--- a/lectures/Lecture3_UlHasan.pptx
+++ b/lectures/Lecture3_UlHasan.pptx
@@ -5,18 +5,25 @@
     <p:sldMasterId id="2147483648" r:id="rId1"/>
   </p:sldMasterIdLst>
   <p:notesMasterIdLst>
-    <p:notesMasterId r:id="rId11"/>
+    <p:notesMasterId r:id="rId18"/>
   </p:notesMasterIdLst>
   <p:sldIdLst>
     <p:sldId id="2237" r:id="rId2"/>
-    <p:sldId id="2236" r:id="rId3"/>
-    <p:sldId id="2223" r:id="rId4"/>
-    <p:sldId id="2238" r:id="rId5"/>
-    <p:sldId id="2239" r:id="rId6"/>
-    <p:sldId id="2240" r:id="rId7"/>
-    <p:sldId id="2241" r:id="rId8"/>
-    <p:sldId id="2242" r:id="rId9"/>
-    <p:sldId id="2243" r:id="rId10"/>
+    <p:sldId id="294" r:id="rId3"/>
+    <p:sldId id="2244" r:id="rId4"/>
+    <p:sldId id="2245" r:id="rId5"/>
+    <p:sldId id="2246" r:id="rId6"/>
+    <p:sldId id="2247" r:id="rId7"/>
+    <p:sldId id="2248" r:id="rId8"/>
+    <p:sldId id="2249" r:id="rId9"/>
+    <p:sldId id="2250" r:id="rId10"/>
+    <p:sldId id="2251" r:id="rId11"/>
+    <p:sldId id="2238" r:id="rId12"/>
+    <p:sldId id="2239" r:id="rId13"/>
+    <p:sldId id="2240" r:id="rId14"/>
+    <p:sldId id="2241" r:id="rId15"/>
+    <p:sldId id="2242" r:id="rId16"/>
+    <p:sldId id="2243" r:id="rId17"/>
   </p:sldIdLst>
   <p:sldSz cx="12192000" cy="6858000"/>
   <p:notesSz cx="6858000" cy="9144000"/>
@@ -205,7 +212,7 @@
           <a:p>
             <a:fld id="{3D3B5B49-9746-BB4D-AA52-42DFB44D1781}" type="datetimeFigureOut">
               <a:rPr lang="en-US" smtClean="0"/>
-              <a:t>3/2/26</a:t>
+              <a:t>3/8/26</a:t>
             </a:fld>
             <a:endParaRPr lang="en-US"/>
           </a:p>
@@ -472,6 +479,414 @@
 </p:notesMaster>
 </file>
 
+<file path=ppt/notesSlides/notesSlide1.xml><?xml version="1.0" encoding="utf-8"?>
+<p:notes xmlns:a="http://schemas.openxmlformats.org/drawingml/2006/main" xmlns:r="http://schemas.openxmlformats.org/officeDocument/2006/relationships" xmlns:p="http://schemas.openxmlformats.org/presentationml/2006/main">
+  <p:cSld>
+    <p:spTree>
+      <p:nvGrpSpPr>
+        <p:cNvPr id="1" name=""/>
+        <p:cNvGrpSpPr/>
+        <p:nvPr/>
+      </p:nvGrpSpPr>
+      <p:grpSpPr>
+        <a:xfrm>
+          <a:off x="0" y="0"/>
+          <a:ext cx="0" cy="0"/>
+          <a:chOff x="0" y="0"/>
+          <a:chExt cx="0" cy="0"/>
+        </a:xfrm>
+      </p:grpSpPr>
+      <p:sp>
+        <p:nvSpPr>
+          <p:cNvPr id="2" name="Slide Image Placeholder 1"/>
+          <p:cNvSpPr>
+            <a:spLocks noGrp="1" noRot="1" noChangeAspect="1"/>
+          </p:cNvSpPr>
+          <p:nvPr>
+            <p:ph type="sldImg"/>
+          </p:nvPr>
+        </p:nvSpPr>
+        <p:spPr/>
+      </p:sp>
+      <p:sp>
+        <p:nvSpPr>
+          <p:cNvPr id="3" name="Notes Placeholder 2"/>
+          <p:cNvSpPr>
+            <a:spLocks noGrp="1"/>
+          </p:cNvSpPr>
+          <p:nvPr>
+            <p:ph type="body" idx="1"/>
+          </p:nvPr>
+        </p:nvSpPr>
+        <p:spPr/>
+        <p:txBody>
+          <a:bodyPr/>
+          <a:lstStyle/>
+          <a:p>
+            <a:endParaRPr lang="en-US" dirty="0"/>
+          </a:p>
+        </p:txBody>
+      </p:sp>
+      <p:sp>
+        <p:nvSpPr>
+          <p:cNvPr id="4" name="Slide Number Placeholder 3"/>
+          <p:cNvSpPr>
+            <a:spLocks noGrp="1"/>
+          </p:cNvSpPr>
+          <p:nvPr>
+            <p:ph type="sldNum" sz="quarter" idx="5"/>
+          </p:nvPr>
+        </p:nvSpPr>
+        <p:spPr/>
+        <p:txBody>
+          <a:bodyPr/>
+          <a:lstStyle/>
+          <a:p>
+            <a:fld id="{F03610D6-285C-CD48-A777-0BA559C510FB}" type="slidenum">
+              <a:rPr lang="en-US" smtClean="0"/>
+              <a:t>1</a:t>
+            </a:fld>
+            <a:endParaRPr lang="en-US"/>
+          </a:p>
+        </p:txBody>
+      </p:sp>
+    </p:spTree>
+    <p:extLst>
+      <p:ext uri="{BB962C8B-B14F-4D97-AF65-F5344CB8AC3E}">
+        <p14:creationId xmlns:p14="http://schemas.microsoft.com/office/powerpoint/2010/main" val="2621771309"/>
+      </p:ext>
+    </p:extLst>
+  </p:cSld>
+  <p:clrMapOvr>
+    <a:masterClrMapping/>
+  </p:clrMapOvr>
+</p:notes>
+</file>
+
+<file path=ppt/notesSlides/notesSlide2.xml><?xml version="1.0" encoding="utf-8"?>
+<p:notes xmlns:a="http://schemas.openxmlformats.org/drawingml/2006/main" xmlns:r="http://schemas.openxmlformats.org/officeDocument/2006/relationships" xmlns:p="http://schemas.openxmlformats.org/presentationml/2006/main">
+  <p:cSld>
+    <p:spTree>
+      <p:nvGrpSpPr>
+        <p:cNvPr id="1" name="">
+          <a:extLst>
+            <a:ext uri="{FF2B5EF4-FFF2-40B4-BE49-F238E27FC236}">
+              <a16:creationId xmlns:a16="http://schemas.microsoft.com/office/drawing/2014/main" id="{D5871D2D-1F00-8D80-3F63-DED0D72B3F71}"/>
+            </a:ext>
+          </a:extLst>
+        </p:cNvPr>
+        <p:cNvGrpSpPr/>
+        <p:nvPr/>
+      </p:nvGrpSpPr>
+      <p:grpSpPr>
+        <a:xfrm>
+          <a:off x="0" y="0"/>
+          <a:ext cx="0" cy="0"/>
+          <a:chOff x="0" y="0"/>
+          <a:chExt cx="0" cy="0"/>
+        </a:xfrm>
+      </p:grpSpPr>
+      <p:sp>
+        <p:nvSpPr>
+          <p:cNvPr id="2" name="Slide Image Placeholder 1">
+            <a:extLst>
+              <a:ext uri="{FF2B5EF4-FFF2-40B4-BE49-F238E27FC236}">
+                <a16:creationId xmlns:a16="http://schemas.microsoft.com/office/drawing/2014/main" id="{BA69AF9C-8E0F-D435-6A38-2D8C1B0576EC}"/>
+              </a:ext>
+            </a:extLst>
+          </p:cNvPr>
+          <p:cNvSpPr>
+            <a:spLocks noGrp="1" noRot="1" noChangeAspect="1"/>
+          </p:cNvSpPr>
+          <p:nvPr>
+            <p:ph type="sldImg"/>
+          </p:nvPr>
+        </p:nvSpPr>
+        <p:spPr/>
+      </p:sp>
+      <p:sp>
+        <p:nvSpPr>
+          <p:cNvPr id="3" name="Notes Placeholder 2">
+            <a:extLst>
+              <a:ext uri="{FF2B5EF4-FFF2-40B4-BE49-F238E27FC236}">
+                <a16:creationId xmlns:a16="http://schemas.microsoft.com/office/drawing/2014/main" id="{79BC6FFE-7130-8D3D-382D-06D62F0D2726}"/>
+              </a:ext>
+            </a:extLst>
+          </p:cNvPr>
+          <p:cNvSpPr>
+            <a:spLocks noGrp="1"/>
+          </p:cNvSpPr>
+          <p:nvPr>
+            <p:ph type="body" idx="1"/>
+          </p:nvPr>
+        </p:nvSpPr>
+        <p:spPr/>
+        <p:txBody>
+          <a:bodyPr/>
+          <a:lstStyle/>
+          <a:p>
+            <a:endParaRPr lang="en-US" dirty="0"/>
+          </a:p>
+        </p:txBody>
+      </p:sp>
+      <p:sp>
+        <p:nvSpPr>
+          <p:cNvPr id="4" name="Slide Number Placeholder 3">
+            <a:extLst>
+              <a:ext uri="{FF2B5EF4-FFF2-40B4-BE49-F238E27FC236}">
+                <a16:creationId xmlns:a16="http://schemas.microsoft.com/office/drawing/2014/main" id="{20280BF1-7AE9-C080-A4FA-53C37E652372}"/>
+              </a:ext>
+            </a:extLst>
+          </p:cNvPr>
+          <p:cNvSpPr>
+            <a:spLocks noGrp="1"/>
+          </p:cNvSpPr>
+          <p:nvPr>
+            <p:ph type="sldNum" sz="quarter" idx="5"/>
+          </p:nvPr>
+        </p:nvSpPr>
+        <p:spPr/>
+        <p:txBody>
+          <a:bodyPr/>
+          <a:lstStyle/>
+          <a:p>
+            <a:fld id="{F03610D6-285C-CD48-A777-0BA559C510FB}" type="slidenum">
+              <a:rPr lang="en-US" smtClean="0"/>
+              <a:t>7</a:t>
+            </a:fld>
+            <a:endParaRPr lang="en-US"/>
+          </a:p>
+        </p:txBody>
+      </p:sp>
+    </p:spTree>
+    <p:extLst>
+      <p:ext uri="{BB962C8B-B14F-4D97-AF65-F5344CB8AC3E}">
+        <p14:creationId xmlns:p14="http://schemas.microsoft.com/office/powerpoint/2010/main" val="3744895219"/>
+      </p:ext>
+    </p:extLst>
+  </p:cSld>
+  <p:clrMapOvr>
+    <a:masterClrMapping/>
+  </p:clrMapOvr>
+</p:notes>
+</file>
+
+<file path=ppt/notesSlides/notesSlide3.xml><?xml version="1.0" encoding="utf-8"?>
+<p:notes xmlns:a="http://schemas.openxmlformats.org/drawingml/2006/main" xmlns:r="http://schemas.openxmlformats.org/officeDocument/2006/relationships" xmlns:p="http://schemas.openxmlformats.org/presentationml/2006/main">
+  <p:cSld>
+    <p:spTree>
+      <p:nvGrpSpPr>
+        <p:cNvPr id="1" name="">
+          <a:extLst>
+            <a:ext uri="{FF2B5EF4-FFF2-40B4-BE49-F238E27FC236}">
+              <a16:creationId xmlns:a16="http://schemas.microsoft.com/office/drawing/2014/main" id="{140A7CBA-FBAD-C00A-2ACD-C1404D429079}"/>
+            </a:ext>
+          </a:extLst>
+        </p:cNvPr>
+        <p:cNvGrpSpPr/>
+        <p:nvPr/>
+      </p:nvGrpSpPr>
+      <p:grpSpPr>
+        <a:xfrm>
+          <a:off x="0" y="0"/>
+          <a:ext cx="0" cy="0"/>
+          <a:chOff x="0" y="0"/>
+          <a:chExt cx="0" cy="0"/>
+        </a:xfrm>
+      </p:grpSpPr>
+      <p:sp>
+        <p:nvSpPr>
+          <p:cNvPr id="2" name="Slide Image Placeholder 1">
+            <a:extLst>
+              <a:ext uri="{FF2B5EF4-FFF2-40B4-BE49-F238E27FC236}">
+                <a16:creationId xmlns:a16="http://schemas.microsoft.com/office/drawing/2014/main" id="{58FAE25F-CD5D-AF72-2F20-CD6349694648}"/>
+              </a:ext>
+            </a:extLst>
+          </p:cNvPr>
+          <p:cNvSpPr>
+            <a:spLocks noGrp="1" noRot="1" noChangeAspect="1"/>
+          </p:cNvSpPr>
+          <p:nvPr>
+            <p:ph type="sldImg"/>
+          </p:nvPr>
+        </p:nvSpPr>
+        <p:spPr/>
+      </p:sp>
+      <p:sp>
+        <p:nvSpPr>
+          <p:cNvPr id="3" name="Notes Placeholder 2">
+            <a:extLst>
+              <a:ext uri="{FF2B5EF4-FFF2-40B4-BE49-F238E27FC236}">
+                <a16:creationId xmlns:a16="http://schemas.microsoft.com/office/drawing/2014/main" id="{F23F3B60-FB8D-1603-61AC-8478A451A561}"/>
+              </a:ext>
+            </a:extLst>
+          </p:cNvPr>
+          <p:cNvSpPr>
+            <a:spLocks noGrp="1"/>
+          </p:cNvSpPr>
+          <p:nvPr>
+            <p:ph type="body" idx="1"/>
+          </p:nvPr>
+        </p:nvSpPr>
+        <p:spPr/>
+        <p:txBody>
+          <a:bodyPr/>
+          <a:lstStyle/>
+          <a:p>
+            <a:endParaRPr lang="en-US" dirty="0"/>
+          </a:p>
+        </p:txBody>
+      </p:sp>
+      <p:sp>
+        <p:nvSpPr>
+          <p:cNvPr id="4" name="Slide Number Placeholder 3">
+            <a:extLst>
+              <a:ext uri="{FF2B5EF4-FFF2-40B4-BE49-F238E27FC236}">
+                <a16:creationId xmlns:a16="http://schemas.microsoft.com/office/drawing/2014/main" id="{B5E72767-A3F2-26ED-97F0-3DE7A90D0FB4}"/>
+              </a:ext>
+            </a:extLst>
+          </p:cNvPr>
+          <p:cNvSpPr>
+            <a:spLocks noGrp="1"/>
+          </p:cNvSpPr>
+          <p:nvPr>
+            <p:ph type="sldNum" sz="quarter" idx="5"/>
+          </p:nvPr>
+        </p:nvSpPr>
+        <p:spPr/>
+        <p:txBody>
+          <a:bodyPr/>
+          <a:lstStyle/>
+          <a:p>
+            <a:fld id="{F03610D6-285C-CD48-A777-0BA559C510FB}" type="slidenum">
+              <a:rPr lang="en-US" smtClean="0"/>
+              <a:t>8</a:t>
+            </a:fld>
+            <a:endParaRPr lang="en-US"/>
+          </a:p>
+        </p:txBody>
+      </p:sp>
+    </p:spTree>
+    <p:extLst>
+      <p:ext uri="{BB962C8B-B14F-4D97-AF65-F5344CB8AC3E}">
+        <p14:creationId xmlns:p14="http://schemas.microsoft.com/office/powerpoint/2010/main" val="3433784813"/>
+      </p:ext>
+    </p:extLst>
+  </p:cSld>
+  <p:clrMapOvr>
+    <a:masterClrMapping/>
+  </p:clrMapOvr>
+</p:notes>
+</file>
+
+<file path=ppt/notesSlides/notesSlide4.xml><?xml version="1.0" encoding="utf-8"?>
+<p:notes xmlns:a="http://schemas.openxmlformats.org/drawingml/2006/main" xmlns:r="http://schemas.openxmlformats.org/officeDocument/2006/relationships" xmlns:p="http://schemas.openxmlformats.org/presentationml/2006/main">
+  <p:cSld>
+    <p:spTree>
+      <p:nvGrpSpPr>
+        <p:cNvPr id="1" name="">
+          <a:extLst>
+            <a:ext uri="{FF2B5EF4-FFF2-40B4-BE49-F238E27FC236}">
+              <a16:creationId xmlns:a16="http://schemas.microsoft.com/office/drawing/2014/main" id="{7A14064C-87E8-ECBE-6E03-032D0C4E58EE}"/>
+            </a:ext>
+          </a:extLst>
+        </p:cNvPr>
+        <p:cNvGrpSpPr/>
+        <p:nvPr/>
+      </p:nvGrpSpPr>
+      <p:grpSpPr>
+        <a:xfrm>
+          <a:off x="0" y="0"/>
+          <a:ext cx="0" cy="0"/>
+          <a:chOff x="0" y="0"/>
+          <a:chExt cx="0" cy="0"/>
+        </a:xfrm>
+      </p:grpSpPr>
+      <p:sp>
+        <p:nvSpPr>
+          <p:cNvPr id="2" name="Slide Image Placeholder 1">
+            <a:extLst>
+              <a:ext uri="{FF2B5EF4-FFF2-40B4-BE49-F238E27FC236}">
+                <a16:creationId xmlns:a16="http://schemas.microsoft.com/office/drawing/2014/main" id="{3A855172-BE70-3884-470B-25E7749EB405}"/>
+              </a:ext>
+            </a:extLst>
+          </p:cNvPr>
+          <p:cNvSpPr>
+            <a:spLocks noGrp="1" noRot="1" noChangeAspect="1"/>
+          </p:cNvSpPr>
+          <p:nvPr>
+            <p:ph type="sldImg"/>
+          </p:nvPr>
+        </p:nvSpPr>
+        <p:spPr/>
+      </p:sp>
+      <p:sp>
+        <p:nvSpPr>
+          <p:cNvPr id="3" name="Notes Placeholder 2">
+            <a:extLst>
+              <a:ext uri="{FF2B5EF4-FFF2-40B4-BE49-F238E27FC236}">
+                <a16:creationId xmlns:a16="http://schemas.microsoft.com/office/drawing/2014/main" id="{1FE93917-3F75-E68B-4D30-3C2ACEAC9893}"/>
+              </a:ext>
+            </a:extLst>
+          </p:cNvPr>
+          <p:cNvSpPr>
+            <a:spLocks noGrp="1"/>
+          </p:cNvSpPr>
+          <p:nvPr>
+            <p:ph type="body" idx="1"/>
+          </p:nvPr>
+        </p:nvSpPr>
+        <p:spPr/>
+        <p:txBody>
+          <a:bodyPr/>
+          <a:lstStyle/>
+          <a:p>
+            <a:endParaRPr lang="en-US" dirty="0"/>
+          </a:p>
+        </p:txBody>
+      </p:sp>
+      <p:sp>
+        <p:nvSpPr>
+          <p:cNvPr id="4" name="Slide Number Placeholder 3">
+            <a:extLst>
+              <a:ext uri="{FF2B5EF4-FFF2-40B4-BE49-F238E27FC236}">
+                <a16:creationId xmlns:a16="http://schemas.microsoft.com/office/drawing/2014/main" id="{ADEB373F-BDF2-C758-207A-54ACEDBE36FA}"/>
+              </a:ext>
+            </a:extLst>
+          </p:cNvPr>
+          <p:cNvSpPr>
+            <a:spLocks noGrp="1"/>
+          </p:cNvSpPr>
+          <p:nvPr>
+            <p:ph type="sldNum" sz="quarter" idx="5"/>
+          </p:nvPr>
+        </p:nvSpPr>
+        <p:spPr/>
+        <p:txBody>
+          <a:bodyPr/>
+          <a:lstStyle/>
+          <a:p>
+            <a:fld id="{F03610D6-285C-CD48-A777-0BA559C510FB}" type="slidenum">
+              <a:rPr lang="en-US" smtClean="0"/>
+              <a:t>9</a:t>
+            </a:fld>
+            <a:endParaRPr lang="en-US"/>
+          </a:p>
+        </p:txBody>
+      </p:sp>
+    </p:spTree>
+    <p:extLst>
+      <p:ext uri="{BB962C8B-B14F-4D97-AF65-F5344CB8AC3E}">
+        <p14:creationId xmlns:p14="http://schemas.microsoft.com/office/powerpoint/2010/main" val="3864190464"/>
+      </p:ext>
+    </p:extLst>
+  </p:cSld>
+  <p:clrMapOvr>
+    <a:masterClrMapping/>
+  </p:clrMapOvr>
+</p:notes>
+</file>
+
 <file path=ppt/slideLayouts/slideLayout1.xml><?xml version="1.0" encoding="utf-8"?>
 <p:sldLayout xmlns:a="http://schemas.openxmlformats.org/drawingml/2006/main" xmlns:r="http://schemas.openxmlformats.org/officeDocument/2006/relationships" xmlns:p="http://schemas.openxmlformats.org/presentationml/2006/main" type="title" preserve="1">
   <p:cSld name="Title Slide">
@@ -619,7 +1034,7 @@
           <a:p>
             <a:fld id="{E03C6363-DBFF-0445-A92B-3D01187C0523}" type="datetime1">
               <a:rPr lang="en-US" smtClean="0"/>
-              <a:t>3/2/26</a:t>
+              <a:t>3/8/26</a:t>
             </a:fld>
             <a:endParaRPr lang="en-US"/>
           </a:p>
@@ -817,7 +1232,7 @@
           <a:p>
             <a:fld id="{37D1FA39-0341-FF46-ADDC-8086B2344C32}" type="datetime1">
               <a:rPr lang="en-US" smtClean="0"/>
-              <a:t>3/2/26</a:t>
+              <a:t>3/8/26</a:t>
             </a:fld>
             <a:endParaRPr lang="en-US"/>
           </a:p>
@@ -1025,7 +1440,7 @@
           <a:p>
             <a:fld id="{395E6BDC-031F-854F-A1E3-49B14A8AF8DA}" type="datetime1">
               <a:rPr lang="en-US" smtClean="0"/>
-              <a:t>3/2/26</a:t>
+              <a:t>3/8/26</a:t>
             </a:fld>
             <a:endParaRPr lang="en-US"/>
           </a:p>
@@ -1223,7 +1638,7 @@
           <a:p>
             <a:fld id="{72507E83-1DB1-B64B-9D6B-16DDFD96D9C4}" type="datetime1">
               <a:rPr lang="en-US" smtClean="0"/>
-              <a:t>3/2/26</a:t>
+              <a:t>3/8/26</a:t>
             </a:fld>
             <a:endParaRPr lang="en-US"/>
           </a:p>
@@ -1498,7 +1913,7 @@
           <a:p>
             <a:fld id="{B0EF5407-A7C3-ED4C-BE90-F572D0287D47}" type="datetime1">
               <a:rPr lang="en-US" smtClean="0"/>
-              <a:t>3/2/26</a:t>
+              <a:t>3/8/26</a:t>
             </a:fld>
             <a:endParaRPr lang="en-US"/>
           </a:p>
@@ -1763,7 +2178,7 @@
           <a:p>
             <a:fld id="{AF8991FD-072F-E247-A23C-B39AD2C064E0}" type="datetime1">
               <a:rPr lang="en-US" smtClean="0"/>
-              <a:t>3/2/26</a:t>
+              <a:t>3/8/26</a:t>
             </a:fld>
             <a:endParaRPr lang="en-US"/>
           </a:p>
@@ -2175,7 +2590,7 @@
           <a:p>
             <a:fld id="{71F22A71-351F-7645-9FB6-24649103B0AD}" type="datetime1">
               <a:rPr lang="en-US" smtClean="0"/>
-              <a:t>3/2/26</a:t>
+              <a:t>3/8/26</a:t>
             </a:fld>
             <a:endParaRPr lang="en-US"/>
           </a:p>
@@ -2316,7 +2731,7 @@
           <a:p>
             <a:fld id="{0E5E215E-438D-ED4F-A6D8-DEE9CE867F74}" type="datetime1">
               <a:rPr lang="en-US" smtClean="0"/>
-              <a:t>3/2/26</a:t>
+              <a:t>3/8/26</a:t>
             </a:fld>
             <a:endParaRPr lang="en-US"/>
           </a:p>
@@ -2429,7 +2844,7 @@
           <a:p>
             <a:fld id="{F6510ED0-EC73-284A-BFD7-2CA0D63C77EC}" type="datetime1">
               <a:rPr lang="en-US" smtClean="0"/>
-              <a:t>3/2/26</a:t>
+              <a:t>3/8/26</a:t>
             </a:fld>
             <a:endParaRPr lang="en-US"/>
           </a:p>
@@ -2740,7 +3155,7 @@
           <a:p>
             <a:fld id="{09FA4520-449E-D04E-98C6-12047F2867A8}" type="datetime1">
               <a:rPr lang="en-US" smtClean="0"/>
-              <a:t>3/2/26</a:t>
+              <a:t>3/8/26</a:t>
             </a:fld>
             <a:endParaRPr lang="en-US"/>
           </a:p>
@@ -3028,7 +3443,7 @@
           <a:p>
             <a:fld id="{C9A70BB6-D8C9-5741-9A2A-708D1867EAD5}" type="datetime1">
               <a:rPr lang="en-US" smtClean="0"/>
-              <a:t>3/2/26</a:t>
+              <a:t>3/8/26</a:t>
             </a:fld>
             <a:endParaRPr lang="en-US"/>
           </a:p>
@@ -3269,7 +3684,7 @@
           <a:p>
             <a:fld id="{F4F81440-1A9F-DC4F-8224-53B0BFA7DADD}" type="datetime1">
               <a:rPr lang="en-US" smtClean="0"/>
-              <a:t>3/2/26</a:t>
+              <a:t>3/8/26</a:t>
             </a:fld>
             <a:endParaRPr lang="en-US"/>
           </a:p>
@@ -3842,7 +4257,7 @@
 </p:sld>
 </file>
 
-<file path=ppt/slides/slide2.xml><?xml version="1.0" encoding="utf-8"?>
+<file path=ppt/slides/slide10.xml><?xml version="1.0" encoding="utf-8"?>
 <p:sld xmlns:a="http://schemas.openxmlformats.org/drawingml/2006/main" xmlns:r="http://schemas.openxmlformats.org/officeDocument/2006/relationships" xmlns:p="http://schemas.openxmlformats.org/presentationml/2006/main">
   <p:cSld>
     <p:spTree>
@@ -3850,7 +4265,7 @@
         <p:cNvPr id="1" name="">
           <a:extLst>
             <a:ext uri="{FF2B5EF4-FFF2-40B4-BE49-F238E27FC236}">
-              <a16:creationId xmlns:a16="http://schemas.microsoft.com/office/drawing/2014/main" id="{408D7A66-6EBC-3016-5218-C3DB00C7AB72}"/>
+              <a16:creationId xmlns:a16="http://schemas.microsoft.com/office/drawing/2014/main" id="{7F8D4F66-83CE-FE03-C237-A41274E48C8C}"/>
             </a:ext>
           </a:extLst>
         </p:cNvPr>
@@ -3865,12 +4280,43 @@
           <a:chExt cx="0" cy="0"/>
         </a:xfrm>
       </p:grpSpPr>
-      <p:sp>
-        <p:nvSpPr>
-          <p:cNvPr id="2" name="TextBox 1">
-            <a:extLst>
-              <a:ext uri="{FF2B5EF4-FFF2-40B4-BE49-F238E27FC236}">
-                <a16:creationId xmlns:a16="http://schemas.microsoft.com/office/drawing/2014/main" id="{705158DD-527E-F619-EAE7-9B224C64E00B}"/>
+      <p:pic>
+        <p:nvPicPr>
+          <p:cNvPr id="4" name="Picture 3" descr="A screenshot of a computer&#10;&#10;AI-generated content may be incorrect.">
+            <a:extLst>
+              <a:ext uri="{FF2B5EF4-FFF2-40B4-BE49-F238E27FC236}">
+                <a16:creationId xmlns:a16="http://schemas.microsoft.com/office/drawing/2014/main" id="{1D76DBB5-9C0E-2272-BAD1-79771C6A2A5E}"/>
+              </a:ext>
+            </a:extLst>
+          </p:cNvPr>
+          <p:cNvPicPr>
+            <a:picLocks noChangeAspect="1"/>
+          </p:cNvPicPr>
+          <p:nvPr/>
+        </p:nvPicPr>
+        <p:blipFill>
+          <a:blip r:embed="rId3"/>
+          <a:srcRect l="965" t="23433" r="49381"/>
+          <a:stretch>
+            <a:fillRect/>
+          </a:stretch>
+        </p:blipFill>
+        <p:spPr>
+          <a:xfrm>
+            <a:off x="185738" y="844784"/>
+            <a:ext cx="5627517" cy="5583190"/>
+          </a:xfrm>
+          <a:prstGeom prst="rect">
+            <a:avLst/>
+          </a:prstGeom>
+        </p:spPr>
+      </p:pic>
+      <p:sp>
+        <p:nvSpPr>
+          <p:cNvPr id="6" name="TextBox 5">
+            <a:extLst>
+              <a:ext uri="{FF2B5EF4-FFF2-40B4-BE49-F238E27FC236}">
+                <a16:creationId xmlns:a16="http://schemas.microsoft.com/office/drawing/2014/main" id="{789A79B6-C4FE-A937-C980-B3E186D17ACD}"/>
               </a:ext>
             </a:extLst>
           </p:cNvPr>
@@ -3879,8 +4325,270 @@
         </p:nvSpPr>
         <p:spPr>
           <a:xfrm>
-            <a:off x="657225" y="2533650"/>
-            <a:ext cx="10877550" cy="739754"/>
+            <a:off x="1233354" y="6289866"/>
+            <a:ext cx="1416423" cy="307777"/>
+          </a:xfrm>
+          <a:prstGeom prst="rect">
+            <a:avLst/>
+          </a:prstGeom>
+          <a:solidFill>
+            <a:schemeClr val="bg1"/>
+          </a:solidFill>
+        </p:spPr>
+        <p:txBody>
+          <a:bodyPr wrap="square" rtlCol="0">
+            <a:spAutoFit/>
+          </a:bodyPr>
+          <a:lstStyle/>
+          <a:p>
+            <a:pPr algn="ctr"/>
+            <a:r>
+              <a:rPr lang="en-US" sz="1400" dirty="0" err="1">
+                <a:solidFill>
+                  <a:schemeClr val="accent5">
+                    <a:lumMod val="75000"/>
+                  </a:schemeClr>
+                </a:solidFill>
+                <a:latin typeface="Arial" panose="020B0604020202020204" pitchFamily="34" charset="0"/>
+                <a:cs typeface="Arial" panose="020B0604020202020204" pitchFamily="34" charset="0"/>
+              </a:rPr>
+              <a:t>Sample_Type</a:t>
+            </a:r>
+            <a:endParaRPr lang="en-US" sz="1400" dirty="0">
+              <a:solidFill>
+                <a:schemeClr val="accent5">
+                  <a:lumMod val="75000"/>
+                </a:schemeClr>
+              </a:solidFill>
+              <a:latin typeface="Arial" panose="020B0604020202020204" pitchFamily="34" charset="0"/>
+              <a:cs typeface="Arial" panose="020B0604020202020204" pitchFamily="34" charset="0"/>
+            </a:endParaRPr>
+          </a:p>
+        </p:txBody>
+      </p:sp>
+      <p:sp>
+        <p:nvSpPr>
+          <p:cNvPr id="9" name="Left Brace 8">
+            <a:extLst>
+              <a:ext uri="{FF2B5EF4-FFF2-40B4-BE49-F238E27FC236}">
+                <a16:creationId xmlns:a16="http://schemas.microsoft.com/office/drawing/2014/main" id="{05470679-E083-3B17-645C-FE46EF23059F}"/>
+              </a:ext>
+            </a:extLst>
+          </p:cNvPr>
+          <p:cNvSpPr/>
+          <p:nvPr/>
+        </p:nvSpPr>
+        <p:spPr>
+          <a:xfrm rot="16200000">
+            <a:off x="1819613" y="4872603"/>
+            <a:ext cx="243906" cy="2776817"/>
+          </a:xfrm>
+          <a:prstGeom prst="leftBrace">
+            <a:avLst/>
+          </a:prstGeom>
+          <a:ln>
+            <a:solidFill>
+              <a:schemeClr val="accent5">
+                <a:lumMod val="75000"/>
+              </a:schemeClr>
+            </a:solidFill>
+          </a:ln>
+        </p:spPr>
+        <p:style>
+          <a:lnRef idx="2">
+            <a:schemeClr val="accent1"/>
+          </a:lnRef>
+          <a:fillRef idx="0">
+            <a:schemeClr val="accent1"/>
+          </a:fillRef>
+          <a:effectRef idx="1">
+            <a:schemeClr val="accent1"/>
+          </a:effectRef>
+          <a:fontRef idx="minor">
+            <a:schemeClr val="tx1"/>
+          </a:fontRef>
+        </p:style>
+        <p:txBody>
+          <a:bodyPr rtlCol="0" anchor="ctr"/>
+          <a:lstStyle/>
+          <a:p>
+            <a:pPr algn="ctr"/>
+            <a:endParaRPr lang="en-US"/>
+          </a:p>
+        </p:txBody>
+      </p:sp>
+      <p:cxnSp>
+        <p:nvCxnSpPr>
+          <p:cNvPr id="11" name="Straight Connector 10">
+            <a:extLst>
+              <a:ext uri="{FF2B5EF4-FFF2-40B4-BE49-F238E27FC236}">
+                <a16:creationId xmlns:a16="http://schemas.microsoft.com/office/drawing/2014/main" id="{CC03DF50-587E-BA53-C709-2ED35B4446F5}"/>
+              </a:ext>
+            </a:extLst>
+          </p:cNvPr>
+          <p:cNvCxnSpPr>
+            <a:cxnSpLocks/>
+          </p:cNvCxnSpPr>
+          <p:nvPr/>
+        </p:nvCxnSpPr>
+        <p:spPr>
+          <a:xfrm>
+            <a:off x="1233354" y="993502"/>
+            <a:ext cx="0" cy="4410635"/>
+          </a:xfrm>
+          <a:prstGeom prst="line">
+            <a:avLst/>
+          </a:prstGeom>
+          <a:ln w="28575"/>
+        </p:spPr>
+        <p:style>
+          <a:lnRef idx="2">
+            <a:schemeClr val="dk1"/>
+          </a:lnRef>
+          <a:fillRef idx="0">
+            <a:schemeClr val="dk1"/>
+          </a:fillRef>
+          <a:effectRef idx="1">
+            <a:schemeClr val="dk1"/>
+          </a:effectRef>
+          <a:fontRef idx="minor">
+            <a:schemeClr val="tx1"/>
+          </a:fontRef>
+        </p:style>
+      </p:cxnSp>
+      <p:cxnSp>
+        <p:nvCxnSpPr>
+          <p:cNvPr id="16" name="Straight Connector 15">
+            <a:extLst>
+              <a:ext uri="{FF2B5EF4-FFF2-40B4-BE49-F238E27FC236}">
+                <a16:creationId xmlns:a16="http://schemas.microsoft.com/office/drawing/2014/main" id="{7ECB5FC1-A6D1-D087-5869-EAB7CD723944}"/>
+              </a:ext>
+            </a:extLst>
+          </p:cNvPr>
+          <p:cNvCxnSpPr>
+            <a:cxnSpLocks/>
+          </p:cNvCxnSpPr>
+          <p:nvPr/>
+        </p:nvCxnSpPr>
+        <p:spPr>
+          <a:xfrm>
+            <a:off x="1372307" y="993502"/>
+            <a:ext cx="0" cy="4410635"/>
+          </a:xfrm>
+          <a:prstGeom prst="line">
+            <a:avLst/>
+          </a:prstGeom>
+          <a:ln w="28575"/>
+        </p:spPr>
+        <p:style>
+          <a:lnRef idx="2">
+            <a:schemeClr val="dk1"/>
+          </a:lnRef>
+          <a:fillRef idx="0">
+            <a:schemeClr val="dk1"/>
+          </a:fillRef>
+          <a:effectRef idx="1">
+            <a:schemeClr val="dk1"/>
+          </a:effectRef>
+          <a:fontRef idx="minor">
+            <a:schemeClr val="tx1"/>
+          </a:fontRef>
+        </p:style>
+      </p:cxnSp>
+      <p:cxnSp>
+        <p:nvCxnSpPr>
+          <p:cNvPr id="17" name="Straight Connector 16">
+            <a:extLst>
+              <a:ext uri="{FF2B5EF4-FFF2-40B4-BE49-F238E27FC236}">
+                <a16:creationId xmlns:a16="http://schemas.microsoft.com/office/drawing/2014/main" id="{DD151DE6-C7C2-005C-C4D4-9FE15FD70B3C}"/>
+              </a:ext>
+            </a:extLst>
+          </p:cNvPr>
+          <p:cNvCxnSpPr>
+            <a:cxnSpLocks/>
+          </p:cNvCxnSpPr>
+          <p:nvPr/>
+        </p:nvCxnSpPr>
+        <p:spPr>
+          <a:xfrm>
+            <a:off x="1943807" y="993502"/>
+            <a:ext cx="0" cy="4410635"/>
+          </a:xfrm>
+          <a:prstGeom prst="line">
+            <a:avLst/>
+          </a:prstGeom>
+          <a:ln w="28575"/>
+        </p:spPr>
+        <p:style>
+          <a:lnRef idx="2">
+            <a:schemeClr val="dk1"/>
+          </a:lnRef>
+          <a:fillRef idx="0">
+            <a:schemeClr val="dk1"/>
+          </a:fillRef>
+          <a:effectRef idx="1">
+            <a:schemeClr val="dk1"/>
+          </a:effectRef>
+          <a:fontRef idx="minor">
+            <a:schemeClr val="tx1"/>
+          </a:fontRef>
+        </p:style>
+      </p:cxnSp>
+      <p:cxnSp>
+        <p:nvCxnSpPr>
+          <p:cNvPr id="18" name="Straight Connector 17">
+            <a:extLst>
+              <a:ext uri="{FF2B5EF4-FFF2-40B4-BE49-F238E27FC236}">
+                <a16:creationId xmlns:a16="http://schemas.microsoft.com/office/drawing/2014/main" id="{F8ACDB56-5E90-BE26-522C-FF0652099526}"/>
+              </a:ext>
+            </a:extLst>
+          </p:cNvPr>
+          <p:cNvCxnSpPr>
+            <a:cxnSpLocks/>
+          </p:cNvCxnSpPr>
+          <p:nvPr/>
+        </p:nvCxnSpPr>
+        <p:spPr>
+          <a:xfrm>
+            <a:off x="2608316" y="993502"/>
+            <a:ext cx="0" cy="4410635"/>
+          </a:xfrm>
+          <a:prstGeom prst="line">
+            <a:avLst/>
+          </a:prstGeom>
+          <a:ln w="28575"/>
+        </p:spPr>
+        <p:style>
+          <a:lnRef idx="2">
+            <a:schemeClr val="dk1"/>
+          </a:lnRef>
+          <a:fillRef idx="0">
+            <a:schemeClr val="dk1"/>
+          </a:fillRef>
+          <a:effectRef idx="1">
+            <a:schemeClr val="dk1"/>
+          </a:effectRef>
+          <a:fontRef idx="minor">
+            <a:schemeClr val="tx1"/>
+          </a:fontRef>
+        </p:style>
+      </p:cxnSp>
+      <p:sp>
+        <p:nvSpPr>
+          <p:cNvPr id="2" name="TextBox 1">
+            <a:extLst>
+              <a:ext uri="{FF2B5EF4-FFF2-40B4-BE49-F238E27FC236}">
+                <a16:creationId xmlns:a16="http://schemas.microsoft.com/office/drawing/2014/main" id="{755A61D3-1C5B-CCA9-39D0-5712433DE83E}"/>
+              </a:ext>
+            </a:extLst>
+          </p:cNvPr>
+          <p:cNvSpPr txBox="1"/>
+          <p:nvPr/>
+        </p:nvSpPr>
+        <p:spPr>
+          <a:xfrm>
+            <a:off x="171449" y="0"/>
+            <a:ext cx="11512545" cy="739754"/>
           </a:xfrm>
           <a:prstGeom prst="rect">
             <a:avLst/>
@@ -3893,7 +4601,7 @@
           </a:bodyPr>
           <a:lstStyle/>
           <a:p>
-            <a:pPr algn="ctr">
+            <a:pPr>
               <a:lnSpc>
                 <a:spcPct val="150000"/>
               </a:lnSpc>
@@ -3903,17 +4611,17 @@
                 <a:latin typeface="Arial" panose="020B0604020202020204" pitchFamily="34" charset="0"/>
                 <a:cs typeface="Arial" panose="020B0604020202020204" pitchFamily="34" charset="0"/>
               </a:rPr>
-              <a:t>Questions</a:t>
-            </a:r>
-          </a:p>
-        </p:txBody>
-      </p:sp>
-      <p:sp>
-        <p:nvSpPr>
-          <p:cNvPr id="8" name="Slide Number Placeholder 7">
-            <a:extLst>
-              <a:ext uri="{FF2B5EF4-FFF2-40B4-BE49-F238E27FC236}">
-                <a16:creationId xmlns:a16="http://schemas.microsoft.com/office/drawing/2014/main" id="{2070759B-ED78-9239-C973-521BE427F44D}"/>
+              <a:t>Both are correct within the appropriate context</a:t>
+            </a:r>
+          </a:p>
+        </p:txBody>
+      </p:sp>
+      <p:sp>
+        <p:nvSpPr>
+          <p:cNvPr id="12" name="Slide Number Placeholder 7">
+            <a:extLst>
+              <a:ext uri="{FF2B5EF4-FFF2-40B4-BE49-F238E27FC236}">
+                <a16:creationId xmlns:a16="http://schemas.microsoft.com/office/drawing/2014/main" id="{D4EF8564-300B-C3ED-1387-C9824DC05708}"/>
               </a:ext>
             </a:extLst>
           </p:cNvPr>
@@ -3940,7 +4648,7 @@
                   <a:schemeClr val="tx1"/>
                 </a:solidFill>
               </a:rPr>
-              <a:t>1</a:t>
+              <a:t>9</a:t>
             </a:fld>
             <a:endParaRPr lang="en-US" sz="1400" dirty="0">
               <a:solidFill>
@@ -3950,76 +4658,40 @@
           </a:p>
         </p:txBody>
       </p:sp>
-      <p:sp>
-        <p:nvSpPr>
-          <p:cNvPr id="4" name="TextBox 3">
-            <a:extLst>
-              <a:ext uri="{FF2B5EF4-FFF2-40B4-BE49-F238E27FC236}">
-                <a16:creationId xmlns:a16="http://schemas.microsoft.com/office/drawing/2014/main" id="{01423887-CC8E-D16D-2E31-45CEFFEFBBE2}"/>
-              </a:ext>
-            </a:extLst>
-          </p:cNvPr>
-          <p:cNvSpPr txBox="1"/>
+      <p:pic>
+        <p:nvPicPr>
+          <p:cNvPr id="5" name="Picture 4" descr="A chart with different colored bars&#10;&#10;AI-generated content may be incorrect.">
+            <a:extLst>
+              <a:ext uri="{FF2B5EF4-FFF2-40B4-BE49-F238E27FC236}">
+                <a16:creationId xmlns:a16="http://schemas.microsoft.com/office/drawing/2014/main" id="{A1245DCA-D417-F4A4-ACC4-45A0211F9E4D}"/>
+              </a:ext>
+            </a:extLst>
+          </p:cNvPr>
+          <p:cNvPicPr>
+            <a:picLocks noChangeAspect="1"/>
+          </p:cNvPicPr>
           <p:nvPr/>
-        </p:nvSpPr>
-        <p:spPr>
-          <a:xfrm>
-            <a:off x="657225" y="3285541"/>
-            <a:ext cx="10877550" cy="598112"/>
+        </p:nvPicPr>
+        <p:blipFill>
+          <a:blip r:embed="rId4"/>
+          <a:stretch>
+            <a:fillRect/>
+          </a:stretch>
+        </p:blipFill>
+        <p:spPr>
+          <a:xfrm>
+            <a:off x="5651494" y="1676400"/>
+            <a:ext cx="6032500" cy="3505200"/>
           </a:xfrm>
           <a:prstGeom prst="rect">
             <a:avLst/>
           </a:prstGeom>
-          <a:noFill/>
-        </p:spPr>
-        <p:txBody>
-          <a:bodyPr wrap="square" rtlCol="0">
-            <a:spAutoFit/>
-          </a:bodyPr>
-          <a:lstStyle/>
-          <a:p>
-            <a:pPr algn="ctr">
-              <a:lnSpc>
-                <a:spcPct val="150000"/>
-              </a:lnSpc>
-            </a:pPr>
-            <a:r>
-              <a:rPr lang="en-US" sz="2500" dirty="0">
-                <a:highlight>
-                  <a:srgbClr val="FFFF00"/>
-                </a:highlight>
-                <a:latin typeface="Arial" panose="020B0604020202020204" pitchFamily="34" charset="0"/>
-                <a:cs typeface="Arial" panose="020B0604020202020204" pitchFamily="34" charset="0"/>
-              </a:rPr>
-              <a:t>[teams: materials were clear to understand/not </a:t>
-            </a:r>
-            <a:r>
-              <a:rPr lang="en-US" sz="2500" dirty="0" err="1">
-                <a:highlight>
-                  <a:srgbClr val="FFFF00"/>
-                </a:highlight>
-                <a:latin typeface="Arial" panose="020B0604020202020204" pitchFamily="34" charset="0"/>
-                <a:cs typeface="Arial" panose="020B0604020202020204" pitchFamily="34" charset="0"/>
-              </a:rPr>
-              <a:t>etc</a:t>
-            </a:r>
-            <a:r>
-              <a:rPr lang="en-US" sz="2500" dirty="0">
-                <a:highlight>
-                  <a:srgbClr val="FFFF00"/>
-                </a:highlight>
-                <a:latin typeface="Arial" panose="020B0604020202020204" pitchFamily="34" charset="0"/>
-                <a:cs typeface="Arial" panose="020B0604020202020204" pitchFamily="34" charset="0"/>
-              </a:rPr>
-              <a:t>]</a:t>
-            </a:r>
-          </a:p>
-        </p:txBody>
-      </p:sp>
+        </p:spPr>
+      </p:pic>
     </p:spTree>
     <p:extLst>
       <p:ext uri="{BB962C8B-B14F-4D97-AF65-F5344CB8AC3E}">
-        <p14:creationId xmlns:p14="http://schemas.microsoft.com/office/powerpoint/2010/main" val="3182914858"/>
+        <p14:creationId xmlns:p14="http://schemas.microsoft.com/office/powerpoint/2010/main" val="1678222444"/>
       </p:ext>
     </p:extLst>
   </p:cSld>
@@ -4029,128 +4701,7 @@
 </p:sld>
 </file>
 
-<file path=ppt/slides/slide3.xml><?xml version="1.0" encoding="utf-8"?>
-<p:sld xmlns:a="http://schemas.openxmlformats.org/drawingml/2006/main" xmlns:r="http://schemas.openxmlformats.org/officeDocument/2006/relationships" xmlns:p="http://schemas.openxmlformats.org/presentationml/2006/main">
-  <p:cSld>
-    <p:spTree>
-      <p:nvGrpSpPr>
-        <p:cNvPr id="1" name="">
-          <a:extLst>
-            <a:ext uri="{FF2B5EF4-FFF2-40B4-BE49-F238E27FC236}">
-              <a16:creationId xmlns:a16="http://schemas.microsoft.com/office/drawing/2014/main" id="{F471082C-F76F-4228-1076-13874BFD5AB9}"/>
-            </a:ext>
-          </a:extLst>
-        </p:cNvPr>
-        <p:cNvGrpSpPr/>
-        <p:nvPr/>
-      </p:nvGrpSpPr>
-      <p:grpSpPr>
-        <a:xfrm>
-          <a:off x="0" y="0"/>
-          <a:ext cx="0" cy="0"/>
-          <a:chOff x="0" y="0"/>
-          <a:chExt cx="0" cy="0"/>
-        </a:xfrm>
-      </p:grpSpPr>
-      <p:sp>
-        <p:nvSpPr>
-          <p:cNvPr id="2" name="TextBox 1">
-            <a:extLst>
-              <a:ext uri="{FF2B5EF4-FFF2-40B4-BE49-F238E27FC236}">
-                <a16:creationId xmlns:a16="http://schemas.microsoft.com/office/drawing/2014/main" id="{5E3A6789-E885-989E-DD91-8C7A696D223F}"/>
-              </a:ext>
-            </a:extLst>
-          </p:cNvPr>
-          <p:cNvSpPr txBox="1"/>
-          <p:nvPr/>
-        </p:nvSpPr>
-        <p:spPr>
-          <a:xfrm>
-            <a:off x="171450" y="0"/>
-            <a:ext cx="10877550" cy="739754"/>
-          </a:xfrm>
-          <a:prstGeom prst="rect">
-            <a:avLst/>
-          </a:prstGeom>
-          <a:noFill/>
-        </p:spPr>
-        <p:txBody>
-          <a:bodyPr wrap="square" rtlCol="0">
-            <a:spAutoFit/>
-          </a:bodyPr>
-          <a:lstStyle/>
-          <a:p>
-            <a:pPr>
-              <a:lnSpc>
-                <a:spcPct val="150000"/>
-              </a:lnSpc>
-            </a:pPr>
-            <a:r>
-              <a:rPr lang="en-US" sz="3200" b="1" dirty="0">
-                <a:latin typeface="Arial" panose="020B0604020202020204" pitchFamily="34" charset="0"/>
-                <a:cs typeface="Arial" panose="020B0604020202020204" pitchFamily="34" charset="0"/>
-              </a:rPr>
-              <a:t>Recap: Session 1</a:t>
-            </a:r>
-          </a:p>
-        </p:txBody>
-      </p:sp>
-      <p:sp>
-        <p:nvSpPr>
-          <p:cNvPr id="8" name="Slide Number Placeholder 7">
-            <a:extLst>
-              <a:ext uri="{FF2B5EF4-FFF2-40B4-BE49-F238E27FC236}">
-                <a16:creationId xmlns:a16="http://schemas.microsoft.com/office/drawing/2014/main" id="{B249CF31-AEAD-9CA1-5C03-B3050E8E4463}"/>
-              </a:ext>
-            </a:extLst>
-          </p:cNvPr>
-          <p:cNvSpPr>
-            <a:spLocks noGrp="1"/>
-          </p:cNvSpPr>
-          <p:nvPr>
-            <p:ph type="sldNum" sz="quarter" idx="12"/>
-          </p:nvPr>
-        </p:nvSpPr>
-        <p:spPr>
-          <a:xfrm>
-            <a:off x="9263062" y="6337300"/>
-            <a:ext cx="2743200" cy="365125"/>
-          </a:xfrm>
-        </p:spPr>
-        <p:txBody>
-          <a:bodyPr/>
-          <a:lstStyle/>
-          <a:p>
-            <a:fld id="{A7C13B74-2CD1-074C-84D2-FF26F00FE39E}" type="slidenum">
-              <a:rPr lang="en-US" sz="1400" smtClean="0">
-                <a:solidFill>
-                  <a:schemeClr val="tx1"/>
-                </a:solidFill>
-              </a:rPr>
-              <a:t>2</a:t>
-            </a:fld>
-            <a:endParaRPr lang="en-US" sz="1400" dirty="0">
-              <a:solidFill>
-                <a:schemeClr val="tx1"/>
-              </a:solidFill>
-            </a:endParaRPr>
-          </a:p>
-        </p:txBody>
-      </p:sp>
-    </p:spTree>
-    <p:extLst>
-      <p:ext uri="{BB962C8B-B14F-4D97-AF65-F5344CB8AC3E}">
-        <p14:creationId xmlns:p14="http://schemas.microsoft.com/office/powerpoint/2010/main" val="481237574"/>
-      </p:ext>
-    </p:extLst>
-  </p:cSld>
-  <p:clrMapOvr>
-    <a:masterClrMapping/>
-  </p:clrMapOvr>
-</p:sld>
-</file>
-
-<file path=ppt/slides/slide4.xml><?xml version="1.0" encoding="utf-8"?>
+<file path=ppt/slides/slide11.xml><?xml version="1.0" encoding="utf-8"?>
 <p:sld xmlns:a="http://schemas.openxmlformats.org/drawingml/2006/main" xmlns:r="http://schemas.openxmlformats.org/officeDocument/2006/relationships" xmlns:p="http://schemas.openxmlformats.org/presentationml/2006/main">
   <p:cSld>
     <p:spTree>
@@ -4211,7 +4762,7 @@
                 <a:latin typeface="Arial" panose="020B0604020202020204" pitchFamily="34" charset="0"/>
                 <a:cs typeface="Arial" panose="020B0604020202020204" pitchFamily="34" charset="0"/>
               </a:rPr>
-              <a:t>Recap: Session 1</a:t>
+              <a:t>Today’s Objectives</a:t>
             </a:r>
           </a:p>
         </p:txBody>
@@ -4248,7 +4799,7 @@
                   <a:schemeClr val="tx1"/>
                 </a:solidFill>
               </a:rPr>
-              <a:t>3</a:t>
+              <a:t>10</a:t>
             </a:fld>
             <a:endParaRPr lang="en-US" sz="1400" dirty="0">
               <a:solidFill>
@@ -4273,7 +4824,7 @@
         <p:spPr>
           <a:xfrm>
             <a:off x="657225" y="1099644"/>
-            <a:ext cx="10877550" cy="2329356"/>
+            <a:ext cx="10877550" cy="1752275"/>
           </a:xfrm>
           <a:prstGeom prst="rect">
             <a:avLst/>
@@ -4285,20 +4836,6 @@
             <a:spAutoFit/>
           </a:bodyPr>
           <a:lstStyle/>
-          <a:p>
-            <a:pPr>
-              <a:lnSpc>
-                <a:spcPct val="150000"/>
-              </a:lnSpc>
-            </a:pPr>
-            <a:r>
-              <a:rPr lang="en-US" sz="2500" dirty="0">
-                <a:latin typeface="Arial" panose="020B0604020202020204" pitchFamily="34" charset="0"/>
-                <a:cs typeface="Arial" panose="020B0604020202020204" pitchFamily="34" charset="0"/>
-              </a:rPr>
-              <a:t>Today’s Objectives</a:t>
-            </a:r>
-          </a:p>
           <a:p>
             <a:pPr marL="457200" indent="-457200">
               <a:lnSpc>
@@ -4376,7 +4913,7 @@
 </p:sld>
 </file>
 
-<file path=ppt/slides/slide5.xml><?xml version="1.0" encoding="utf-8"?>
+<file path=ppt/slides/slide12.xml><?xml version="1.0" encoding="utf-8"?>
 <p:sld xmlns:a="http://schemas.openxmlformats.org/drawingml/2006/main" xmlns:r="http://schemas.openxmlformats.org/officeDocument/2006/relationships" xmlns:p="http://schemas.openxmlformats.org/presentationml/2006/main">
   <p:cSld>
     <p:spTree>
@@ -4431,7 +4968,7 @@
                   <a:schemeClr val="tx1"/>
                 </a:solidFill>
               </a:rPr>
-              <a:t>4</a:t>
+              <a:t>11</a:t>
             </a:fld>
             <a:endParaRPr lang="en-US" sz="1400" dirty="0">
               <a:solidFill>
@@ -4673,7 +5210,7 @@
 </p:sld>
 </file>
 
-<file path=ppt/slides/slide6.xml><?xml version="1.0" encoding="utf-8"?>
+<file path=ppt/slides/slide13.xml><?xml version="1.0" encoding="utf-8"?>
 <p:sld xmlns:a="http://schemas.openxmlformats.org/drawingml/2006/main" xmlns:r="http://schemas.openxmlformats.org/officeDocument/2006/relationships" xmlns:p="http://schemas.openxmlformats.org/presentationml/2006/main">
   <p:cSld>
     <p:spTree>
@@ -4728,7 +5265,7 @@
                   <a:schemeClr val="tx1"/>
                 </a:solidFill>
               </a:rPr>
-              <a:t>5</a:t>
+              <a:t>12</a:t>
             </a:fld>
             <a:endParaRPr lang="en-US" sz="1400" dirty="0">
               <a:solidFill>
@@ -4795,7 +5332,7 @@
         </p:nvSpPr>
         <p:spPr>
           <a:xfrm>
-            <a:off x="1263586" y="1409712"/>
+            <a:off x="694626" y="1023632"/>
             <a:ext cx="7999476" cy="4524315"/>
           </a:xfrm>
           <a:prstGeom prst="rect">
@@ -4874,7 +5411,7 @@
 </p:sld>
 </file>
 
-<file path=ppt/slides/slide7.xml><?xml version="1.0" encoding="utf-8"?>
+<file path=ppt/slides/slide14.xml><?xml version="1.0" encoding="utf-8"?>
 <p:sld xmlns:a="http://schemas.openxmlformats.org/drawingml/2006/main" xmlns:r="http://schemas.openxmlformats.org/officeDocument/2006/relationships" xmlns:p="http://schemas.openxmlformats.org/presentationml/2006/main">
   <p:cSld>
     <p:spTree>
@@ -4929,7 +5466,7 @@
                   <a:schemeClr val="tx1"/>
                 </a:solidFill>
               </a:rPr>
-              <a:t>6</a:t>
+              <a:t>13</a:t>
             </a:fld>
             <a:endParaRPr lang="en-US" sz="1400" dirty="0">
               <a:solidFill>
@@ -5127,7 +5664,7 @@
 </p:sld>
 </file>
 
-<file path=ppt/slides/slide8.xml><?xml version="1.0" encoding="utf-8"?>
+<file path=ppt/slides/slide15.xml><?xml version="1.0" encoding="utf-8"?>
 <p:sld xmlns:a="http://schemas.openxmlformats.org/drawingml/2006/main" xmlns:r="http://schemas.openxmlformats.org/officeDocument/2006/relationships" xmlns:p="http://schemas.openxmlformats.org/presentationml/2006/main">
   <p:cSld>
     <p:spTree>
@@ -5182,7 +5719,7 @@
                   <a:schemeClr val="tx1"/>
                 </a:solidFill>
               </a:rPr>
-              <a:t>7</a:t>
+              <a:t>14</a:t>
             </a:fld>
             <a:endParaRPr lang="en-US" sz="1400" dirty="0">
               <a:solidFill>
@@ -5248,7 +5785,7 @@
           <a:p>
             <a:r>
               <a:rPr lang="en-US" dirty="0"/>
-              <a:t>    Create a beautiful </a:t>
+              <a:t>    Create a </a:t>
             </a:r>
             <a:r>
               <a:rPr lang="en-US" dirty="0" err="1"/>
@@ -5300,7 +5837,7 @@
 </p:sld>
 </file>
 
-<file path=ppt/slides/slide9.xml><?xml version="1.0" encoding="utf-8"?>
+<file path=ppt/slides/slide16.xml><?xml version="1.0" encoding="utf-8"?>
 <p:sld xmlns:a="http://schemas.openxmlformats.org/drawingml/2006/main" xmlns:r="http://schemas.openxmlformats.org/officeDocument/2006/relationships" xmlns:p="http://schemas.openxmlformats.org/presentationml/2006/main">
   <p:cSld>
     <p:spTree>
@@ -5355,6 +5892,2476 @@
                   <a:schemeClr val="tx1"/>
                 </a:solidFill>
               </a:rPr>
+              <a:t>15</a:t>
+            </a:fld>
+            <a:endParaRPr lang="en-US" sz="1400" dirty="0">
+              <a:solidFill>
+                <a:schemeClr val="tx1"/>
+              </a:solidFill>
+            </a:endParaRPr>
+          </a:p>
+        </p:txBody>
+      </p:sp>
+      <p:sp>
+        <p:nvSpPr>
+          <p:cNvPr id="2" name="TextBox 1">
+            <a:extLst>
+              <a:ext uri="{FF2B5EF4-FFF2-40B4-BE49-F238E27FC236}">
+                <a16:creationId xmlns:a16="http://schemas.microsoft.com/office/drawing/2014/main" id="{048326CD-B11C-B821-5FE8-01B346866CC0}"/>
+              </a:ext>
+            </a:extLst>
+          </p:cNvPr>
+          <p:cNvSpPr txBox="1"/>
+          <p:nvPr/>
+        </p:nvSpPr>
+        <p:spPr>
+          <a:xfrm>
+            <a:off x="171450" y="0"/>
+            <a:ext cx="10877550" cy="739754"/>
+          </a:xfrm>
+          <a:prstGeom prst="rect">
+            <a:avLst/>
+          </a:prstGeom>
+          <a:noFill/>
+        </p:spPr>
+        <p:txBody>
+          <a:bodyPr wrap="square" rtlCol="0">
+            <a:spAutoFit/>
+          </a:bodyPr>
+          <a:lstStyle/>
+          <a:p>
+            <a:pPr>
+              <a:lnSpc>
+                <a:spcPct val="150000"/>
+              </a:lnSpc>
+            </a:pPr>
+            <a:r>
+              <a:rPr lang="en-US" sz="3200" b="1" dirty="0">
+                <a:latin typeface="Arial" panose="020B0604020202020204" pitchFamily="34" charset="0"/>
+                <a:cs typeface="Arial" panose="020B0604020202020204" pitchFamily="34" charset="0"/>
+              </a:rPr>
+              <a:t>Next Steps and Timeline Long-Term</a:t>
+            </a:r>
+          </a:p>
+        </p:txBody>
+      </p:sp>
+      <p:sp>
+        <p:nvSpPr>
+          <p:cNvPr id="3" name="TextBox 2">
+            <a:extLst>
+              <a:ext uri="{FF2B5EF4-FFF2-40B4-BE49-F238E27FC236}">
+                <a16:creationId xmlns:a16="http://schemas.microsoft.com/office/drawing/2014/main" id="{390E87F7-02BB-B6D8-C7D9-B268F2609A03}"/>
+              </a:ext>
+            </a:extLst>
+          </p:cNvPr>
+          <p:cNvSpPr txBox="1"/>
+          <p:nvPr/>
+        </p:nvSpPr>
+        <p:spPr>
+          <a:xfrm>
+            <a:off x="714946" y="1104912"/>
+            <a:ext cx="10334054" cy="3139321"/>
+          </a:xfrm>
+          <a:prstGeom prst="rect">
+            <a:avLst/>
+          </a:prstGeom>
+          <a:noFill/>
+        </p:spPr>
+        <p:txBody>
+          <a:bodyPr wrap="square">
+            <a:spAutoFit/>
+          </a:bodyPr>
+          <a:lstStyle/>
+          <a:p>
+            <a:pPr marL="457200" indent="-457200">
+              <a:buFont typeface="+mj-lt"/>
+              <a:buAutoNum type="arabicPeriod"/>
+            </a:pPr>
+            <a:r>
+              <a:rPr lang="en-US" sz="2200" dirty="0"/>
+              <a:t>Now that you’ve completed the entire analysis process, </a:t>
+            </a:r>
+            <a:br>
+              <a:rPr lang="en-US" sz="2200" dirty="0"/>
+            </a:br>
+            <a:r>
+              <a:rPr lang="en-US" sz="2200" dirty="0"/>
+              <a:t>what’s clear and what remains hazy? </a:t>
+            </a:r>
+            <a:br>
+              <a:rPr lang="en-US" sz="2200" dirty="0"/>
+            </a:br>
+            <a:endParaRPr lang="en-US" sz="2200" dirty="0"/>
+          </a:p>
+          <a:p>
+            <a:pPr marL="457200" indent="-457200">
+              <a:buFont typeface="+mj-lt"/>
+              <a:buAutoNum type="arabicPeriod"/>
+            </a:pPr>
+            <a:r>
+              <a:rPr lang="en-US" sz="2200" dirty="0"/>
+              <a:t>What would you do personally to improve the dataset?</a:t>
+            </a:r>
+            <a:br>
+              <a:rPr lang="en-US" sz="2200" dirty="0"/>
+            </a:br>
+            <a:r>
+              <a:rPr lang="en-US" sz="2200" dirty="0"/>
+              <a:t>What would you do personally to improve the analysis?</a:t>
+            </a:r>
+            <a:br>
+              <a:rPr lang="en-US" sz="2200" dirty="0"/>
+            </a:br>
+            <a:endParaRPr lang="en-US" sz="2200" dirty="0"/>
+          </a:p>
+          <a:p>
+            <a:pPr marL="457200" indent="-457200">
+              <a:buFont typeface="+mj-lt"/>
+              <a:buAutoNum type="arabicPeriod"/>
+            </a:pPr>
+            <a:r>
+              <a:rPr lang="en-US" sz="2200" dirty="0"/>
+              <a:t>What additional questions could be addressed with the data available?</a:t>
+            </a:r>
+          </a:p>
+          <a:p>
+            <a:pPr marL="457200" indent="-457200">
+              <a:buFont typeface="+mj-lt"/>
+              <a:buAutoNum type="arabicPeriod"/>
+            </a:pPr>
+            <a:endParaRPr lang="en-US" sz="2200" dirty="0"/>
+          </a:p>
+          <a:p>
+            <a:pPr marL="457200" indent="-457200">
+              <a:buFont typeface="+mj-lt"/>
+              <a:buAutoNum type="arabicPeriod"/>
+            </a:pPr>
+            <a:r>
+              <a:rPr lang="en-US" sz="2200" dirty="0"/>
+              <a:t>What does this look like in terms of a publication and workflow?</a:t>
+            </a:r>
+          </a:p>
+        </p:txBody>
+      </p:sp>
+      <p:sp>
+        <p:nvSpPr>
+          <p:cNvPr id="4" name="TextBox 3">
+            <a:extLst>
+              <a:ext uri="{FF2B5EF4-FFF2-40B4-BE49-F238E27FC236}">
+                <a16:creationId xmlns:a16="http://schemas.microsoft.com/office/drawing/2014/main" id="{75D3F7CD-0210-35A9-1624-BCA87E6EA1A6}"/>
+              </a:ext>
+            </a:extLst>
+          </p:cNvPr>
+          <p:cNvSpPr txBox="1"/>
+          <p:nvPr/>
+        </p:nvSpPr>
+        <p:spPr>
+          <a:xfrm>
+            <a:off x="474345" y="5780108"/>
+            <a:ext cx="10877550" cy="739754"/>
+          </a:xfrm>
+          <a:prstGeom prst="rect">
+            <a:avLst/>
+          </a:prstGeom>
+          <a:noFill/>
+        </p:spPr>
+        <p:txBody>
+          <a:bodyPr wrap="square" rtlCol="0">
+            <a:spAutoFit/>
+          </a:bodyPr>
+          <a:lstStyle/>
+          <a:p>
+            <a:pPr algn="r">
+              <a:lnSpc>
+                <a:spcPct val="150000"/>
+              </a:lnSpc>
+            </a:pPr>
+            <a:r>
+              <a:rPr lang="en-US" sz="3200" b="1" dirty="0">
+                <a:highlight>
+                  <a:srgbClr val="00FFFF"/>
+                </a:highlight>
+                <a:latin typeface="Arial" panose="020B0604020202020204" pitchFamily="34" charset="0"/>
+                <a:cs typeface="Arial" panose="020B0604020202020204" pitchFamily="34" charset="0"/>
+              </a:rPr>
+              <a:t>Questions?</a:t>
+            </a:r>
+          </a:p>
+        </p:txBody>
+      </p:sp>
+    </p:spTree>
+    <p:extLst>
+      <p:ext uri="{BB962C8B-B14F-4D97-AF65-F5344CB8AC3E}">
+        <p14:creationId xmlns:p14="http://schemas.microsoft.com/office/powerpoint/2010/main" val="3737335531"/>
+      </p:ext>
+    </p:extLst>
+  </p:cSld>
+  <p:clrMapOvr>
+    <a:masterClrMapping/>
+  </p:clrMapOvr>
+</p:sld>
+</file>
+
+<file path=ppt/slides/slide2.xml><?xml version="1.0" encoding="utf-8"?>
+<p:sld xmlns:a="http://schemas.openxmlformats.org/drawingml/2006/main" xmlns:r="http://schemas.openxmlformats.org/officeDocument/2006/relationships" xmlns:p="http://schemas.openxmlformats.org/presentationml/2006/main">
+  <p:cSld>
+    <p:spTree>
+      <p:nvGrpSpPr>
+        <p:cNvPr id="1" name="">
+          <a:extLst>
+            <a:ext uri="{FF2B5EF4-FFF2-40B4-BE49-F238E27FC236}">
+              <a16:creationId xmlns:a16="http://schemas.microsoft.com/office/drawing/2014/main" id="{D05914A0-4ECF-3962-3189-A27F96C2F58E}"/>
+            </a:ext>
+          </a:extLst>
+        </p:cNvPr>
+        <p:cNvGrpSpPr/>
+        <p:nvPr/>
+      </p:nvGrpSpPr>
+      <p:grpSpPr>
+        <a:xfrm>
+          <a:off x="0" y="0"/>
+          <a:ext cx="0" cy="0"/>
+          <a:chOff x="0" y="0"/>
+          <a:chExt cx="0" cy="0"/>
+        </a:xfrm>
+      </p:grpSpPr>
+      <p:pic>
+        <p:nvPicPr>
+          <p:cNvPr id="4" name="Picture 3" descr="A screenshot of a computer&#10;&#10;AI-generated content may be incorrect.">
+            <a:extLst>
+              <a:ext uri="{FF2B5EF4-FFF2-40B4-BE49-F238E27FC236}">
+                <a16:creationId xmlns:a16="http://schemas.microsoft.com/office/drawing/2014/main" id="{E8D20AE0-000A-BFAF-5C82-FD6FBCBB932D}"/>
+              </a:ext>
+            </a:extLst>
+          </p:cNvPr>
+          <p:cNvPicPr>
+            <a:picLocks noChangeAspect="1"/>
+          </p:cNvPicPr>
+          <p:nvPr/>
+        </p:nvPicPr>
+        <p:blipFill>
+          <a:blip r:embed="rId3"/>
+          <a:srcRect l="965" t="23433" r="49381"/>
+          <a:stretch>
+            <a:fillRect/>
+          </a:stretch>
+        </p:blipFill>
+        <p:spPr>
+          <a:xfrm>
+            <a:off x="5118984" y="1014453"/>
+            <a:ext cx="5627517" cy="5583190"/>
+          </a:xfrm>
+          <a:prstGeom prst="rect">
+            <a:avLst/>
+          </a:prstGeom>
+        </p:spPr>
+      </p:pic>
+      <p:pic>
+        <p:nvPicPr>
+          <p:cNvPr id="8" name="Picture 7" descr="A screenshot of a computer&#10;&#10;AI-generated content may be incorrect.">
+            <a:extLst>
+              <a:ext uri="{FF2B5EF4-FFF2-40B4-BE49-F238E27FC236}">
+                <a16:creationId xmlns:a16="http://schemas.microsoft.com/office/drawing/2014/main" id="{97416228-1FF1-CE8D-772A-E9943124C98A}"/>
+              </a:ext>
+            </a:extLst>
+          </p:cNvPr>
+          <p:cNvPicPr>
+            <a:picLocks noChangeAspect="1"/>
+          </p:cNvPicPr>
+          <p:nvPr/>
+        </p:nvPicPr>
+        <p:blipFill>
+          <a:blip r:embed="rId3"/>
+          <a:srcRect l="18945" b="85748"/>
+          <a:stretch>
+            <a:fillRect/>
+          </a:stretch>
+        </p:blipFill>
+        <p:spPr>
+          <a:xfrm>
+            <a:off x="5118984" y="260357"/>
+            <a:ext cx="5627516" cy="636628"/>
+          </a:xfrm>
+          <a:prstGeom prst="rect">
+            <a:avLst/>
+          </a:prstGeom>
+        </p:spPr>
+      </p:pic>
+      <p:sp>
+        <p:nvSpPr>
+          <p:cNvPr id="6" name="TextBox 5">
+            <a:extLst>
+              <a:ext uri="{FF2B5EF4-FFF2-40B4-BE49-F238E27FC236}">
+                <a16:creationId xmlns:a16="http://schemas.microsoft.com/office/drawing/2014/main" id="{3A103DB1-F5DF-912E-2F02-0256B4F3EE16}"/>
+              </a:ext>
+            </a:extLst>
+          </p:cNvPr>
+          <p:cNvSpPr txBox="1"/>
+          <p:nvPr/>
+        </p:nvSpPr>
+        <p:spPr>
+          <a:xfrm>
+            <a:off x="6166600" y="6459535"/>
+            <a:ext cx="1416423" cy="307777"/>
+          </a:xfrm>
+          <a:prstGeom prst="rect">
+            <a:avLst/>
+          </a:prstGeom>
+          <a:solidFill>
+            <a:schemeClr val="bg1"/>
+          </a:solidFill>
+        </p:spPr>
+        <p:txBody>
+          <a:bodyPr wrap="square" rtlCol="0">
+            <a:spAutoFit/>
+          </a:bodyPr>
+          <a:lstStyle/>
+          <a:p>
+            <a:pPr algn="ctr"/>
+            <a:r>
+              <a:rPr lang="en-US" sz="1400" dirty="0" err="1">
+                <a:solidFill>
+                  <a:schemeClr val="accent5">
+                    <a:lumMod val="75000"/>
+                  </a:schemeClr>
+                </a:solidFill>
+                <a:latin typeface="Arial" panose="020B0604020202020204" pitchFamily="34" charset="0"/>
+                <a:cs typeface="Arial" panose="020B0604020202020204" pitchFamily="34" charset="0"/>
+              </a:rPr>
+              <a:t>Sample_Type</a:t>
+            </a:r>
+            <a:endParaRPr lang="en-US" sz="1400" dirty="0">
+              <a:solidFill>
+                <a:schemeClr val="accent5">
+                  <a:lumMod val="75000"/>
+                </a:schemeClr>
+              </a:solidFill>
+              <a:latin typeface="Arial" panose="020B0604020202020204" pitchFamily="34" charset="0"/>
+              <a:cs typeface="Arial" panose="020B0604020202020204" pitchFamily="34" charset="0"/>
+            </a:endParaRPr>
+          </a:p>
+        </p:txBody>
+      </p:sp>
+      <p:sp>
+        <p:nvSpPr>
+          <p:cNvPr id="9" name="Left Brace 8">
+            <a:extLst>
+              <a:ext uri="{FF2B5EF4-FFF2-40B4-BE49-F238E27FC236}">
+                <a16:creationId xmlns:a16="http://schemas.microsoft.com/office/drawing/2014/main" id="{C02F3D61-81AA-409F-9ED9-52A7901EBF7D}"/>
+              </a:ext>
+            </a:extLst>
+          </p:cNvPr>
+          <p:cNvSpPr/>
+          <p:nvPr/>
+        </p:nvSpPr>
+        <p:spPr>
+          <a:xfrm rot="16200000">
+            <a:off x="6752859" y="5042272"/>
+            <a:ext cx="243906" cy="2776817"/>
+          </a:xfrm>
+          <a:prstGeom prst="leftBrace">
+            <a:avLst/>
+          </a:prstGeom>
+          <a:ln>
+            <a:solidFill>
+              <a:schemeClr val="accent5">
+                <a:lumMod val="75000"/>
+              </a:schemeClr>
+            </a:solidFill>
+          </a:ln>
+        </p:spPr>
+        <p:style>
+          <a:lnRef idx="2">
+            <a:schemeClr val="accent1"/>
+          </a:lnRef>
+          <a:fillRef idx="0">
+            <a:schemeClr val="accent1"/>
+          </a:fillRef>
+          <a:effectRef idx="1">
+            <a:schemeClr val="accent1"/>
+          </a:effectRef>
+          <a:fontRef idx="minor">
+            <a:schemeClr val="tx1"/>
+          </a:fontRef>
+        </p:style>
+        <p:txBody>
+          <a:bodyPr rtlCol="0" anchor="ctr"/>
+          <a:lstStyle/>
+          <a:p>
+            <a:pPr algn="ctr"/>
+            <a:endParaRPr lang="en-US"/>
+          </a:p>
+        </p:txBody>
+      </p:sp>
+      <p:cxnSp>
+        <p:nvCxnSpPr>
+          <p:cNvPr id="11" name="Straight Connector 10">
+            <a:extLst>
+              <a:ext uri="{FF2B5EF4-FFF2-40B4-BE49-F238E27FC236}">
+                <a16:creationId xmlns:a16="http://schemas.microsoft.com/office/drawing/2014/main" id="{3A5AC5FE-5A33-8ABB-CF17-CC6C3AC9076D}"/>
+              </a:ext>
+            </a:extLst>
+          </p:cNvPr>
+          <p:cNvCxnSpPr>
+            <a:cxnSpLocks/>
+          </p:cNvCxnSpPr>
+          <p:nvPr/>
+        </p:nvCxnSpPr>
+        <p:spPr>
+          <a:xfrm>
+            <a:off x="6166600" y="1163171"/>
+            <a:ext cx="0" cy="4410635"/>
+          </a:xfrm>
+          <a:prstGeom prst="line">
+            <a:avLst/>
+          </a:prstGeom>
+          <a:ln w="28575"/>
+        </p:spPr>
+        <p:style>
+          <a:lnRef idx="2">
+            <a:schemeClr val="dk1"/>
+          </a:lnRef>
+          <a:fillRef idx="0">
+            <a:schemeClr val="dk1"/>
+          </a:fillRef>
+          <a:effectRef idx="1">
+            <a:schemeClr val="dk1"/>
+          </a:effectRef>
+          <a:fontRef idx="minor">
+            <a:schemeClr val="tx1"/>
+          </a:fontRef>
+        </p:style>
+      </p:cxnSp>
+      <p:cxnSp>
+        <p:nvCxnSpPr>
+          <p:cNvPr id="16" name="Straight Connector 15">
+            <a:extLst>
+              <a:ext uri="{FF2B5EF4-FFF2-40B4-BE49-F238E27FC236}">
+                <a16:creationId xmlns:a16="http://schemas.microsoft.com/office/drawing/2014/main" id="{52F7048B-1200-BE41-2C71-CE28500E9D5D}"/>
+              </a:ext>
+            </a:extLst>
+          </p:cNvPr>
+          <p:cNvCxnSpPr>
+            <a:cxnSpLocks/>
+          </p:cNvCxnSpPr>
+          <p:nvPr/>
+        </p:nvCxnSpPr>
+        <p:spPr>
+          <a:xfrm>
+            <a:off x="6305553" y="1163171"/>
+            <a:ext cx="0" cy="4410635"/>
+          </a:xfrm>
+          <a:prstGeom prst="line">
+            <a:avLst/>
+          </a:prstGeom>
+          <a:ln w="28575"/>
+        </p:spPr>
+        <p:style>
+          <a:lnRef idx="2">
+            <a:schemeClr val="dk1"/>
+          </a:lnRef>
+          <a:fillRef idx="0">
+            <a:schemeClr val="dk1"/>
+          </a:fillRef>
+          <a:effectRef idx="1">
+            <a:schemeClr val="dk1"/>
+          </a:effectRef>
+          <a:fontRef idx="minor">
+            <a:schemeClr val="tx1"/>
+          </a:fontRef>
+        </p:style>
+      </p:cxnSp>
+      <p:cxnSp>
+        <p:nvCxnSpPr>
+          <p:cNvPr id="17" name="Straight Connector 16">
+            <a:extLst>
+              <a:ext uri="{FF2B5EF4-FFF2-40B4-BE49-F238E27FC236}">
+                <a16:creationId xmlns:a16="http://schemas.microsoft.com/office/drawing/2014/main" id="{E069E062-C499-E53F-E1A0-6C24857A1930}"/>
+              </a:ext>
+            </a:extLst>
+          </p:cNvPr>
+          <p:cNvCxnSpPr>
+            <a:cxnSpLocks/>
+          </p:cNvCxnSpPr>
+          <p:nvPr/>
+        </p:nvCxnSpPr>
+        <p:spPr>
+          <a:xfrm>
+            <a:off x="6877053" y="1163171"/>
+            <a:ext cx="0" cy="4410635"/>
+          </a:xfrm>
+          <a:prstGeom prst="line">
+            <a:avLst/>
+          </a:prstGeom>
+          <a:ln w="28575"/>
+        </p:spPr>
+        <p:style>
+          <a:lnRef idx="2">
+            <a:schemeClr val="dk1"/>
+          </a:lnRef>
+          <a:fillRef idx="0">
+            <a:schemeClr val="dk1"/>
+          </a:fillRef>
+          <a:effectRef idx="1">
+            <a:schemeClr val="dk1"/>
+          </a:effectRef>
+          <a:fontRef idx="minor">
+            <a:schemeClr val="tx1"/>
+          </a:fontRef>
+        </p:style>
+      </p:cxnSp>
+      <p:cxnSp>
+        <p:nvCxnSpPr>
+          <p:cNvPr id="18" name="Straight Connector 17">
+            <a:extLst>
+              <a:ext uri="{FF2B5EF4-FFF2-40B4-BE49-F238E27FC236}">
+                <a16:creationId xmlns:a16="http://schemas.microsoft.com/office/drawing/2014/main" id="{78B7E543-7602-DC91-C362-7238EDCFAB1A}"/>
+              </a:ext>
+            </a:extLst>
+          </p:cNvPr>
+          <p:cNvCxnSpPr>
+            <a:cxnSpLocks/>
+          </p:cNvCxnSpPr>
+          <p:nvPr/>
+        </p:nvCxnSpPr>
+        <p:spPr>
+          <a:xfrm>
+            <a:off x="7541562" y="1163171"/>
+            <a:ext cx="0" cy="4410635"/>
+          </a:xfrm>
+          <a:prstGeom prst="line">
+            <a:avLst/>
+          </a:prstGeom>
+          <a:ln w="28575"/>
+        </p:spPr>
+        <p:style>
+          <a:lnRef idx="2">
+            <a:schemeClr val="dk1"/>
+          </a:lnRef>
+          <a:fillRef idx="0">
+            <a:schemeClr val="dk1"/>
+          </a:fillRef>
+          <a:effectRef idx="1">
+            <a:schemeClr val="dk1"/>
+          </a:effectRef>
+          <a:fontRef idx="minor">
+            <a:schemeClr val="tx1"/>
+          </a:fontRef>
+        </p:style>
+      </p:cxnSp>
+      <p:sp>
+        <p:nvSpPr>
+          <p:cNvPr id="2" name="TextBox 1">
+            <a:extLst>
+              <a:ext uri="{FF2B5EF4-FFF2-40B4-BE49-F238E27FC236}">
+                <a16:creationId xmlns:a16="http://schemas.microsoft.com/office/drawing/2014/main" id="{314B383F-972D-EA01-05F5-3737B2A692D8}"/>
+              </a:ext>
+            </a:extLst>
+          </p:cNvPr>
+          <p:cNvSpPr txBox="1"/>
+          <p:nvPr/>
+        </p:nvSpPr>
+        <p:spPr>
+          <a:xfrm>
+            <a:off x="171450" y="0"/>
+            <a:ext cx="10877550" cy="739754"/>
+          </a:xfrm>
+          <a:prstGeom prst="rect">
+            <a:avLst/>
+          </a:prstGeom>
+          <a:noFill/>
+        </p:spPr>
+        <p:txBody>
+          <a:bodyPr wrap="square" rtlCol="0">
+            <a:spAutoFit/>
+          </a:bodyPr>
+          <a:lstStyle/>
+          <a:p>
+            <a:pPr>
+              <a:lnSpc>
+                <a:spcPct val="150000"/>
+              </a:lnSpc>
+            </a:pPr>
+            <a:r>
+              <a:rPr lang="en-US" sz="3200" b="1" dirty="0">
+                <a:latin typeface="Arial" panose="020B0604020202020204" pitchFamily="34" charset="0"/>
+                <a:cs typeface="Arial" panose="020B0604020202020204" pitchFamily="34" charset="0"/>
+              </a:rPr>
+              <a:t>Recap: Session 1</a:t>
+            </a:r>
+          </a:p>
+        </p:txBody>
+      </p:sp>
+      <p:sp>
+        <p:nvSpPr>
+          <p:cNvPr id="10" name="TextBox 9">
+            <a:extLst>
+              <a:ext uri="{FF2B5EF4-FFF2-40B4-BE49-F238E27FC236}">
+                <a16:creationId xmlns:a16="http://schemas.microsoft.com/office/drawing/2014/main" id="{8A9F45FA-CF01-9B03-F096-1D1516816427}"/>
+              </a:ext>
+            </a:extLst>
+          </p:cNvPr>
+          <p:cNvSpPr txBox="1"/>
+          <p:nvPr/>
+        </p:nvSpPr>
+        <p:spPr>
+          <a:xfrm>
+            <a:off x="657225" y="1099644"/>
+            <a:ext cx="3679399" cy="1175194"/>
+          </a:xfrm>
+          <a:prstGeom prst="rect">
+            <a:avLst/>
+          </a:prstGeom>
+          <a:noFill/>
+        </p:spPr>
+        <p:txBody>
+          <a:bodyPr wrap="square" rtlCol="0">
+            <a:spAutoFit/>
+          </a:bodyPr>
+          <a:lstStyle/>
+          <a:p>
+            <a:pPr>
+              <a:lnSpc>
+                <a:spcPct val="150000"/>
+              </a:lnSpc>
+            </a:pPr>
+            <a:r>
+              <a:rPr lang="en-US" sz="2500" dirty="0">
+                <a:latin typeface="Arial" panose="020B0604020202020204" pitchFamily="34" charset="0"/>
+                <a:cs typeface="Arial" panose="020B0604020202020204" pitchFamily="34" charset="0"/>
+              </a:rPr>
+              <a:t>Why is this important, </a:t>
+            </a:r>
+            <a:br>
+              <a:rPr lang="en-US" sz="2500" dirty="0">
+                <a:latin typeface="Arial" panose="020B0604020202020204" pitchFamily="34" charset="0"/>
+                <a:cs typeface="Arial" panose="020B0604020202020204" pitchFamily="34" charset="0"/>
+              </a:rPr>
+            </a:br>
+            <a:r>
+              <a:rPr lang="en-US" sz="2500" dirty="0">
+                <a:latin typeface="Arial" panose="020B0604020202020204" pitchFamily="34" charset="0"/>
+                <a:cs typeface="Arial" panose="020B0604020202020204" pitchFamily="34" charset="0"/>
+              </a:rPr>
+              <a:t>what does it tell us?</a:t>
+            </a:r>
+          </a:p>
+        </p:txBody>
+      </p:sp>
+      <p:sp>
+        <p:nvSpPr>
+          <p:cNvPr id="12" name="Slide Number Placeholder 7">
+            <a:extLst>
+              <a:ext uri="{FF2B5EF4-FFF2-40B4-BE49-F238E27FC236}">
+                <a16:creationId xmlns:a16="http://schemas.microsoft.com/office/drawing/2014/main" id="{70FB20F2-C56D-3F98-0B6E-4FB6DEDD49B6}"/>
+              </a:ext>
+            </a:extLst>
+          </p:cNvPr>
+          <p:cNvSpPr>
+            <a:spLocks noGrp="1"/>
+          </p:cNvSpPr>
+          <p:nvPr>
+            <p:ph type="sldNum" sz="quarter" idx="12"/>
+          </p:nvPr>
+        </p:nvSpPr>
+        <p:spPr>
+          <a:xfrm>
+            <a:off x="9263062" y="6337300"/>
+            <a:ext cx="2743200" cy="365125"/>
+          </a:xfrm>
+        </p:spPr>
+        <p:txBody>
+          <a:bodyPr/>
+          <a:lstStyle/>
+          <a:p>
+            <a:fld id="{A7C13B74-2CD1-074C-84D2-FF26F00FE39E}" type="slidenum">
+              <a:rPr lang="en-US" sz="1400" smtClean="0">
+                <a:solidFill>
+                  <a:schemeClr val="tx1"/>
+                </a:solidFill>
+              </a:rPr>
+              <a:t>1</a:t>
+            </a:fld>
+            <a:endParaRPr lang="en-US" sz="1400" dirty="0">
+              <a:solidFill>
+                <a:schemeClr val="tx1"/>
+              </a:solidFill>
+            </a:endParaRPr>
+          </a:p>
+        </p:txBody>
+      </p:sp>
+    </p:spTree>
+    <p:extLst>
+      <p:ext uri="{BB962C8B-B14F-4D97-AF65-F5344CB8AC3E}">
+        <p14:creationId xmlns:p14="http://schemas.microsoft.com/office/powerpoint/2010/main" val="1950204725"/>
+      </p:ext>
+    </p:extLst>
+  </p:cSld>
+  <p:clrMapOvr>
+    <a:masterClrMapping/>
+  </p:clrMapOvr>
+</p:sld>
+</file>
+
+<file path=ppt/slides/slide3.xml><?xml version="1.0" encoding="utf-8"?>
+<p:sld xmlns:a="http://schemas.openxmlformats.org/drawingml/2006/main" xmlns:r="http://schemas.openxmlformats.org/officeDocument/2006/relationships" xmlns:p="http://schemas.openxmlformats.org/presentationml/2006/main">
+  <p:cSld>
+    <p:spTree>
+      <p:nvGrpSpPr>
+        <p:cNvPr id="1" name="">
+          <a:extLst>
+            <a:ext uri="{FF2B5EF4-FFF2-40B4-BE49-F238E27FC236}">
+              <a16:creationId xmlns:a16="http://schemas.microsoft.com/office/drawing/2014/main" id="{5234D886-68CC-C0E3-73DD-03E9C866A4D0}"/>
+            </a:ext>
+          </a:extLst>
+        </p:cNvPr>
+        <p:cNvGrpSpPr/>
+        <p:nvPr/>
+      </p:nvGrpSpPr>
+      <p:grpSpPr>
+        <a:xfrm>
+          <a:off x="0" y="0"/>
+          <a:ext cx="0" cy="0"/>
+          <a:chOff x="0" y="0"/>
+          <a:chExt cx="0" cy="0"/>
+        </a:xfrm>
+      </p:grpSpPr>
+      <p:sp>
+        <p:nvSpPr>
+          <p:cNvPr id="2" name="TextBox 1">
+            <a:extLst>
+              <a:ext uri="{FF2B5EF4-FFF2-40B4-BE49-F238E27FC236}">
+                <a16:creationId xmlns:a16="http://schemas.microsoft.com/office/drawing/2014/main" id="{5C0CED24-5772-3519-5499-42534F0D4439}"/>
+              </a:ext>
+            </a:extLst>
+          </p:cNvPr>
+          <p:cNvSpPr txBox="1"/>
+          <p:nvPr/>
+        </p:nvSpPr>
+        <p:spPr>
+          <a:xfrm>
+            <a:off x="171450" y="0"/>
+            <a:ext cx="10877550" cy="739754"/>
+          </a:xfrm>
+          <a:prstGeom prst="rect">
+            <a:avLst/>
+          </a:prstGeom>
+          <a:noFill/>
+        </p:spPr>
+        <p:txBody>
+          <a:bodyPr wrap="square" rtlCol="0">
+            <a:spAutoFit/>
+          </a:bodyPr>
+          <a:lstStyle/>
+          <a:p>
+            <a:pPr>
+              <a:lnSpc>
+                <a:spcPct val="150000"/>
+              </a:lnSpc>
+            </a:pPr>
+            <a:r>
+              <a:rPr lang="en-US" sz="3200" b="1" dirty="0">
+                <a:latin typeface="Arial" panose="020B0604020202020204" pitchFamily="34" charset="0"/>
+                <a:cs typeface="Arial" panose="020B0604020202020204" pitchFamily="34" charset="0"/>
+              </a:rPr>
+              <a:t>Experimental Design, Statistics, and Visualizations</a:t>
+            </a:r>
+          </a:p>
+        </p:txBody>
+      </p:sp>
+      <p:sp>
+        <p:nvSpPr>
+          <p:cNvPr id="8" name="Slide Number Placeholder 7">
+            <a:extLst>
+              <a:ext uri="{FF2B5EF4-FFF2-40B4-BE49-F238E27FC236}">
+                <a16:creationId xmlns:a16="http://schemas.microsoft.com/office/drawing/2014/main" id="{BB41802B-9D12-15D3-ADA8-63E5E2DCD590}"/>
+              </a:ext>
+            </a:extLst>
+          </p:cNvPr>
+          <p:cNvSpPr>
+            <a:spLocks noGrp="1"/>
+          </p:cNvSpPr>
+          <p:nvPr>
+            <p:ph type="sldNum" sz="quarter" idx="12"/>
+          </p:nvPr>
+        </p:nvSpPr>
+        <p:spPr>
+          <a:xfrm>
+            <a:off x="9263062" y="6337300"/>
+            <a:ext cx="2743200" cy="365125"/>
+          </a:xfrm>
+        </p:spPr>
+        <p:txBody>
+          <a:bodyPr/>
+          <a:lstStyle/>
+          <a:p>
+            <a:fld id="{A7C13B74-2CD1-074C-84D2-FF26F00FE39E}" type="slidenum">
+              <a:rPr lang="en-US" sz="1400" smtClean="0">
+                <a:solidFill>
+                  <a:schemeClr val="tx1"/>
+                </a:solidFill>
+              </a:rPr>
+              <a:t>2</a:t>
+            </a:fld>
+            <a:endParaRPr lang="en-US" sz="1400" dirty="0">
+              <a:solidFill>
+                <a:schemeClr val="tx1"/>
+              </a:solidFill>
+            </a:endParaRPr>
+          </a:p>
+        </p:txBody>
+      </p:sp>
+    </p:spTree>
+    <p:extLst>
+      <p:ext uri="{BB962C8B-B14F-4D97-AF65-F5344CB8AC3E}">
+        <p14:creationId xmlns:p14="http://schemas.microsoft.com/office/powerpoint/2010/main" val="342621549"/>
+      </p:ext>
+    </p:extLst>
+  </p:cSld>
+  <p:clrMapOvr>
+    <a:masterClrMapping/>
+  </p:clrMapOvr>
+</p:sld>
+</file>
+
+<file path=ppt/slides/slide4.xml><?xml version="1.0" encoding="utf-8"?>
+<p:sld xmlns:a="http://schemas.openxmlformats.org/drawingml/2006/main" xmlns:r="http://schemas.openxmlformats.org/officeDocument/2006/relationships" xmlns:p="http://schemas.openxmlformats.org/presentationml/2006/main">
+  <p:cSld>
+    <p:spTree>
+      <p:nvGrpSpPr>
+        <p:cNvPr id="1" name="">
+          <a:extLst>
+            <a:ext uri="{FF2B5EF4-FFF2-40B4-BE49-F238E27FC236}">
+              <a16:creationId xmlns:a16="http://schemas.microsoft.com/office/drawing/2014/main" id="{8AE78885-FBCE-A548-4971-78BAF508191C}"/>
+            </a:ext>
+          </a:extLst>
+        </p:cNvPr>
+        <p:cNvGrpSpPr/>
+        <p:nvPr/>
+      </p:nvGrpSpPr>
+      <p:grpSpPr>
+        <a:xfrm>
+          <a:off x="0" y="0"/>
+          <a:ext cx="0" cy="0"/>
+          <a:chOff x="0" y="0"/>
+          <a:chExt cx="0" cy="0"/>
+        </a:xfrm>
+      </p:grpSpPr>
+      <p:sp>
+        <p:nvSpPr>
+          <p:cNvPr id="2" name="TextBox 1">
+            <a:extLst>
+              <a:ext uri="{FF2B5EF4-FFF2-40B4-BE49-F238E27FC236}">
+                <a16:creationId xmlns:a16="http://schemas.microsoft.com/office/drawing/2014/main" id="{E45389C4-356D-D3DE-419E-D538D7AB3A8C}"/>
+              </a:ext>
+            </a:extLst>
+          </p:cNvPr>
+          <p:cNvSpPr txBox="1"/>
+          <p:nvPr/>
+        </p:nvSpPr>
+        <p:spPr>
+          <a:xfrm>
+            <a:off x="171450" y="0"/>
+            <a:ext cx="10877550" cy="739754"/>
+          </a:xfrm>
+          <a:prstGeom prst="rect">
+            <a:avLst/>
+          </a:prstGeom>
+          <a:noFill/>
+        </p:spPr>
+        <p:txBody>
+          <a:bodyPr wrap="square" rtlCol="0">
+            <a:spAutoFit/>
+          </a:bodyPr>
+          <a:lstStyle/>
+          <a:p>
+            <a:pPr>
+              <a:lnSpc>
+                <a:spcPct val="150000"/>
+              </a:lnSpc>
+            </a:pPr>
+            <a:r>
+              <a:rPr lang="en-US" sz="3200" b="1" dirty="0">
+                <a:latin typeface="Arial" panose="020B0604020202020204" pitchFamily="34" charset="0"/>
+                <a:cs typeface="Arial" panose="020B0604020202020204" pitchFamily="34" charset="0"/>
+              </a:rPr>
+              <a:t>Experimental Design, Statistics, and Visualizations</a:t>
+            </a:r>
+          </a:p>
+        </p:txBody>
+      </p:sp>
+      <p:sp>
+        <p:nvSpPr>
+          <p:cNvPr id="8" name="Slide Number Placeholder 7">
+            <a:extLst>
+              <a:ext uri="{FF2B5EF4-FFF2-40B4-BE49-F238E27FC236}">
+                <a16:creationId xmlns:a16="http://schemas.microsoft.com/office/drawing/2014/main" id="{6FB724B1-5711-A542-3F45-3BE170545E78}"/>
+              </a:ext>
+            </a:extLst>
+          </p:cNvPr>
+          <p:cNvSpPr>
+            <a:spLocks noGrp="1"/>
+          </p:cNvSpPr>
+          <p:nvPr>
+            <p:ph type="sldNum" sz="quarter" idx="12"/>
+          </p:nvPr>
+        </p:nvSpPr>
+        <p:spPr>
+          <a:xfrm>
+            <a:off x="9263062" y="6337300"/>
+            <a:ext cx="2743200" cy="365125"/>
+          </a:xfrm>
+        </p:spPr>
+        <p:txBody>
+          <a:bodyPr/>
+          <a:lstStyle/>
+          <a:p>
+            <a:fld id="{A7C13B74-2CD1-074C-84D2-FF26F00FE39E}" type="slidenum">
+              <a:rPr lang="en-US" sz="1400" smtClean="0">
+                <a:solidFill>
+                  <a:schemeClr val="tx1"/>
+                </a:solidFill>
+              </a:rPr>
+              <a:t>3</a:t>
+            </a:fld>
+            <a:endParaRPr lang="en-US" sz="1400" dirty="0">
+              <a:solidFill>
+                <a:schemeClr val="tx1"/>
+              </a:solidFill>
+            </a:endParaRPr>
+          </a:p>
+        </p:txBody>
+      </p:sp>
+      <p:sp>
+        <p:nvSpPr>
+          <p:cNvPr id="3" name="TextBox 2">
+            <a:extLst>
+              <a:ext uri="{FF2B5EF4-FFF2-40B4-BE49-F238E27FC236}">
+                <a16:creationId xmlns:a16="http://schemas.microsoft.com/office/drawing/2014/main" id="{5ABD06A2-F77B-352E-3D38-CEB1C3B89D98}"/>
+              </a:ext>
+            </a:extLst>
+          </p:cNvPr>
+          <p:cNvSpPr txBox="1"/>
+          <p:nvPr/>
+        </p:nvSpPr>
+        <p:spPr>
+          <a:xfrm>
+            <a:off x="657224" y="1099644"/>
+            <a:ext cx="11534775" cy="1045223"/>
+          </a:xfrm>
+          <a:prstGeom prst="rect">
+            <a:avLst/>
+          </a:prstGeom>
+          <a:noFill/>
+        </p:spPr>
+        <p:txBody>
+          <a:bodyPr wrap="square" rtlCol="0">
+            <a:spAutoFit/>
+          </a:bodyPr>
+          <a:lstStyle/>
+          <a:p>
+            <a:pPr marL="457200" indent="-457200">
+              <a:lnSpc>
+                <a:spcPct val="150000"/>
+              </a:lnSpc>
+              <a:buFont typeface="+mj-lt"/>
+              <a:buAutoNum type="arabicPeriod"/>
+            </a:pPr>
+            <a:r>
+              <a:rPr lang="en-US" sz="2200" dirty="0">
+                <a:latin typeface="Arial" panose="020B0604020202020204" pitchFamily="34" charset="0"/>
+                <a:cs typeface="Arial" panose="020B0604020202020204" pitchFamily="34" charset="0"/>
+              </a:rPr>
+              <a:t>You can have a good question, and you also need a good experimental design</a:t>
+            </a:r>
+            <a:br>
+              <a:rPr lang="en-US" sz="2200" dirty="0">
+                <a:latin typeface="Arial" panose="020B0604020202020204" pitchFamily="34" charset="0"/>
+                <a:cs typeface="Arial" panose="020B0604020202020204" pitchFamily="34" charset="0"/>
+              </a:rPr>
+            </a:br>
+            <a:endParaRPr lang="en-US" sz="2200" dirty="0">
+              <a:latin typeface="Arial" panose="020B0604020202020204" pitchFamily="34" charset="0"/>
+              <a:cs typeface="Arial" panose="020B0604020202020204" pitchFamily="34" charset="0"/>
+            </a:endParaRPr>
+          </a:p>
+        </p:txBody>
+      </p:sp>
+    </p:spTree>
+    <p:extLst>
+      <p:ext uri="{BB962C8B-B14F-4D97-AF65-F5344CB8AC3E}">
+        <p14:creationId xmlns:p14="http://schemas.microsoft.com/office/powerpoint/2010/main" val="1744705141"/>
+      </p:ext>
+    </p:extLst>
+  </p:cSld>
+  <p:clrMapOvr>
+    <a:masterClrMapping/>
+  </p:clrMapOvr>
+</p:sld>
+</file>
+
+<file path=ppt/slides/slide5.xml><?xml version="1.0" encoding="utf-8"?>
+<p:sld xmlns:a="http://schemas.openxmlformats.org/drawingml/2006/main" xmlns:r="http://schemas.openxmlformats.org/officeDocument/2006/relationships" xmlns:p="http://schemas.openxmlformats.org/presentationml/2006/main">
+  <p:cSld>
+    <p:spTree>
+      <p:nvGrpSpPr>
+        <p:cNvPr id="1" name="">
+          <a:extLst>
+            <a:ext uri="{FF2B5EF4-FFF2-40B4-BE49-F238E27FC236}">
+              <a16:creationId xmlns:a16="http://schemas.microsoft.com/office/drawing/2014/main" id="{4D2ED574-4245-E47B-6A64-824C7E7ADDC6}"/>
+            </a:ext>
+          </a:extLst>
+        </p:cNvPr>
+        <p:cNvGrpSpPr/>
+        <p:nvPr/>
+      </p:nvGrpSpPr>
+      <p:grpSpPr>
+        <a:xfrm>
+          <a:off x="0" y="0"/>
+          <a:ext cx="0" cy="0"/>
+          <a:chOff x="0" y="0"/>
+          <a:chExt cx="0" cy="0"/>
+        </a:xfrm>
+      </p:grpSpPr>
+      <p:sp>
+        <p:nvSpPr>
+          <p:cNvPr id="2" name="TextBox 1">
+            <a:extLst>
+              <a:ext uri="{FF2B5EF4-FFF2-40B4-BE49-F238E27FC236}">
+                <a16:creationId xmlns:a16="http://schemas.microsoft.com/office/drawing/2014/main" id="{A2EA2798-BF0C-5C1D-B978-EC167EBE917B}"/>
+              </a:ext>
+            </a:extLst>
+          </p:cNvPr>
+          <p:cNvSpPr txBox="1"/>
+          <p:nvPr/>
+        </p:nvSpPr>
+        <p:spPr>
+          <a:xfrm>
+            <a:off x="171450" y="0"/>
+            <a:ext cx="10877550" cy="739754"/>
+          </a:xfrm>
+          <a:prstGeom prst="rect">
+            <a:avLst/>
+          </a:prstGeom>
+          <a:noFill/>
+        </p:spPr>
+        <p:txBody>
+          <a:bodyPr wrap="square" rtlCol="0">
+            <a:spAutoFit/>
+          </a:bodyPr>
+          <a:lstStyle/>
+          <a:p>
+            <a:pPr>
+              <a:lnSpc>
+                <a:spcPct val="150000"/>
+              </a:lnSpc>
+            </a:pPr>
+            <a:r>
+              <a:rPr lang="en-US" sz="3200" b="1" dirty="0">
+                <a:latin typeface="Arial" panose="020B0604020202020204" pitchFamily="34" charset="0"/>
+                <a:cs typeface="Arial" panose="020B0604020202020204" pitchFamily="34" charset="0"/>
+              </a:rPr>
+              <a:t>Experimental Design, Statistics, and Visualizations</a:t>
+            </a:r>
+          </a:p>
+        </p:txBody>
+      </p:sp>
+      <p:sp>
+        <p:nvSpPr>
+          <p:cNvPr id="8" name="Slide Number Placeholder 7">
+            <a:extLst>
+              <a:ext uri="{FF2B5EF4-FFF2-40B4-BE49-F238E27FC236}">
+                <a16:creationId xmlns:a16="http://schemas.microsoft.com/office/drawing/2014/main" id="{D2D3AB51-407F-78C8-638A-D203D2C87988}"/>
+              </a:ext>
+            </a:extLst>
+          </p:cNvPr>
+          <p:cNvSpPr>
+            <a:spLocks noGrp="1"/>
+          </p:cNvSpPr>
+          <p:nvPr>
+            <p:ph type="sldNum" sz="quarter" idx="12"/>
+          </p:nvPr>
+        </p:nvSpPr>
+        <p:spPr>
+          <a:xfrm>
+            <a:off x="9263062" y="6337300"/>
+            <a:ext cx="2743200" cy="365125"/>
+          </a:xfrm>
+        </p:spPr>
+        <p:txBody>
+          <a:bodyPr/>
+          <a:lstStyle/>
+          <a:p>
+            <a:fld id="{A7C13B74-2CD1-074C-84D2-FF26F00FE39E}" type="slidenum">
+              <a:rPr lang="en-US" sz="1400" smtClean="0">
+                <a:solidFill>
+                  <a:schemeClr val="tx1"/>
+                </a:solidFill>
+              </a:rPr>
+              <a:t>4</a:t>
+            </a:fld>
+            <a:endParaRPr lang="en-US" sz="1400" dirty="0">
+              <a:solidFill>
+                <a:schemeClr val="tx1"/>
+              </a:solidFill>
+            </a:endParaRPr>
+          </a:p>
+        </p:txBody>
+      </p:sp>
+      <p:sp>
+        <p:nvSpPr>
+          <p:cNvPr id="3" name="TextBox 2">
+            <a:extLst>
+              <a:ext uri="{FF2B5EF4-FFF2-40B4-BE49-F238E27FC236}">
+                <a16:creationId xmlns:a16="http://schemas.microsoft.com/office/drawing/2014/main" id="{6CB29C4F-00DE-C32D-EAEE-E98C76DEAF77}"/>
+              </a:ext>
+            </a:extLst>
+          </p:cNvPr>
+          <p:cNvSpPr txBox="1"/>
+          <p:nvPr/>
+        </p:nvSpPr>
+        <p:spPr>
+          <a:xfrm>
+            <a:off x="657224" y="1099644"/>
+            <a:ext cx="11534775" cy="2568717"/>
+          </a:xfrm>
+          <a:prstGeom prst="rect">
+            <a:avLst/>
+          </a:prstGeom>
+          <a:noFill/>
+        </p:spPr>
+        <p:txBody>
+          <a:bodyPr wrap="square" rtlCol="0">
+            <a:spAutoFit/>
+          </a:bodyPr>
+          <a:lstStyle/>
+          <a:p>
+            <a:pPr marL="457200" indent="-457200">
+              <a:lnSpc>
+                <a:spcPct val="150000"/>
+              </a:lnSpc>
+              <a:buFont typeface="+mj-lt"/>
+              <a:buAutoNum type="arabicPeriod"/>
+            </a:pPr>
+            <a:r>
+              <a:rPr lang="en-US" sz="2200" dirty="0">
+                <a:latin typeface="Arial" panose="020B0604020202020204" pitchFamily="34" charset="0"/>
+                <a:cs typeface="Arial" panose="020B0604020202020204" pitchFamily="34" charset="0"/>
+              </a:rPr>
+              <a:t>You can have a good question, and you also </a:t>
+            </a:r>
+            <a:r>
+              <a:rPr lang="en-US" sz="2200" u="sng" dirty="0">
+                <a:latin typeface="Arial" panose="020B0604020202020204" pitchFamily="34" charset="0"/>
+                <a:cs typeface="Arial" panose="020B0604020202020204" pitchFamily="34" charset="0"/>
+              </a:rPr>
+              <a:t>need</a:t>
+            </a:r>
+            <a:r>
+              <a:rPr lang="en-US" sz="2200" dirty="0">
+                <a:latin typeface="Arial" panose="020B0604020202020204" pitchFamily="34" charset="0"/>
+                <a:cs typeface="Arial" panose="020B0604020202020204" pitchFamily="34" charset="0"/>
+              </a:rPr>
+              <a:t> a good experimental design</a:t>
+            </a:r>
+            <a:br>
+              <a:rPr lang="en-US" sz="2200" dirty="0">
+                <a:latin typeface="Arial" panose="020B0604020202020204" pitchFamily="34" charset="0"/>
+                <a:cs typeface="Arial" panose="020B0604020202020204" pitchFamily="34" charset="0"/>
+              </a:rPr>
+            </a:br>
+            <a:r>
+              <a:rPr lang="en-US" sz="2200" dirty="0">
+                <a:highlight>
+                  <a:srgbClr val="00FFFF"/>
+                </a:highlight>
+                <a:latin typeface="Arial" panose="020B0604020202020204" pitchFamily="34" charset="0"/>
+                <a:cs typeface="Arial" panose="020B0604020202020204" pitchFamily="34" charset="0"/>
+              </a:rPr>
+              <a:t>Does the venom microbial community differ across the gland of </a:t>
+            </a:r>
+            <a:r>
+              <a:rPr lang="en-US" sz="2200" i="1" dirty="0">
+                <a:highlight>
+                  <a:srgbClr val="00FFFF"/>
+                </a:highlight>
+                <a:latin typeface="Arial" panose="020B0604020202020204" pitchFamily="34" charset="0"/>
+                <a:cs typeface="Arial" panose="020B0604020202020204" pitchFamily="34" charset="0"/>
+              </a:rPr>
+              <a:t>C. </a:t>
+            </a:r>
+            <a:r>
+              <a:rPr lang="en-US" sz="2200" i="1" dirty="0" err="1">
+                <a:highlight>
+                  <a:srgbClr val="00FFFF"/>
+                </a:highlight>
+                <a:latin typeface="Arial" panose="020B0604020202020204" pitchFamily="34" charset="0"/>
+                <a:cs typeface="Arial" panose="020B0604020202020204" pitchFamily="34" charset="0"/>
+              </a:rPr>
+              <a:t>californiconus</a:t>
+            </a:r>
+            <a:r>
+              <a:rPr lang="en-US" sz="2200" dirty="0">
+                <a:highlight>
+                  <a:srgbClr val="00FFFF"/>
+                </a:highlight>
+                <a:latin typeface="Arial" panose="020B0604020202020204" pitchFamily="34" charset="0"/>
+                <a:cs typeface="Arial" panose="020B0604020202020204" pitchFamily="34" charset="0"/>
+              </a:rPr>
+              <a:t>?</a:t>
+            </a:r>
+            <a:br>
+              <a:rPr lang="en-US" sz="2200" dirty="0">
+                <a:highlight>
+                  <a:srgbClr val="00FFFF"/>
+                </a:highlight>
+                <a:latin typeface="Arial" panose="020B0604020202020204" pitchFamily="34" charset="0"/>
+                <a:cs typeface="Arial" panose="020B0604020202020204" pitchFamily="34" charset="0"/>
+              </a:rPr>
+            </a:br>
+            <a:r>
+              <a:rPr lang="en-US" sz="2200" dirty="0">
+                <a:latin typeface="Arial" panose="020B0604020202020204" pitchFamily="34" charset="0"/>
+                <a:cs typeface="Arial" panose="020B0604020202020204" pitchFamily="34" charset="0"/>
+              </a:rPr>
+              <a:t>	Is the experimental design sufficient for answering this question? </a:t>
+            </a:r>
+            <a:br>
+              <a:rPr lang="en-US" sz="2200" dirty="0">
+                <a:latin typeface="Arial" panose="020B0604020202020204" pitchFamily="34" charset="0"/>
+                <a:cs typeface="Arial" panose="020B0604020202020204" pitchFamily="34" charset="0"/>
+              </a:rPr>
+            </a:br>
+            <a:r>
+              <a:rPr lang="en-US" sz="2200" dirty="0">
+                <a:latin typeface="Arial" panose="020B0604020202020204" pitchFamily="34" charset="0"/>
+                <a:cs typeface="Arial" panose="020B0604020202020204" pitchFamily="34" charset="0"/>
+              </a:rPr>
+              <a:t> 		If not, what needs to be included? Controls, n, assumptions, </a:t>
+            </a:r>
+            <a:r>
+              <a:rPr lang="en-US" sz="2200" dirty="0" err="1">
+                <a:latin typeface="Arial" panose="020B0604020202020204" pitchFamily="34" charset="0"/>
+                <a:cs typeface="Arial" panose="020B0604020202020204" pitchFamily="34" charset="0"/>
+              </a:rPr>
+              <a:t>etc</a:t>
+            </a:r>
+            <a:endParaRPr lang="en-US" sz="2200" dirty="0">
+              <a:latin typeface="Arial" panose="020B0604020202020204" pitchFamily="34" charset="0"/>
+              <a:cs typeface="Arial" panose="020B0604020202020204" pitchFamily="34" charset="0"/>
+            </a:endParaRPr>
+          </a:p>
+          <a:p>
+            <a:pPr>
+              <a:lnSpc>
+                <a:spcPct val="150000"/>
+              </a:lnSpc>
+            </a:pPr>
+            <a:endParaRPr lang="en-US" sz="2200" dirty="0">
+              <a:latin typeface="Arial" panose="020B0604020202020204" pitchFamily="34" charset="0"/>
+              <a:cs typeface="Arial" panose="020B0604020202020204" pitchFamily="34" charset="0"/>
+            </a:endParaRPr>
+          </a:p>
+        </p:txBody>
+      </p:sp>
+    </p:spTree>
+    <p:extLst>
+      <p:ext uri="{BB962C8B-B14F-4D97-AF65-F5344CB8AC3E}">
+        <p14:creationId xmlns:p14="http://schemas.microsoft.com/office/powerpoint/2010/main" val="2364240087"/>
+      </p:ext>
+    </p:extLst>
+  </p:cSld>
+  <p:clrMapOvr>
+    <a:masterClrMapping/>
+  </p:clrMapOvr>
+</p:sld>
+</file>
+
+<file path=ppt/slides/slide6.xml><?xml version="1.0" encoding="utf-8"?>
+<p:sld xmlns:a="http://schemas.openxmlformats.org/drawingml/2006/main" xmlns:r="http://schemas.openxmlformats.org/officeDocument/2006/relationships" xmlns:p="http://schemas.openxmlformats.org/presentationml/2006/main">
+  <p:cSld>
+    <p:spTree>
+      <p:nvGrpSpPr>
+        <p:cNvPr id="1" name="">
+          <a:extLst>
+            <a:ext uri="{FF2B5EF4-FFF2-40B4-BE49-F238E27FC236}">
+              <a16:creationId xmlns:a16="http://schemas.microsoft.com/office/drawing/2014/main" id="{5B112624-82DC-B459-1BF0-E52ED156E98C}"/>
+            </a:ext>
+          </a:extLst>
+        </p:cNvPr>
+        <p:cNvGrpSpPr/>
+        <p:nvPr/>
+      </p:nvGrpSpPr>
+      <p:grpSpPr>
+        <a:xfrm>
+          <a:off x="0" y="0"/>
+          <a:ext cx="0" cy="0"/>
+          <a:chOff x="0" y="0"/>
+          <a:chExt cx="0" cy="0"/>
+        </a:xfrm>
+      </p:grpSpPr>
+      <p:sp>
+        <p:nvSpPr>
+          <p:cNvPr id="2" name="TextBox 1">
+            <a:extLst>
+              <a:ext uri="{FF2B5EF4-FFF2-40B4-BE49-F238E27FC236}">
+                <a16:creationId xmlns:a16="http://schemas.microsoft.com/office/drawing/2014/main" id="{88D62610-CA43-801C-1429-0BD02975689E}"/>
+              </a:ext>
+            </a:extLst>
+          </p:cNvPr>
+          <p:cNvSpPr txBox="1"/>
+          <p:nvPr/>
+        </p:nvSpPr>
+        <p:spPr>
+          <a:xfrm>
+            <a:off x="171450" y="0"/>
+            <a:ext cx="10877550" cy="739754"/>
+          </a:xfrm>
+          <a:prstGeom prst="rect">
+            <a:avLst/>
+          </a:prstGeom>
+          <a:noFill/>
+        </p:spPr>
+        <p:txBody>
+          <a:bodyPr wrap="square" rtlCol="0">
+            <a:spAutoFit/>
+          </a:bodyPr>
+          <a:lstStyle/>
+          <a:p>
+            <a:pPr>
+              <a:lnSpc>
+                <a:spcPct val="150000"/>
+              </a:lnSpc>
+            </a:pPr>
+            <a:r>
+              <a:rPr lang="en-US" sz="3200" b="1" dirty="0">
+                <a:latin typeface="Arial" panose="020B0604020202020204" pitchFamily="34" charset="0"/>
+                <a:cs typeface="Arial" panose="020B0604020202020204" pitchFamily="34" charset="0"/>
+              </a:rPr>
+              <a:t>Experimental Design, Statistics, and Visualizations</a:t>
+            </a:r>
+          </a:p>
+        </p:txBody>
+      </p:sp>
+      <p:sp>
+        <p:nvSpPr>
+          <p:cNvPr id="8" name="Slide Number Placeholder 7">
+            <a:extLst>
+              <a:ext uri="{FF2B5EF4-FFF2-40B4-BE49-F238E27FC236}">
+                <a16:creationId xmlns:a16="http://schemas.microsoft.com/office/drawing/2014/main" id="{CDF4345B-8988-C416-E5D2-D4FAE062DAAD}"/>
+              </a:ext>
+            </a:extLst>
+          </p:cNvPr>
+          <p:cNvSpPr>
+            <a:spLocks noGrp="1"/>
+          </p:cNvSpPr>
+          <p:nvPr>
+            <p:ph type="sldNum" sz="quarter" idx="12"/>
+          </p:nvPr>
+        </p:nvSpPr>
+        <p:spPr>
+          <a:xfrm>
+            <a:off x="9263062" y="6337300"/>
+            <a:ext cx="2743200" cy="365125"/>
+          </a:xfrm>
+        </p:spPr>
+        <p:txBody>
+          <a:bodyPr/>
+          <a:lstStyle/>
+          <a:p>
+            <a:fld id="{A7C13B74-2CD1-074C-84D2-FF26F00FE39E}" type="slidenum">
+              <a:rPr lang="en-US" sz="1400" smtClean="0">
+                <a:solidFill>
+                  <a:schemeClr val="tx1"/>
+                </a:solidFill>
+              </a:rPr>
+              <a:t>5</a:t>
+            </a:fld>
+            <a:endParaRPr lang="en-US" sz="1400" dirty="0">
+              <a:solidFill>
+                <a:schemeClr val="tx1"/>
+              </a:solidFill>
+            </a:endParaRPr>
+          </a:p>
+        </p:txBody>
+      </p:sp>
+      <p:sp>
+        <p:nvSpPr>
+          <p:cNvPr id="3" name="TextBox 2">
+            <a:extLst>
+              <a:ext uri="{FF2B5EF4-FFF2-40B4-BE49-F238E27FC236}">
+                <a16:creationId xmlns:a16="http://schemas.microsoft.com/office/drawing/2014/main" id="{509F5D5D-B043-9888-D1BF-AB9F7C664CE3}"/>
+              </a:ext>
+            </a:extLst>
+          </p:cNvPr>
+          <p:cNvSpPr txBox="1"/>
+          <p:nvPr/>
+        </p:nvSpPr>
+        <p:spPr>
+          <a:xfrm>
+            <a:off x="657224" y="1099644"/>
+            <a:ext cx="11534775" cy="3584379"/>
+          </a:xfrm>
+          <a:prstGeom prst="rect">
+            <a:avLst/>
+          </a:prstGeom>
+          <a:noFill/>
+        </p:spPr>
+        <p:txBody>
+          <a:bodyPr wrap="square" rtlCol="0">
+            <a:spAutoFit/>
+          </a:bodyPr>
+          <a:lstStyle/>
+          <a:p>
+            <a:pPr marL="457200" indent="-457200">
+              <a:lnSpc>
+                <a:spcPct val="150000"/>
+              </a:lnSpc>
+              <a:buFont typeface="+mj-lt"/>
+              <a:buAutoNum type="arabicPeriod"/>
+            </a:pPr>
+            <a:r>
+              <a:rPr lang="en-US" sz="2200" dirty="0">
+                <a:latin typeface="Arial" panose="020B0604020202020204" pitchFamily="34" charset="0"/>
+                <a:cs typeface="Arial" panose="020B0604020202020204" pitchFamily="34" charset="0"/>
+              </a:rPr>
+              <a:t>You can have a good question, and you also </a:t>
+            </a:r>
+            <a:r>
+              <a:rPr lang="en-US" sz="2200" u="sng" dirty="0">
+                <a:latin typeface="Arial" panose="020B0604020202020204" pitchFamily="34" charset="0"/>
+                <a:cs typeface="Arial" panose="020B0604020202020204" pitchFamily="34" charset="0"/>
+              </a:rPr>
+              <a:t>need</a:t>
+            </a:r>
+            <a:r>
+              <a:rPr lang="en-US" sz="2200" dirty="0">
+                <a:latin typeface="Arial" panose="020B0604020202020204" pitchFamily="34" charset="0"/>
+                <a:cs typeface="Arial" panose="020B0604020202020204" pitchFamily="34" charset="0"/>
+              </a:rPr>
+              <a:t> a good experimental design</a:t>
+            </a:r>
+            <a:br>
+              <a:rPr lang="en-US" sz="2200" dirty="0">
+                <a:latin typeface="Arial" panose="020B0604020202020204" pitchFamily="34" charset="0"/>
+                <a:cs typeface="Arial" panose="020B0604020202020204" pitchFamily="34" charset="0"/>
+              </a:rPr>
+            </a:br>
+            <a:r>
+              <a:rPr lang="en-US" sz="2200" dirty="0">
+                <a:highlight>
+                  <a:srgbClr val="00FFFF"/>
+                </a:highlight>
+                <a:latin typeface="Arial" panose="020B0604020202020204" pitchFamily="34" charset="0"/>
+                <a:cs typeface="Arial" panose="020B0604020202020204" pitchFamily="34" charset="0"/>
+              </a:rPr>
+              <a:t>Does the venom microbial community differ across the gland of </a:t>
+            </a:r>
+            <a:r>
+              <a:rPr lang="en-US" sz="2200" i="1" dirty="0">
+                <a:highlight>
+                  <a:srgbClr val="00FFFF"/>
+                </a:highlight>
+                <a:latin typeface="Arial" panose="020B0604020202020204" pitchFamily="34" charset="0"/>
+                <a:cs typeface="Arial" panose="020B0604020202020204" pitchFamily="34" charset="0"/>
+              </a:rPr>
+              <a:t>C. </a:t>
+            </a:r>
+            <a:r>
+              <a:rPr lang="en-US" sz="2200" i="1" dirty="0" err="1">
+                <a:highlight>
+                  <a:srgbClr val="00FFFF"/>
+                </a:highlight>
+                <a:latin typeface="Arial" panose="020B0604020202020204" pitchFamily="34" charset="0"/>
+                <a:cs typeface="Arial" panose="020B0604020202020204" pitchFamily="34" charset="0"/>
+              </a:rPr>
+              <a:t>californiconus</a:t>
+            </a:r>
+            <a:r>
+              <a:rPr lang="en-US" sz="2200" dirty="0">
+                <a:highlight>
+                  <a:srgbClr val="00FFFF"/>
+                </a:highlight>
+                <a:latin typeface="Arial" panose="020B0604020202020204" pitchFamily="34" charset="0"/>
+                <a:cs typeface="Arial" panose="020B0604020202020204" pitchFamily="34" charset="0"/>
+              </a:rPr>
+              <a:t>?</a:t>
+            </a:r>
+            <a:br>
+              <a:rPr lang="en-US" sz="2200" dirty="0">
+                <a:highlight>
+                  <a:srgbClr val="00FFFF"/>
+                </a:highlight>
+                <a:latin typeface="Arial" panose="020B0604020202020204" pitchFamily="34" charset="0"/>
+                <a:cs typeface="Arial" panose="020B0604020202020204" pitchFamily="34" charset="0"/>
+              </a:rPr>
+            </a:br>
+            <a:r>
+              <a:rPr lang="en-US" sz="2200" dirty="0">
+                <a:latin typeface="Arial" panose="020B0604020202020204" pitchFamily="34" charset="0"/>
+                <a:cs typeface="Arial" panose="020B0604020202020204" pitchFamily="34" charset="0"/>
+              </a:rPr>
+              <a:t>	Is the experimental design sufficient for answering this question? </a:t>
+            </a:r>
+            <a:br>
+              <a:rPr lang="en-US" sz="2200" dirty="0">
+                <a:latin typeface="Arial" panose="020B0604020202020204" pitchFamily="34" charset="0"/>
+                <a:cs typeface="Arial" panose="020B0604020202020204" pitchFamily="34" charset="0"/>
+              </a:rPr>
+            </a:br>
+            <a:r>
+              <a:rPr lang="en-US" sz="2200" dirty="0">
+                <a:latin typeface="Arial" panose="020B0604020202020204" pitchFamily="34" charset="0"/>
+                <a:cs typeface="Arial" panose="020B0604020202020204" pitchFamily="34" charset="0"/>
+              </a:rPr>
+              <a:t> 		If not, what needs to be included? Controls, n, assumptions, </a:t>
+            </a:r>
+            <a:r>
+              <a:rPr lang="en-US" sz="2200" dirty="0" err="1">
+                <a:latin typeface="Arial" panose="020B0604020202020204" pitchFamily="34" charset="0"/>
+                <a:cs typeface="Arial" panose="020B0604020202020204" pitchFamily="34" charset="0"/>
+              </a:rPr>
+              <a:t>etc</a:t>
+            </a:r>
+            <a:endParaRPr lang="en-US" sz="2200" dirty="0">
+              <a:latin typeface="Arial" panose="020B0604020202020204" pitchFamily="34" charset="0"/>
+              <a:cs typeface="Arial" panose="020B0604020202020204" pitchFamily="34" charset="0"/>
+            </a:endParaRPr>
+          </a:p>
+          <a:p>
+            <a:pPr marL="457200" indent="-457200">
+              <a:lnSpc>
+                <a:spcPct val="150000"/>
+              </a:lnSpc>
+              <a:buFont typeface="+mj-lt"/>
+              <a:buAutoNum type="arabicPeriod"/>
+            </a:pPr>
+            <a:endParaRPr lang="en-US" sz="2200" dirty="0">
+              <a:latin typeface="Arial" panose="020B0604020202020204" pitchFamily="34" charset="0"/>
+              <a:cs typeface="Arial" panose="020B0604020202020204" pitchFamily="34" charset="0"/>
+            </a:endParaRPr>
+          </a:p>
+          <a:p>
+            <a:pPr marL="457200" indent="-457200">
+              <a:lnSpc>
+                <a:spcPct val="150000"/>
+              </a:lnSpc>
+              <a:buFont typeface="+mj-lt"/>
+              <a:buAutoNum type="arabicPeriod"/>
+            </a:pPr>
+            <a:r>
+              <a:rPr lang="en-US" sz="2200" dirty="0">
+                <a:latin typeface="Arial" panose="020B0604020202020204" pitchFamily="34" charset="0"/>
+                <a:cs typeface="Arial" panose="020B0604020202020204" pitchFamily="34" charset="0"/>
+              </a:rPr>
+              <a:t>Just because you have a p-value, doesn’t mean it’s real (or that it means something)</a:t>
+            </a:r>
+            <a:br>
+              <a:rPr lang="en-US" sz="2200" dirty="0">
+                <a:latin typeface="Arial" panose="020B0604020202020204" pitchFamily="34" charset="0"/>
+                <a:cs typeface="Arial" panose="020B0604020202020204" pitchFamily="34" charset="0"/>
+              </a:rPr>
+            </a:br>
+            <a:endParaRPr lang="en-US" sz="2200" dirty="0">
+              <a:latin typeface="Arial" panose="020B0604020202020204" pitchFamily="34" charset="0"/>
+              <a:cs typeface="Arial" panose="020B0604020202020204" pitchFamily="34" charset="0"/>
+            </a:endParaRPr>
+          </a:p>
+        </p:txBody>
+      </p:sp>
+    </p:spTree>
+    <p:extLst>
+      <p:ext uri="{BB962C8B-B14F-4D97-AF65-F5344CB8AC3E}">
+        <p14:creationId xmlns:p14="http://schemas.microsoft.com/office/powerpoint/2010/main" val="3629887579"/>
+      </p:ext>
+    </p:extLst>
+  </p:cSld>
+  <p:clrMapOvr>
+    <a:masterClrMapping/>
+  </p:clrMapOvr>
+</p:sld>
+</file>
+
+<file path=ppt/slides/slide7.xml><?xml version="1.0" encoding="utf-8"?>
+<p:sld xmlns:a="http://schemas.openxmlformats.org/drawingml/2006/main" xmlns:r="http://schemas.openxmlformats.org/officeDocument/2006/relationships" xmlns:p="http://schemas.openxmlformats.org/presentationml/2006/main">
+  <p:cSld>
+    <p:spTree>
+      <p:nvGrpSpPr>
+        <p:cNvPr id="1" name="">
+          <a:extLst>
+            <a:ext uri="{FF2B5EF4-FFF2-40B4-BE49-F238E27FC236}">
+              <a16:creationId xmlns:a16="http://schemas.microsoft.com/office/drawing/2014/main" id="{E77A9C7F-381E-5DE4-1813-CF7A96E81B65}"/>
+            </a:ext>
+          </a:extLst>
+        </p:cNvPr>
+        <p:cNvGrpSpPr/>
+        <p:nvPr/>
+      </p:nvGrpSpPr>
+      <p:grpSpPr>
+        <a:xfrm>
+          <a:off x="0" y="0"/>
+          <a:ext cx="0" cy="0"/>
+          <a:chOff x="0" y="0"/>
+          <a:chExt cx="0" cy="0"/>
+        </a:xfrm>
+      </p:grpSpPr>
+      <p:sp>
+        <p:nvSpPr>
+          <p:cNvPr id="2" name="TextBox 1">
+            <a:extLst>
+              <a:ext uri="{FF2B5EF4-FFF2-40B4-BE49-F238E27FC236}">
+                <a16:creationId xmlns:a16="http://schemas.microsoft.com/office/drawing/2014/main" id="{42D71262-E9D0-EC5E-0CC4-CC5C26CC5DC3}"/>
+              </a:ext>
+            </a:extLst>
+          </p:cNvPr>
+          <p:cNvSpPr txBox="1"/>
+          <p:nvPr/>
+        </p:nvSpPr>
+        <p:spPr>
+          <a:xfrm>
+            <a:off x="171450" y="0"/>
+            <a:ext cx="10877550" cy="739754"/>
+          </a:xfrm>
+          <a:prstGeom prst="rect">
+            <a:avLst/>
+          </a:prstGeom>
+          <a:noFill/>
+        </p:spPr>
+        <p:txBody>
+          <a:bodyPr wrap="square" rtlCol="0">
+            <a:spAutoFit/>
+          </a:bodyPr>
+          <a:lstStyle/>
+          <a:p>
+            <a:pPr>
+              <a:lnSpc>
+                <a:spcPct val="150000"/>
+              </a:lnSpc>
+            </a:pPr>
+            <a:r>
+              <a:rPr lang="en-US" sz="3200" b="1" dirty="0">
+                <a:latin typeface="Arial" panose="020B0604020202020204" pitchFamily="34" charset="0"/>
+                <a:cs typeface="Arial" panose="020B0604020202020204" pitchFamily="34" charset="0"/>
+              </a:rPr>
+              <a:t>Experimental Design, Statistics, and Visualizations</a:t>
+            </a:r>
+          </a:p>
+        </p:txBody>
+      </p:sp>
+      <p:sp>
+        <p:nvSpPr>
+          <p:cNvPr id="8" name="Slide Number Placeholder 7">
+            <a:extLst>
+              <a:ext uri="{FF2B5EF4-FFF2-40B4-BE49-F238E27FC236}">
+                <a16:creationId xmlns:a16="http://schemas.microsoft.com/office/drawing/2014/main" id="{1D393352-7395-32FC-B554-08C3BB0DE569}"/>
+              </a:ext>
+            </a:extLst>
+          </p:cNvPr>
+          <p:cNvSpPr>
+            <a:spLocks noGrp="1"/>
+          </p:cNvSpPr>
+          <p:nvPr>
+            <p:ph type="sldNum" sz="quarter" idx="12"/>
+          </p:nvPr>
+        </p:nvSpPr>
+        <p:spPr>
+          <a:xfrm>
+            <a:off x="9263062" y="6337300"/>
+            <a:ext cx="2743200" cy="365125"/>
+          </a:xfrm>
+        </p:spPr>
+        <p:txBody>
+          <a:bodyPr/>
+          <a:lstStyle/>
+          <a:p>
+            <a:fld id="{A7C13B74-2CD1-074C-84D2-FF26F00FE39E}" type="slidenum">
+              <a:rPr lang="en-US" sz="1400" smtClean="0">
+                <a:solidFill>
+                  <a:schemeClr val="tx1"/>
+                </a:solidFill>
+              </a:rPr>
+              <a:t>6</a:t>
+            </a:fld>
+            <a:endParaRPr lang="en-US" sz="1400" dirty="0">
+              <a:solidFill>
+                <a:schemeClr val="tx1"/>
+              </a:solidFill>
+            </a:endParaRPr>
+          </a:p>
+        </p:txBody>
+      </p:sp>
+      <p:sp>
+        <p:nvSpPr>
+          <p:cNvPr id="3" name="TextBox 2">
+            <a:extLst>
+              <a:ext uri="{FF2B5EF4-FFF2-40B4-BE49-F238E27FC236}">
+                <a16:creationId xmlns:a16="http://schemas.microsoft.com/office/drawing/2014/main" id="{356431D3-1988-D34F-F26B-43065962BAAE}"/>
+              </a:ext>
+            </a:extLst>
+          </p:cNvPr>
+          <p:cNvSpPr txBox="1"/>
+          <p:nvPr/>
+        </p:nvSpPr>
+        <p:spPr>
+          <a:xfrm>
+            <a:off x="657224" y="1099644"/>
+            <a:ext cx="11534775" cy="4092211"/>
+          </a:xfrm>
+          <a:prstGeom prst="rect">
+            <a:avLst/>
+          </a:prstGeom>
+          <a:noFill/>
+        </p:spPr>
+        <p:txBody>
+          <a:bodyPr wrap="square" rtlCol="0">
+            <a:spAutoFit/>
+          </a:bodyPr>
+          <a:lstStyle/>
+          <a:p>
+            <a:pPr marL="457200" indent="-457200">
+              <a:lnSpc>
+                <a:spcPct val="150000"/>
+              </a:lnSpc>
+              <a:buFont typeface="+mj-lt"/>
+              <a:buAutoNum type="arabicPeriod"/>
+            </a:pPr>
+            <a:r>
+              <a:rPr lang="en-US" sz="2200" dirty="0">
+                <a:latin typeface="Arial" panose="020B0604020202020204" pitchFamily="34" charset="0"/>
+                <a:cs typeface="Arial" panose="020B0604020202020204" pitchFamily="34" charset="0"/>
+              </a:rPr>
+              <a:t>You can have a good question, and you also </a:t>
+            </a:r>
+            <a:r>
+              <a:rPr lang="en-US" sz="2200" u="sng" dirty="0">
+                <a:latin typeface="Arial" panose="020B0604020202020204" pitchFamily="34" charset="0"/>
+                <a:cs typeface="Arial" panose="020B0604020202020204" pitchFamily="34" charset="0"/>
+              </a:rPr>
+              <a:t>need</a:t>
+            </a:r>
+            <a:r>
+              <a:rPr lang="en-US" sz="2200" dirty="0">
+                <a:latin typeface="Arial" panose="020B0604020202020204" pitchFamily="34" charset="0"/>
+                <a:cs typeface="Arial" panose="020B0604020202020204" pitchFamily="34" charset="0"/>
+              </a:rPr>
+              <a:t> a good experimental design</a:t>
+            </a:r>
+            <a:br>
+              <a:rPr lang="en-US" sz="2200" dirty="0">
+                <a:latin typeface="Arial" panose="020B0604020202020204" pitchFamily="34" charset="0"/>
+                <a:cs typeface="Arial" panose="020B0604020202020204" pitchFamily="34" charset="0"/>
+              </a:rPr>
+            </a:br>
+            <a:r>
+              <a:rPr lang="en-US" sz="2200" dirty="0">
+                <a:highlight>
+                  <a:srgbClr val="00FFFF"/>
+                </a:highlight>
+                <a:latin typeface="Arial" panose="020B0604020202020204" pitchFamily="34" charset="0"/>
+                <a:cs typeface="Arial" panose="020B0604020202020204" pitchFamily="34" charset="0"/>
+              </a:rPr>
+              <a:t>Does the venom microbial community differ across the gland of </a:t>
+            </a:r>
+            <a:r>
+              <a:rPr lang="en-US" sz="2200" i="1" dirty="0">
+                <a:highlight>
+                  <a:srgbClr val="00FFFF"/>
+                </a:highlight>
+                <a:latin typeface="Arial" panose="020B0604020202020204" pitchFamily="34" charset="0"/>
+                <a:cs typeface="Arial" panose="020B0604020202020204" pitchFamily="34" charset="0"/>
+              </a:rPr>
+              <a:t>C. </a:t>
+            </a:r>
+            <a:r>
+              <a:rPr lang="en-US" sz="2200" i="1" dirty="0" err="1">
+                <a:highlight>
+                  <a:srgbClr val="00FFFF"/>
+                </a:highlight>
+                <a:latin typeface="Arial" panose="020B0604020202020204" pitchFamily="34" charset="0"/>
+                <a:cs typeface="Arial" panose="020B0604020202020204" pitchFamily="34" charset="0"/>
+              </a:rPr>
+              <a:t>californiconus</a:t>
+            </a:r>
+            <a:r>
+              <a:rPr lang="en-US" sz="2200" dirty="0">
+                <a:highlight>
+                  <a:srgbClr val="00FFFF"/>
+                </a:highlight>
+                <a:latin typeface="Arial" panose="020B0604020202020204" pitchFamily="34" charset="0"/>
+                <a:cs typeface="Arial" panose="020B0604020202020204" pitchFamily="34" charset="0"/>
+              </a:rPr>
+              <a:t>?</a:t>
+            </a:r>
+            <a:br>
+              <a:rPr lang="en-US" sz="2200" dirty="0">
+                <a:highlight>
+                  <a:srgbClr val="00FFFF"/>
+                </a:highlight>
+                <a:latin typeface="Arial" panose="020B0604020202020204" pitchFamily="34" charset="0"/>
+                <a:cs typeface="Arial" panose="020B0604020202020204" pitchFamily="34" charset="0"/>
+              </a:rPr>
+            </a:br>
+            <a:r>
+              <a:rPr lang="en-US" sz="2200" dirty="0">
+                <a:latin typeface="Arial" panose="020B0604020202020204" pitchFamily="34" charset="0"/>
+                <a:cs typeface="Arial" panose="020B0604020202020204" pitchFamily="34" charset="0"/>
+              </a:rPr>
+              <a:t>	Is the experimental design sufficient for answering this question? </a:t>
+            </a:r>
+            <a:br>
+              <a:rPr lang="en-US" sz="2200" dirty="0">
+                <a:latin typeface="Arial" panose="020B0604020202020204" pitchFamily="34" charset="0"/>
+                <a:cs typeface="Arial" panose="020B0604020202020204" pitchFamily="34" charset="0"/>
+              </a:rPr>
+            </a:br>
+            <a:r>
+              <a:rPr lang="en-US" sz="2200" dirty="0">
+                <a:latin typeface="Arial" panose="020B0604020202020204" pitchFamily="34" charset="0"/>
+                <a:cs typeface="Arial" panose="020B0604020202020204" pitchFamily="34" charset="0"/>
+              </a:rPr>
+              <a:t> 		If not, what needs to be included? Controls, n, assumptions, </a:t>
+            </a:r>
+            <a:r>
+              <a:rPr lang="en-US" sz="2200" dirty="0" err="1">
+                <a:latin typeface="Arial" panose="020B0604020202020204" pitchFamily="34" charset="0"/>
+                <a:cs typeface="Arial" panose="020B0604020202020204" pitchFamily="34" charset="0"/>
+              </a:rPr>
+              <a:t>etc</a:t>
+            </a:r>
+            <a:endParaRPr lang="en-US" sz="2200" dirty="0">
+              <a:latin typeface="Arial" panose="020B0604020202020204" pitchFamily="34" charset="0"/>
+              <a:cs typeface="Arial" panose="020B0604020202020204" pitchFamily="34" charset="0"/>
+            </a:endParaRPr>
+          </a:p>
+          <a:p>
+            <a:pPr marL="457200" indent="-457200">
+              <a:lnSpc>
+                <a:spcPct val="150000"/>
+              </a:lnSpc>
+              <a:buFont typeface="+mj-lt"/>
+              <a:buAutoNum type="arabicPeriod"/>
+            </a:pPr>
+            <a:endParaRPr lang="en-US" sz="2200" dirty="0">
+              <a:latin typeface="Arial" panose="020B0604020202020204" pitchFamily="34" charset="0"/>
+              <a:cs typeface="Arial" panose="020B0604020202020204" pitchFamily="34" charset="0"/>
+            </a:endParaRPr>
+          </a:p>
+          <a:p>
+            <a:pPr marL="457200" indent="-457200">
+              <a:lnSpc>
+                <a:spcPct val="150000"/>
+              </a:lnSpc>
+              <a:buFont typeface="+mj-lt"/>
+              <a:buAutoNum type="arabicPeriod"/>
+            </a:pPr>
+            <a:r>
+              <a:rPr lang="en-US" sz="2200" dirty="0">
+                <a:latin typeface="Arial" panose="020B0604020202020204" pitchFamily="34" charset="0"/>
+                <a:cs typeface="Arial" panose="020B0604020202020204" pitchFamily="34" charset="0"/>
+              </a:rPr>
+              <a:t>Just because you have a p-value, doesn’t mean it’s real (or that it means something)</a:t>
+            </a:r>
+            <a:br>
+              <a:rPr lang="en-US" sz="2200" dirty="0">
+                <a:latin typeface="Arial" panose="020B0604020202020204" pitchFamily="34" charset="0"/>
+                <a:cs typeface="Arial" panose="020B0604020202020204" pitchFamily="34" charset="0"/>
+              </a:rPr>
+            </a:br>
+            <a:r>
+              <a:rPr lang="en-US" sz="2200" dirty="0">
+                <a:highlight>
+                  <a:srgbClr val="00FFFF"/>
+                </a:highlight>
+                <a:latin typeface="Arial" panose="020B0604020202020204" pitchFamily="34" charset="0"/>
+                <a:cs typeface="Arial" panose="020B0604020202020204" pitchFamily="34" charset="0"/>
+              </a:rPr>
+              <a:t>How do trust the results we see? </a:t>
+            </a:r>
+            <a:br>
+              <a:rPr lang="en-US" sz="2200" dirty="0">
+                <a:latin typeface="Arial" panose="020B0604020202020204" pitchFamily="34" charset="0"/>
+                <a:cs typeface="Arial" panose="020B0604020202020204" pitchFamily="34" charset="0"/>
+              </a:rPr>
+            </a:br>
+            <a:r>
+              <a:rPr lang="en-US" sz="2200" dirty="0">
+                <a:latin typeface="Arial" panose="020B0604020202020204" pitchFamily="34" charset="0"/>
+                <a:cs typeface="Arial" panose="020B0604020202020204" pitchFamily="34" charset="0"/>
+              </a:rPr>
+              <a:t> 	Why statistics are important. And the difference of visuals vs results</a:t>
+            </a:r>
+          </a:p>
+        </p:txBody>
+      </p:sp>
+    </p:spTree>
+    <p:extLst>
+      <p:ext uri="{BB962C8B-B14F-4D97-AF65-F5344CB8AC3E}">
+        <p14:creationId xmlns:p14="http://schemas.microsoft.com/office/powerpoint/2010/main" val="1241989413"/>
+      </p:ext>
+    </p:extLst>
+  </p:cSld>
+  <p:clrMapOvr>
+    <a:masterClrMapping/>
+  </p:clrMapOvr>
+</p:sld>
+</file>
+
+<file path=ppt/slides/slide8.xml><?xml version="1.0" encoding="utf-8"?>
+<p:sld xmlns:a="http://schemas.openxmlformats.org/drawingml/2006/main" xmlns:r="http://schemas.openxmlformats.org/officeDocument/2006/relationships" xmlns:p="http://schemas.openxmlformats.org/presentationml/2006/main">
+  <p:cSld>
+    <p:spTree>
+      <p:nvGrpSpPr>
+        <p:cNvPr id="1" name="">
+          <a:extLst>
+            <a:ext uri="{FF2B5EF4-FFF2-40B4-BE49-F238E27FC236}">
+              <a16:creationId xmlns:a16="http://schemas.microsoft.com/office/drawing/2014/main" id="{6C089280-FC7A-B37C-9B5A-CCBE098A4D11}"/>
+            </a:ext>
+          </a:extLst>
+        </p:cNvPr>
+        <p:cNvGrpSpPr/>
+        <p:nvPr/>
+      </p:nvGrpSpPr>
+      <p:grpSpPr>
+        <a:xfrm>
+          <a:off x="0" y="0"/>
+          <a:ext cx="0" cy="0"/>
+          <a:chOff x="0" y="0"/>
+          <a:chExt cx="0" cy="0"/>
+        </a:xfrm>
+      </p:grpSpPr>
+      <p:pic>
+        <p:nvPicPr>
+          <p:cNvPr id="4" name="Picture 3" descr="A screenshot of a computer&#10;&#10;AI-generated content may be incorrect.">
+            <a:extLst>
+              <a:ext uri="{FF2B5EF4-FFF2-40B4-BE49-F238E27FC236}">
+                <a16:creationId xmlns:a16="http://schemas.microsoft.com/office/drawing/2014/main" id="{64A9BB0A-5C9C-FE60-95E5-30602024B05A}"/>
+              </a:ext>
+            </a:extLst>
+          </p:cNvPr>
+          <p:cNvPicPr>
+            <a:picLocks noChangeAspect="1"/>
+          </p:cNvPicPr>
+          <p:nvPr/>
+        </p:nvPicPr>
+        <p:blipFill>
+          <a:blip r:embed="rId3"/>
+          <a:srcRect l="965" t="23433" r="49381"/>
+          <a:stretch>
+            <a:fillRect/>
+          </a:stretch>
+        </p:blipFill>
+        <p:spPr>
+          <a:xfrm>
+            <a:off x="185738" y="844784"/>
+            <a:ext cx="5627517" cy="5583190"/>
+          </a:xfrm>
+          <a:prstGeom prst="rect">
+            <a:avLst/>
+          </a:prstGeom>
+        </p:spPr>
+      </p:pic>
+      <p:sp>
+        <p:nvSpPr>
+          <p:cNvPr id="6" name="TextBox 5">
+            <a:extLst>
+              <a:ext uri="{FF2B5EF4-FFF2-40B4-BE49-F238E27FC236}">
+                <a16:creationId xmlns:a16="http://schemas.microsoft.com/office/drawing/2014/main" id="{0126572D-17B9-062E-E813-16BE286C5850}"/>
+              </a:ext>
+            </a:extLst>
+          </p:cNvPr>
+          <p:cNvSpPr txBox="1"/>
+          <p:nvPr/>
+        </p:nvSpPr>
+        <p:spPr>
+          <a:xfrm>
+            <a:off x="1233354" y="6289866"/>
+            <a:ext cx="1416423" cy="307777"/>
+          </a:xfrm>
+          <a:prstGeom prst="rect">
+            <a:avLst/>
+          </a:prstGeom>
+          <a:solidFill>
+            <a:schemeClr val="bg1"/>
+          </a:solidFill>
+        </p:spPr>
+        <p:txBody>
+          <a:bodyPr wrap="square" rtlCol="0">
+            <a:spAutoFit/>
+          </a:bodyPr>
+          <a:lstStyle/>
+          <a:p>
+            <a:pPr algn="ctr"/>
+            <a:r>
+              <a:rPr lang="en-US" sz="1400" dirty="0" err="1">
+                <a:solidFill>
+                  <a:schemeClr val="accent5">
+                    <a:lumMod val="75000"/>
+                  </a:schemeClr>
+                </a:solidFill>
+                <a:latin typeface="Arial" panose="020B0604020202020204" pitchFamily="34" charset="0"/>
+                <a:cs typeface="Arial" panose="020B0604020202020204" pitchFamily="34" charset="0"/>
+              </a:rPr>
+              <a:t>Sample_Type</a:t>
+            </a:r>
+            <a:endParaRPr lang="en-US" sz="1400" dirty="0">
+              <a:solidFill>
+                <a:schemeClr val="accent5">
+                  <a:lumMod val="75000"/>
+                </a:schemeClr>
+              </a:solidFill>
+              <a:latin typeface="Arial" panose="020B0604020202020204" pitchFamily="34" charset="0"/>
+              <a:cs typeface="Arial" panose="020B0604020202020204" pitchFamily="34" charset="0"/>
+            </a:endParaRPr>
+          </a:p>
+        </p:txBody>
+      </p:sp>
+      <p:sp>
+        <p:nvSpPr>
+          <p:cNvPr id="9" name="Left Brace 8">
+            <a:extLst>
+              <a:ext uri="{FF2B5EF4-FFF2-40B4-BE49-F238E27FC236}">
+                <a16:creationId xmlns:a16="http://schemas.microsoft.com/office/drawing/2014/main" id="{E2C38033-E636-BCA6-8043-07ACC45D0495}"/>
+              </a:ext>
+            </a:extLst>
+          </p:cNvPr>
+          <p:cNvSpPr/>
+          <p:nvPr/>
+        </p:nvSpPr>
+        <p:spPr>
+          <a:xfrm rot="16200000">
+            <a:off x="1819613" y="4872603"/>
+            <a:ext cx="243906" cy="2776817"/>
+          </a:xfrm>
+          <a:prstGeom prst="leftBrace">
+            <a:avLst/>
+          </a:prstGeom>
+          <a:ln>
+            <a:solidFill>
+              <a:schemeClr val="accent5">
+                <a:lumMod val="75000"/>
+              </a:schemeClr>
+            </a:solidFill>
+          </a:ln>
+        </p:spPr>
+        <p:style>
+          <a:lnRef idx="2">
+            <a:schemeClr val="accent1"/>
+          </a:lnRef>
+          <a:fillRef idx="0">
+            <a:schemeClr val="accent1"/>
+          </a:fillRef>
+          <a:effectRef idx="1">
+            <a:schemeClr val="accent1"/>
+          </a:effectRef>
+          <a:fontRef idx="minor">
+            <a:schemeClr val="tx1"/>
+          </a:fontRef>
+        </p:style>
+        <p:txBody>
+          <a:bodyPr rtlCol="0" anchor="ctr"/>
+          <a:lstStyle/>
+          <a:p>
+            <a:pPr algn="ctr"/>
+            <a:endParaRPr lang="en-US"/>
+          </a:p>
+        </p:txBody>
+      </p:sp>
+      <p:cxnSp>
+        <p:nvCxnSpPr>
+          <p:cNvPr id="11" name="Straight Connector 10">
+            <a:extLst>
+              <a:ext uri="{FF2B5EF4-FFF2-40B4-BE49-F238E27FC236}">
+                <a16:creationId xmlns:a16="http://schemas.microsoft.com/office/drawing/2014/main" id="{95CE6784-57F3-C2F6-A6EE-16BAC14BCFC0}"/>
+              </a:ext>
+            </a:extLst>
+          </p:cNvPr>
+          <p:cNvCxnSpPr>
+            <a:cxnSpLocks/>
+          </p:cNvCxnSpPr>
+          <p:nvPr/>
+        </p:nvCxnSpPr>
+        <p:spPr>
+          <a:xfrm>
+            <a:off x="1233354" y="993502"/>
+            <a:ext cx="0" cy="4410635"/>
+          </a:xfrm>
+          <a:prstGeom prst="line">
+            <a:avLst/>
+          </a:prstGeom>
+          <a:ln w="28575"/>
+        </p:spPr>
+        <p:style>
+          <a:lnRef idx="2">
+            <a:schemeClr val="dk1"/>
+          </a:lnRef>
+          <a:fillRef idx="0">
+            <a:schemeClr val="dk1"/>
+          </a:fillRef>
+          <a:effectRef idx="1">
+            <a:schemeClr val="dk1"/>
+          </a:effectRef>
+          <a:fontRef idx="minor">
+            <a:schemeClr val="tx1"/>
+          </a:fontRef>
+        </p:style>
+      </p:cxnSp>
+      <p:cxnSp>
+        <p:nvCxnSpPr>
+          <p:cNvPr id="16" name="Straight Connector 15">
+            <a:extLst>
+              <a:ext uri="{FF2B5EF4-FFF2-40B4-BE49-F238E27FC236}">
+                <a16:creationId xmlns:a16="http://schemas.microsoft.com/office/drawing/2014/main" id="{2723D22F-768D-0268-524F-99D3FFA0B635}"/>
+              </a:ext>
+            </a:extLst>
+          </p:cNvPr>
+          <p:cNvCxnSpPr>
+            <a:cxnSpLocks/>
+          </p:cNvCxnSpPr>
+          <p:nvPr/>
+        </p:nvCxnSpPr>
+        <p:spPr>
+          <a:xfrm>
+            <a:off x="1372307" y="993502"/>
+            <a:ext cx="0" cy="4410635"/>
+          </a:xfrm>
+          <a:prstGeom prst="line">
+            <a:avLst/>
+          </a:prstGeom>
+          <a:ln w="28575"/>
+        </p:spPr>
+        <p:style>
+          <a:lnRef idx="2">
+            <a:schemeClr val="dk1"/>
+          </a:lnRef>
+          <a:fillRef idx="0">
+            <a:schemeClr val="dk1"/>
+          </a:fillRef>
+          <a:effectRef idx="1">
+            <a:schemeClr val="dk1"/>
+          </a:effectRef>
+          <a:fontRef idx="minor">
+            <a:schemeClr val="tx1"/>
+          </a:fontRef>
+        </p:style>
+      </p:cxnSp>
+      <p:cxnSp>
+        <p:nvCxnSpPr>
+          <p:cNvPr id="17" name="Straight Connector 16">
+            <a:extLst>
+              <a:ext uri="{FF2B5EF4-FFF2-40B4-BE49-F238E27FC236}">
+                <a16:creationId xmlns:a16="http://schemas.microsoft.com/office/drawing/2014/main" id="{CE040614-5AA7-346B-E275-E53D624E66B8}"/>
+              </a:ext>
+            </a:extLst>
+          </p:cNvPr>
+          <p:cNvCxnSpPr>
+            <a:cxnSpLocks/>
+          </p:cNvCxnSpPr>
+          <p:nvPr/>
+        </p:nvCxnSpPr>
+        <p:spPr>
+          <a:xfrm>
+            <a:off x="1943807" y="993502"/>
+            <a:ext cx="0" cy="4410635"/>
+          </a:xfrm>
+          <a:prstGeom prst="line">
+            <a:avLst/>
+          </a:prstGeom>
+          <a:ln w="28575"/>
+        </p:spPr>
+        <p:style>
+          <a:lnRef idx="2">
+            <a:schemeClr val="dk1"/>
+          </a:lnRef>
+          <a:fillRef idx="0">
+            <a:schemeClr val="dk1"/>
+          </a:fillRef>
+          <a:effectRef idx="1">
+            <a:schemeClr val="dk1"/>
+          </a:effectRef>
+          <a:fontRef idx="minor">
+            <a:schemeClr val="tx1"/>
+          </a:fontRef>
+        </p:style>
+      </p:cxnSp>
+      <p:cxnSp>
+        <p:nvCxnSpPr>
+          <p:cNvPr id="18" name="Straight Connector 17">
+            <a:extLst>
+              <a:ext uri="{FF2B5EF4-FFF2-40B4-BE49-F238E27FC236}">
+                <a16:creationId xmlns:a16="http://schemas.microsoft.com/office/drawing/2014/main" id="{CE0AF89F-EF8F-DA59-9E75-5A5E425654B2}"/>
+              </a:ext>
+            </a:extLst>
+          </p:cNvPr>
+          <p:cNvCxnSpPr>
+            <a:cxnSpLocks/>
+          </p:cNvCxnSpPr>
+          <p:nvPr/>
+        </p:nvCxnSpPr>
+        <p:spPr>
+          <a:xfrm>
+            <a:off x="2608316" y="993502"/>
+            <a:ext cx="0" cy="4410635"/>
+          </a:xfrm>
+          <a:prstGeom prst="line">
+            <a:avLst/>
+          </a:prstGeom>
+          <a:ln w="28575"/>
+        </p:spPr>
+        <p:style>
+          <a:lnRef idx="2">
+            <a:schemeClr val="dk1"/>
+          </a:lnRef>
+          <a:fillRef idx="0">
+            <a:schemeClr val="dk1"/>
+          </a:fillRef>
+          <a:effectRef idx="1">
+            <a:schemeClr val="dk1"/>
+          </a:effectRef>
+          <a:fontRef idx="minor">
+            <a:schemeClr val="tx1"/>
+          </a:fontRef>
+        </p:style>
+      </p:cxnSp>
+      <p:sp>
+        <p:nvSpPr>
+          <p:cNvPr id="2" name="TextBox 1">
+            <a:extLst>
+              <a:ext uri="{FF2B5EF4-FFF2-40B4-BE49-F238E27FC236}">
+                <a16:creationId xmlns:a16="http://schemas.microsoft.com/office/drawing/2014/main" id="{0B94CA20-82A9-BFEF-4ECB-B6B0F26ED4BD}"/>
+              </a:ext>
+            </a:extLst>
+          </p:cNvPr>
+          <p:cNvSpPr txBox="1"/>
+          <p:nvPr/>
+        </p:nvSpPr>
+        <p:spPr>
+          <a:xfrm>
+            <a:off x="171449" y="0"/>
+            <a:ext cx="11512545" cy="739754"/>
+          </a:xfrm>
+          <a:prstGeom prst="rect">
+            <a:avLst/>
+          </a:prstGeom>
+          <a:noFill/>
+        </p:spPr>
+        <p:txBody>
+          <a:bodyPr wrap="square" rtlCol="0">
+            <a:spAutoFit/>
+          </a:bodyPr>
+          <a:lstStyle/>
+          <a:p>
+            <a:pPr>
+              <a:lnSpc>
+                <a:spcPct val="150000"/>
+              </a:lnSpc>
+            </a:pPr>
+            <a:r>
+              <a:rPr lang="en-US" sz="3200" b="1" dirty="0">
+                <a:latin typeface="Arial" panose="020B0604020202020204" pitchFamily="34" charset="0"/>
+                <a:cs typeface="Arial" panose="020B0604020202020204" pitchFamily="34" charset="0"/>
+              </a:rPr>
+              <a:t>What could be some reasons behind these differences?</a:t>
+            </a:r>
+          </a:p>
+        </p:txBody>
+      </p:sp>
+      <p:sp>
+        <p:nvSpPr>
+          <p:cNvPr id="12" name="Slide Number Placeholder 7">
+            <a:extLst>
+              <a:ext uri="{FF2B5EF4-FFF2-40B4-BE49-F238E27FC236}">
+                <a16:creationId xmlns:a16="http://schemas.microsoft.com/office/drawing/2014/main" id="{603CA6CA-66FA-EB03-2FBC-EE1E33439BCC}"/>
+              </a:ext>
+            </a:extLst>
+          </p:cNvPr>
+          <p:cNvSpPr>
+            <a:spLocks noGrp="1"/>
+          </p:cNvSpPr>
+          <p:nvPr>
+            <p:ph type="sldNum" sz="quarter" idx="12"/>
+          </p:nvPr>
+        </p:nvSpPr>
+        <p:spPr>
+          <a:xfrm>
+            <a:off x="9263062" y="6337300"/>
+            <a:ext cx="2743200" cy="365125"/>
+          </a:xfrm>
+        </p:spPr>
+        <p:txBody>
+          <a:bodyPr/>
+          <a:lstStyle/>
+          <a:p>
+            <a:fld id="{A7C13B74-2CD1-074C-84D2-FF26F00FE39E}" type="slidenum">
+              <a:rPr lang="en-US" sz="1400" smtClean="0">
+                <a:solidFill>
+                  <a:schemeClr val="tx1"/>
+                </a:solidFill>
+              </a:rPr>
+              <a:t>7</a:t>
+            </a:fld>
+            <a:endParaRPr lang="en-US" sz="1400" dirty="0">
+              <a:solidFill>
+                <a:schemeClr val="tx1"/>
+              </a:solidFill>
+            </a:endParaRPr>
+          </a:p>
+        </p:txBody>
+      </p:sp>
+      <p:pic>
+        <p:nvPicPr>
+          <p:cNvPr id="5" name="Picture 4" descr="A chart with different colored bars&#10;&#10;AI-generated content may be incorrect.">
+            <a:extLst>
+              <a:ext uri="{FF2B5EF4-FFF2-40B4-BE49-F238E27FC236}">
+                <a16:creationId xmlns:a16="http://schemas.microsoft.com/office/drawing/2014/main" id="{97FA4388-84D4-D798-7EEF-343303A92E45}"/>
+              </a:ext>
+            </a:extLst>
+          </p:cNvPr>
+          <p:cNvPicPr>
+            <a:picLocks noChangeAspect="1"/>
+          </p:cNvPicPr>
+          <p:nvPr/>
+        </p:nvPicPr>
+        <p:blipFill>
+          <a:blip r:embed="rId4"/>
+          <a:stretch>
+            <a:fillRect/>
+          </a:stretch>
+        </p:blipFill>
+        <p:spPr>
+          <a:xfrm>
+            <a:off x="5651494" y="1676400"/>
+            <a:ext cx="6032500" cy="3505200"/>
+          </a:xfrm>
+          <a:prstGeom prst="rect">
+            <a:avLst/>
+          </a:prstGeom>
+        </p:spPr>
+      </p:pic>
+    </p:spTree>
+    <p:extLst>
+      <p:ext uri="{BB962C8B-B14F-4D97-AF65-F5344CB8AC3E}">
+        <p14:creationId xmlns:p14="http://schemas.microsoft.com/office/powerpoint/2010/main" val="3228791797"/>
+      </p:ext>
+    </p:extLst>
+  </p:cSld>
+  <p:clrMapOvr>
+    <a:masterClrMapping/>
+  </p:clrMapOvr>
+</p:sld>
+</file>
+
+<file path=ppt/slides/slide9.xml><?xml version="1.0" encoding="utf-8"?>
+<p:sld xmlns:a="http://schemas.openxmlformats.org/drawingml/2006/main" xmlns:r="http://schemas.openxmlformats.org/officeDocument/2006/relationships" xmlns:p="http://schemas.openxmlformats.org/presentationml/2006/main">
+  <p:cSld>
+    <p:spTree>
+      <p:nvGrpSpPr>
+        <p:cNvPr id="1" name="">
+          <a:extLst>
+            <a:ext uri="{FF2B5EF4-FFF2-40B4-BE49-F238E27FC236}">
+              <a16:creationId xmlns:a16="http://schemas.microsoft.com/office/drawing/2014/main" id="{BF19687D-33EB-EB16-ABDC-40CEF8A795AF}"/>
+            </a:ext>
+          </a:extLst>
+        </p:cNvPr>
+        <p:cNvGrpSpPr/>
+        <p:nvPr/>
+      </p:nvGrpSpPr>
+      <p:grpSpPr>
+        <a:xfrm>
+          <a:off x="0" y="0"/>
+          <a:ext cx="0" cy="0"/>
+          <a:chOff x="0" y="0"/>
+          <a:chExt cx="0" cy="0"/>
+        </a:xfrm>
+      </p:grpSpPr>
+      <p:sp>
+        <p:nvSpPr>
+          <p:cNvPr id="2" name="TextBox 1">
+            <a:extLst>
+              <a:ext uri="{FF2B5EF4-FFF2-40B4-BE49-F238E27FC236}">
+                <a16:creationId xmlns:a16="http://schemas.microsoft.com/office/drawing/2014/main" id="{A6699D8B-F4EE-9433-E74A-629F3D6534C1}"/>
+              </a:ext>
+            </a:extLst>
+          </p:cNvPr>
+          <p:cNvSpPr txBox="1"/>
+          <p:nvPr/>
+        </p:nvSpPr>
+        <p:spPr>
+          <a:xfrm>
+            <a:off x="339727" y="2896563"/>
+            <a:ext cx="11512545" cy="1478418"/>
+          </a:xfrm>
+          <a:prstGeom prst="rect">
+            <a:avLst/>
+          </a:prstGeom>
+          <a:noFill/>
+        </p:spPr>
+        <p:txBody>
+          <a:bodyPr wrap="square" rtlCol="0">
+            <a:spAutoFit/>
+          </a:bodyPr>
+          <a:lstStyle/>
+          <a:p>
+            <a:pPr algn="ctr">
+              <a:lnSpc>
+                <a:spcPct val="150000"/>
+              </a:lnSpc>
+            </a:pPr>
+            <a:r>
+              <a:rPr lang="en-US" sz="3200" b="1" dirty="0">
+                <a:latin typeface="Arial" panose="020B0604020202020204" pitchFamily="34" charset="0"/>
+                <a:cs typeface="Arial" panose="020B0604020202020204" pitchFamily="34" charset="0"/>
+              </a:rPr>
+              <a:t>The data doesn’t lie, but your approach may trick you</a:t>
+            </a:r>
+          </a:p>
+          <a:p>
+            <a:pPr algn="ctr">
+              <a:lnSpc>
+                <a:spcPct val="150000"/>
+              </a:lnSpc>
+            </a:pPr>
+            <a:r>
+              <a:rPr lang="en-US" sz="3200" dirty="0">
+                <a:latin typeface="Arial" panose="020B0604020202020204" pitchFamily="34" charset="0"/>
+                <a:cs typeface="Arial" panose="020B0604020202020204" pitchFamily="34" charset="0"/>
+              </a:rPr>
+              <a:t>Ensure you’re interpreting your data correctly</a:t>
+            </a:r>
+          </a:p>
+        </p:txBody>
+      </p:sp>
+      <p:sp>
+        <p:nvSpPr>
+          <p:cNvPr id="12" name="Slide Number Placeholder 7">
+            <a:extLst>
+              <a:ext uri="{FF2B5EF4-FFF2-40B4-BE49-F238E27FC236}">
+                <a16:creationId xmlns:a16="http://schemas.microsoft.com/office/drawing/2014/main" id="{4F8BCA73-C142-BD79-3B47-67651FC89255}"/>
+              </a:ext>
+            </a:extLst>
+          </p:cNvPr>
+          <p:cNvSpPr>
+            <a:spLocks noGrp="1"/>
+          </p:cNvSpPr>
+          <p:nvPr>
+            <p:ph type="sldNum" sz="quarter" idx="12"/>
+          </p:nvPr>
+        </p:nvSpPr>
+        <p:spPr>
+          <a:xfrm>
+            <a:off x="9263062" y="6337300"/>
+            <a:ext cx="2743200" cy="365125"/>
+          </a:xfrm>
+        </p:spPr>
+        <p:txBody>
+          <a:bodyPr/>
+          <a:lstStyle/>
+          <a:p>
+            <a:fld id="{A7C13B74-2CD1-074C-84D2-FF26F00FE39E}" type="slidenum">
+              <a:rPr lang="en-US" sz="1400" smtClean="0">
+                <a:solidFill>
+                  <a:schemeClr val="tx1"/>
+                </a:solidFill>
+              </a:rPr>
               <a:t>8</a:t>
             </a:fld>
             <a:endParaRPr lang="en-US" sz="1400" dirty="0">
@@ -5365,53 +8372,10 @@
           </a:p>
         </p:txBody>
       </p:sp>
-      <p:sp>
-        <p:nvSpPr>
-          <p:cNvPr id="2" name="TextBox 1">
-            <a:extLst>
-              <a:ext uri="{FF2B5EF4-FFF2-40B4-BE49-F238E27FC236}">
-                <a16:creationId xmlns:a16="http://schemas.microsoft.com/office/drawing/2014/main" id="{048326CD-B11C-B821-5FE8-01B346866CC0}"/>
-              </a:ext>
-            </a:extLst>
-          </p:cNvPr>
-          <p:cNvSpPr txBox="1"/>
-          <p:nvPr/>
-        </p:nvSpPr>
-        <p:spPr>
-          <a:xfrm>
-            <a:off x="171450" y="0"/>
-            <a:ext cx="10877550" cy="739754"/>
-          </a:xfrm>
-          <a:prstGeom prst="rect">
-            <a:avLst/>
-          </a:prstGeom>
-          <a:noFill/>
-        </p:spPr>
-        <p:txBody>
-          <a:bodyPr wrap="square" rtlCol="0">
-            <a:spAutoFit/>
-          </a:bodyPr>
-          <a:lstStyle/>
-          <a:p>
-            <a:pPr>
-              <a:lnSpc>
-                <a:spcPct val="150000"/>
-              </a:lnSpc>
-            </a:pPr>
-            <a:r>
-              <a:rPr lang="en-US" sz="3200" b="1" dirty="0">
-                <a:latin typeface="Arial" panose="020B0604020202020204" pitchFamily="34" charset="0"/>
-                <a:cs typeface="Arial" panose="020B0604020202020204" pitchFamily="34" charset="0"/>
-              </a:rPr>
-              <a:t>Next Steps and Timeline Long-Term</a:t>
-            </a:r>
-          </a:p>
-        </p:txBody>
-      </p:sp>
     </p:spTree>
     <p:extLst>
       <p:ext uri="{BB962C8B-B14F-4D97-AF65-F5344CB8AC3E}">
-        <p14:creationId xmlns:p14="http://schemas.microsoft.com/office/powerpoint/2010/main" val="3737335531"/>
+        <p14:creationId xmlns:p14="http://schemas.microsoft.com/office/powerpoint/2010/main" val="2405003966"/>
       </p:ext>
     </p:extLst>
   </p:cSld>

--- a/lectures/Lecture3_UlHasan.pptx
+++ b/lectures/Lecture3_UlHasan.pptx
@@ -5,25 +5,29 @@
     <p:sldMasterId id="2147483648" r:id="rId1"/>
   </p:sldMasterIdLst>
   <p:notesMasterIdLst>
-    <p:notesMasterId r:id="rId18"/>
+    <p:notesMasterId r:id="rId22"/>
   </p:notesMasterIdLst>
   <p:sldIdLst>
     <p:sldId id="2237" r:id="rId2"/>
     <p:sldId id="294" r:id="rId3"/>
-    <p:sldId id="2244" r:id="rId4"/>
-    <p:sldId id="2245" r:id="rId5"/>
-    <p:sldId id="2246" r:id="rId6"/>
-    <p:sldId id="2247" r:id="rId7"/>
-    <p:sldId id="2248" r:id="rId8"/>
-    <p:sldId id="2249" r:id="rId9"/>
-    <p:sldId id="2250" r:id="rId10"/>
-    <p:sldId id="2251" r:id="rId11"/>
-    <p:sldId id="2238" r:id="rId12"/>
-    <p:sldId id="2239" r:id="rId13"/>
-    <p:sldId id="2240" r:id="rId14"/>
-    <p:sldId id="2241" r:id="rId15"/>
-    <p:sldId id="2242" r:id="rId16"/>
-    <p:sldId id="2243" r:id="rId17"/>
+    <p:sldId id="2254" r:id="rId4"/>
+    <p:sldId id="2255" r:id="rId5"/>
+    <p:sldId id="2256" r:id="rId6"/>
+    <p:sldId id="2221" r:id="rId7"/>
+    <p:sldId id="2252" r:id="rId8"/>
+    <p:sldId id="2244" r:id="rId9"/>
+    <p:sldId id="2245" r:id="rId10"/>
+    <p:sldId id="2246" r:id="rId11"/>
+    <p:sldId id="2247" r:id="rId12"/>
+    <p:sldId id="2248" r:id="rId13"/>
+    <p:sldId id="2249" r:id="rId14"/>
+    <p:sldId id="2250" r:id="rId15"/>
+    <p:sldId id="2251" r:id="rId16"/>
+    <p:sldId id="2238" r:id="rId17"/>
+    <p:sldId id="2258" r:id="rId18"/>
+    <p:sldId id="2239" r:id="rId19"/>
+    <p:sldId id="2259" r:id="rId20"/>
+    <p:sldId id="2243" r:id="rId21"/>
   </p:sldIdLst>
   <p:sldSz cx="12192000" cy="6858000"/>
   <p:notesSz cx="6858000" cy="9144000"/>
@@ -212,7 +216,7 @@
           <a:p>
             <a:fld id="{3D3B5B49-9746-BB4D-AA52-42DFB44D1781}" type="datetimeFigureOut">
               <a:rPr lang="en-US" smtClean="0"/>
-              <a:t>3/8/26</a:t>
+              <a:t>3/11/26</a:t>
             </a:fld>
             <a:endParaRPr lang="en-US"/>
           </a:p>
@@ -571,6 +575,438 @@
         <p:cNvPr id="1" name="">
           <a:extLst>
             <a:ext uri="{FF2B5EF4-FFF2-40B4-BE49-F238E27FC236}">
+              <a16:creationId xmlns:a16="http://schemas.microsoft.com/office/drawing/2014/main" id="{E1234658-8F35-4A66-643A-18624B31D84D}"/>
+            </a:ext>
+          </a:extLst>
+        </p:cNvPr>
+        <p:cNvGrpSpPr/>
+        <p:nvPr/>
+      </p:nvGrpSpPr>
+      <p:grpSpPr>
+        <a:xfrm>
+          <a:off x="0" y="0"/>
+          <a:ext cx="0" cy="0"/>
+          <a:chOff x="0" y="0"/>
+          <a:chExt cx="0" cy="0"/>
+        </a:xfrm>
+      </p:grpSpPr>
+      <p:sp>
+        <p:nvSpPr>
+          <p:cNvPr id="2" name="Slide Image Placeholder 1">
+            <a:extLst>
+              <a:ext uri="{FF2B5EF4-FFF2-40B4-BE49-F238E27FC236}">
+                <a16:creationId xmlns:a16="http://schemas.microsoft.com/office/drawing/2014/main" id="{5710480F-C402-091C-D3F1-2AB532396B46}"/>
+              </a:ext>
+            </a:extLst>
+          </p:cNvPr>
+          <p:cNvSpPr>
+            <a:spLocks noGrp="1" noRot="1" noChangeAspect="1"/>
+          </p:cNvSpPr>
+          <p:nvPr>
+            <p:ph type="sldImg"/>
+          </p:nvPr>
+        </p:nvSpPr>
+        <p:spPr/>
+      </p:sp>
+      <p:sp>
+        <p:nvSpPr>
+          <p:cNvPr id="3" name="Notes Placeholder 2">
+            <a:extLst>
+              <a:ext uri="{FF2B5EF4-FFF2-40B4-BE49-F238E27FC236}">
+                <a16:creationId xmlns:a16="http://schemas.microsoft.com/office/drawing/2014/main" id="{70917937-AF65-35FF-F7D4-3AA11A26D000}"/>
+              </a:ext>
+            </a:extLst>
+          </p:cNvPr>
+          <p:cNvSpPr>
+            <a:spLocks noGrp="1"/>
+          </p:cNvSpPr>
+          <p:nvPr>
+            <p:ph type="body" idx="1"/>
+          </p:nvPr>
+        </p:nvSpPr>
+        <p:spPr/>
+        <p:txBody>
+          <a:bodyPr/>
+          <a:lstStyle/>
+          <a:p>
+            <a:endParaRPr lang="en-US" dirty="0"/>
+          </a:p>
+        </p:txBody>
+      </p:sp>
+      <p:sp>
+        <p:nvSpPr>
+          <p:cNvPr id="4" name="Slide Number Placeholder 3">
+            <a:extLst>
+              <a:ext uri="{FF2B5EF4-FFF2-40B4-BE49-F238E27FC236}">
+                <a16:creationId xmlns:a16="http://schemas.microsoft.com/office/drawing/2014/main" id="{1CEFB72F-6CD2-541A-77AC-636840A6B53B}"/>
+              </a:ext>
+            </a:extLst>
+          </p:cNvPr>
+          <p:cNvSpPr>
+            <a:spLocks noGrp="1"/>
+          </p:cNvSpPr>
+          <p:nvPr>
+            <p:ph type="sldNum" sz="quarter" idx="5"/>
+          </p:nvPr>
+        </p:nvSpPr>
+        <p:spPr/>
+        <p:txBody>
+          <a:bodyPr/>
+          <a:lstStyle/>
+          <a:p>
+            <a:fld id="{F03610D6-285C-CD48-A777-0BA559C510FB}" type="slidenum">
+              <a:rPr lang="en-US" smtClean="0"/>
+              <a:t>2</a:t>
+            </a:fld>
+            <a:endParaRPr lang="en-US"/>
+          </a:p>
+        </p:txBody>
+      </p:sp>
+    </p:spTree>
+    <p:extLst>
+      <p:ext uri="{BB962C8B-B14F-4D97-AF65-F5344CB8AC3E}">
+        <p14:creationId xmlns:p14="http://schemas.microsoft.com/office/powerpoint/2010/main" val="2636919664"/>
+      </p:ext>
+    </p:extLst>
+  </p:cSld>
+  <p:clrMapOvr>
+    <a:masterClrMapping/>
+  </p:clrMapOvr>
+</p:notes>
+</file>
+
+<file path=ppt/notesSlides/notesSlide3.xml><?xml version="1.0" encoding="utf-8"?>
+<p:notes xmlns:a="http://schemas.openxmlformats.org/drawingml/2006/main" xmlns:r="http://schemas.openxmlformats.org/officeDocument/2006/relationships" xmlns:p="http://schemas.openxmlformats.org/presentationml/2006/main">
+  <p:cSld>
+    <p:spTree>
+      <p:nvGrpSpPr>
+        <p:cNvPr id="1" name="">
+          <a:extLst>
+            <a:ext uri="{FF2B5EF4-FFF2-40B4-BE49-F238E27FC236}">
+              <a16:creationId xmlns:a16="http://schemas.microsoft.com/office/drawing/2014/main" id="{096D0271-2EDE-2795-C249-2850C0A31341}"/>
+            </a:ext>
+          </a:extLst>
+        </p:cNvPr>
+        <p:cNvGrpSpPr/>
+        <p:nvPr/>
+      </p:nvGrpSpPr>
+      <p:grpSpPr>
+        <a:xfrm>
+          <a:off x="0" y="0"/>
+          <a:ext cx="0" cy="0"/>
+          <a:chOff x="0" y="0"/>
+          <a:chExt cx="0" cy="0"/>
+        </a:xfrm>
+      </p:grpSpPr>
+      <p:sp>
+        <p:nvSpPr>
+          <p:cNvPr id="2" name="Slide Image Placeholder 1">
+            <a:extLst>
+              <a:ext uri="{FF2B5EF4-FFF2-40B4-BE49-F238E27FC236}">
+                <a16:creationId xmlns:a16="http://schemas.microsoft.com/office/drawing/2014/main" id="{3714FECE-090A-893D-1847-24A6CDF77031}"/>
+              </a:ext>
+            </a:extLst>
+          </p:cNvPr>
+          <p:cNvSpPr>
+            <a:spLocks noGrp="1" noRot="1" noChangeAspect="1"/>
+          </p:cNvSpPr>
+          <p:nvPr>
+            <p:ph type="sldImg"/>
+          </p:nvPr>
+        </p:nvSpPr>
+        <p:spPr/>
+      </p:sp>
+      <p:sp>
+        <p:nvSpPr>
+          <p:cNvPr id="3" name="Notes Placeholder 2">
+            <a:extLst>
+              <a:ext uri="{FF2B5EF4-FFF2-40B4-BE49-F238E27FC236}">
+                <a16:creationId xmlns:a16="http://schemas.microsoft.com/office/drawing/2014/main" id="{CFDCE49C-87EB-95CA-C0B1-1557F60AE43E}"/>
+              </a:ext>
+            </a:extLst>
+          </p:cNvPr>
+          <p:cNvSpPr>
+            <a:spLocks noGrp="1"/>
+          </p:cNvSpPr>
+          <p:nvPr>
+            <p:ph type="body" idx="1"/>
+          </p:nvPr>
+        </p:nvSpPr>
+        <p:spPr/>
+        <p:txBody>
+          <a:bodyPr/>
+          <a:lstStyle/>
+          <a:p>
+            <a:endParaRPr lang="en-US" dirty="0"/>
+          </a:p>
+        </p:txBody>
+      </p:sp>
+      <p:sp>
+        <p:nvSpPr>
+          <p:cNvPr id="4" name="Slide Number Placeholder 3">
+            <a:extLst>
+              <a:ext uri="{FF2B5EF4-FFF2-40B4-BE49-F238E27FC236}">
+                <a16:creationId xmlns:a16="http://schemas.microsoft.com/office/drawing/2014/main" id="{1122B46B-0A48-EB1B-7996-2A39350CC804}"/>
+              </a:ext>
+            </a:extLst>
+          </p:cNvPr>
+          <p:cNvSpPr>
+            <a:spLocks noGrp="1"/>
+          </p:cNvSpPr>
+          <p:nvPr>
+            <p:ph type="sldNum" sz="quarter" idx="5"/>
+          </p:nvPr>
+        </p:nvSpPr>
+        <p:spPr/>
+        <p:txBody>
+          <a:bodyPr/>
+          <a:lstStyle/>
+          <a:p>
+            <a:fld id="{F03610D6-285C-CD48-A777-0BA559C510FB}" type="slidenum">
+              <a:rPr lang="en-US" smtClean="0"/>
+              <a:t>3</a:t>
+            </a:fld>
+            <a:endParaRPr lang="en-US"/>
+          </a:p>
+        </p:txBody>
+      </p:sp>
+    </p:spTree>
+    <p:extLst>
+      <p:ext uri="{BB962C8B-B14F-4D97-AF65-F5344CB8AC3E}">
+        <p14:creationId xmlns:p14="http://schemas.microsoft.com/office/powerpoint/2010/main" val="2191145414"/>
+      </p:ext>
+    </p:extLst>
+  </p:cSld>
+  <p:clrMapOvr>
+    <a:masterClrMapping/>
+  </p:clrMapOvr>
+</p:notes>
+</file>
+
+<file path=ppt/notesSlides/notesSlide4.xml><?xml version="1.0" encoding="utf-8"?>
+<p:notes xmlns:a="http://schemas.openxmlformats.org/drawingml/2006/main" xmlns:r="http://schemas.openxmlformats.org/officeDocument/2006/relationships" xmlns:p="http://schemas.openxmlformats.org/presentationml/2006/main">
+  <p:cSld>
+    <p:spTree>
+      <p:nvGrpSpPr>
+        <p:cNvPr id="1" name="">
+          <a:extLst>
+            <a:ext uri="{FF2B5EF4-FFF2-40B4-BE49-F238E27FC236}">
+              <a16:creationId xmlns:a16="http://schemas.microsoft.com/office/drawing/2014/main" id="{A148FB8C-E95B-B323-776E-0AE3BBC31E4A}"/>
+            </a:ext>
+          </a:extLst>
+        </p:cNvPr>
+        <p:cNvGrpSpPr/>
+        <p:nvPr/>
+      </p:nvGrpSpPr>
+      <p:grpSpPr>
+        <a:xfrm>
+          <a:off x="0" y="0"/>
+          <a:ext cx="0" cy="0"/>
+          <a:chOff x="0" y="0"/>
+          <a:chExt cx="0" cy="0"/>
+        </a:xfrm>
+      </p:grpSpPr>
+      <p:sp>
+        <p:nvSpPr>
+          <p:cNvPr id="2" name="Slide Image Placeholder 1">
+            <a:extLst>
+              <a:ext uri="{FF2B5EF4-FFF2-40B4-BE49-F238E27FC236}">
+                <a16:creationId xmlns:a16="http://schemas.microsoft.com/office/drawing/2014/main" id="{5CF154C3-E5C4-9EF5-8040-9C16DA4CFD24}"/>
+              </a:ext>
+            </a:extLst>
+          </p:cNvPr>
+          <p:cNvSpPr>
+            <a:spLocks noGrp="1" noRot="1" noChangeAspect="1"/>
+          </p:cNvSpPr>
+          <p:nvPr>
+            <p:ph type="sldImg"/>
+          </p:nvPr>
+        </p:nvSpPr>
+        <p:spPr/>
+      </p:sp>
+      <p:sp>
+        <p:nvSpPr>
+          <p:cNvPr id="3" name="Notes Placeholder 2">
+            <a:extLst>
+              <a:ext uri="{FF2B5EF4-FFF2-40B4-BE49-F238E27FC236}">
+                <a16:creationId xmlns:a16="http://schemas.microsoft.com/office/drawing/2014/main" id="{4C169411-202E-1D84-86A6-DD1D091A3117}"/>
+              </a:ext>
+            </a:extLst>
+          </p:cNvPr>
+          <p:cNvSpPr>
+            <a:spLocks noGrp="1"/>
+          </p:cNvSpPr>
+          <p:nvPr>
+            <p:ph type="body" idx="1"/>
+          </p:nvPr>
+        </p:nvSpPr>
+        <p:spPr/>
+        <p:txBody>
+          <a:bodyPr/>
+          <a:lstStyle/>
+          <a:p>
+            <a:endParaRPr lang="en-US" dirty="0"/>
+          </a:p>
+        </p:txBody>
+      </p:sp>
+      <p:sp>
+        <p:nvSpPr>
+          <p:cNvPr id="4" name="Slide Number Placeholder 3">
+            <a:extLst>
+              <a:ext uri="{FF2B5EF4-FFF2-40B4-BE49-F238E27FC236}">
+                <a16:creationId xmlns:a16="http://schemas.microsoft.com/office/drawing/2014/main" id="{1D141672-B010-959D-2EFD-46E201E6633E}"/>
+              </a:ext>
+            </a:extLst>
+          </p:cNvPr>
+          <p:cNvSpPr>
+            <a:spLocks noGrp="1"/>
+          </p:cNvSpPr>
+          <p:nvPr>
+            <p:ph type="sldNum" sz="quarter" idx="5"/>
+          </p:nvPr>
+        </p:nvSpPr>
+        <p:spPr/>
+        <p:txBody>
+          <a:bodyPr/>
+          <a:lstStyle/>
+          <a:p>
+            <a:fld id="{F03610D6-285C-CD48-A777-0BA559C510FB}" type="slidenum">
+              <a:rPr lang="en-US" smtClean="0"/>
+              <a:t>4</a:t>
+            </a:fld>
+            <a:endParaRPr lang="en-US"/>
+          </a:p>
+        </p:txBody>
+      </p:sp>
+    </p:spTree>
+    <p:extLst>
+      <p:ext uri="{BB962C8B-B14F-4D97-AF65-F5344CB8AC3E}">
+        <p14:creationId xmlns:p14="http://schemas.microsoft.com/office/powerpoint/2010/main" val="2103098347"/>
+      </p:ext>
+    </p:extLst>
+  </p:cSld>
+  <p:clrMapOvr>
+    <a:masterClrMapping/>
+  </p:clrMapOvr>
+</p:notes>
+</file>
+
+<file path=ppt/notesSlides/notesSlide5.xml><?xml version="1.0" encoding="utf-8"?>
+<p:notes xmlns:a="http://schemas.openxmlformats.org/drawingml/2006/main" xmlns:r="http://schemas.openxmlformats.org/officeDocument/2006/relationships" xmlns:p="http://schemas.openxmlformats.org/presentationml/2006/main">
+  <p:cSld>
+    <p:spTree>
+      <p:nvGrpSpPr>
+        <p:cNvPr id="1" name="">
+          <a:extLst>
+            <a:ext uri="{FF2B5EF4-FFF2-40B4-BE49-F238E27FC236}">
+              <a16:creationId xmlns:a16="http://schemas.microsoft.com/office/drawing/2014/main" id="{AE618B79-A58B-10E5-3BF6-CFD7BF7B6301}"/>
+            </a:ext>
+          </a:extLst>
+        </p:cNvPr>
+        <p:cNvGrpSpPr/>
+        <p:nvPr/>
+      </p:nvGrpSpPr>
+      <p:grpSpPr>
+        <a:xfrm>
+          <a:off x="0" y="0"/>
+          <a:ext cx="0" cy="0"/>
+          <a:chOff x="0" y="0"/>
+          <a:chExt cx="0" cy="0"/>
+        </a:xfrm>
+      </p:grpSpPr>
+      <p:sp>
+        <p:nvSpPr>
+          <p:cNvPr id="2" name="Slide Image Placeholder 1">
+            <a:extLst>
+              <a:ext uri="{FF2B5EF4-FFF2-40B4-BE49-F238E27FC236}">
+                <a16:creationId xmlns:a16="http://schemas.microsoft.com/office/drawing/2014/main" id="{0CDBCC31-227D-E7CB-E9A9-5E28C97F921C}"/>
+              </a:ext>
+            </a:extLst>
+          </p:cNvPr>
+          <p:cNvSpPr>
+            <a:spLocks noGrp="1" noRot="1" noChangeAspect="1"/>
+          </p:cNvSpPr>
+          <p:nvPr>
+            <p:ph type="sldImg"/>
+          </p:nvPr>
+        </p:nvSpPr>
+        <p:spPr/>
+      </p:sp>
+      <p:sp>
+        <p:nvSpPr>
+          <p:cNvPr id="3" name="Notes Placeholder 2">
+            <a:extLst>
+              <a:ext uri="{FF2B5EF4-FFF2-40B4-BE49-F238E27FC236}">
+                <a16:creationId xmlns:a16="http://schemas.microsoft.com/office/drawing/2014/main" id="{EEAB067B-0FAE-5C3E-819A-944AD6D9ACE2}"/>
+              </a:ext>
+            </a:extLst>
+          </p:cNvPr>
+          <p:cNvSpPr>
+            <a:spLocks noGrp="1"/>
+          </p:cNvSpPr>
+          <p:nvPr>
+            <p:ph type="body" idx="1"/>
+          </p:nvPr>
+        </p:nvSpPr>
+        <p:spPr/>
+        <p:txBody>
+          <a:bodyPr/>
+          <a:lstStyle/>
+          <a:p>
+            <a:endParaRPr lang="en-US" dirty="0"/>
+          </a:p>
+        </p:txBody>
+      </p:sp>
+      <p:sp>
+        <p:nvSpPr>
+          <p:cNvPr id="4" name="Slide Number Placeholder 3">
+            <a:extLst>
+              <a:ext uri="{FF2B5EF4-FFF2-40B4-BE49-F238E27FC236}">
+                <a16:creationId xmlns:a16="http://schemas.microsoft.com/office/drawing/2014/main" id="{1D40A8FF-1BF6-2633-E638-394EA4106C99}"/>
+              </a:ext>
+            </a:extLst>
+          </p:cNvPr>
+          <p:cNvSpPr>
+            <a:spLocks noGrp="1"/>
+          </p:cNvSpPr>
+          <p:nvPr>
+            <p:ph type="sldNum" sz="quarter" idx="5"/>
+          </p:nvPr>
+        </p:nvSpPr>
+        <p:spPr/>
+        <p:txBody>
+          <a:bodyPr/>
+          <a:lstStyle/>
+          <a:p>
+            <a:fld id="{F03610D6-285C-CD48-A777-0BA559C510FB}" type="slidenum">
+              <a:rPr lang="en-US" smtClean="0"/>
+              <a:t>6</a:t>
+            </a:fld>
+            <a:endParaRPr lang="en-US"/>
+          </a:p>
+        </p:txBody>
+      </p:sp>
+    </p:spTree>
+    <p:extLst>
+      <p:ext uri="{BB962C8B-B14F-4D97-AF65-F5344CB8AC3E}">
+        <p14:creationId xmlns:p14="http://schemas.microsoft.com/office/powerpoint/2010/main" val="1248824519"/>
+      </p:ext>
+    </p:extLst>
+  </p:cSld>
+  <p:clrMapOvr>
+    <a:masterClrMapping/>
+  </p:clrMapOvr>
+</p:notes>
+</file>
+
+<file path=ppt/notesSlides/notesSlide6.xml><?xml version="1.0" encoding="utf-8"?>
+<p:notes xmlns:a="http://schemas.openxmlformats.org/drawingml/2006/main" xmlns:r="http://schemas.openxmlformats.org/officeDocument/2006/relationships" xmlns:p="http://schemas.openxmlformats.org/presentationml/2006/main">
+  <p:cSld>
+    <p:spTree>
+      <p:nvGrpSpPr>
+        <p:cNvPr id="1" name="">
+          <a:extLst>
+            <a:ext uri="{FF2B5EF4-FFF2-40B4-BE49-F238E27FC236}">
               <a16:creationId xmlns:a16="http://schemas.microsoft.com/office/drawing/2014/main" id="{D5871D2D-1F00-8D80-3F63-DED0D72B3F71}"/>
             </a:ext>
           </a:extLst>
@@ -652,7 +1088,7 @@
           <a:p>
             <a:fld id="{F03610D6-285C-CD48-A777-0BA559C510FB}" type="slidenum">
               <a:rPr lang="en-US" smtClean="0"/>
-              <a:t>7</a:t>
+              <a:t>12</a:t>
             </a:fld>
             <a:endParaRPr lang="en-US"/>
           </a:p>
@@ -671,7 +1107,7 @@
 </p:notes>
 </file>
 
-<file path=ppt/notesSlides/notesSlide3.xml><?xml version="1.0" encoding="utf-8"?>
+<file path=ppt/notesSlides/notesSlide7.xml><?xml version="1.0" encoding="utf-8"?>
 <p:notes xmlns:a="http://schemas.openxmlformats.org/drawingml/2006/main" xmlns:r="http://schemas.openxmlformats.org/officeDocument/2006/relationships" xmlns:p="http://schemas.openxmlformats.org/presentationml/2006/main">
   <p:cSld>
     <p:spTree>
@@ -760,7 +1196,7 @@
           <a:p>
             <a:fld id="{F03610D6-285C-CD48-A777-0BA559C510FB}" type="slidenum">
               <a:rPr lang="en-US" smtClean="0"/>
-              <a:t>8</a:t>
+              <a:t>13</a:t>
             </a:fld>
             <a:endParaRPr lang="en-US"/>
           </a:p>
@@ -779,7 +1215,7 @@
 </p:notes>
 </file>
 
-<file path=ppt/notesSlides/notesSlide4.xml><?xml version="1.0" encoding="utf-8"?>
+<file path=ppt/notesSlides/notesSlide8.xml><?xml version="1.0" encoding="utf-8"?>
 <p:notes xmlns:a="http://schemas.openxmlformats.org/drawingml/2006/main" xmlns:r="http://schemas.openxmlformats.org/officeDocument/2006/relationships" xmlns:p="http://schemas.openxmlformats.org/presentationml/2006/main">
   <p:cSld>
     <p:spTree>
@@ -868,7 +1304,7 @@
           <a:p>
             <a:fld id="{F03610D6-285C-CD48-A777-0BA559C510FB}" type="slidenum">
               <a:rPr lang="en-US" smtClean="0"/>
-              <a:t>9</a:t>
+              <a:t>14</a:t>
             </a:fld>
             <a:endParaRPr lang="en-US"/>
           </a:p>
@@ -1034,7 +1470,7 @@
           <a:p>
             <a:fld id="{E03C6363-DBFF-0445-A92B-3D01187C0523}" type="datetime1">
               <a:rPr lang="en-US" smtClean="0"/>
-              <a:t>3/8/26</a:t>
+              <a:t>3/11/26</a:t>
             </a:fld>
             <a:endParaRPr lang="en-US"/>
           </a:p>
@@ -1232,7 +1668,7 @@
           <a:p>
             <a:fld id="{37D1FA39-0341-FF46-ADDC-8086B2344C32}" type="datetime1">
               <a:rPr lang="en-US" smtClean="0"/>
-              <a:t>3/8/26</a:t>
+              <a:t>3/11/26</a:t>
             </a:fld>
             <a:endParaRPr lang="en-US"/>
           </a:p>
@@ -1440,7 +1876,7 @@
           <a:p>
             <a:fld id="{395E6BDC-031F-854F-A1E3-49B14A8AF8DA}" type="datetime1">
               <a:rPr lang="en-US" smtClean="0"/>
-              <a:t>3/8/26</a:t>
+              <a:t>3/11/26</a:t>
             </a:fld>
             <a:endParaRPr lang="en-US"/>
           </a:p>
@@ -1638,7 +2074,7 @@
           <a:p>
             <a:fld id="{72507E83-1DB1-B64B-9D6B-16DDFD96D9C4}" type="datetime1">
               <a:rPr lang="en-US" smtClean="0"/>
-              <a:t>3/8/26</a:t>
+              <a:t>3/11/26</a:t>
             </a:fld>
             <a:endParaRPr lang="en-US"/>
           </a:p>
@@ -1913,7 +2349,7 @@
           <a:p>
             <a:fld id="{B0EF5407-A7C3-ED4C-BE90-F572D0287D47}" type="datetime1">
               <a:rPr lang="en-US" smtClean="0"/>
-              <a:t>3/8/26</a:t>
+              <a:t>3/11/26</a:t>
             </a:fld>
             <a:endParaRPr lang="en-US"/>
           </a:p>
@@ -2178,7 +2614,7 @@
           <a:p>
             <a:fld id="{AF8991FD-072F-E247-A23C-B39AD2C064E0}" type="datetime1">
               <a:rPr lang="en-US" smtClean="0"/>
-              <a:t>3/8/26</a:t>
+              <a:t>3/11/26</a:t>
             </a:fld>
             <a:endParaRPr lang="en-US"/>
           </a:p>
@@ -2590,7 +3026,7 @@
           <a:p>
             <a:fld id="{71F22A71-351F-7645-9FB6-24649103B0AD}" type="datetime1">
               <a:rPr lang="en-US" smtClean="0"/>
-              <a:t>3/8/26</a:t>
+              <a:t>3/11/26</a:t>
             </a:fld>
             <a:endParaRPr lang="en-US"/>
           </a:p>
@@ -2731,7 +3167,7 @@
           <a:p>
             <a:fld id="{0E5E215E-438D-ED4F-A6D8-DEE9CE867F74}" type="datetime1">
               <a:rPr lang="en-US" smtClean="0"/>
-              <a:t>3/8/26</a:t>
+              <a:t>3/11/26</a:t>
             </a:fld>
             <a:endParaRPr lang="en-US"/>
           </a:p>
@@ -2844,7 +3280,7 @@
           <a:p>
             <a:fld id="{F6510ED0-EC73-284A-BFD7-2CA0D63C77EC}" type="datetime1">
               <a:rPr lang="en-US" smtClean="0"/>
-              <a:t>3/8/26</a:t>
+              <a:t>3/11/26</a:t>
             </a:fld>
             <a:endParaRPr lang="en-US"/>
           </a:p>
@@ -3155,7 +3591,7 @@
           <a:p>
             <a:fld id="{09FA4520-449E-D04E-98C6-12047F2867A8}" type="datetime1">
               <a:rPr lang="en-US" smtClean="0"/>
-              <a:t>3/8/26</a:t>
+              <a:t>3/11/26</a:t>
             </a:fld>
             <a:endParaRPr lang="en-US"/>
           </a:p>
@@ -3443,7 +3879,7 @@
           <a:p>
             <a:fld id="{C9A70BB6-D8C9-5741-9A2A-708D1867EAD5}" type="datetime1">
               <a:rPr lang="en-US" smtClean="0"/>
-              <a:t>3/8/26</a:t>
+              <a:t>3/11/26</a:t>
             </a:fld>
             <a:endParaRPr lang="en-US"/>
           </a:p>
@@ -3684,7 +4120,7 @@
           <a:p>
             <a:fld id="{F4F81440-1A9F-DC4F-8224-53B0BFA7DADD}" type="datetime1">
               <a:rPr lang="en-US" smtClean="0"/>
-              <a:t>3/8/26</a:t>
+              <a:t>3/11/26</a:t>
             </a:fld>
             <a:endParaRPr lang="en-US"/>
           </a:p>
@@ -4265,6 +4701,1491 @@
         <p:cNvPr id="1" name="">
           <a:extLst>
             <a:ext uri="{FF2B5EF4-FFF2-40B4-BE49-F238E27FC236}">
+              <a16:creationId xmlns:a16="http://schemas.microsoft.com/office/drawing/2014/main" id="{4D2ED574-4245-E47B-6A64-824C7E7ADDC6}"/>
+            </a:ext>
+          </a:extLst>
+        </p:cNvPr>
+        <p:cNvGrpSpPr/>
+        <p:nvPr/>
+      </p:nvGrpSpPr>
+      <p:grpSpPr>
+        <a:xfrm>
+          <a:off x="0" y="0"/>
+          <a:ext cx="0" cy="0"/>
+          <a:chOff x="0" y="0"/>
+          <a:chExt cx="0" cy="0"/>
+        </a:xfrm>
+      </p:grpSpPr>
+      <p:sp>
+        <p:nvSpPr>
+          <p:cNvPr id="2" name="TextBox 1">
+            <a:extLst>
+              <a:ext uri="{FF2B5EF4-FFF2-40B4-BE49-F238E27FC236}">
+                <a16:creationId xmlns:a16="http://schemas.microsoft.com/office/drawing/2014/main" id="{A2EA2798-BF0C-5C1D-B978-EC167EBE917B}"/>
+              </a:ext>
+            </a:extLst>
+          </p:cNvPr>
+          <p:cNvSpPr txBox="1"/>
+          <p:nvPr/>
+        </p:nvSpPr>
+        <p:spPr>
+          <a:xfrm>
+            <a:off x="171450" y="0"/>
+            <a:ext cx="10877550" cy="739754"/>
+          </a:xfrm>
+          <a:prstGeom prst="rect">
+            <a:avLst/>
+          </a:prstGeom>
+          <a:noFill/>
+        </p:spPr>
+        <p:txBody>
+          <a:bodyPr wrap="square" rtlCol="0">
+            <a:spAutoFit/>
+          </a:bodyPr>
+          <a:lstStyle/>
+          <a:p>
+            <a:pPr>
+              <a:lnSpc>
+                <a:spcPct val="150000"/>
+              </a:lnSpc>
+            </a:pPr>
+            <a:r>
+              <a:rPr lang="en-US" sz="3200" b="1" dirty="0">
+                <a:latin typeface="Arial" panose="020B0604020202020204" pitchFamily="34" charset="0"/>
+                <a:cs typeface="Arial" panose="020B0604020202020204" pitchFamily="34" charset="0"/>
+              </a:rPr>
+              <a:t>Experimental Design, Statistics, and Visualizations</a:t>
+            </a:r>
+          </a:p>
+        </p:txBody>
+      </p:sp>
+      <p:sp>
+        <p:nvSpPr>
+          <p:cNvPr id="8" name="Slide Number Placeholder 7">
+            <a:extLst>
+              <a:ext uri="{FF2B5EF4-FFF2-40B4-BE49-F238E27FC236}">
+                <a16:creationId xmlns:a16="http://schemas.microsoft.com/office/drawing/2014/main" id="{D2D3AB51-407F-78C8-638A-D203D2C87988}"/>
+              </a:ext>
+            </a:extLst>
+          </p:cNvPr>
+          <p:cNvSpPr>
+            <a:spLocks noGrp="1"/>
+          </p:cNvSpPr>
+          <p:nvPr>
+            <p:ph type="sldNum" sz="quarter" idx="12"/>
+          </p:nvPr>
+        </p:nvSpPr>
+        <p:spPr>
+          <a:xfrm>
+            <a:off x="9263062" y="6337300"/>
+            <a:ext cx="2743200" cy="365125"/>
+          </a:xfrm>
+        </p:spPr>
+        <p:txBody>
+          <a:bodyPr/>
+          <a:lstStyle/>
+          <a:p>
+            <a:fld id="{A7C13B74-2CD1-074C-84D2-FF26F00FE39E}" type="slidenum">
+              <a:rPr lang="en-US" sz="1400" smtClean="0">
+                <a:solidFill>
+                  <a:schemeClr val="tx1"/>
+                </a:solidFill>
+              </a:rPr>
+              <a:t>9</a:t>
+            </a:fld>
+            <a:endParaRPr lang="en-US" sz="1400" dirty="0">
+              <a:solidFill>
+                <a:schemeClr val="tx1"/>
+              </a:solidFill>
+            </a:endParaRPr>
+          </a:p>
+        </p:txBody>
+      </p:sp>
+      <p:sp>
+        <p:nvSpPr>
+          <p:cNvPr id="3" name="TextBox 2">
+            <a:extLst>
+              <a:ext uri="{FF2B5EF4-FFF2-40B4-BE49-F238E27FC236}">
+                <a16:creationId xmlns:a16="http://schemas.microsoft.com/office/drawing/2014/main" id="{6CB29C4F-00DE-C32D-EAEE-E98C76DEAF77}"/>
+              </a:ext>
+            </a:extLst>
+          </p:cNvPr>
+          <p:cNvSpPr txBox="1"/>
+          <p:nvPr/>
+        </p:nvSpPr>
+        <p:spPr>
+          <a:xfrm>
+            <a:off x="657224" y="1099644"/>
+            <a:ext cx="11534775" cy="2568717"/>
+          </a:xfrm>
+          <a:prstGeom prst="rect">
+            <a:avLst/>
+          </a:prstGeom>
+          <a:noFill/>
+        </p:spPr>
+        <p:txBody>
+          <a:bodyPr wrap="square" rtlCol="0">
+            <a:spAutoFit/>
+          </a:bodyPr>
+          <a:lstStyle/>
+          <a:p>
+            <a:pPr marL="457200" indent="-457200">
+              <a:lnSpc>
+                <a:spcPct val="150000"/>
+              </a:lnSpc>
+              <a:buFont typeface="+mj-lt"/>
+              <a:buAutoNum type="arabicPeriod"/>
+            </a:pPr>
+            <a:r>
+              <a:rPr lang="en-US" sz="2200" dirty="0">
+                <a:latin typeface="Arial" panose="020B0604020202020204" pitchFamily="34" charset="0"/>
+                <a:cs typeface="Arial" panose="020B0604020202020204" pitchFamily="34" charset="0"/>
+              </a:rPr>
+              <a:t>You can have a good question, and you also </a:t>
+            </a:r>
+            <a:r>
+              <a:rPr lang="en-US" sz="2200" u="sng" dirty="0">
+                <a:latin typeface="Arial" panose="020B0604020202020204" pitchFamily="34" charset="0"/>
+                <a:cs typeface="Arial" panose="020B0604020202020204" pitchFamily="34" charset="0"/>
+              </a:rPr>
+              <a:t>need</a:t>
+            </a:r>
+            <a:r>
+              <a:rPr lang="en-US" sz="2200" dirty="0">
+                <a:latin typeface="Arial" panose="020B0604020202020204" pitchFamily="34" charset="0"/>
+                <a:cs typeface="Arial" panose="020B0604020202020204" pitchFamily="34" charset="0"/>
+              </a:rPr>
+              <a:t> a good experimental design</a:t>
+            </a:r>
+            <a:br>
+              <a:rPr lang="en-US" sz="2200" dirty="0">
+                <a:latin typeface="Arial" panose="020B0604020202020204" pitchFamily="34" charset="0"/>
+                <a:cs typeface="Arial" panose="020B0604020202020204" pitchFamily="34" charset="0"/>
+              </a:rPr>
+            </a:br>
+            <a:r>
+              <a:rPr lang="en-US" sz="2200" dirty="0">
+                <a:highlight>
+                  <a:srgbClr val="00FFFF"/>
+                </a:highlight>
+                <a:latin typeface="Arial" panose="020B0604020202020204" pitchFamily="34" charset="0"/>
+                <a:cs typeface="Arial" panose="020B0604020202020204" pitchFamily="34" charset="0"/>
+              </a:rPr>
+              <a:t>Does the venom microbial community differ across the gland of </a:t>
+            </a:r>
+            <a:r>
+              <a:rPr lang="en-US" sz="2200" i="1" dirty="0">
+                <a:highlight>
+                  <a:srgbClr val="00FFFF"/>
+                </a:highlight>
+                <a:latin typeface="Arial" panose="020B0604020202020204" pitchFamily="34" charset="0"/>
+                <a:cs typeface="Arial" panose="020B0604020202020204" pitchFamily="34" charset="0"/>
+              </a:rPr>
+              <a:t>C. </a:t>
+            </a:r>
+            <a:r>
+              <a:rPr lang="en-US" sz="2200" i="1" dirty="0" err="1">
+                <a:highlight>
+                  <a:srgbClr val="00FFFF"/>
+                </a:highlight>
+                <a:latin typeface="Arial" panose="020B0604020202020204" pitchFamily="34" charset="0"/>
+                <a:cs typeface="Arial" panose="020B0604020202020204" pitchFamily="34" charset="0"/>
+              </a:rPr>
+              <a:t>californiconus</a:t>
+            </a:r>
+            <a:r>
+              <a:rPr lang="en-US" sz="2200" dirty="0">
+                <a:highlight>
+                  <a:srgbClr val="00FFFF"/>
+                </a:highlight>
+                <a:latin typeface="Arial" panose="020B0604020202020204" pitchFamily="34" charset="0"/>
+                <a:cs typeface="Arial" panose="020B0604020202020204" pitchFamily="34" charset="0"/>
+              </a:rPr>
+              <a:t>?</a:t>
+            </a:r>
+            <a:br>
+              <a:rPr lang="en-US" sz="2200" dirty="0">
+                <a:highlight>
+                  <a:srgbClr val="00FFFF"/>
+                </a:highlight>
+                <a:latin typeface="Arial" panose="020B0604020202020204" pitchFamily="34" charset="0"/>
+                <a:cs typeface="Arial" panose="020B0604020202020204" pitchFamily="34" charset="0"/>
+              </a:rPr>
+            </a:br>
+            <a:r>
+              <a:rPr lang="en-US" sz="2200" dirty="0">
+                <a:latin typeface="Arial" panose="020B0604020202020204" pitchFamily="34" charset="0"/>
+                <a:cs typeface="Arial" panose="020B0604020202020204" pitchFamily="34" charset="0"/>
+              </a:rPr>
+              <a:t>	Is the experimental design sufficient for answering this question? </a:t>
+            </a:r>
+            <a:br>
+              <a:rPr lang="en-US" sz="2200" dirty="0">
+                <a:latin typeface="Arial" panose="020B0604020202020204" pitchFamily="34" charset="0"/>
+                <a:cs typeface="Arial" panose="020B0604020202020204" pitchFamily="34" charset="0"/>
+              </a:rPr>
+            </a:br>
+            <a:r>
+              <a:rPr lang="en-US" sz="2200" dirty="0">
+                <a:latin typeface="Arial" panose="020B0604020202020204" pitchFamily="34" charset="0"/>
+                <a:cs typeface="Arial" panose="020B0604020202020204" pitchFamily="34" charset="0"/>
+              </a:rPr>
+              <a:t> 		If not, what needs to be included? Controls, n, assumptions, </a:t>
+            </a:r>
+            <a:r>
+              <a:rPr lang="en-US" sz="2200" dirty="0" err="1">
+                <a:latin typeface="Arial" panose="020B0604020202020204" pitchFamily="34" charset="0"/>
+                <a:cs typeface="Arial" panose="020B0604020202020204" pitchFamily="34" charset="0"/>
+              </a:rPr>
+              <a:t>etc</a:t>
+            </a:r>
+            <a:endParaRPr lang="en-US" sz="2200" dirty="0">
+              <a:latin typeface="Arial" panose="020B0604020202020204" pitchFamily="34" charset="0"/>
+              <a:cs typeface="Arial" panose="020B0604020202020204" pitchFamily="34" charset="0"/>
+            </a:endParaRPr>
+          </a:p>
+          <a:p>
+            <a:pPr>
+              <a:lnSpc>
+                <a:spcPct val="150000"/>
+              </a:lnSpc>
+            </a:pPr>
+            <a:endParaRPr lang="en-US" sz="2200" dirty="0">
+              <a:latin typeface="Arial" panose="020B0604020202020204" pitchFamily="34" charset="0"/>
+              <a:cs typeface="Arial" panose="020B0604020202020204" pitchFamily="34" charset="0"/>
+            </a:endParaRPr>
+          </a:p>
+        </p:txBody>
+      </p:sp>
+    </p:spTree>
+    <p:extLst>
+      <p:ext uri="{BB962C8B-B14F-4D97-AF65-F5344CB8AC3E}">
+        <p14:creationId xmlns:p14="http://schemas.microsoft.com/office/powerpoint/2010/main" val="2364240087"/>
+      </p:ext>
+    </p:extLst>
+  </p:cSld>
+  <p:clrMapOvr>
+    <a:masterClrMapping/>
+  </p:clrMapOvr>
+</p:sld>
+</file>
+
+<file path=ppt/slides/slide11.xml><?xml version="1.0" encoding="utf-8"?>
+<p:sld xmlns:a="http://schemas.openxmlformats.org/drawingml/2006/main" xmlns:r="http://schemas.openxmlformats.org/officeDocument/2006/relationships" xmlns:p="http://schemas.openxmlformats.org/presentationml/2006/main">
+  <p:cSld>
+    <p:spTree>
+      <p:nvGrpSpPr>
+        <p:cNvPr id="1" name="">
+          <a:extLst>
+            <a:ext uri="{FF2B5EF4-FFF2-40B4-BE49-F238E27FC236}">
+              <a16:creationId xmlns:a16="http://schemas.microsoft.com/office/drawing/2014/main" id="{5B112624-82DC-B459-1BF0-E52ED156E98C}"/>
+            </a:ext>
+          </a:extLst>
+        </p:cNvPr>
+        <p:cNvGrpSpPr/>
+        <p:nvPr/>
+      </p:nvGrpSpPr>
+      <p:grpSpPr>
+        <a:xfrm>
+          <a:off x="0" y="0"/>
+          <a:ext cx="0" cy="0"/>
+          <a:chOff x="0" y="0"/>
+          <a:chExt cx="0" cy="0"/>
+        </a:xfrm>
+      </p:grpSpPr>
+      <p:sp>
+        <p:nvSpPr>
+          <p:cNvPr id="2" name="TextBox 1">
+            <a:extLst>
+              <a:ext uri="{FF2B5EF4-FFF2-40B4-BE49-F238E27FC236}">
+                <a16:creationId xmlns:a16="http://schemas.microsoft.com/office/drawing/2014/main" id="{88D62610-CA43-801C-1429-0BD02975689E}"/>
+              </a:ext>
+            </a:extLst>
+          </p:cNvPr>
+          <p:cNvSpPr txBox="1"/>
+          <p:nvPr/>
+        </p:nvSpPr>
+        <p:spPr>
+          <a:xfrm>
+            <a:off x="171450" y="0"/>
+            <a:ext cx="10877550" cy="739754"/>
+          </a:xfrm>
+          <a:prstGeom prst="rect">
+            <a:avLst/>
+          </a:prstGeom>
+          <a:noFill/>
+        </p:spPr>
+        <p:txBody>
+          <a:bodyPr wrap="square" rtlCol="0">
+            <a:spAutoFit/>
+          </a:bodyPr>
+          <a:lstStyle/>
+          <a:p>
+            <a:pPr>
+              <a:lnSpc>
+                <a:spcPct val="150000"/>
+              </a:lnSpc>
+            </a:pPr>
+            <a:r>
+              <a:rPr lang="en-US" sz="3200" b="1" dirty="0">
+                <a:latin typeface="Arial" panose="020B0604020202020204" pitchFamily="34" charset="0"/>
+                <a:cs typeface="Arial" panose="020B0604020202020204" pitchFamily="34" charset="0"/>
+              </a:rPr>
+              <a:t>Experimental Design, Statistics, and Visualizations</a:t>
+            </a:r>
+          </a:p>
+        </p:txBody>
+      </p:sp>
+      <p:sp>
+        <p:nvSpPr>
+          <p:cNvPr id="8" name="Slide Number Placeholder 7">
+            <a:extLst>
+              <a:ext uri="{FF2B5EF4-FFF2-40B4-BE49-F238E27FC236}">
+                <a16:creationId xmlns:a16="http://schemas.microsoft.com/office/drawing/2014/main" id="{CDF4345B-8988-C416-E5D2-D4FAE062DAAD}"/>
+              </a:ext>
+            </a:extLst>
+          </p:cNvPr>
+          <p:cNvSpPr>
+            <a:spLocks noGrp="1"/>
+          </p:cNvSpPr>
+          <p:nvPr>
+            <p:ph type="sldNum" sz="quarter" idx="12"/>
+          </p:nvPr>
+        </p:nvSpPr>
+        <p:spPr>
+          <a:xfrm>
+            <a:off x="9263062" y="6337300"/>
+            <a:ext cx="2743200" cy="365125"/>
+          </a:xfrm>
+        </p:spPr>
+        <p:txBody>
+          <a:bodyPr/>
+          <a:lstStyle/>
+          <a:p>
+            <a:fld id="{A7C13B74-2CD1-074C-84D2-FF26F00FE39E}" type="slidenum">
+              <a:rPr lang="en-US" sz="1400" smtClean="0">
+                <a:solidFill>
+                  <a:schemeClr val="tx1"/>
+                </a:solidFill>
+              </a:rPr>
+              <a:t>10</a:t>
+            </a:fld>
+            <a:endParaRPr lang="en-US" sz="1400" dirty="0">
+              <a:solidFill>
+                <a:schemeClr val="tx1"/>
+              </a:solidFill>
+            </a:endParaRPr>
+          </a:p>
+        </p:txBody>
+      </p:sp>
+      <p:sp>
+        <p:nvSpPr>
+          <p:cNvPr id="3" name="TextBox 2">
+            <a:extLst>
+              <a:ext uri="{FF2B5EF4-FFF2-40B4-BE49-F238E27FC236}">
+                <a16:creationId xmlns:a16="http://schemas.microsoft.com/office/drawing/2014/main" id="{509F5D5D-B043-9888-D1BF-AB9F7C664CE3}"/>
+              </a:ext>
+            </a:extLst>
+          </p:cNvPr>
+          <p:cNvSpPr txBox="1"/>
+          <p:nvPr/>
+        </p:nvSpPr>
+        <p:spPr>
+          <a:xfrm>
+            <a:off x="657224" y="1099644"/>
+            <a:ext cx="11534775" cy="3584379"/>
+          </a:xfrm>
+          <a:prstGeom prst="rect">
+            <a:avLst/>
+          </a:prstGeom>
+          <a:noFill/>
+        </p:spPr>
+        <p:txBody>
+          <a:bodyPr wrap="square" rtlCol="0">
+            <a:spAutoFit/>
+          </a:bodyPr>
+          <a:lstStyle/>
+          <a:p>
+            <a:pPr marL="457200" indent="-457200">
+              <a:lnSpc>
+                <a:spcPct val="150000"/>
+              </a:lnSpc>
+              <a:buFont typeface="+mj-lt"/>
+              <a:buAutoNum type="arabicPeriod"/>
+            </a:pPr>
+            <a:r>
+              <a:rPr lang="en-US" sz="2200" dirty="0">
+                <a:latin typeface="Arial" panose="020B0604020202020204" pitchFamily="34" charset="0"/>
+                <a:cs typeface="Arial" panose="020B0604020202020204" pitchFamily="34" charset="0"/>
+              </a:rPr>
+              <a:t>You can have a good question, and you also </a:t>
+            </a:r>
+            <a:r>
+              <a:rPr lang="en-US" sz="2200" u="sng" dirty="0">
+                <a:latin typeface="Arial" panose="020B0604020202020204" pitchFamily="34" charset="0"/>
+                <a:cs typeface="Arial" panose="020B0604020202020204" pitchFamily="34" charset="0"/>
+              </a:rPr>
+              <a:t>need</a:t>
+            </a:r>
+            <a:r>
+              <a:rPr lang="en-US" sz="2200" dirty="0">
+                <a:latin typeface="Arial" panose="020B0604020202020204" pitchFamily="34" charset="0"/>
+                <a:cs typeface="Arial" panose="020B0604020202020204" pitchFamily="34" charset="0"/>
+              </a:rPr>
+              <a:t> a good experimental design</a:t>
+            </a:r>
+            <a:br>
+              <a:rPr lang="en-US" sz="2200" dirty="0">
+                <a:latin typeface="Arial" panose="020B0604020202020204" pitchFamily="34" charset="0"/>
+                <a:cs typeface="Arial" panose="020B0604020202020204" pitchFamily="34" charset="0"/>
+              </a:rPr>
+            </a:br>
+            <a:r>
+              <a:rPr lang="en-US" sz="2200" dirty="0">
+                <a:highlight>
+                  <a:srgbClr val="00FFFF"/>
+                </a:highlight>
+                <a:latin typeface="Arial" panose="020B0604020202020204" pitchFamily="34" charset="0"/>
+                <a:cs typeface="Arial" panose="020B0604020202020204" pitchFamily="34" charset="0"/>
+              </a:rPr>
+              <a:t>Does the venom microbial community differ across the gland of </a:t>
+            </a:r>
+            <a:r>
+              <a:rPr lang="en-US" sz="2200" i="1" dirty="0">
+                <a:highlight>
+                  <a:srgbClr val="00FFFF"/>
+                </a:highlight>
+                <a:latin typeface="Arial" panose="020B0604020202020204" pitchFamily="34" charset="0"/>
+                <a:cs typeface="Arial" panose="020B0604020202020204" pitchFamily="34" charset="0"/>
+              </a:rPr>
+              <a:t>C. </a:t>
+            </a:r>
+            <a:r>
+              <a:rPr lang="en-US" sz="2200" i="1" dirty="0" err="1">
+                <a:highlight>
+                  <a:srgbClr val="00FFFF"/>
+                </a:highlight>
+                <a:latin typeface="Arial" panose="020B0604020202020204" pitchFamily="34" charset="0"/>
+                <a:cs typeface="Arial" panose="020B0604020202020204" pitchFamily="34" charset="0"/>
+              </a:rPr>
+              <a:t>californiconus</a:t>
+            </a:r>
+            <a:r>
+              <a:rPr lang="en-US" sz="2200" dirty="0">
+                <a:highlight>
+                  <a:srgbClr val="00FFFF"/>
+                </a:highlight>
+                <a:latin typeface="Arial" panose="020B0604020202020204" pitchFamily="34" charset="0"/>
+                <a:cs typeface="Arial" panose="020B0604020202020204" pitchFamily="34" charset="0"/>
+              </a:rPr>
+              <a:t>?</a:t>
+            </a:r>
+            <a:br>
+              <a:rPr lang="en-US" sz="2200" dirty="0">
+                <a:highlight>
+                  <a:srgbClr val="00FFFF"/>
+                </a:highlight>
+                <a:latin typeface="Arial" panose="020B0604020202020204" pitchFamily="34" charset="0"/>
+                <a:cs typeface="Arial" panose="020B0604020202020204" pitchFamily="34" charset="0"/>
+              </a:rPr>
+            </a:br>
+            <a:r>
+              <a:rPr lang="en-US" sz="2200" dirty="0">
+                <a:latin typeface="Arial" panose="020B0604020202020204" pitchFamily="34" charset="0"/>
+                <a:cs typeface="Arial" panose="020B0604020202020204" pitchFamily="34" charset="0"/>
+              </a:rPr>
+              <a:t>	Is the experimental design sufficient for answering this question? </a:t>
+            </a:r>
+            <a:br>
+              <a:rPr lang="en-US" sz="2200" dirty="0">
+                <a:latin typeface="Arial" panose="020B0604020202020204" pitchFamily="34" charset="0"/>
+                <a:cs typeface="Arial" panose="020B0604020202020204" pitchFamily="34" charset="0"/>
+              </a:rPr>
+            </a:br>
+            <a:r>
+              <a:rPr lang="en-US" sz="2200" dirty="0">
+                <a:latin typeface="Arial" panose="020B0604020202020204" pitchFamily="34" charset="0"/>
+                <a:cs typeface="Arial" panose="020B0604020202020204" pitchFamily="34" charset="0"/>
+              </a:rPr>
+              <a:t> 		If not, what needs to be included? Controls, n, assumptions, </a:t>
+            </a:r>
+            <a:r>
+              <a:rPr lang="en-US" sz="2200" dirty="0" err="1">
+                <a:latin typeface="Arial" panose="020B0604020202020204" pitchFamily="34" charset="0"/>
+                <a:cs typeface="Arial" panose="020B0604020202020204" pitchFamily="34" charset="0"/>
+              </a:rPr>
+              <a:t>etc</a:t>
+            </a:r>
+            <a:endParaRPr lang="en-US" sz="2200" dirty="0">
+              <a:latin typeface="Arial" panose="020B0604020202020204" pitchFamily="34" charset="0"/>
+              <a:cs typeface="Arial" panose="020B0604020202020204" pitchFamily="34" charset="0"/>
+            </a:endParaRPr>
+          </a:p>
+          <a:p>
+            <a:pPr marL="457200" indent="-457200">
+              <a:lnSpc>
+                <a:spcPct val="150000"/>
+              </a:lnSpc>
+              <a:buFont typeface="+mj-lt"/>
+              <a:buAutoNum type="arabicPeriod"/>
+            </a:pPr>
+            <a:endParaRPr lang="en-US" sz="2200" dirty="0">
+              <a:latin typeface="Arial" panose="020B0604020202020204" pitchFamily="34" charset="0"/>
+              <a:cs typeface="Arial" panose="020B0604020202020204" pitchFamily="34" charset="0"/>
+            </a:endParaRPr>
+          </a:p>
+          <a:p>
+            <a:pPr marL="457200" indent="-457200">
+              <a:lnSpc>
+                <a:spcPct val="150000"/>
+              </a:lnSpc>
+              <a:buFont typeface="+mj-lt"/>
+              <a:buAutoNum type="arabicPeriod"/>
+            </a:pPr>
+            <a:r>
+              <a:rPr lang="en-US" sz="2200" dirty="0">
+                <a:latin typeface="Arial" panose="020B0604020202020204" pitchFamily="34" charset="0"/>
+                <a:cs typeface="Arial" panose="020B0604020202020204" pitchFamily="34" charset="0"/>
+              </a:rPr>
+              <a:t>Just because you have a p-value, doesn’t mean it’s real (or that it means something)</a:t>
+            </a:r>
+            <a:br>
+              <a:rPr lang="en-US" sz="2200" dirty="0">
+                <a:latin typeface="Arial" panose="020B0604020202020204" pitchFamily="34" charset="0"/>
+                <a:cs typeface="Arial" panose="020B0604020202020204" pitchFamily="34" charset="0"/>
+              </a:rPr>
+            </a:br>
+            <a:endParaRPr lang="en-US" sz="2200" dirty="0">
+              <a:latin typeface="Arial" panose="020B0604020202020204" pitchFamily="34" charset="0"/>
+              <a:cs typeface="Arial" panose="020B0604020202020204" pitchFamily="34" charset="0"/>
+            </a:endParaRPr>
+          </a:p>
+        </p:txBody>
+      </p:sp>
+    </p:spTree>
+    <p:extLst>
+      <p:ext uri="{BB962C8B-B14F-4D97-AF65-F5344CB8AC3E}">
+        <p14:creationId xmlns:p14="http://schemas.microsoft.com/office/powerpoint/2010/main" val="3629887579"/>
+      </p:ext>
+    </p:extLst>
+  </p:cSld>
+  <p:clrMapOvr>
+    <a:masterClrMapping/>
+  </p:clrMapOvr>
+</p:sld>
+</file>
+
+<file path=ppt/slides/slide12.xml><?xml version="1.0" encoding="utf-8"?>
+<p:sld xmlns:a="http://schemas.openxmlformats.org/drawingml/2006/main" xmlns:r="http://schemas.openxmlformats.org/officeDocument/2006/relationships" xmlns:p="http://schemas.openxmlformats.org/presentationml/2006/main">
+  <p:cSld>
+    <p:spTree>
+      <p:nvGrpSpPr>
+        <p:cNvPr id="1" name="">
+          <a:extLst>
+            <a:ext uri="{FF2B5EF4-FFF2-40B4-BE49-F238E27FC236}">
+              <a16:creationId xmlns:a16="http://schemas.microsoft.com/office/drawing/2014/main" id="{E77A9C7F-381E-5DE4-1813-CF7A96E81B65}"/>
+            </a:ext>
+          </a:extLst>
+        </p:cNvPr>
+        <p:cNvGrpSpPr/>
+        <p:nvPr/>
+      </p:nvGrpSpPr>
+      <p:grpSpPr>
+        <a:xfrm>
+          <a:off x="0" y="0"/>
+          <a:ext cx="0" cy="0"/>
+          <a:chOff x="0" y="0"/>
+          <a:chExt cx="0" cy="0"/>
+        </a:xfrm>
+      </p:grpSpPr>
+      <p:sp>
+        <p:nvSpPr>
+          <p:cNvPr id="2" name="TextBox 1">
+            <a:extLst>
+              <a:ext uri="{FF2B5EF4-FFF2-40B4-BE49-F238E27FC236}">
+                <a16:creationId xmlns:a16="http://schemas.microsoft.com/office/drawing/2014/main" id="{42D71262-E9D0-EC5E-0CC4-CC5C26CC5DC3}"/>
+              </a:ext>
+            </a:extLst>
+          </p:cNvPr>
+          <p:cNvSpPr txBox="1"/>
+          <p:nvPr/>
+        </p:nvSpPr>
+        <p:spPr>
+          <a:xfrm>
+            <a:off x="171450" y="0"/>
+            <a:ext cx="10877550" cy="739754"/>
+          </a:xfrm>
+          <a:prstGeom prst="rect">
+            <a:avLst/>
+          </a:prstGeom>
+          <a:noFill/>
+        </p:spPr>
+        <p:txBody>
+          <a:bodyPr wrap="square" rtlCol="0">
+            <a:spAutoFit/>
+          </a:bodyPr>
+          <a:lstStyle/>
+          <a:p>
+            <a:pPr>
+              <a:lnSpc>
+                <a:spcPct val="150000"/>
+              </a:lnSpc>
+            </a:pPr>
+            <a:r>
+              <a:rPr lang="en-US" sz="3200" b="1" dirty="0">
+                <a:latin typeface="Arial" panose="020B0604020202020204" pitchFamily="34" charset="0"/>
+                <a:cs typeface="Arial" panose="020B0604020202020204" pitchFamily="34" charset="0"/>
+              </a:rPr>
+              <a:t>Experimental Design, Statistics, and Visualizations</a:t>
+            </a:r>
+          </a:p>
+        </p:txBody>
+      </p:sp>
+      <p:sp>
+        <p:nvSpPr>
+          <p:cNvPr id="8" name="Slide Number Placeholder 7">
+            <a:extLst>
+              <a:ext uri="{FF2B5EF4-FFF2-40B4-BE49-F238E27FC236}">
+                <a16:creationId xmlns:a16="http://schemas.microsoft.com/office/drawing/2014/main" id="{1D393352-7395-32FC-B554-08C3BB0DE569}"/>
+              </a:ext>
+            </a:extLst>
+          </p:cNvPr>
+          <p:cNvSpPr>
+            <a:spLocks noGrp="1"/>
+          </p:cNvSpPr>
+          <p:nvPr>
+            <p:ph type="sldNum" sz="quarter" idx="12"/>
+          </p:nvPr>
+        </p:nvSpPr>
+        <p:spPr>
+          <a:xfrm>
+            <a:off x="9263062" y="6337300"/>
+            <a:ext cx="2743200" cy="365125"/>
+          </a:xfrm>
+        </p:spPr>
+        <p:txBody>
+          <a:bodyPr/>
+          <a:lstStyle/>
+          <a:p>
+            <a:fld id="{A7C13B74-2CD1-074C-84D2-FF26F00FE39E}" type="slidenum">
+              <a:rPr lang="en-US" sz="1400" smtClean="0">
+                <a:solidFill>
+                  <a:schemeClr val="tx1"/>
+                </a:solidFill>
+              </a:rPr>
+              <a:t>11</a:t>
+            </a:fld>
+            <a:endParaRPr lang="en-US" sz="1400" dirty="0">
+              <a:solidFill>
+                <a:schemeClr val="tx1"/>
+              </a:solidFill>
+            </a:endParaRPr>
+          </a:p>
+        </p:txBody>
+      </p:sp>
+      <p:sp>
+        <p:nvSpPr>
+          <p:cNvPr id="3" name="TextBox 2">
+            <a:extLst>
+              <a:ext uri="{FF2B5EF4-FFF2-40B4-BE49-F238E27FC236}">
+                <a16:creationId xmlns:a16="http://schemas.microsoft.com/office/drawing/2014/main" id="{356431D3-1988-D34F-F26B-43065962BAAE}"/>
+              </a:ext>
+            </a:extLst>
+          </p:cNvPr>
+          <p:cNvSpPr txBox="1"/>
+          <p:nvPr/>
+        </p:nvSpPr>
+        <p:spPr>
+          <a:xfrm>
+            <a:off x="657224" y="1099644"/>
+            <a:ext cx="11534775" cy="4092211"/>
+          </a:xfrm>
+          <a:prstGeom prst="rect">
+            <a:avLst/>
+          </a:prstGeom>
+          <a:noFill/>
+        </p:spPr>
+        <p:txBody>
+          <a:bodyPr wrap="square" rtlCol="0">
+            <a:spAutoFit/>
+          </a:bodyPr>
+          <a:lstStyle/>
+          <a:p>
+            <a:pPr marL="457200" indent="-457200">
+              <a:lnSpc>
+                <a:spcPct val="150000"/>
+              </a:lnSpc>
+              <a:buFont typeface="+mj-lt"/>
+              <a:buAutoNum type="arabicPeriod"/>
+            </a:pPr>
+            <a:r>
+              <a:rPr lang="en-US" sz="2200" dirty="0">
+                <a:latin typeface="Arial" panose="020B0604020202020204" pitchFamily="34" charset="0"/>
+                <a:cs typeface="Arial" panose="020B0604020202020204" pitchFamily="34" charset="0"/>
+              </a:rPr>
+              <a:t>You can have a good question, and you also </a:t>
+            </a:r>
+            <a:r>
+              <a:rPr lang="en-US" sz="2200" u="sng" dirty="0">
+                <a:latin typeface="Arial" panose="020B0604020202020204" pitchFamily="34" charset="0"/>
+                <a:cs typeface="Arial" panose="020B0604020202020204" pitchFamily="34" charset="0"/>
+              </a:rPr>
+              <a:t>need</a:t>
+            </a:r>
+            <a:r>
+              <a:rPr lang="en-US" sz="2200" dirty="0">
+                <a:latin typeface="Arial" panose="020B0604020202020204" pitchFamily="34" charset="0"/>
+                <a:cs typeface="Arial" panose="020B0604020202020204" pitchFamily="34" charset="0"/>
+              </a:rPr>
+              <a:t> a good experimental design</a:t>
+            </a:r>
+            <a:br>
+              <a:rPr lang="en-US" sz="2200" dirty="0">
+                <a:latin typeface="Arial" panose="020B0604020202020204" pitchFamily="34" charset="0"/>
+                <a:cs typeface="Arial" panose="020B0604020202020204" pitchFamily="34" charset="0"/>
+              </a:rPr>
+            </a:br>
+            <a:r>
+              <a:rPr lang="en-US" sz="2200" dirty="0">
+                <a:highlight>
+                  <a:srgbClr val="00FFFF"/>
+                </a:highlight>
+                <a:latin typeface="Arial" panose="020B0604020202020204" pitchFamily="34" charset="0"/>
+                <a:cs typeface="Arial" panose="020B0604020202020204" pitchFamily="34" charset="0"/>
+              </a:rPr>
+              <a:t>Does the venom microbial community differ across the gland of </a:t>
+            </a:r>
+            <a:r>
+              <a:rPr lang="en-US" sz="2200" i="1" dirty="0">
+                <a:highlight>
+                  <a:srgbClr val="00FFFF"/>
+                </a:highlight>
+                <a:latin typeface="Arial" panose="020B0604020202020204" pitchFamily="34" charset="0"/>
+                <a:cs typeface="Arial" panose="020B0604020202020204" pitchFamily="34" charset="0"/>
+              </a:rPr>
+              <a:t>C. </a:t>
+            </a:r>
+            <a:r>
+              <a:rPr lang="en-US" sz="2200" i="1" dirty="0" err="1">
+                <a:highlight>
+                  <a:srgbClr val="00FFFF"/>
+                </a:highlight>
+                <a:latin typeface="Arial" panose="020B0604020202020204" pitchFamily="34" charset="0"/>
+                <a:cs typeface="Arial" panose="020B0604020202020204" pitchFamily="34" charset="0"/>
+              </a:rPr>
+              <a:t>californiconus</a:t>
+            </a:r>
+            <a:r>
+              <a:rPr lang="en-US" sz="2200" dirty="0">
+                <a:highlight>
+                  <a:srgbClr val="00FFFF"/>
+                </a:highlight>
+                <a:latin typeface="Arial" panose="020B0604020202020204" pitchFamily="34" charset="0"/>
+                <a:cs typeface="Arial" panose="020B0604020202020204" pitchFamily="34" charset="0"/>
+              </a:rPr>
+              <a:t>?</a:t>
+            </a:r>
+            <a:br>
+              <a:rPr lang="en-US" sz="2200" dirty="0">
+                <a:highlight>
+                  <a:srgbClr val="00FFFF"/>
+                </a:highlight>
+                <a:latin typeface="Arial" panose="020B0604020202020204" pitchFamily="34" charset="0"/>
+                <a:cs typeface="Arial" panose="020B0604020202020204" pitchFamily="34" charset="0"/>
+              </a:rPr>
+            </a:br>
+            <a:r>
+              <a:rPr lang="en-US" sz="2200" dirty="0">
+                <a:latin typeface="Arial" panose="020B0604020202020204" pitchFamily="34" charset="0"/>
+                <a:cs typeface="Arial" panose="020B0604020202020204" pitchFamily="34" charset="0"/>
+              </a:rPr>
+              <a:t>	Is the experimental design sufficient for answering this question? </a:t>
+            </a:r>
+            <a:br>
+              <a:rPr lang="en-US" sz="2200" dirty="0">
+                <a:latin typeface="Arial" panose="020B0604020202020204" pitchFamily="34" charset="0"/>
+                <a:cs typeface="Arial" panose="020B0604020202020204" pitchFamily="34" charset="0"/>
+              </a:rPr>
+            </a:br>
+            <a:r>
+              <a:rPr lang="en-US" sz="2200" dirty="0">
+                <a:latin typeface="Arial" panose="020B0604020202020204" pitchFamily="34" charset="0"/>
+                <a:cs typeface="Arial" panose="020B0604020202020204" pitchFamily="34" charset="0"/>
+              </a:rPr>
+              <a:t> 		If not, what needs to be included? Controls, n, assumptions, </a:t>
+            </a:r>
+            <a:r>
+              <a:rPr lang="en-US" sz="2200" dirty="0" err="1">
+                <a:latin typeface="Arial" panose="020B0604020202020204" pitchFamily="34" charset="0"/>
+                <a:cs typeface="Arial" panose="020B0604020202020204" pitchFamily="34" charset="0"/>
+              </a:rPr>
+              <a:t>etc</a:t>
+            </a:r>
+            <a:endParaRPr lang="en-US" sz="2200" dirty="0">
+              <a:latin typeface="Arial" panose="020B0604020202020204" pitchFamily="34" charset="0"/>
+              <a:cs typeface="Arial" panose="020B0604020202020204" pitchFamily="34" charset="0"/>
+            </a:endParaRPr>
+          </a:p>
+          <a:p>
+            <a:pPr marL="457200" indent="-457200">
+              <a:lnSpc>
+                <a:spcPct val="150000"/>
+              </a:lnSpc>
+              <a:buFont typeface="+mj-lt"/>
+              <a:buAutoNum type="arabicPeriod"/>
+            </a:pPr>
+            <a:endParaRPr lang="en-US" sz="2200" dirty="0">
+              <a:latin typeface="Arial" panose="020B0604020202020204" pitchFamily="34" charset="0"/>
+              <a:cs typeface="Arial" panose="020B0604020202020204" pitchFamily="34" charset="0"/>
+            </a:endParaRPr>
+          </a:p>
+          <a:p>
+            <a:pPr marL="457200" indent="-457200">
+              <a:lnSpc>
+                <a:spcPct val="150000"/>
+              </a:lnSpc>
+              <a:buFont typeface="+mj-lt"/>
+              <a:buAutoNum type="arabicPeriod"/>
+            </a:pPr>
+            <a:r>
+              <a:rPr lang="en-US" sz="2200" dirty="0">
+                <a:latin typeface="Arial" panose="020B0604020202020204" pitchFamily="34" charset="0"/>
+                <a:cs typeface="Arial" panose="020B0604020202020204" pitchFamily="34" charset="0"/>
+              </a:rPr>
+              <a:t>Just because you have a p-value, doesn’t mean it’s real (or that it means something)</a:t>
+            </a:r>
+            <a:br>
+              <a:rPr lang="en-US" sz="2200" dirty="0">
+                <a:latin typeface="Arial" panose="020B0604020202020204" pitchFamily="34" charset="0"/>
+                <a:cs typeface="Arial" panose="020B0604020202020204" pitchFamily="34" charset="0"/>
+              </a:rPr>
+            </a:br>
+            <a:r>
+              <a:rPr lang="en-US" sz="2200" dirty="0">
+                <a:highlight>
+                  <a:srgbClr val="00FFFF"/>
+                </a:highlight>
+                <a:latin typeface="Arial" panose="020B0604020202020204" pitchFamily="34" charset="0"/>
+                <a:cs typeface="Arial" panose="020B0604020202020204" pitchFamily="34" charset="0"/>
+              </a:rPr>
+              <a:t>How do trust the results we see? </a:t>
+            </a:r>
+            <a:br>
+              <a:rPr lang="en-US" sz="2200" dirty="0">
+                <a:latin typeface="Arial" panose="020B0604020202020204" pitchFamily="34" charset="0"/>
+                <a:cs typeface="Arial" panose="020B0604020202020204" pitchFamily="34" charset="0"/>
+              </a:rPr>
+            </a:br>
+            <a:r>
+              <a:rPr lang="en-US" sz="2200" dirty="0">
+                <a:latin typeface="Arial" panose="020B0604020202020204" pitchFamily="34" charset="0"/>
+                <a:cs typeface="Arial" panose="020B0604020202020204" pitchFamily="34" charset="0"/>
+              </a:rPr>
+              <a:t> 	Why statistics are important. And the difference of visuals vs results</a:t>
+            </a:r>
+          </a:p>
+        </p:txBody>
+      </p:sp>
+    </p:spTree>
+    <p:extLst>
+      <p:ext uri="{BB962C8B-B14F-4D97-AF65-F5344CB8AC3E}">
+        <p14:creationId xmlns:p14="http://schemas.microsoft.com/office/powerpoint/2010/main" val="1241989413"/>
+      </p:ext>
+    </p:extLst>
+  </p:cSld>
+  <p:clrMapOvr>
+    <a:masterClrMapping/>
+  </p:clrMapOvr>
+</p:sld>
+</file>
+
+<file path=ppt/slides/slide13.xml><?xml version="1.0" encoding="utf-8"?>
+<p:sld xmlns:a="http://schemas.openxmlformats.org/drawingml/2006/main" xmlns:r="http://schemas.openxmlformats.org/officeDocument/2006/relationships" xmlns:p="http://schemas.openxmlformats.org/presentationml/2006/main">
+  <p:cSld>
+    <p:spTree>
+      <p:nvGrpSpPr>
+        <p:cNvPr id="1" name="">
+          <a:extLst>
+            <a:ext uri="{FF2B5EF4-FFF2-40B4-BE49-F238E27FC236}">
+              <a16:creationId xmlns:a16="http://schemas.microsoft.com/office/drawing/2014/main" id="{6C089280-FC7A-B37C-9B5A-CCBE098A4D11}"/>
+            </a:ext>
+          </a:extLst>
+        </p:cNvPr>
+        <p:cNvGrpSpPr/>
+        <p:nvPr/>
+      </p:nvGrpSpPr>
+      <p:grpSpPr>
+        <a:xfrm>
+          <a:off x="0" y="0"/>
+          <a:ext cx="0" cy="0"/>
+          <a:chOff x="0" y="0"/>
+          <a:chExt cx="0" cy="0"/>
+        </a:xfrm>
+      </p:grpSpPr>
+      <p:pic>
+        <p:nvPicPr>
+          <p:cNvPr id="4" name="Picture 3" descr="A screenshot of a computer&#10;&#10;AI-generated content may be incorrect.">
+            <a:extLst>
+              <a:ext uri="{FF2B5EF4-FFF2-40B4-BE49-F238E27FC236}">
+                <a16:creationId xmlns:a16="http://schemas.microsoft.com/office/drawing/2014/main" id="{64A9BB0A-5C9C-FE60-95E5-30602024B05A}"/>
+              </a:ext>
+            </a:extLst>
+          </p:cNvPr>
+          <p:cNvPicPr>
+            <a:picLocks noChangeAspect="1"/>
+          </p:cNvPicPr>
+          <p:nvPr/>
+        </p:nvPicPr>
+        <p:blipFill>
+          <a:blip r:embed="rId3"/>
+          <a:srcRect l="965" t="23433" r="49381"/>
+          <a:stretch>
+            <a:fillRect/>
+          </a:stretch>
+        </p:blipFill>
+        <p:spPr>
+          <a:xfrm>
+            <a:off x="185738" y="844784"/>
+            <a:ext cx="5627517" cy="5583190"/>
+          </a:xfrm>
+          <a:prstGeom prst="rect">
+            <a:avLst/>
+          </a:prstGeom>
+        </p:spPr>
+      </p:pic>
+      <p:sp>
+        <p:nvSpPr>
+          <p:cNvPr id="6" name="TextBox 5">
+            <a:extLst>
+              <a:ext uri="{FF2B5EF4-FFF2-40B4-BE49-F238E27FC236}">
+                <a16:creationId xmlns:a16="http://schemas.microsoft.com/office/drawing/2014/main" id="{0126572D-17B9-062E-E813-16BE286C5850}"/>
+              </a:ext>
+            </a:extLst>
+          </p:cNvPr>
+          <p:cNvSpPr txBox="1"/>
+          <p:nvPr/>
+        </p:nvSpPr>
+        <p:spPr>
+          <a:xfrm>
+            <a:off x="1233354" y="6289866"/>
+            <a:ext cx="1416423" cy="307777"/>
+          </a:xfrm>
+          <a:prstGeom prst="rect">
+            <a:avLst/>
+          </a:prstGeom>
+          <a:solidFill>
+            <a:schemeClr val="bg1"/>
+          </a:solidFill>
+        </p:spPr>
+        <p:txBody>
+          <a:bodyPr wrap="square" rtlCol="0">
+            <a:spAutoFit/>
+          </a:bodyPr>
+          <a:lstStyle/>
+          <a:p>
+            <a:pPr algn="ctr"/>
+            <a:r>
+              <a:rPr lang="en-US" sz="1400" dirty="0" err="1">
+                <a:solidFill>
+                  <a:schemeClr val="accent5">
+                    <a:lumMod val="75000"/>
+                  </a:schemeClr>
+                </a:solidFill>
+                <a:latin typeface="Arial" panose="020B0604020202020204" pitchFamily="34" charset="0"/>
+                <a:cs typeface="Arial" panose="020B0604020202020204" pitchFamily="34" charset="0"/>
+              </a:rPr>
+              <a:t>Sample_Type</a:t>
+            </a:r>
+            <a:endParaRPr lang="en-US" sz="1400" dirty="0">
+              <a:solidFill>
+                <a:schemeClr val="accent5">
+                  <a:lumMod val="75000"/>
+                </a:schemeClr>
+              </a:solidFill>
+              <a:latin typeface="Arial" panose="020B0604020202020204" pitchFamily="34" charset="0"/>
+              <a:cs typeface="Arial" panose="020B0604020202020204" pitchFamily="34" charset="0"/>
+            </a:endParaRPr>
+          </a:p>
+        </p:txBody>
+      </p:sp>
+      <p:sp>
+        <p:nvSpPr>
+          <p:cNvPr id="9" name="Left Brace 8">
+            <a:extLst>
+              <a:ext uri="{FF2B5EF4-FFF2-40B4-BE49-F238E27FC236}">
+                <a16:creationId xmlns:a16="http://schemas.microsoft.com/office/drawing/2014/main" id="{E2C38033-E636-BCA6-8043-07ACC45D0495}"/>
+              </a:ext>
+            </a:extLst>
+          </p:cNvPr>
+          <p:cNvSpPr/>
+          <p:nvPr/>
+        </p:nvSpPr>
+        <p:spPr>
+          <a:xfrm rot="16200000">
+            <a:off x="1819613" y="4872603"/>
+            <a:ext cx="243906" cy="2776817"/>
+          </a:xfrm>
+          <a:prstGeom prst="leftBrace">
+            <a:avLst/>
+          </a:prstGeom>
+          <a:ln>
+            <a:solidFill>
+              <a:schemeClr val="accent5">
+                <a:lumMod val="75000"/>
+              </a:schemeClr>
+            </a:solidFill>
+          </a:ln>
+        </p:spPr>
+        <p:style>
+          <a:lnRef idx="2">
+            <a:schemeClr val="accent1"/>
+          </a:lnRef>
+          <a:fillRef idx="0">
+            <a:schemeClr val="accent1"/>
+          </a:fillRef>
+          <a:effectRef idx="1">
+            <a:schemeClr val="accent1"/>
+          </a:effectRef>
+          <a:fontRef idx="minor">
+            <a:schemeClr val="tx1"/>
+          </a:fontRef>
+        </p:style>
+        <p:txBody>
+          <a:bodyPr rtlCol="0" anchor="ctr"/>
+          <a:lstStyle/>
+          <a:p>
+            <a:pPr algn="ctr"/>
+            <a:endParaRPr lang="en-US"/>
+          </a:p>
+        </p:txBody>
+      </p:sp>
+      <p:cxnSp>
+        <p:nvCxnSpPr>
+          <p:cNvPr id="11" name="Straight Connector 10">
+            <a:extLst>
+              <a:ext uri="{FF2B5EF4-FFF2-40B4-BE49-F238E27FC236}">
+                <a16:creationId xmlns:a16="http://schemas.microsoft.com/office/drawing/2014/main" id="{95CE6784-57F3-C2F6-A6EE-16BAC14BCFC0}"/>
+              </a:ext>
+            </a:extLst>
+          </p:cNvPr>
+          <p:cNvCxnSpPr>
+            <a:cxnSpLocks/>
+          </p:cNvCxnSpPr>
+          <p:nvPr/>
+        </p:nvCxnSpPr>
+        <p:spPr>
+          <a:xfrm>
+            <a:off x="1233354" y="993502"/>
+            <a:ext cx="0" cy="4410635"/>
+          </a:xfrm>
+          <a:prstGeom prst="line">
+            <a:avLst/>
+          </a:prstGeom>
+          <a:ln w="28575"/>
+        </p:spPr>
+        <p:style>
+          <a:lnRef idx="2">
+            <a:schemeClr val="dk1"/>
+          </a:lnRef>
+          <a:fillRef idx="0">
+            <a:schemeClr val="dk1"/>
+          </a:fillRef>
+          <a:effectRef idx="1">
+            <a:schemeClr val="dk1"/>
+          </a:effectRef>
+          <a:fontRef idx="minor">
+            <a:schemeClr val="tx1"/>
+          </a:fontRef>
+        </p:style>
+      </p:cxnSp>
+      <p:cxnSp>
+        <p:nvCxnSpPr>
+          <p:cNvPr id="16" name="Straight Connector 15">
+            <a:extLst>
+              <a:ext uri="{FF2B5EF4-FFF2-40B4-BE49-F238E27FC236}">
+                <a16:creationId xmlns:a16="http://schemas.microsoft.com/office/drawing/2014/main" id="{2723D22F-768D-0268-524F-99D3FFA0B635}"/>
+              </a:ext>
+            </a:extLst>
+          </p:cNvPr>
+          <p:cNvCxnSpPr>
+            <a:cxnSpLocks/>
+          </p:cNvCxnSpPr>
+          <p:nvPr/>
+        </p:nvCxnSpPr>
+        <p:spPr>
+          <a:xfrm>
+            <a:off x="1372307" y="993502"/>
+            <a:ext cx="0" cy="4410635"/>
+          </a:xfrm>
+          <a:prstGeom prst="line">
+            <a:avLst/>
+          </a:prstGeom>
+          <a:ln w="28575"/>
+        </p:spPr>
+        <p:style>
+          <a:lnRef idx="2">
+            <a:schemeClr val="dk1"/>
+          </a:lnRef>
+          <a:fillRef idx="0">
+            <a:schemeClr val="dk1"/>
+          </a:fillRef>
+          <a:effectRef idx="1">
+            <a:schemeClr val="dk1"/>
+          </a:effectRef>
+          <a:fontRef idx="minor">
+            <a:schemeClr val="tx1"/>
+          </a:fontRef>
+        </p:style>
+      </p:cxnSp>
+      <p:cxnSp>
+        <p:nvCxnSpPr>
+          <p:cNvPr id="17" name="Straight Connector 16">
+            <a:extLst>
+              <a:ext uri="{FF2B5EF4-FFF2-40B4-BE49-F238E27FC236}">
+                <a16:creationId xmlns:a16="http://schemas.microsoft.com/office/drawing/2014/main" id="{CE040614-5AA7-346B-E275-E53D624E66B8}"/>
+              </a:ext>
+            </a:extLst>
+          </p:cNvPr>
+          <p:cNvCxnSpPr>
+            <a:cxnSpLocks/>
+          </p:cNvCxnSpPr>
+          <p:nvPr/>
+        </p:nvCxnSpPr>
+        <p:spPr>
+          <a:xfrm>
+            <a:off x="1943807" y="993502"/>
+            <a:ext cx="0" cy="4410635"/>
+          </a:xfrm>
+          <a:prstGeom prst="line">
+            <a:avLst/>
+          </a:prstGeom>
+          <a:ln w="28575"/>
+        </p:spPr>
+        <p:style>
+          <a:lnRef idx="2">
+            <a:schemeClr val="dk1"/>
+          </a:lnRef>
+          <a:fillRef idx="0">
+            <a:schemeClr val="dk1"/>
+          </a:fillRef>
+          <a:effectRef idx="1">
+            <a:schemeClr val="dk1"/>
+          </a:effectRef>
+          <a:fontRef idx="minor">
+            <a:schemeClr val="tx1"/>
+          </a:fontRef>
+        </p:style>
+      </p:cxnSp>
+      <p:cxnSp>
+        <p:nvCxnSpPr>
+          <p:cNvPr id="18" name="Straight Connector 17">
+            <a:extLst>
+              <a:ext uri="{FF2B5EF4-FFF2-40B4-BE49-F238E27FC236}">
+                <a16:creationId xmlns:a16="http://schemas.microsoft.com/office/drawing/2014/main" id="{CE0AF89F-EF8F-DA59-9E75-5A5E425654B2}"/>
+              </a:ext>
+            </a:extLst>
+          </p:cNvPr>
+          <p:cNvCxnSpPr>
+            <a:cxnSpLocks/>
+          </p:cNvCxnSpPr>
+          <p:nvPr/>
+        </p:nvCxnSpPr>
+        <p:spPr>
+          <a:xfrm>
+            <a:off x="2608316" y="993502"/>
+            <a:ext cx="0" cy="4410635"/>
+          </a:xfrm>
+          <a:prstGeom prst="line">
+            <a:avLst/>
+          </a:prstGeom>
+          <a:ln w="28575"/>
+        </p:spPr>
+        <p:style>
+          <a:lnRef idx="2">
+            <a:schemeClr val="dk1"/>
+          </a:lnRef>
+          <a:fillRef idx="0">
+            <a:schemeClr val="dk1"/>
+          </a:fillRef>
+          <a:effectRef idx="1">
+            <a:schemeClr val="dk1"/>
+          </a:effectRef>
+          <a:fontRef idx="minor">
+            <a:schemeClr val="tx1"/>
+          </a:fontRef>
+        </p:style>
+      </p:cxnSp>
+      <p:sp>
+        <p:nvSpPr>
+          <p:cNvPr id="2" name="TextBox 1">
+            <a:extLst>
+              <a:ext uri="{FF2B5EF4-FFF2-40B4-BE49-F238E27FC236}">
+                <a16:creationId xmlns:a16="http://schemas.microsoft.com/office/drawing/2014/main" id="{0B94CA20-82A9-BFEF-4ECB-B6B0F26ED4BD}"/>
+              </a:ext>
+            </a:extLst>
+          </p:cNvPr>
+          <p:cNvSpPr txBox="1"/>
+          <p:nvPr/>
+        </p:nvSpPr>
+        <p:spPr>
+          <a:xfrm>
+            <a:off x="171449" y="0"/>
+            <a:ext cx="11512545" cy="739754"/>
+          </a:xfrm>
+          <a:prstGeom prst="rect">
+            <a:avLst/>
+          </a:prstGeom>
+          <a:noFill/>
+        </p:spPr>
+        <p:txBody>
+          <a:bodyPr wrap="square" rtlCol="0">
+            <a:spAutoFit/>
+          </a:bodyPr>
+          <a:lstStyle/>
+          <a:p>
+            <a:pPr>
+              <a:lnSpc>
+                <a:spcPct val="150000"/>
+              </a:lnSpc>
+            </a:pPr>
+            <a:r>
+              <a:rPr lang="en-US" sz="3200" b="1" dirty="0">
+                <a:latin typeface="Arial" panose="020B0604020202020204" pitchFamily="34" charset="0"/>
+                <a:cs typeface="Arial" panose="020B0604020202020204" pitchFamily="34" charset="0"/>
+              </a:rPr>
+              <a:t>What could be some reasons behind these differences?</a:t>
+            </a:r>
+          </a:p>
+        </p:txBody>
+      </p:sp>
+      <p:sp>
+        <p:nvSpPr>
+          <p:cNvPr id="12" name="Slide Number Placeholder 7">
+            <a:extLst>
+              <a:ext uri="{FF2B5EF4-FFF2-40B4-BE49-F238E27FC236}">
+                <a16:creationId xmlns:a16="http://schemas.microsoft.com/office/drawing/2014/main" id="{603CA6CA-66FA-EB03-2FBC-EE1E33439BCC}"/>
+              </a:ext>
+            </a:extLst>
+          </p:cNvPr>
+          <p:cNvSpPr>
+            <a:spLocks noGrp="1"/>
+          </p:cNvSpPr>
+          <p:nvPr>
+            <p:ph type="sldNum" sz="quarter" idx="12"/>
+          </p:nvPr>
+        </p:nvSpPr>
+        <p:spPr>
+          <a:xfrm>
+            <a:off x="9263062" y="6337300"/>
+            <a:ext cx="2743200" cy="365125"/>
+          </a:xfrm>
+        </p:spPr>
+        <p:txBody>
+          <a:bodyPr/>
+          <a:lstStyle/>
+          <a:p>
+            <a:fld id="{A7C13B74-2CD1-074C-84D2-FF26F00FE39E}" type="slidenum">
+              <a:rPr lang="en-US" sz="1400" smtClean="0">
+                <a:solidFill>
+                  <a:schemeClr val="tx1"/>
+                </a:solidFill>
+              </a:rPr>
+              <a:t>12</a:t>
+            </a:fld>
+            <a:endParaRPr lang="en-US" sz="1400" dirty="0">
+              <a:solidFill>
+                <a:schemeClr val="tx1"/>
+              </a:solidFill>
+            </a:endParaRPr>
+          </a:p>
+        </p:txBody>
+      </p:sp>
+      <p:pic>
+        <p:nvPicPr>
+          <p:cNvPr id="5" name="Picture 4" descr="A chart with different colored bars&#10;&#10;AI-generated content may be incorrect.">
+            <a:extLst>
+              <a:ext uri="{FF2B5EF4-FFF2-40B4-BE49-F238E27FC236}">
+                <a16:creationId xmlns:a16="http://schemas.microsoft.com/office/drawing/2014/main" id="{97FA4388-84D4-D798-7EEF-343303A92E45}"/>
+              </a:ext>
+            </a:extLst>
+          </p:cNvPr>
+          <p:cNvPicPr>
+            <a:picLocks noChangeAspect="1"/>
+          </p:cNvPicPr>
+          <p:nvPr/>
+        </p:nvPicPr>
+        <p:blipFill>
+          <a:blip r:embed="rId4"/>
+          <a:stretch>
+            <a:fillRect/>
+          </a:stretch>
+        </p:blipFill>
+        <p:spPr>
+          <a:xfrm>
+            <a:off x="5651494" y="1676400"/>
+            <a:ext cx="6032500" cy="3505200"/>
+          </a:xfrm>
+          <a:prstGeom prst="rect">
+            <a:avLst/>
+          </a:prstGeom>
+        </p:spPr>
+      </p:pic>
+    </p:spTree>
+    <p:extLst>
+      <p:ext uri="{BB962C8B-B14F-4D97-AF65-F5344CB8AC3E}">
+        <p14:creationId xmlns:p14="http://schemas.microsoft.com/office/powerpoint/2010/main" val="3228791797"/>
+      </p:ext>
+    </p:extLst>
+  </p:cSld>
+  <p:clrMapOvr>
+    <a:masterClrMapping/>
+  </p:clrMapOvr>
+</p:sld>
+</file>
+
+<file path=ppt/slides/slide14.xml><?xml version="1.0" encoding="utf-8"?>
+<p:sld xmlns:a="http://schemas.openxmlformats.org/drawingml/2006/main" xmlns:r="http://schemas.openxmlformats.org/officeDocument/2006/relationships" xmlns:p="http://schemas.openxmlformats.org/presentationml/2006/main">
+  <p:cSld>
+    <p:spTree>
+      <p:nvGrpSpPr>
+        <p:cNvPr id="1" name="">
+          <a:extLst>
+            <a:ext uri="{FF2B5EF4-FFF2-40B4-BE49-F238E27FC236}">
+              <a16:creationId xmlns:a16="http://schemas.microsoft.com/office/drawing/2014/main" id="{BF19687D-33EB-EB16-ABDC-40CEF8A795AF}"/>
+            </a:ext>
+          </a:extLst>
+        </p:cNvPr>
+        <p:cNvGrpSpPr/>
+        <p:nvPr/>
+      </p:nvGrpSpPr>
+      <p:grpSpPr>
+        <a:xfrm>
+          <a:off x="0" y="0"/>
+          <a:ext cx="0" cy="0"/>
+          <a:chOff x="0" y="0"/>
+          <a:chExt cx="0" cy="0"/>
+        </a:xfrm>
+      </p:grpSpPr>
+      <p:sp>
+        <p:nvSpPr>
+          <p:cNvPr id="2" name="TextBox 1">
+            <a:extLst>
+              <a:ext uri="{FF2B5EF4-FFF2-40B4-BE49-F238E27FC236}">
+                <a16:creationId xmlns:a16="http://schemas.microsoft.com/office/drawing/2014/main" id="{A6699D8B-F4EE-9433-E74A-629F3D6534C1}"/>
+              </a:ext>
+            </a:extLst>
+          </p:cNvPr>
+          <p:cNvSpPr txBox="1"/>
+          <p:nvPr/>
+        </p:nvSpPr>
+        <p:spPr>
+          <a:xfrm>
+            <a:off x="17464" y="2689791"/>
+            <a:ext cx="12157072" cy="1478418"/>
+          </a:xfrm>
+          <a:prstGeom prst="rect">
+            <a:avLst/>
+          </a:prstGeom>
+          <a:noFill/>
+        </p:spPr>
+        <p:txBody>
+          <a:bodyPr wrap="square" rtlCol="0">
+            <a:spAutoFit/>
+          </a:bodyPr>
+          <a:lstStyle/>
+          <a:p>
+            <a:pPr algn="ctr">
+              <a:lnSpc>
+                <a:spcPct val="150000"/>
+              </a:lnSpc>
+            </a:pPr>
+            <a:r>
+              <a:rPr lang="en-US" sz="3200" b="1" dirty="0">
+                <a:latin typeface="Arial" panose="020B0604020202020204" pitchFamily="34" charset="0"/>
+                <a:cs typeface="Arial" panose="020B0604020202020204" pitchFamily="34" charset="0"/>
+              </a:rPr>
+              <a:t>The data doesn’t lie, but you need to understand your method</a:t>
+            </a:r>
+          </a:p>
+          <a:p>
+            <a:pPr algn="ctr">
+              <a:lnSpc>
+                <a:spcPct val="150000"/>
+              </a:lnSpc>
+            </a:pPr>
+            <a:r>
+              <a:rPr lang="en-US" sz="3200" dirty="0">
+                <a:latin typeface="Arial" panose="020B0604020202020204" pitchFamily="34" charset="0"/>
+                <a:cs typeface="Arial" panose="020B0604020202020204" pitchFamily="34" charset="0"/>
+              </a:rPr>
+              <a:t>Ensure you’re interpreting your data correctly</a:t>
+            </a:r>
+          </a:p>
+        </p:txBody>
+      </p:sp>
+      <p:sp>
+        <p:nvSpPr>
+          <p:cNvPr id="12" name="Slide Number Placeholder 7">
+            <a:extLst>
+              <a:ext uri="{FF2B5EF4-FFF2-40B4-BE49-F238E27FC236}">
+                <a16:creationId xmlns:a16="http://schemas.microsoft.com/office/drawing/2014/main" id="{4F8BCA73-C142-BD79-3B47-67651FC89255}"/>
+              </a:ext>
+            </a:extLst>
+          </p:cNvPr>
+          <p:cNvSpPr>
+            <a:spLocks noGrp="1"/>
+          </p:cNvSpPr>
+          <p:nvPr>
+            <p:ph type="sldNum" sz="quarter" idx="12"/>
+          </p:nvPr>
+        </p:nvSpPr>
+        <p:spPr>
+          <a:xfrm>
+            <a:off x="9263062" y="6337300"/>
+            <a:ext cx="2743200" cy="365125"/>
+          </a:xfrm>
+        </p:spPr>
+        <p:txBody>
+          <a:bodyPr/>
+          <a:lstStyle/>
+          <a:p>
+            <a:fld id="{A7C13B74-2CD1-074C-84D2-FF26F00FE39E}" type="slidenum">
+              <a:rPr lang="en-US" sz="1400" smtClean="0">
+                <a:solidFill>
+                  <a:schemeClr val="tx1"/>
+                </a:solidFill>
+              </a:rPr>
+              <a:t>13</a:t>
+            </a:fld>
+            <a:endParaRPr lang="en-US" sz="1400" dirty="0">
+              <a:solidFill>
+                <a:schemeClr val="tx1"/>
+              </a:solidFill>
+            </a:endParaRPr>
+          </a:p>
+        </p:txBody>
+      </p:sp>
+    </p:spTree>
+    <p:extLst>
+      <p:ext uri="{BB962C8B-B14F-4D97-AF65-F5344CB8AC3E}">
+        <p14:creationId xmlns:p14="http://schemas.microsoft.com/office/powerpoint/2010/main" val="2405003966"/>
+      </p:ext>
+    </p:extLst>
+  </p:cSld>
+  <p:clrMapOvr>
+    <a:masterClrMapping/>
+  </p:clrMapOvr>
+</p:sld>
+</file>
+
+<file path=ppt/slides/slide15.xml><?xml version="1.0" encoding="utf-8"?>
+<p:sld xmlns:a="http://schemas.openxmlformats.org/drawingml/2006/main" xmlns:r="http://schemas.openxmlformats.org/officeDocument/2006/relationships" xmlns:p="http://schemas.openxmlformats.org/presentationml/2006/main">
+  <p:cSld>
+    <p:spTree>
+      <p:nvGrpSpPr>
+        <p:cNvPr id="1" name="">
+          <a:extLst>
+            <a:ext uri="{FF2B5EF4-FFF2-40B4-BE49-F238E27FC236}">
               <a16:creationId xmlns:a16="http://schemas.microsoft.com/office/drawing/2014/main" id="{7F8D4F66-83CE-FE03-C237-A41274E48C8C}"/>
             </a:ext>
           </a:extLst>
@@ -4648,7 +6569,7 @@
                   <a:schemeClr val="tx1"/>
                 </a:solidFill>
               </a:rPr>
-              <a:t>9</a:t>
+              <a:t>14</a:t>
             </a:fld>
             <a:endParaRPr lang="en-US" sz="1400" dirty="0">
               <a:solidFill>
@@ -4701,7 +6622,7 @@
 </p:sld>
 </file>
 
-<file path=ppt/slides/slide11.xml><?xml version="1.0" encoding="utf-8"?>
+<file path=ppt/slides/slide16.xml><?xml version="1.0" encoding="utf-8"?>
 <p:sld xmlns:a="http://schemas.openxmlformats.org/drawingml/2006/main" xmlns:r="http://schemas.openxmlformats.org/officeDocument/2006/relationships" xmlns:p="http://schemas.openxmlformats.org/presentationml/2006/main">
   <p:cSld>
     <p:spTree>
@@ -4799,7 +6720,7 @@
                   <a:schemeClr val="tx1"/>
                 </a:solidFill>
               </a:rPr>
-              <a:t>10</a:t>
+              <a:t>15</a:t>
             </a:fld>
             <a:endParaRPr lang="en-US" sz="1400" dirty="0">
               <a:solidFill>
@@ -4913,7 +6834,254 @@
 </p:sld>
 </file>
 
-<file path=ppt/slides/slide12.xml><?xml version="1.0" encoding="utf-8"?>
+<file path=ppt/slides/slide17.xml><?xml version="1.0" encoding="utf-8"?>
+<p:sld xmlns:a="http://schemas.openxmlformats.org/drawingml/2006/main" xmlns:r="http://schemas.openxmlformats.org/officeDocument/2006/relationships" xmlns:p="http://schemas.openxmlformats.org/presentationml/2006/main">
+  <p:cSld>
+    <p:spTree>
+      <p:nvGrpSpPr>
+        <p:cNvPr id="1" name="">
+          <a:extLst>
+            <a:ext uri="{FF2B5EF4-FFF2-40B4-BE49-F238E27FC236}">
+              <a16:creationId xmlns:a16="http://schemas.microsoft.com/office/drawing/2014/main" id="{F109FD17-D971-81D1-DD8E-659C2A2933FD}"/>
+            </a:ext>
+          </a:extLst>
+        </p:cNvPr>
+        <p:cNvGrpSpPr/>
+        <p:nvPr/>
+      </p:nvGrpSpPr>
+      <p:grpSpPr>
+        <a:xfrm>
+          <a:off x="0" y="0"/>
+          <a:ext cx="0" cy="0"/>
+          <a:chOff x="0" y="0"/>
+          <a:chExt cx="0" cy="0"/>
+        </a:xfrm>
+      </p:grpSpPr>
+      <p:sp>
+        <p:nvSpPr>
+          <p:cNvPr id="2" name="TextBox 1">
+            <a:extLst>
+              <a:ext uri="{FF2B5EF4-FFF2-40B4-BE49-F238E27FC236}">
+                <a16:creationId xmlns:a16="http://schemas.microsoft.com/office/drawing/2014/main" id="{E2FE206C-95B2-E30F-4682-5B33555B4860}"/>
+              </a:ext>
+            </a:extLst>
+          </p:cNvPr>
+          <p:cNvSpPr txBox="1"/>
+          <p:nvPr/>
+        </p:nvSpPr>
+        <p:spPr>
+          <a:xfrm>
+            <a:off x="657225" y="2533650"/>
+            <a:ext cx="10877550" cy="739754"/>
+          </a:xfrm>
+          <a:prstGeom prst="rect">
+            <a:avLst/>
+          </a:prstGeom>
+          <a:noFill/>
+        </p:spPr>
+        <p:txBody>
+          <a:bodyPr wrap="square" rtlCol="0">
+            <a:spAutoFit/>
+          </a:bodyPr>
+          <a:lstStyle/>
+          <a:p>
+            <a:pPr algn="ctr">
+              <a:lnSpc>
+                <a:spcPct val="150000"/>
+              </a:lnSpc>
+            </a:pPr>
+            <a:r>
+              <a:rPr lang="en-US" sz="3200" b="1" dirty="0">
+                <a:latin typeface="Arial" panose="020B0604020202020204" pitchFamily="34" charset="0"/>
+                <a:cs typeface="Arial" panose="020B0604020202020204" pitchFamily="34" charset="0"/>
+              </a:rPr>
+              <a:t>Demo</a:t>
+            </a:r>
+          </a:p>
+        </p:txBody>
+      </p:sp>
+      <p:sp>
+        <p:nvSpPr>
+          <p:cNvPr id="8" name="Slide Number Placeholder 7">
+            <a:extLst>
+              <a:ext uri="{FF2B5EF4-FFF2-40B4-BE49-F238E27FC236}">
+                <a16:creationId xmlns:a16="http://schemas.microsoft.com/office/drawing/2014/main" id="{D7D80360-AC48-FFCE-33AC-3EB92163D785}"/>
+              </a:ext>
+            </a:extLst>
+          </p:cNvPr>
+          <p:cNvSpPr>
+            <a:spLocks noGrp="1"/>
+          </p:cNvSpPr>
+          <p:nvPr>
+            <p:ph type="sldNum" sz="quarter" idx="12"/>
+          </p:nvPr>
+        </p:nvSpPr>
+        <p:spPr>
+          <a:xfrm>
+            <a:off x="9263062" y="6337300"/>
+            <a:ext cx="2743200" cy="365125"/>
+          </a:xfrm>
+        </p:spPr>
+        <p:txBody>
+          <a:bodyPr/>
+          <a:lstStyle/>
+          <a:p>
+            <a:fld id="{A7C13B74-2CD1-074C-84D2-FF26F00FE39E}" type="slidenum">
+              <a:rPr lang="en-US" sz="1400" smtClean="0">
+                <a:solidFill>
+                  <a:schemeClr val="tx1"/>
+                </a:solidFill>
+              </a:rPr>
+              <a:t>16</a:t>
+            </a:fld>
+            <a:endParaRPr lang="en-US" sz="1400" dirty="0">
+              <a:solidFill>
+                <a:schemeClr val="tx1"/>
+              </a:solidFill>
+            </a:endParaRPr>
+          </a:p>
+        </p:txBody>
+      </p:sp>
+      <p:sp>
+        <p:nvSpPr>
+          <p:cNvPr id="4" name="TextBox 3">
+            <a:extLst>
+              <a:ext uri="{FF2B5EF4-FFF2-40B4-BE49-F238E27FC236}">
+                <a16:creationId xmlns:a16="http://schemas.microsoft.com/office/drawing/2014/main" id="{30AF180A-30F6-3527-3A46-C4F718DD8757}"/>
+              </a:ext>
+            </a:extLst>
+          </p:cNvPr>
+          <p:cNvSpPr txBox="1"/>
+          <p:nvPr/>
+        </p:nvSpPr>
+        <p:spPr>
+          <a:xfrm>
+            <a:off x="657225" y="3285541"/>
+            <a:ext cx="10877550" cy="1175194"/>
+          </a:xfrm>
+          <a:prstGeom prst="rect">
+            <a:avLst/>
+          </a:prstGeom>
+          <a:noFill/>
+        </p:spPr>
+        <p:txBody>
+          <a:bodyPr wrap="square" rtlCol="0">
+            <a:spAutoFit/>
+          </a:bodyPr>
+          <a:lstStyle/>
+          <a:p>
+            <a:pPr algn="ctr">
+              <a:lnSpc>
+                <a:spcPct val="150000"/>
+              </a:lnSpc>
+            </a:pPr>
+            <a:r>
+              <a:rPr lang="en-US" sz="2500" dirty="0" err="1">
+                <a:solidFill>
+                  <a:schemeClr val="tx2">
+                    <a:lumMod val="50000"/>
+                    <a:lumOff val="50000"/>
+                  </a:schemeClr>
+                </a:solidFill>
+                <a:latin typeface="Arial" panose="020B0604020202020204" pitchFamily="34" charset="0"/>
+                <a:cs typeface="Arial" panose="020B0604020202020204" pitchFamily="34" charset="0"/>
+              </a:rPr>
+              <a:t>UPRM_Workshop_RelAbund</a:t>
+            </a:r>
+            <a:r>
+              <a:rPr lang="en-US" sz="2500" dirty="0">
+                <a:solidFill>
+                  <a:schemeClr val="tx2">
+                    <a:lumMod val="50000"/>
+                    <a:lumOff val="50000"/>
+                  </a:schemeClr>
+                </a:solidFill>
+                <a:latin typeface="Arial" panose="020B0604020202020204" pitchFamily="34" charset="0"/>
+                <a:cs typeface="Arial" panose="020B0604020202020204" pitchFamily="34" charset="0"/>
+              </a:rPr>
+              <a:t>-SS.R</a:t>
+            </a:r>
+            <a:br>
+              <a:rPr lang="en-US" sz="2500" dirty="0">
+                <a:solidFill>
+                  <a:schemeClr val="tx2">
+                    <a:lumMod val="50000"/>
+                    <a:lumOff val="50000"/>
+                  </a:schemeClr>
+                </a:solidFill>
+                <a:latin typeface="Arial" panose="020B0604020202020204" pitchFamily="34" charset="0"/>
+                <a:cs typeface="Arial" panose="020B0604020202020204" pitchFamily="34" charset="0"/>
+              </a:rPr>
+            </a:br>
+            <a:r>
+              <a:rPr lang="en-US" sz="2500" dirty="0">
+                <a:solidFill>
+                  <a:schemeClr val="tx2">
+                    <a:lumMod val="50000"/>
+                    <a:lumOff val="50000"/>
+                  </a:schemeClr>
+                </a:solidFill>
+                <a:latin typeface="Arial" panose="020B0604020202020204" pitchFamily="34" charset="0"/>
+                <a:cs typeface="Arial" panose="020B0604020202020204" pitchFamily="34" charset="0"/>
+              </a:rPr>
+              <a:t>UPRM-</a:t>
+            </a:r>
+            <a:r>
+              <a:rPr lang="en-US" sz="2500" dirty="0" err="1">
+                <a:solidFill>
+                  <a:schemeClr val="tx2">
+                    <a:lumMod val="50000"/>
+                    <a:lumOff val="50000"/>
+                  </a:schemeClr>
+                </a:solidFill>
+                <a:latin typeface="Arial" panose="020B0604020202020204" pitchFamily="34" charset="0"/>
+                <a:cs typeface="Arial" panose="020B0604020202020204" pitchFamily="34" charset="0"/>
+              </a:rPr>
+              <a:t>Workshop_PCoA</a:t>
+            </a:r>
+            <a:r>
+              <a:rPr lang="en-US" sz="2500" dirty="0">
+                <a:solidFill>
+                  <a:schemeClr val="tx2">
+                    <a:lumMod val="50000"/>
+                    <a:lumOff val="50000"/>
+                  </a:schemeClr>
+                </a:solidFill>
+                <a:latin typeface="Arial" panose="020B0604020202020204" pitchFamily="34" charset="0"/>
+                <a:cs typeface="Arial" panose="020B0604020202020204" pitchFamily="34" charset="0"/>
+              </a:rPr>
+              <a:t>-SS.R</a:t>
+            </a:r>
+            <a:endParaRPr lang="en-US" sz="2500" dirty="0">
+              <a:solidFill>
+                <a:schemeClr val="tx2">
+                  <a:lumMod val="50000"/>
+                  <a:lumOff val="50000"/>
+                </a:schemeClr>
+              </a:solidFill>
+              <a:highlight>
+                <a:srgbClr val="FFFF00"/>
+              </a:highlight>
+              <a:latin typeface="Arial" panose="020B0604020202020204" pitchFamily="34" charset="0"/>
+              <a:cs typeface="Arial" panose="020B0604020202020204" pitchFamily="34" charset="0"/>
+            </a:endParaRPr>
+          </a:p>
+        </p:txBody>
+      </p:sp>
+    </p:spTree>
+    <p:extLst>
+      <p:ext uri="{BB962C8B-B14F-4D97-AF65-F5344CB8AC3E}">
+        <p14:creationId xmlns:p14="http://schemas.microsoft.com/office/powerpoint/2010/main" val="33887626"/>
+      </p:ext>
+    </p:extLst>
+  </p:cSld>
+  <p:clrMapOvr>
+    <a:masterClrMapping/>
+  </p:clrMapOvr>
+</p:sld>
+</file>
+
+<file path=ppt/slides/slide18.xml><?xml version="1.0" encoding="utf-8"?>
 <p:sld xmlns:a="http://schemas.openxmlformats.org/drawingml/2006/main" xmlns:r="http://schemas.openxmlformats.org/officeDocument/2006/relationships" xmlns:p="http://schemas.openxmlformats.org/presentationml/2006/main">
   <p:cSld>
     <p:spTree>
@@ -4968,7 +7136,7 @@
                   <a:schemeClr val="tx1"/>
                 </a:solidFill>
               </a:rPr>
-              <a:t>11</a:t>
+              <a:t>17</a:t>
             </a:fld>
             <a:endParaRPr lang="en-US" sz="1400" dirty="0">
               <a:solidFill>
@@ -5016,17 +7184,24 @@
                 <a:latin typeface="Arial" panose="020B0604020202020204" pitchFamily="34" charset="0"/>
                 <a:cs typeface="Arial" panose="020B0604020202020204" pitchFamily="34" charset="0"/>
               </a:rPr>
-              <a:t>Getting QIIME2 Data into R</a:t>
-            </a:r>
-          </a:p>
-        </p:txBody>
-      </p:sp>
-      <p:sp>
-        <p:nvSpPr>
-          <p:cNvPr id="6" name="TextBox 5">
-            <a:extLst>
-              <a:ext uri="{FF2B5EF4-FFF2-40B4-BE49-F238E27FC236}">
-                <a16:creationId xmlns:a16="http://schemas.microsoft.com/office/drawing/2014/main" id="{12D54614-A30A-FA26-2216-DE2B82FB54BB}"/>
+              <a:t>Hypothesis Testing: </a:t>
+            </a:r>
+            <a:r>
+              <a:rPr lang="en-US" sz="3200" dirty="0">
+                <a:latin typeface="Arial" panose="020B0604020202020204" pitchFamily="34" charset="0"/>
+                <a:cs typeface="Arial" panose="020B0604020202020204" pitchFamily="34" charset="0"/>
+              </a:rPr>
+              <a:t>Why do we need Alpha and Beta?</a:t>
+            </a:r>
+          </a:p>
+        </p:txBody>
+      </p:sp>
+      <p:sp>
+        <p:nvSpPr>
+          <p:cNvPr id="3" name="TextBox 2">
+            <a:extLst>
+              <a:ext uri="{FF2B5EF4-FFF2-40B4-BE49-F238E27FC236}">
+                <a16:creationId xmlns:a16="http://schemas.microsoft.com/office/drawing/2014/main" id="{02353F3A-4AD6-6121-C1B5-BDDD3571BC39}"/>
               </a:ext>
             </a:extLst>
           </p:cNvPr>
@@ -5035,8 +7210,8 @@
         </p:nvSpPr>
         <p:spPr>
           <a:xfrm>
-            <a:off x="672084" y="1519904"/>
-            <a:ext cx="6099048" cy="1477328"/>
+            <a:off x="171450" y="5932984"/>
+            <a:ext cx="6096000" cy="769441"/>
           </a:xfrm>
           <a:prstGeom prst="rect">
             <a:avLst/>
@@ -5050,149 +7225,64 @@
           <a:lstStyle/>
           <a:p>
             <a:r>
-              <a:rPr lang="en-US" dirty="0"/>
-              <a:t>library(qiime2R)</a:t>
-            </a:r>
-          </a:p>
-          <a:p>
-            <a:r>
-              <a:rPr lang="en-US" dirty="0"/>
-              <a:t>metadata &lt;- read_q2metadata("</a:t>
-            </a:r>
-            <a:r>
-              <a:rPr lang="en-US" dirty="0" err="1"/>
-              <a:t>metadata.tsv</a:t>
-            </a:r>
-            <a:r>
-              <a:rPr lang="en-US" dirty="0"/>
-              <a:t>")</a:t>
-            </a:r>
-          </a:p>
-          <a:p>
-            <a:r>
-              <a:rPr lang="en-US" dirty="0" err="1"/>
-              <a:t>asv_table</a:t>
-            </a:r>
-            <a:r>
-              <a:rPr lang="en-US" dirty="0"/>
-              <a:t> &lt;- </a:t>
-            </a:r>
-            <a:r>
-              <a:rPr lang="en-US" dirty="0" err="1"/>
-              <a:t>read_qza</a:t>
-            </a:r>
-            <a:r>
-              <a:rPr lang="en-US" dirty="0"/>
-              <a:t>("</a:t>
-            </a:r>
-            <a:r>
-              <a:rPr lang="en-US" dirty="0" err="1"/>
-              <a:t>table.qza</a:t>
-            </a:r>
-            <a:r>
-              <a:rPr lang="en-US" dirty="0"/>
-              <a:t>")$data</a:t>
-            </a:r>
-          </a:p>
-          <a:p>
-            <a:r>
-              <a:rPr lang="en-US" dirty="0"/>
-              <a:t>taxonomy &lt;- </a:t>
-            </a:r>
-            <a:r>
-              <a:rPr lang="en-US" dirty="0" err="1"/>
-              <a:t>read_qza</a:t>
-            </a:r>
-            <a:r>
-              <a:rPr lang="en-US" dirty="0"/>
-              <a:t>("</a:t>
-            </a:r>
-            <a:r>
-              <a:rPr lang="en-US" dirty="0" err="1"/>
-              <a:t>taxonomy.qza</a:t>
-            </a:r>
-            <a:r>
-              <a:rPr lang="en-US" dirty="0"/>
-              <a:t>")$data</a:t>
-            </a:r>
-          </a:p>
-          <a:p>
-            <a:r>
-              <a:rPr lang="en-US" dirty="0"/>
-              <a:t>tree &lt;- </a:t>
-            </a:r>
-            <a:r>
-              <a:rPr lang="en-US" dirty="0" err="1"/>
-              <a:t>read_qza</a:t>
-            </a:r>
-            <a:r>
-              <a:rPr lang="en-US" dirty="0"/>
-              <a:t>("rooted-</a:t>
-            </a:r>
-            <a:r>
-              <a:rPr lang="en-US" dirty="0" err="1"/>
-              <a:t>tree.qza</a:t>
-            </a:r>
-            <a:r>
-              <a:rPr lang="en-US" dirty="0"/>
-              <a:t>")$data</a:t>
-            </a:r>
-          </a:p>
-        </p:txBody>
-      </p:sp>
-      <p:sp>
-        <p:nvSpPr>
-          <p:cNvPr id="7" name="TextBox 6">
-            <a:extLst>
-              <a:ext uri="{FF2B5EF4-FFF2-40B4-BE49-F238E27FC236}">
-                <a16:creationId xmlns:a16="http://schemas.microsoft.com/office/drawing/2014/main" id="{434E3857-6319-3505-5099-C3CA38739A3A}"/>
-              </a:ext>
-            </a:extLst>
-          </p:cNvPr>
-          <p:cNvSpPr txBox="1"/>
-          <p:nvPr/>
-        </p:nvSpPr>
-        <p:spPr>
-          <a:xfrm>
-            <a:off x="422910" y="921792"/>
-            <a:ext cx="10877550" cy="598112"/>
-          </a:xfrm>
-          <a:prstGeom prst="rect">
-            <a:avLst/>
-          </a:prstGeom>
-          <a:noFill/>
-        </p:spPr>
-        <p:txBody>
-          <a:bodyPr wrap="square" rtlCol="0">
-            <a:spAutoFit/>
-          </a:bodyPr>
-          <a:lstStyle/>
-          <a:p>
-            <a:pPr>
-              <a:lnSpc>
-                <a:spcPct val="150000"/>
-              </a:lnSpc>
-            </a:pPr>
-            <a:r>
-              <a:rPr lang="en-US" sz="2500" dirty="0">
-                <a:latin typeface="Arial" panose="020B0604020202020204" pitchFamily="34" charset="0"/>
-                <a:cs typeface="Arial" panose="020B0604020202020204" pitchFamily="34" charset="0"/>
-              </a:rPr>
-              <a:t>Create a </a:t>
-            </a:r>
-            <a:r>
-              <a:rPr lang="en-US" sz="2500" dirty="0" err="1">
-                <a:latin typeface="Arial" panose="020B0604020202020204" pitchFamily="34" charset="0"/>
-                <a:cs typeface="Arial" panose="020B0604020202020204" pitchFamily="34" charset="0"/>
-              </a:rPr>
-              <a:t>phyloseq</a:t>
-            </a:r>
-            <a:r>
-              <a:rPr lang="en-US" sz="2500" dirty="0">
-                <a:latin typeface="Arial" panose="020B0604020202020204" pitchFamily="34" charset="0"/>
-                <a:cs typeface="Arial" panose="020B0604020202020204" pitchFamily="34" charset="0"/>
-              </a:rPr>
-              <a:t> object</a:t>
+              <a:rPr lang="en-US" sz="2200" dirty="0">
+                <a:solidFill>
+                  <a:schemeClr val="tx2">
+                    <a:lumMod val="50000"/>
+                    <a:lumOff val="50000"/>
+                  </a:schemeClr>
+                </a:solidFill>
+                <a:hlinkClick r:id="rId2">
+                  <a:extLst>
+                    <a:ext uri="{A12FA001-AC4F-418D-AE19-62706E023703}">
+                      <ahyp:hlinkClr xmlns:ahyp="http://schemas.microsoft.com/office/drawing/2018/hyperlinkcolor" val="tx"/>
+                    </a:ext>
+                  </a:extLst>
+                </a:hlinkClick>
+              </a:rPr>
+              <a:t>https://r-graph-gallery.com/</a:t>
+            </a:r>
+            <a:r>
+              <a:rPr lang="en-US" sz="2200" dirty="0">
+                <a:solidFill>
+                  <a:schemeClr val="tx2">
+                    <a:lumMod val="50000"/>
+                    <a:lumOff val="50000"/>
+                  </a:schemeClr>
+                </a:solidFill>
+              </a:rPr>
+              <a:t> </a:t>
+            </a:r>
+          </a:p>
+          <a:p>
+            <a:r>
+              <a:rPr lang="en-US" sz="2200" dirty="0">
+                <a:solidFill>
+                  <a:schemeClr val="tx2">
+                    <a:lumMod val="50000"/>
+                    <a:lumOff val="50000"/>
+                  </a:schemeClr>
+                </a:solidFill>
+                <a:hlinkClick r:id="rId3">
+                  <a:extLst>
+                    <a:ext uri="{A12FA001-AC4F-418D-AE19-62706E023703}">
+                      <ahyp:hlinkClr xmlns:ahyp="http://schemas.microsoft.com/office/drawing/2018/hyperlinkcolor" val="tx"/>
+                    </a:ext>
+                  </a:extLst>
+                </a:hlinkClick>
+              </a:rPr>
+              <a:t>https://microbiome.github.io/tutorials/</a:t>
+            </a:r>
+            <a:r>
+              <a:rPr lang="en-US" sz="2200" dirty="0">
+                <a:solidFill>
+                  <a:schemeClr val="tx2">
+                    <a:lumMod val="50000"/>
+                    <a:lumOff val="50000"/>
+                  </a:schemeClr>
+                </a:solidFill>
+              </a:rPr>
+              <a:t> </a:t>
             </a:r>
           </a:p>
         </p:txBody>
@@ -5210,7 +7300,7 @@
 </p:sld>
 </file>
 
-<file path=ppt/slides/slide13.xml><?xml version="1.0" encoding="utf-8"?>
+<file path=ppt/slides/slide19.xml><?xml version="1.0" encoding="utf-8"?>
 <p:sld xmlns:a="http://schemas.openxmlformats.org/drawingml/2006/main" xmlns:r="http://schemas.openxmlformats.org/officeDocument/2006/relationships" xmlns:p="http://schemas.openxmlformats.org/presentationml/2006/main">
   <p:cSld>
     <p:spTree>
@@ -5218,7 +7308,7 @@
         <p:cNvPr id="1" name="">
           <a:extLst>
             <a:ext uri="{FF2B5EF4-FFF2-40B4-BE49-F238E27FC236}">
-              <a16:creationId xmlns:a16="http://schemas.microsoft.com/office/drawing/2014/main" id="{2A5AA31D-BBF9-65B7-F587-9162809FF27C}"/>
+              <a16:creationId xmlns:a16="http://schemas.microsoft.com/office/drawing/2014/main" id="{D01E7D3A-2884-85AF-6B72-5E0E506B7335}"/>
             </a:ext>
           </a:extLst>
         </p:cNvPr>
@@ -5238,7 +7328,7 @@
           <p:cNvPr id="8" name="Slide Number Placeholder 7">
             <a:extLst>
               <a:ext uri="{FF2B5EF4-FFF2-40B4-BE49-F238E27FC236}">
-                <a16:creationId xmlns:a16="http://schemas.microsoft.com/office/drawing/2014/main" id="{1EDAE90B-DF84-2D09-A69A-45B8275E9015}"/>
+                <a16:creationId xmlns:a16="http://schemas.microsoft.com/office/drawing/2014/main" id="{491D97DF-83D6-14D2-C969-5BBCB86F77C8}"/>
               </a:ext>
             </a:extLst>
           </p:cNvPr>
@@ -5265,7 +7355,7 @@
                   <a:schemeClr val="tx1"/>
                 </a:solidFill>
               </a:rPr>
-              <a:t>12</a:t>
+              <a:t>18</a:t>
             </a:fld>
             <a:endParaRPr lang="en-US" sz="1400" dirty="0">
               <a:solidFill>
@@ -5280,7 +7370,7 @@
           <p:cNvPr id="4" name="TextBox 3">
             <a:extLst>
               <a:ext uri="{FF2B5EF4-FFF2-40B4-BE49-F238E27FC236}">
-                <a16:creationId xmlns:a16="http://schemas.microsoft.com/office/drawing/2014/main" id="{9A8C67F5-EF1B-CD74-9EF9-920789D4BA5B}"/>
+                <a16:creationId xmlns:a16="http://schemas.microsoft.com/office/drawing/2014/main" id="{FDC0F156-C903-F341-2625-7843FD669D75}"/>
               </a:ext>
             </a:extLst>
           </p:cNvPr>
@@ -5313,17 +7403,24 @@
                 <a:latin typeface="Arial" panose="020B0604020202020204" pitchFamily="34" charset="0"/>
                 <a:cs typeface="Arial" panose="020B0604020202020204" pitchFamily="34" charset="0"/>
               </a:rPr>
-              <a:t>Alpha diversity: Which groups are ‘richer’?</a:t>
-            </a:r>
-          </a:p>
-        </p:txBody>
-      </p:sp>
-      <p:sp>
-        <p:nvSpPr>
-          <p:cNvPr id="9" name="TextBox 8">
-            <a:extLst>
-              <a:ext uri="{FF2B5EF4-FFF2-40B4-BE49-F238E27FC236}">
-                <a16:creationId xmlns:a16="http://schemas.microsoft.com/office/drawing/2014/main" id="{03757729-2683-DFF9-3301-A13B387DE30D}"/>
+              <a:t>Hypothesis Testing: </a:t>
+            </a:r>
+            <a:r>
+              <a:rPr lang="en-US" sz="3200" dirty="0">
+                <a:latin typeface="Arial" panose="020B0604020202020204" pitchFamily="34" charset="0"/>
+                <a:cs typeface="Arial" panose="020B0604020202020204" pitchFamily="34" charset="0"/>
+              </a:rPr>
+              <a:t>Why do we need Alpha and Beta?</a:t>
+            </a:r>
+          </a:p>
+        </p:txBody>
+      </p:sp>
+      <p:sp>
+        <p:nvSpPr>
+          <p:cNvPr id="3" name="TextBox 2">
+            <a:extLst>
+              <a:ext uri="{FF2B5EF4-FFF2-40B4-BE49-F238E27FC236}">
+                <a16:creationId xmlns:a16="http://schemas.microsoft.com/office/drawing/2014/main" id="{8B8186C9-3150-8A66-D8FA-4ED3E4C53B4F}"/>
               </a:ext>
             </a:extLst>
           </p:cNvPr>
@@ -5332,8 +7429,8 @@
         </p:nvSpPr>
         <p:spPr>
           <a:xfrm>
-            <a:off x="694626" y="1023632"/>
-            <a:ext cx="7999476" cy="4524315"/>
+            <a:off x="171450" y="5932984"/>
+            <a:ext cx="6096000" cy="769441"/>
           </a:xfrm>
           <a:prstGeom prst="rect">
             <a:avLst/>
@@ -5347,141 +7444,74 @@
           <a:lstStyle/>
           <a:p>
             <a:r>
-              <a:rPr lang="en-US" dirty="0"/>
-              <a:t>The Question: Does the venom gland tissue type (distal vs. bulb) affect the internal diversity of the microbial community?</a:t>
-            </a:r>
-          </a:p>
-          <a:p>
-            <a:endParaRPr lang="en-US" dirty="0"/>
-          </a:p>
-          <a:p>
-            <a:r>
-              <a:rPr lang="en-US" dirty="0"/>
-              <a:t>The Metric: We'll use observed ASVs (richness) and Shannon (evenness) from yesterday's QIIME 2 run.</a:t>
-            </a:r>
-          </a:p>
-          <a:p>
-            <a:endParaRPr lang="en-US" dirty="0"/>
-          </a:p>
-          <a:p>
-            <a:r>
-              <a:rPr lang="en-US" dirty="0"/>
-              <a:t>The Statistical Test:</a:t>
-            </a:r>
-          </a:p>
-          <a:p>
-            <a:endParaRPr lang="en-US" dirty="0"/>
-          </a:p>
-          <a:p>
-            <a:r>
-              <a:rPr lang="en-US" dirty="0"/>
-              <a:t>    Non-parametric: Kruskal-Wallis (for &gt;2 groups, like the three tissue types) or Mann-Whitney U (for 2 groups, like Control vs. Experimental).</a:t>
-            </a:r>
-          </a:p>
-          <a:p>
-            <a:endParaRPr lang="en-US" dirty="0"/>
-          </a:p>
-          <a:p>
-            <a:r>
-              <a:rPr lang="en-US" dirty="0"/>
-              <a:t>    Why these tests? Our alpha diversity data often isn't normally distributed, so we use non-parametric tests.</a:t>
-            </a:r>
-          </a:p>
-          <a:p>
-            <a:endParaRPr lang="en-US" dirty="0"/>
-          </a:p>
-          <a:p>
-            <a:r>
-              <a:rPr lang="en-US" dirty="0"/>
-              <a:t>The Visualization: A boxplot in ggplot2 with points, with significance letters (e.g., 'a', 'b', 'c') above the groups to show which are significantly different.</a:t>
-            </a:r>
-          </a:p>
-        </p:txBody>
-      </p:sp>
-    </p:spTree>
-    <p:extLst>
-      <p:ext uri="{BB962C8B-B14F-4D97-AF65-F5344CB8AC3E}">
-        <p14:creationId xmlns:p14="http://schemas.microsoft.com/office/powerpoint/2010/main" val="1745332119"/>
-      </p:ext>
-    </p:extLst>
-  </p:cSld>
-  <p:clrMapOvr>
-    <a:masterClrMapping/>
-  </p:clrMapOvr>
-</p:sld>
-</file>
-
-<file path=ppt/slides/slide14.xml><?xml version="1.0" encoding="utf-8"?>
-<p:sld xmlns:a="http://schemas.openxmlformats.org/drawingml/2006/main" xmlns:r="http://schemas.openxmlformats.org/officeDocument/2006/relationships" xmlns:p="http://schemas.openxmlformats.org/presentationml/2006/main">
-  <p:cSld>
-    <p:spTree>
-      <p:nvGrpSpPr>
-        <p:cNvPr id="1" name="">
-          <a:extLst>
-            <a:ext uri="{FF2B5EF4-FFF2-40B4-BE49-F238E27FC236}">
-              <a16:creationId xmlns:a16="http://schemas.microsoft.com/office/drawing/2014/main" id="{76394F04-FE56-7351-C353-25EC568F270A}"/>
-            </a:ext>
-          </a:extLst>
-        </p:cNvPr>
-        <p:cNvGrpSpPr/>
-        <p:nvPr/>
-      </p:nvGrpSpPr>
-      <p:grpSpPr>
-        <a:xfrm>
-          <a:off x="0" y="0"/>
-          <a:ext cx="0" cy="0"/>
-          <a:chOff x="0" y="0"/>
-          <a:chExt cx="0" cy="0"/>
-        </a:xfrm>
-      </p:grpSpPr>
-      <p:sp>
-        <p:nvSpPr>
-          <p:cNvPr id="8" name="Slide Number Placeholder 7">
-            <a:extLst>
-              <a:ext uri="{FF2B5EF4-FFF2-40B4-BE49-F238E27FC236}">
-                <a16:creationId xmlns:a16="http://schemas.microsoft.com/office/drawing/2014/main" id="{3BB9C35A-AEAD-7D18-1942-84B319FDAF2A}"/>
-              </a:ext>
-            </a:extLst>
-          </p:cNvPr>
-          <p:cNvSpPr>
-            <a:spLocks noGrp="1"/>
-          </p:cNvSpPr>
-          <p:nvPr>
-            <p:ph type="sldNum" sz="quarter" idx="12"/>
-          </p:nvPr>
-        </p:nvSpPr>
-        <p:spPr>
-          <a:xfrm>
-            <a:off x="9263062" y="6337300"/>
-            <a:ext cx="2743200" cy="365125"/>
-          </a:xfrm>
-        </p:spPr>
-        <p:txBody>
-          <a:bodyPr/>
-          <a:lstStyle/>
-          <a:p>
-            <a:fld id="{A7C13B74-2CD1-074C-84D2-FF26F00FE39E}" type="slidenum">
-              <a:rPr lang="en-US" sz="1400" smtClean="0">
+              <a:rPr lang="en-US" sz="2200" dirty="0">
                 <a:solidFill>
-                  <a:schemeClr val="tx1"/>
+                  <a:schemeClr val="tx2">
+                    <a:lumMod val="50000"/>
+                    <a:lumOff val="50000"/>
+                  </a:schemeClr>
                 </a:solidFill>
-              </a:rPr>
-              <a:t>13</a:t>
-            </a:fld>
-            <a:endParaRPr lang="en-US" sz="1400" dirty="0">
-              <a:solidFill>
-                <a:schemeClr val="tx1"/>
-              </a:solidFill>
-            </a:endParaRPr>
-          </a:p>
-        </p:txBody>
-      </p:sp>
-      <p:sp>
-        <p:nvSpPr>
-          <p:cNvPr id="4" name="TextBox 3">
-            <a:extLst>
-              <a:ext uri="{FF2B5EF4-FFF2-40B4-BE49-F238E27FC236}">
-                <a16:creationId xmlns:a16="http://schemas.microsoft.com/office/drawing/2014/main" id="{2A211041-C4FA-FFBB-8610-B5F2BCD2C25E}"/>
+                <a:hlinkClick r:id="rId2">
+                  <a:extLst>
+                    <a:ext uri="{A12FA001-AC4F-418D-AE19-62706E023703}">
+                      <ahyp:hlinkClr xmlns:ahyp="http://schemas.microsoft.com/office/drawing/2018/hyperlinkcolor" val="tx"/>
+                    </a:ext>
+                  </a:extLst>
+                </a:hlinkClick>
+              </a:rPr>
+              <a:t>https://r-graph-gallery.com/</a:t>
+            </a:r>
+            <a:r>
+              <a:rPr lang="en-US" sz="2200" dirty="0">
+                <a:solidFill>
+                  <a:schemeClr val="tx2">
+                    <a:lumMod val="50000"/>
+                    <a:lumOff val="50000"/>
+                  </a:schemeClr>
+                </a:solidFill>
+              </a:rPr>
+              <a:t> </a:t>
+            </a:r>
+          </a:p>
+          <a:p>
+            <a:r>
+              <a:rPr lang="en-US" sz="2200" dirty="0">
+                <a:solidFill>
+                  <a:schemeClr val="tx2">
+                    <a:lumMod val="50000"/>
+                    <a:lumOff val="50000"/>
+                  </a:schemeClr>
+                </a:solidFill>
+                <a:hlinkClick r:id="rId3">
+                  <a:extLst>
+                    <a:ext uri="{A12FA001-AC4F-418D-AE19-62706E023703}">
+                      <ahyp:hlinkClr xmlns:ahyp="http://schemas.microsoft.com/office/drawing/2018/hyperlinkcolor" val="tx"/>
+                    </a:ext>
+                  </a:extLst>
+                </a:hlinkClick>
+              </a:rPr>
+              <a:t>https://microbiome.github.io/tutorials/</a:t>
+            </a:r>
+            <a:r>
+              <a:rPr lang="en-US" sz="2200" dirty="0">
+                <a:solidFill>
+                  <a:schemeClr val="tx2">
+                    <a:lumMod val="50000"/>
+                    <a:lumOff val="50000"/>
+                  </a:schemeClr>
+                </a:solidFill>
+              </a:rPr>
+              <a:t> </a:t>
+            </a:r>
+          </a:p>
+        </p:txBody>
+      </p:sp>
+      <p:sp>
+        <p:nvSpPr>
+          <p:cNvPr id="9" name="TextBox 8">
+            <a:extLst>
+              <a:ext uri="{FF2B5EF4-FFF2-40B4-BE49-F238E27FC236}">
+                <a16:creationId xmlns:a16="http://schemas.microsoft.com/office/drawing/2014/main" id="{DC7284BB-5897-DF8B-91D7-B82282EDE056}"/>
               </a:ext>
             </a:extLst>
           </p:cNvPr>
@@ -5490,8 +7520,8 @@
         </p:nvSpPr>
         <p:spPr>
           <a:xfrm>
-            <a:off x="171450" y="0"/>
-            <a:ext cx="10877550" cy="739754"/>
+            <a:off x="657225" y="1736964"/>
+            <a:ext cx="10877550" cy="4196020"/>
           </a:xfrm>
           <a:prstGeom prst="rect">
             <a:avLst/>
@@ -5499,7 +7529,7 @@
           <a:noFill/>
         </p:spPr>
         <p:txBody>
-          <a:bodyPr wrap="square" rtlCol="0">
+          <a:bodyPr wrap="square">
             <a:spAutoFit/>
           </a:bodyPr>
           <a:lstStyle/>
@@ -5510,589 +7540,99 @@
               </a:lnSpc>
             </a:pPr>
             <a:r>
-              <a:rPr lang="en-US" sz="3200" b="1" dirty="0">
-                <a:latin typeface="Arial" panose="020B0604020202020204" pitchFamily="34" charset="0"/>
-                <a:cs typeface="Arial" panose="020B0604020202020204" pitchFamily="34" charset="0"/>
-              </a:rPr>
-              <a:t>Beta diversity: PERMANOVA &amp; homogeneity</a:t>
-            </a:r>
-          </a:p>
-        </p:txBody>
-      </p:sp>
-      <p:sp>
-        <p:nvSpPr>
-          <p:cNvPr id="3" name="TextBox 2">
-            <a:extLst>
-              <a:ext uri="{FF2B5EF4-FFF2-40B4-BE49-F238E27FC236}">
-                <a16:creationId xmlns:a16="http://schemas.microsoft.com/office/drawing/2014/main" id="{24DE03E5-A9F0-89F8-D440-D6E68719F7FB}"/>
-              </a:ext>
-            </a:extLst>
-          </p:cNvPr>
-          <p:cNvSpPr txBox="1"/>
-          <p:nvPr/>
-        </p:nvSpPr>
-        <p:spPr>
-          <a:xfrm>
-            <a:off x="562356" y="953203"/>
-            <a:ext cx="10877550" cy="6740307"/>
-          </a:xfrm>
-          <a:prstGeom prst="rect">
-            <a:avLst/>
-          </a:prstGeom>
-          <a:noFill/>
-        </p:spPr>
-        <p:txBody>
-          <a:bodyPr wrap="square">
-            <a:spAutoFit/>
-          </a:bodyPr>
-          <a:lstStyle/>
-          <a:p>
+              <a:rPr lang="en-US" sz="1800" b="1" dirty="0">
+                <a:latin typeface="Arial" panose="020B0604020202020204" pitchFamily="34" charset="0"/>
+                <a:cs typeface="Arial" panose="020B0604020202020204" pitchFamily="34" charset="0"/>
+              </a:rPr>
+              <a:t>Alpha diversity: Which groups are ‘richer’?</a:t>
+            </a:r>
+            <a:br>
+              <a:rPr lang="en-US" sz="1800" b="1" dirty="0">
+                <a:latin typeface="Arial" panose="020B0604020202020204" pitchFamily="34" charset="0"/>
+                <a:cs typeface="Arial" panose="020B0604020202020204" pitchFamily="34" charset="0"/>
+              </a:rPr>
+            </a:br>
+            <a:r>
+              <a:rPr lang="en-US" sz="1800" dirty="0"/>
+              <a:t>Does the venom gland tissue type (e.g., distal vs. bulb) </a:t>
+            </a:r>
             <a:r>
               <a:rPr lang="en-US" dirty="0"/>
-              <a:t>The Question: Is the composition of the community different between our experimental groups (e.g., control vs. experimental)?</a:t>
-            </a:r>
-          </a:p>
-          <a:p>
-            <a:endParaRPr lang="en-US" dirty="0"/>
-          </a:p>
-          <a:p>
+              <a:t>correlate to the </a:t>
+            </a:r>
+            <a:r>
+              <a:rPr lang="en-US" sz="1800" dirty="0"/>
+              <a:t>diversity of the microbial community</a:t>
+            </a:r>
             <a:r>
               <a:rPr lang="en-US" dirty="0"/>
-              <a:t>The Metric: We'll use the distance matrices we generated (Bray-Curtis, Jaccard, </a:t>
-            </a:r>
-            <a:r>
-              <a:rPr lang="en-US" dirty="0" err="1"/>
-              <a:t>UniFrac</a:t>
-            </a:r>
-            <a:r>
+              <a:t>?</a:t>
+            </a:r>
+            <a:br>
               <a:rPr lang="en-US" dirty="0"/>
-              <a:t>).</a:t>
-            </a:r>
-          </a:p>
-          <a:p>
-            <a:endParaRPr lang="en-US" dirty="0"/>
-          </a:p>
-          <a:p>
+            </a:br>
             <a:r>
               <a:rPr lang="en-US" dirty="0"/>
-              <a:t>The Statistical Test: PERMANOVA (adonis2 in vegan).</a:t>
-            </a:r>
-          </a:p>
-          <a:p>
-            <a:endParaRPr lang="en-US" dirty="0"/>
-          </a:p>
-          <a:p>
-            <a:r>
-              <a:rPr lang="en-US" dirty="0"/>
-              <a:t>    Analogy: Think of it as an ANOVA, but for multivariate data (whole communities). It tests if the "center" (centroid) of the groups in a </a:t>
-            </a:r>
-            <a:r>
-              <a:rPr lang="en-US" dirty="0" err="1"/>
-              <a:t>PCoA</a:t>
-            </a:r>
-            <a:r>
-              <a:rPr lang="en-US" dirty="0"/>
-              <a:t> plot is significantly different.</a:t>
-            </a:r>
-          </a:p>
-          <a:p>
-            <a:endParaRPr lang="en-US" dirty="0"/>
-          </a:p>
-          <a:p>
-            <a:r>
-              <a:rPr lang="en-US" dirty="0"/>
-              <a:t>The Crucial Check: A significant PERMANOVA result could mean the groups have different centers (real composition differences) OR that one group is just much more variable (dispersed) than the other.</a:t>
-            </a:r>
-          </a:p>
-          <a:p>
-            <a:endParaRPr lang="en-US" dirty="0"/>
-          </a:p>
-          <a:p>
-            <a:r>
-              <a:rPr lang="en-US" dirty="0"/>
-              <a:t>The Test: BETADISPER.</a:t>
-            </a:r>
-          </a:p>
-          <a:p>
-            <a:endParaRPr lang="en-US" dirty="0"/>
-          </a:p>
-          <a:p>
-            <a:r>
-              <a:rPr lang="en-US" dirty="0"/>
-              <a:t>    This tests if the spread of the data is the same across groups.</a:t>
-            </a:r>
-          </a:p>
-          <a:p>
-            <a:endParaRPr lang="en-US" dirty="0"/>
-          </a:p>
-          <a:p>
-            <a:r>
-              <a:rPr lang="en-US" dirty="0"/>
-              <a:t>The Interpretation:</a:t>
-            </a:r>
-          </a:p>
-          <a:p>
-            <a:endParaRPr lang="en-US" dirty="0"/>
-          </a:p>
-          <a:p>
-            <a:r>
-              <a:rPr lang="en-US" dirty="0"/>
-              <a:t>    If PERMANOVA is significant &amp; BETADISPER is NOT significant: Great! The groups truly have different compositions.</a:t>
-            </a:r>
-          </a:p>
-          <a:p>
-            <a:endParaRPr lang="en-US" dirty="0"/>
-          </a:p>
-          <a:p>
-            <a:r>
-              <a:rPr lang="en-US" dirty="0"/>
-              <a:t>    If both are significant: The difference might be driven by one group being more variable. The interpretation is more complex.</a:t>
-            </a:r>
-          </a:p>
-        </p:txBody>
-      </p:sp>
-    </p:spTree>
-    <p:extLst>
-      <p:ext uri="{BB962C8B-B14F-4D97-AF65-F5344CB8AC3E}">
-        <p14:creationId xmlns:p14="http://schemas.microsoft.com/office/powerpoint/2010/main" val="3681608773"/>
-      </p:ext>
-    </p:extLst>
-  </p:cSld>
-  <p:clrMapOvr>
-    <a:masterClrMapping/>
-  </p:clrMapOvr>
-</p:sld>
-</file>
-
-<file path=ppt/slides/slide15.xml><?xml version="1.0" encoding="utf-8"?>
-<p:sld xmlns:a="http://schemas.openxmlformats.org/drawingml/2006/main" xmlns:r="http://schemas.openxmlformats.org/officeDocument/2006/relationships" xmlns:p="http://schemas.openxmlformats.org/presentationml/2006/main">
-  <p:cSld>
-    <p:spTree>
-      <p:nvGrpSpPr>
-        <p:cNvPr id="1" name="">
-          <a:extLst>
-            <a:ext uri="{FF2B5EF4-FFF2-40B4-BE49-F238E27FC236}">
-              <a16:creationId xmlns:a16="http://schemas.microsoft.com/office/drawing/2014/main" id="{FC2CE3E1-7212-4C10-90C5-89746652BDB3}"/>
-            </a:ext>
-          </a:extLst>
-        </p:cNvPr>
-        <p:cNvGrpSpPr/>
-        <p:nvPr/>
-      </p:nvGrpSpPr>
-      <p:grpSpPr>
-        <a:xfrm>
-          <a:off x="0" y="0"/>
-          <a:ext cx="0" cy="0"/>
-          <a:chOff x="0" y="0"/>
-          <a:chExt cx="0" cy="0"/>
-        </a:xfrm>
-      </p:grpSpPr>
-      <p:sp>
-        <p:nvSpPr>
-          <p:cNvPr id="8" name="Slide Number Placeholder 7">
-            <a:extLst>
-              <a:ext uri="{FF2B5EF4-FFF2-40B4-BE49-F238E27FC236}">
-                <a16:creationId xmlns:a16="http://schemas.microsoft.com/office/drawing/2014/main" id="{37C9EFBA-5887-0042-A4E0-7175AA194166}"/>
-              </a:ext>
-            </a:extLst>
-          </p:cNvPr>
-          <p:cNvSpPr>
-            <a:spLocks noGrp="1"/>
-          </p:cNvSpPr>
-          <p:nvPr>
-            <p:ph type="sldNum" sz="quarter" idx="12"/>
-          </p:nvPr>
-        </p:nvSpPr>
-        <p:spPr>
-          <a:xfrm>
-            <a:off x="9263062" y="6337300"/>
-            <a:ext cx="2743200" cy="365125"/>
-          </a:xfrm>
-        </p:spPr>
-        <p:txBody>
-          <a:bodyPr/>
-          <a:lstStyle/>
-          <a:p>
-            <a:fld id="{A7C13B74-2CD1-074C-84D2-FF26F00FE39E}" type="slidenum">
-              <a:rPr lang="en-US" sz="1400" smtClean="0">
-                <a:solidFill>
-                  <a:schemeClr val="tx1"/>
-                </a:solidFill>
-              </a:rPr>
-              <a:t>14</a:t>
-            </a:fld>
-            <a:endParaRPr lang="en-US" sz="1400" dirty="0">
-              <a:solidFill>
-                <a:schemeClr val="tx1"/>
-              </a:solidFill>
-            </a:endParaRPr>
-          </a:p>
-        </p:txBody>
-      </p:sp>
-      <p:sp>
-        <p:nvSpPr>
-          <p:cNvPr id="9" name="TextBox 8">
-            <a:extLst>
-              <a:ext uri="{FF2B5EF4-FFF2-40B4-BE49-F238E27FC236}">
-                <a16:creationId xmlns:a16="http://schemas.microsoft.com/office/drawing/2014/main" id="{2BF8B4E7-5DB1-733C-D086-786C01432A6B}"/>
-              </a:ext>
-            </a:extLst>
-          </p:cNvPr>
-          <p:cNvSpPr txBox="1"/>
-          <p:nvPr/>
-        </p:nvSpPr>
-        <p:spPr>
-          <a:xfrm>
-            <a:off x="1263586" y="1409712"/>
-            <a:ext cx="7999476" cy="3416320"/>
-          </a:xfrm>
-          <a:prstGeom prst="rect">
-            <a:avLst/>
-          </a:prstGeom>
-          <a:noFill/>
-        </p:spPr>
-        <p:txBody>
-          <a:bodyPr wrap="square">
-            <a:spAutoFit/>
-          </a:bodyPr>
-          <a:lstStyle/>
-          <a:p>
-            <a:r>
-              <a:rPr lang="en-US" dirty="0"/>
-              <a:t> Import data with qiime2R.</a:t>
-            </a:r>
-          </a:p>
-          <a:p>
-            <a:endParaRPr lang="en-US" dirty="0"/>
-          </a:p>
-          <a:p>
-            <a:r>
-              <a:rPr lang="en-US" dirty="0"/>
-              <a:t>    Run a PERMANOVA to test the effect of </a:t>
-            </a:r>
-            <a:r>
-              <a:rPr lang="en-US" dirty="0" err="1"/>
-              <a:t>tissue_compartment</a:t>
-            </a:r>
-            <a:r>
-              <a:rPr lang="en-US" dirty="0"/>
-              <a:t> and treatment on beta diversity.</a:t>
-            </a:r>
-          </a:p>
-          <a:p>
-            <a:endParaRPr lang="en-US" dirty="0"/>
-          </a:p>
-          <a:p>
-            <a:r>
-              <a:rPr lang="en-US" dirty="0"/>
-              <a:t>    Create a </a:t>
-            </a:r>
-            <a:r>
-              <a:rPr lang="en-US" dirty="0" err="1"/>
-              <a:t>PCoA</a:t>
-            </a:r>
-            <a:r>
-              <a:rPr lang="en-US" dirty="0"/>
-              <a:t> plot with ggplot2, coloring points by </a:t>
-            </a:r>
-            <a:r>
-              <a:rPr lang="en-US" dirty="0" err="1"/>
-              <a:t>tissue_compartment</a:t>
-            </a:r>
-            <a:r>
-              <a:rPr lang="en-US" dirty="0"/>
-              <a:t> and shaping them by treatment.</a:t>
-            </a:r>
-          </a:p>
-          <a:p>
-            <a:endParaRPr lang="en-US" dirty="0"/>
-          </a:p>
-          <a:p>
-            <a:r>
-              <a:rPr lang="en-US" dirty="0"/>
-              <a:t>    Create a relative abundance bar plot to visualize the "who" behind the statistics.</a:t>
-            </a:r>
-          </a:p>
-          <a:p>
-            <a:endParaRPr lang="en-US" dirty="0"/>
-          </a:p>
-          <a:p>
-            <a:r>
-              <a:rPr lang="en-US" dirty="0"/>
-              <a:t>This is the raw material for the figures in our future publication.</a:t>
-            </a:r>
-          </a:p>
-        </p:txBody>
-      </p:sp>
-    </p:spTree>
-    <p:extLst>
-      <p:ext uri="{BB962C8B-B14F-4D97-AF65-F5344CB8AC3E}">
-        <p14:creationId xmlns:p14="http://schemas.microsoft.com/office/powerpoint/2010/main" val="2677023342"/>
-      </p:ext>
-    </p:extLst>
-  </p:cSld>
-  <p:clrMapOvr>
-    <a:masterClrMapping/>
-  </p:clrMapOvr>
-</p:sld>
-</file>
-
-<file path=ppt/slides/slide16.xml><?xml version="1.0" encoding="utf-8"?>
-<p:sld xmlns:a="http://schemas.openxmlformats.org/drawingml/2006/main" xmlns:r="http://schemas.openxmlformats.org/officeDocument/2006/relationships" xmlns:p="http://schemas.openxmlformats.org/presentationml/2006/main">
-  <p:cSld>
-    <p:spTree>
-      <p:nvGrpSpPr>
-        <p:cNvPr id="1" name="">
-          <a:extLst>
-            <a:ext uri="{FF2B5EF4-FFF2-40B4-BE49-F238E27FC236}">
-              <a16:creationId xmlns:a16="http://schemas.microsoft.com/office/drawing/2014/main" id="{F4DC9A32-3CD1-CEC0-92A9-781154D96DE2}"/>
-            </a:ext>
-          </a:extLst>
-        </p:cNvPr>
-        <p:cNvGrpSpPr/>
-        <p:nvPr/>
-      </p:nvGrpSpPr>
-      <p:grpSpPr>
-        <a:xfrm>
-          <a:off x="0" y="0"/>
-          <a:ext cx="0" cy="0"/>
-          <a:chOff x="0" y="0"/>
-          <a:chExt cx="0" cy="0"/>
-        </a:xfrm>
-      </p:grpSpPr>
-      <p:sp>
-        <p:nvSpPr>
-          <p:cNvPr id="8" name="Slide Number Placeholder 7">
-            <a:extLst>
-              <a:ext uri="{FF2B5EF4-FFF2-40B4-BE49-F238E27FC236}">
-                <a16:creationId xmlns:a16="http://schemas.microsoft.com/office/drawing/2014/main" id="{0F32F8BB-8EBC-3CB2-3BF6-ED9DB51EE9A2}"/>
-              </a:ext>
-            </a:extLst>
-          </p:cNvPr>
-          <p:cNvSpPr>
-            <a:spLocks noGrp="1"/>
-          </p:cNvSpPr>
-          <p:nvPr>
-            <p:ph type="sldNum" sz="quarter" idx="12"/>
-          </p:nvPr>
-        </p:nvSpPr>
-        <p:spPr>
-          <a:xfrm>
-            <a:off x="9263062" y="6337300"/>
-            <a:ext cx="2743200" cy="365125"/>
-          </a:xfrm>
-        </p:spPr>
-        <p:txBody>
-          <a:bodyPr/>
-          <a:lstStyle/>
-          <a:p>
-            <a:fld id="{A7C13B74-2CD1-074C-84D2-FF26F00FE39E}" type="slidenum">
-              <a:rPr lang="en-US" sz="1400" smtClean="0">
-                <a:solidFill>
-                  <a:schemeClr val="tx1"/>
-                </a:solidFill>
-              </a:rPr>
-              <a:t>15</a:t>
-            </a:fld>
-            <a:endParaRPr lang="en-US" sz="1400" dirty="0">
-              <a:solidFill>
-                <a:schemeClr val="tx1"/>
-              </a:solidFill>
-            </a:endParaRPr>
-          </a:p>
-        </p:txBody>
-      </p:sp>
-      <p:sp>
-        <p:nvSpPr>
-          <p:cNvPr id="2" name="TextBox 1">
-            <a:extLst>
-              <a:ext uri="{FF2B5EF4-FFF2-40B4-BE49-F238E27FC236}">
-                <a16:creationId xmlns:a16="http://schemas.microsoft.com/office/drawing/2014/main" id="{048326CD-B11C-B821-5FE8-01B346866CC0}"/>
-              </a:ext>
-            </a:extLst>
-          </p:cNvPr>
-          <p:cNvSpPr txBox="1"/>
-          <p:nvPr/>
-        </p:nvSpPr>
-        <p:spPr>
-          <a:xfrm>
-            <a:off x="171450" y="0"/>
-            <a:ext cx="10877550" cy="739754"/>
-          </a:xfrm>
-          <a:prstGeom prst="rect">
-            <a:avLst/>
-          </a:prstGeom>
-          <a:noFill/>
-        </p:spPr>
-        <p:txBody>
-          <a:bodyPr wrap="square" rtlCol="0">
-            <a:spAutoFit/>
-          </a:bodyPr>
-          <a:lstStyle/>
+              <a:t>Relative abundance bar plot to visualize the "who" behind the statistics</a:t>
+            </a:r>
+          </a:p>
           <a:p>
             <a:pPr>
               <a:lnSpc>
                 <a:spcPct val="150000"/>
               </a:lnSpc>
             </a:pPr>
-            <a:r>
-              <a:rPr lang="en-US" sz="3200" b="1" dirty="0">
-                <a:latin typeface="Arial" panose="020B0604020202020204" pitchFamily="34" charset="0"/>
-                <a:cs typeface="Arial" panose="020B0604020202020204" pitchFamily="34" charset="0"/>
-              </a:rPr>
-              <a:t>Next Steps and Timeline Long-Term</a:t>
-            </a:r>
-          </a:p>
-        </p:txBody>
-      </p:sp>
-      <p:sp>
-        <p:nvSpPr>
-          <p:cNvPr id="3" name="TextBox 2">
-            <a:extLst>
-              <a:ext uri="{FF2B5EF4-FFF2-40B4-BE49-F238E27FC236}">
-                <a16:creationId xmlns:a16="http://schemas.microsoft.com/office/drawing/2014/main" id="{390E87F7-02BB-B6D8-C7D9-B268F2609A03}"/>
-              </a:ext>
-            </a:extLst>
-          </p:cNvPr>
-          <p:cNvSpPr txBox="1"/>
-          <p:nvPr/>
-        </p:nvSpPr>
-        <p:spPr>
-          <a:xfrm>
-            <a:off x="714946" y="1104912"/>
-            <a:ext cx="10334054" cy="3139321"/>
-          </a:xfrm>
-          <a:prstGeom prst="rect">
-            <a:avLst/>
-          </a:prstGeom>
-          <a:noFill/>
-        </p:spPr>
-        <p:txBody>
-          <a:bodyPr wrap="square">
-            <a:spAutoFit/>
-          </a:bodyPr>
-          <a:lstStyle/>
-          <a:p>
-            <a:pPr marL="457200" indent="-457200">
-              <a:buFont typeface="+mj-lt"/>
-              <a:buAutoNum type="arabicPeriod"/>
-            </a:pPr>
-            <a:r>
-              <a:rPr lang="en-US" sz="2200" dirty="0"/>
-              <a:t>Now that you’ve completed the entire analysis process, </a:t>
-            </a:r>
             <a:br>
-              <a:rPr lang="en-US" sz="2200" dirty="0"/>
+              <a:rPr lang="en-US" sz="1800" dirty="0"/>
             </a:br>
-            <a:r>
-              <a:rPr lang="en-US" sz="2200" dirty="0"/>
-              <a:t>what’s clear and what remains hazy? </a:t>
-            </a:r>
             <a:br>
-              <a:rPr lang="en-US" sz="2200" dirty="0"/>
+              <a:rPr lang="en-US" sz="1800" dirty="0"/>
             </a:br>
-            <a:endParaRPr lang="en-US" sz="2200" dirty="0"/>
-          </a:p>
-          <a:p>
-            <a:pPr marL="457200" indent="-457200">
-              <a:buFont typeface="+mj-lt"/>
-              <a:buAutoNum type="arabicPeriod"/>
-            </a:pPr>
-            <a:r>
-              <a:rPr lang="en-US" sz="2200" dirty="0"/>
-              <a:t>What would you do personally to improve the dataset?</a:t>
+            <a:r>
+              <a:rPr lang="en-US" sz="1800" b="1" dirty="0">
+                <a:latin typeface="Arial" panose="020B0604020202020204" pitchFamily="34" charset="0"/>
+                <a:cs typeface="Arial" panose="020B0604020202020204" pitchFamily="34" charset="0"/>
+              </a:rPr>
+              <a:t>Beta diversity: PERMANOVA &amp; homogeneity</a:t>
             </a:r>
             <a:br>
-              <a:rPr lang="en-US" sz="2200" dirty="0"/>
+              <a:rPr lang="en-US" sz="1800" b="1" dirty="0">
+                <a:latin typeface="Arial" panose="020B0604020202020204" pitchFamily="34" charset="0"/>
+                <a:cs typeface="Arial" panose="020B0604020202020204" pitchFamily="34" charset="0"/>
+              </a:rPr>
             </a:br>
             <a:r>
-              <a:rPr lang="en-US" sz="2200" dirty="0"/>
-              <a:t>What would you do personally to improve the analysis?</a:t>
+              <a:rPr lang="en-US" sz="1800" dirty="0"/>
+              <a:t>Is the composition of the community different between groups (</a:t>
             </a:r>
             <a:br>
-              <a:rPr lang="en-US" sz="2200" dirty="0"/>
+              <a:rPr lang="en-US" sz="1800" dirty="0"/>
             </a:br>
-            <a:endParaRPr lang="en-US" sz="2200" dirty="0"/>
-          </a:p>
-          <a:p>
-            <a:pPr marL="457200" indent="-457200">
-              <a:buFont typeface="+mj-lt"/>
-              <a:buAutoNum type="arabicPeriod"/>
-            </a:pPr>
-            <a:r>
-              <a:rPr lang="en-US" sz="2200" dirty="0"/>
-              <a:t>What additional questions could be addressed with the data available?</a:t>
-            </a:r>
-          </a:p>
-          <a:p>
-            <a:pPr marL="457200" indent="-457200">
-              <a:buFont typeface="+mj-lt"/>
-              <a:buAutoNum type="arabicPeriod"/>
-            </a:pPr>
-            <a:endParaRPr lang="en-US" sz="2200" dirty="0"/>
-          </a:p>
-          <a:p>
-            <a:pPr marL="457200" indent="-457200">
-              <a:buFont typeface="+mj-lt"/>
-              <a:buAutoNum type="arabicPeriod"/>
-            </a:pPr>
-            <a:r>
-              <a:rPr lang="en-US" sz="2200" dirty="0"/>
-              <a:t>What does this look like in terms of a publication and workflow?</a:t>
-            </a:r>
-          </a:p>
-        </p:txBody>
-      </p:sp>
-      <p:sp>
-        <p:nvSpPr>
-          <p:cNvPr id="4" name="TextBox 3">
-            <a:extLst>
-              <a:ext uri="{FF2B5EF4-FFF2-40B4-BE49-F238E27FC236}">
-                <a16:creationId xmlns:a16="http://schemas.microsoft.com/office/drawing/2014/main" id="{75D3F7CD-0210-35A9-1624-BCA87E6EA1A6}"/>
-              </a:ext>
-            </a:extLst>
-          </p:cNvPr>
-          <p:cNvSpPr txBox="1"/>
-          <p:nvPr/>
-        </p:nvSpPr>
-        <p:spPr>
-          <a:xfrm>
-            <a:off x="474345" y="5780108"/>
-            <a:ext cx="10877550" cy="739754"/>
-          </a:xfrm>
-          <a:prstGeom prst="rect">
-            <a:avLst/>
-          </a:prstGeom>
-          <a:noFill/>
-        </p:spPr>
-        <p:txBody>
-          <a:bodyPr wrap="square" rtlCol="0">
-            <a:spAutoFit/>
-          </a:bodyPr>
-          <a:lstStyle/>
-          <a:p>
-            <a:pPr algn="r">
+            <a:endParaRPr lang="en-US" sz="1800" dirty="0"/>
+          </a:p>
+          <a:p>
+            <a:pPr>
               <a:lnSpc>
                 <a:spcPct val="150000"/>
               </a:lnSpc>
             </a:pPr>
-            <a:r>
-              <a:rPr lang="en-US" sz="3200" b="1" dirty="0">
-                <a:highlight>
-                  <a:srgbClr val="00FFFF"/>
-                </a:highlight>
-                <a:latin typeface="Arial" panose="020B0604020202020204" pitchFamily="34" charset="0"/>
-                <a:cs typeface="Arial" panose="020B0604020202020204" pitchFamily="34" charset="0"/>
-              </a:rPr>
-              <a:t>Questions?</a:t>
-            </a:r>
+            <a:br>
+              <a:rPr lang="en-US" sz="1800" b="1" dirty="0">
+                <a:latin typeface="Arial" panose="020B0604020202020204" pitchFamily="34" charset="0"/>
+                <a:cs typeface="Arial" panose="020B0604020202020204" pitchFamily="34" charset="0"/>
+              </a:rPr>
+            </a:br>
+            <a:endParaRPr lang="en-US" sz="1800" b="1" dirty="0">
+              <a:latin typeface="Arial" panose="020B0604020202020204" pitchFamily="34" charset="0"/>
+              <a:cs typeface="Arial" panose="020B0604020202020204" pitchFamily="34" charset="0"/>
+            </a:endParaRPr>
           </a:p>
         </p:txBody>
       </p:sp>
     </p:spTree>
     <p:extLst>
       <p:ext uri="{BB962C8B-B14F-4D97-AF65-F5344CB8AC3E}">
-        <p14:creationId xmlns:p14="http://schemas.microsoft.com/office/powerpoint/2010/main" val="3737335531"/>
+        <p14:creationId xmlns:p14="http://schemas.microsoft.com/office/powerpoint/2010/main" val="3972255442"/>
       </p:ext>
     </p:extLst>
   </p:cSld>
@@ -6125,12 +7665,490 @@
           <a:chExt cx="0" cy="0"/>
         </a:xfrm>
       </p:grpSpPr>
+      <p:sp>
+        <p:nvSpPr>
+          <p:cNvPr id="2" name="TextBox 1">
+            <a:extLst>
+              <a:ext uri="{FF2B5EF4-FFF2-40B4-BE49-F238E27FC236}">
+                <a16:creationId xmlns:a16="http://schemas.microsoft.com/office/drawing/2014/main" id="{314B383F-972D-EA01-05F5-3737B2A692D8}"/>
+              </a:ext>
+            </a:extLst>
+          </p:cNvPr>
+          <p:cNvSpPr txBox="1"/>
+          <p:nvPr/>
+        </p:nvSpPr>
+        <p:spPr>
+          <a:xfrm>
+            <a:off x="171450" y="0"/>
+            <a:ext cx="10877550" cy="739754"/>
+          </a:xfrm>
+          <a:prstGeom prst="rect">
+            <a:avLst/>
+          </a:prstGeom>
+          <a:noFill/>
+        </p:spPr>
+        <p:txBody>
+          <a:bodyPr wrap="square" rtlCol="0">
+            <a:spAutoFit/>
+          </a:bodyPr>
+          <a:lstStyle/>
+          <a:p>
+            <a:pPr>
+              <a:lnSpc>
+                <a:spcPct val="150000"/>
+              </a:lnSpc>
+            </a:pPr>
+            <a:r>
+              <a:rPr lang="en-US" sz="3200" b="1" dirty="0">
+                <a:latin typeface="Arial" panose="020B0604020202020204" pitchFamily="34" charset="0"/>
+                <a:cs typeface="Arial" panose="020B0604020202020204" pitchFamily="34" charset="0"/>
+              </a:rPr>
+              <a:t>Overview</a:t>
+            </a:r>
+          </a:p>
+        </p:txBody>
+      </p:sp>
+      <p:sp>
+        <p:nvSpPr>
+          <p:cNvPr id="12" name="Slide Number Placeholder 7">
+            <a:extLst>
+              <a:ext uri="{FF2B5EF4-FFF2-40B4-BE49-F238E27FC236}">
+                <a16:creationId xmlns:a16="http://schemas.microsoft.com/office/drawing/2014/main" id="{70FB20F2-C56D-3F98-0B6E-4FB6DEDD49B6}"/>
+              </a:ext>
+            </a:extLst>
+          </p:cNvPr>
+          <p:cNvSpPr>
+            <a:spLocks noGrp="1"/>
+          </p:cNvSpPr>
+          <p:nvPr>
+            <p:ph type="sldNum" sz="quarter" idx="12"/>
+          </p:nvPr>
+        </p:nvSpPr>
+        <p:spPr>
+          <a:xfrm>
+            <a:off x="9263062" y="6337300"/>
+            <a:ext cx="2743200" cy="365125"/>
+          </a:xfrm>
+        </p:spPr>
+        <p:txBody>
+          <a:bodyPr/>
+          <a:lstStyle/>
+          <a:p>
+            <a:fld id="{A7C13B74-2CD1-074C-84D2-FF26F00FE39E}" type="slidenum">
+              <a:rPr lang="en-US" sz="1400" smtClean="0">
+                <a:solidFill>
+                  <a:schemeClr val="tx1"/>
+                </a:solidFill>
+              </a:rPr>
+              <a:t>1</a:t>
+            </a:fld>
+            <a:endParaRPr lang="en-US" sz="1400" dirty="0">
+              <a:solidFill>
+                <a:schemeClr val="tx1"/>
+              </a:solidFill>
+            </a:endParaRPr>
+          </a:p>
+        </p:txBody>
+      </p:sp>
+    </p:spTree>
+    <p:extLst>
+      <p:ext uri="{BB962C8B-B14F-4D97-AF65-F5344CB8AC3E}">
+        <p14:creationId xmlns:p14="http://schemas.microsoft.com/office/powerpoint/2010/main" val="1950204725"/>
+      </p:ext>
+    </p:extLst>
+  </p:cSld>
+  <p:clrMapOvr>
+    <a:masterClrMapping/>
+  </p:clrMapOvr>
+</p:sld>
+</file>
+
+<file path=ppt/slides/slide20.xml><?xml version="1.0" encoding="utf-8"?>
+<p:sld xmlns:a="http://schemas.openxmlformats.org/drawingml/2006/main" xmlns:r="http://schemas.openxmlformats.org/officeDocument/2006/relationships" xmlns:p="http://schemas.openxmlformats.org/presentationml/2006/main">
+  <p:cSld>
+    <p:spTree>
+      <p:nvGrpSpPr>
+        <p:cNvPr id="1" name="">
+          <a:extLst>
+            <a:ext uri="{FF2B5EF4-FFF2-40B4-BE49-F238E27FC236}">
+              <a16:creationId xmlns:a16="http://schemas.microsoft.com/office/drawing/2014/main" id="{F4DC9A32-3CD1-CEC0-92A9-781154D96DE2}"/>
+            </a:ext>
+          </a:extLst>
+        </p:cNvPr>
+        <p:cNvGrpSpPr/>
+        <p:nvPr/>
+      </p:nvGrpSpPr>
+      <p:grpSpPr>
+        <a:xfrm>
+          <a:off x="0" y="0"/>
+          <a:ext cx="0" cy="0"/>
+          <a:chOff x="0" y="0"/>
+          <a:chExt cx="0" cy="0"/>
+        </a:xfrm>
+      </p:grpSpPr>
+      <p:sp>
+        <p:nvSpPr>
+          <p:cNvPr id="8" name="Slide Number Placeholder 7">
+            <a:extLst>
+              <a:ext uri="{FF2B5EF4-FFF2-40B4-BE49-F238E27FC236}">
+                <a16:creationId xmlns:a16="http://schemas.microsoft.com/office/drawing/2014/main" id="{0F32F8BB-8EBC-3CB2-3BF6-ED9DB51EE9A2}"/>
+              </a:ext>
+            </a:extLst>
+          </p:cNvPr>
+          <p:cNvSpPr>
+            <a:spLocks noGrp="1"/>
+          </p:cNvSpPr>
+          <p:nvPr>
+            <p:ph type="sldNum" sz="quarter" idx="12"/>
+          </p:nvPr>
+        </p:nvSpPr>
+        <p:spPr>
+          <a:xfrm>
+            <a:off x="9263062" y="6337300"/>
+            <a:ext cx="2743200" cy="365125"/>
+          </a:xfrm>
+        </p:spPr>
+        <p:txBody>
+          <a:bodyPr/>
+          <a:lstStyle/>
+          <a:p>
+            <a:fld id="{A7C13B74-2CD1-074C-84D2-FF26F00FE39E}" type="slidenum">
+              <a:rPr lang="en-US" sz="1400" smtClean="0">
+                <a:solidFill>
+                  <a:schemeClr val="tx1"/>
+                </a:solidFill>
+              </a:rPr>
+              <a:t>19</a:t>
+            </a:fld>
+            <a:endParaRPr lang="en-US" sz="1400" dirty="0">
+              <a:solidFill>
+                <a:schemeClr val="tx1"/>
+              </a:solidFill>
+            </a:endParaRPr>
+          </a:p>
+        </p:txBody>
+      </p:sp>
+      <p:sp>
+        <p:nvSpPr>
+          <p:cNvPr id="2" name="TextBox 1">
+            <a:extLst>
+              <a:ext uri="{FF2B5EF4-FFF2-40B4-BE49-F238E27FC236}">
+                <a16:creationId xmlns:a16="http://schemas.microsoft.com/office/drawing/2014/main" id="{048326CD-B11C-B821-5FE8-01B346866CC0}"/>
+              </a:ext>
+            </a:extLst>
+          </p:cNvPr>
+          <p:cNvSpPr txBox="1"/>
+          <p:nvPr/>
+        </p:nvSpPr>
+        <p:spPr>
+          <a:xfrm>
+            <a:off x="171450" y="0"/>
+            <a:ext cx="10877550" cy="739754"/>
+          </a:xfrm>
+          <a:prstGeom prst="rect">
+            <a:avLst/>
+          </a:prstGeom>
+          <a:noFill/>
+        </p:spPr>
+        <p:txBody>
+          <a:bodyPr wrap="square" rtlCol="0">
+            <a:spAutoFit/>
+          </a:bodyPr>
+          <a:lstStyle/>
+          <a:p>
+            <a:pPr>
+              <a:lnSpc>
+                <a:spcPct val="150000"/>
+              </a:lnSpc>
+            </a:pPr>
+            <a:r>
+              <a:rPr lang="en-US" sz="3200" b="1" dirty="0">
+                <a:latin typeface="Arial" panose="020B0604020202020204" pitchFamily="34" charset="0"/>
+                <a:cs typeface="Arial" panose="020B0604020202020204" pitchFamily="34" charset="0"/>
+              </a:rPr>
+              <a:t>Next Steps and Timeline Long-Term</a:t>
+            </a:r>
+          </a:p>
+        </p:txBody>
+      </p:sp>
+      <p:sp>
+        <p:nvSpPr>
+          <p:cNvPr id="3" name="TextBox 2">
+            <a:extLst>
+              <a:ext uri="{FF2B5EF4-FFF2-40B4-BE49-F238E27FC236}">
+                <a16:creationId xmlns:a16="http://schemas.microsoft.com/office/drawing/2014/main" id="{390E87F7-02BB-B6D8-C7D9-B268F2609A03}"/>
+              </a:ext>
+            </a:extLst>
+          </p:cNvPr>
+          <p:cNvSpPr txBox="1"/>
+          <p:nvPr/>
+        </p:nvSpPr>
+        <p:spPr>
+          <a:xfrm>
+            <a:off x="714946" y="1104912"/>
+            <a:ext cx="10334054" cy="3139321"/>
+          </a:xfrm>
+          <a:prstGeom prst="rect">
+            <a:avLst/>
+          </a:prstGeom>
+          <a:noFill/>
+        </p:spPr>
+        <p:txBody>
+          <a:bodyPr wrap="square">
+            <a:spAutoFit/>
+          </a:bodyPr>
+          <a:lstStyle/>
+          <a:p>
+            <a:pPr marL="457200" indent="-457200">
+              <a:buFont typeface="+mj-lt"/>
+              <a:buAutoNum type="arabicPeriod"/>
+            </a:pPr>
+            <a:r>
+              <a:rPr lang="en-US" sz="2200" dirty="0"/>
+              <a:t>Now that you’ve completed the entire analysis process, </a:t>
+            </a:r>
+            <a:br>
+              <a:rPr lang="en-US" sz="2200" dirty="0"/>
+            </a:br>
+            <a:r>
+              <a:rPr lang="en-US" sz="2200" dirty="0"/>
+              <a:t>what’s clear and what remains hazy? </a:t>
+            </a:r>
+            <a:br>
+              <a:rPr lang="en-US" sz="2200" dirty="0"/>
+            </a:br>
+            <a:endParaRPr lang="en-US" sz="2200" dirty="0"/>
+          </a:p>
+          <a:p>
+            <a:pPr marL="457200" indent="-457200">
+              <a:buFont typeface="+mj-lt"/>
+              <a:buAutoNum type="arabicPeriod"/>
+            </a:pPr>
+            <a:r>
+              <a:rPr lang="en-US" sz="2200" dirty="0"/>
+              <a:t>What would you do personally to improve the dataset?</a:t>
+            </a:r>
+            <a:br>
+              <a:rPr lang="en-US" sz="2200" dirty="0"/>
+            </a:br>
+            <a:r>
+              <a:rPr lang="en-US" sz="2200" dirty="0"/>
+              <a:t>What would you do personally to improve the analysis?</a:t>
+            </a:r>
+            <a:br>
+              <a:rPr lang="en-US" sz="2200" dirty="0"/>
+            </a:br>
+            <a:endParaRPr lang="en-US" sz="2200" dirty="0"/>
+          </a:p>
+          <a:p>
+            <a:pPr marL="457200" indent="-457200">
+              <a:buFont typeface="+mj-lt"/>
+              <a:buAutoNum type="arabicPeriod"/>
+            </a:pPr>
+            <a:r>
+              <a:rPr lang="en-US" sz="2200" dirty="0"/>
+              <a:t>What additional questions could be addressed with the data available?</a:t>
+            </a:r>
+          </a:p>
+          <a:p>
+            <a:pPr marL="457200" indent="-457200">
+              <a:buFont typeface="+mj-lt"/>
+              <a:buAutoNum type="arabicPeriod"/>
+            </a:pPr>
+            <a:endParaRPr lang="en-US" sz="2200" dirty="0"/>
+          </a:p>
+          <a:p>
+            <a:pPr marL="457200" indent="-457200">
+              <a:buFont typeface="+mj-lt"/>
+              <a:buAutoNum type="arabicPeriod"/>
+            </a:pPr>
+            <a:r>
+              <a:rPr lang="en-US" sz="2200" dirty="0"/>
+              <a:t>What does this look like in terms of a publication and workflow?</a:t>
+            </a:r>
+          </a:p>
+        </p:txBody>
+      </p:sp>
+      <p:sp>
+        <p:nvSpPr>
+          <p:cNvPr id="4" name="TextBox 3">
+            <a:extLst>
+              <a:ext uri="{FF2B5EF4-FFF2-40B4-BE49-F238E27FC236}">
+                <a16:creationId xmlns:a16="http://schemas.microsoft.com/office/drawing/2014/main" id="{75D3F7CD-0210-35A9-1624-BCA87E6EA1A6}"/>
+              </a:ext>
+            </a:extLst>
+          </p:cNvPr>
+          <p:cNvSpPr txBox="1"/>
+          <p:nvPr/>
+        </p:nvSpPr>
+        <p:spPr>
+          <a:xfrm>
+            <a:off x="474345" y="5780108"/>
+            <a:ext cx="10877550" cy="739754"/>
+          </a:xfrm>
+          <a:prstGeom prst="rect">
+            <a:avLst/>
+          </a:prstGeom>
+          <a:noFill/>
+        </p:spPr>
+        <p:txBody>
+          <a:bodyPr wrap="square" rtlCol="0">
+            <a:spAutoFit/>
+          </a:bodyPr>
+          <a:lstStyle/>
+          <a:p>
+            <a:pPr algn="r">
+              <a:lnSpc>
+                <a:spcPct val="150000"/>
+              </a:lnSpc>
+            </a:pPr>
+            <a:r>
+              <a:rPr lang="en-US" sz="3200" b="1" dirty="0">
+                <a:highlight>
+                  <a:srgbClr val="00FFFF"/>
+                </a:highlight>
+                <a:latin typeface="Arial" panose="020B0604020202020204" pitchFamily="34" charset="0"/>
+                <a:cs typeface="Arial" panose="020B0604020202020204" pitchFamily="34" charset="0"/>
+              </a:rPr>
+              <a:t>Questions?</a:t>
+            </a:r>
+          </a:p>
+        </p:txBody>
+      </p:sp>
+    </p:spTree>
+    <p:extLst>
+      <p:ext uri="{BB962C8B-B14F-4D97-AF65-F5344CB8AC3E}">
+        <p14:creationId xmlns:p14="http://schemas.microsoft.com/office/powerpoint/2010/main" val="3737335531"/>
+      </p:ext>
+    </p:extLst>
+  </p:cSld>
+  <p:clrMapOvr>
+    <a:masterClrMapping/>
+  </p:clrMapOvr>
+</p:sld>
+</file>
+
+<file path=ppt/slides/slide3.xml><?xml version="1.0" encoding="utf-8"?>
+<p:sld xmlns:a="http://schemas.openxmlformats.org/drawingml/2006/main" xmlns:r="http://schemas.openxmlformats.org/officeDocument/2006/relationships" xmlns:p="http://schemas.openxmlformats.org/presentationml/2006/main">
+  <p:cSld>
+    <p:spTree>
+      <p:nvGrpSpPr>
+        <p:cNvPr id="1" name="">
+          <a:extLst>
+            <a:ext uri="{FF2B5EF4-FFF2-40B4-BE49-F238E27FC236}">
+              <a16:creationId xmlns:a16="http://schemas.microsoft.com/office/drawing/2014/main" id="{2DCAA34B-C0A9-A8EA-95B1-C7391A822D75}"/>
+            </a:ext>
+          </a:extLst>
+        </p:cNvPr>
+        <p:cNvGrpSpPr/>
+        <p:nvPr/>
+      </p:nvGrpSpPr>
+      <p:grpSpPr>
+        <a:xfrm>
+          <a:off x="0" y="0"/>
+          <a:ext cx="0" cy="0"/>
+          <a:chOff x="0" y="0"/>
+          <a:chExt cx="0" cy="0"/>
+        </a:xfrm>
+      </p:grpSpPr>
+      <p:sp>
+        <p:nvSpPr>
+          <p:cNvPr id="2" name="TextBox 1">
+            <a:extLst>
+              <a:ext uri="{FF2B5EF4-FFF2-40B4-BE49-F238E27FC236}">
+                <a16:creationId xmlns:a16="http://schemas.microsoft.com/office/drawing/2014/main" id="{ADFCA7EE-0FD2-1D23-D590-753F7A37E09B}"/>
+              </a:ext>
+            </a:extLst>
+          </p:cNvPr>
+          <p:cNvSpPr txBox="1"/>
+          <p:nvPr/>
+        </p:nvSpPr>
+        <p:spPr>
+          <a:xfrm>
+            <a:off x="171450" y="0"/>
+            <a:ext cx="10877550" cy="739754"/>
+          </a:xfrm>
+          <a:prstGeom prst="rect">
+            <a:avLst/>
+          </a:prstGeom>
+          <a:noFill/>
+        </p:spPr>
+        <p:txBody>
+          <a:bodyPr wrap="square" rtlCol="0">
+            <a:spAutoFit/>
+          </a:bodyPr>
+          <a:lstStyle/>
+          <a:p>
+            <a:pPr>
+              <a:lnSpc>
+                <a:spcPct val="150000"/>
+              </a:lnSpc>
+            </a:pPr>
+            <a:r>
+              <a:rPr lang="en-US" sz="3200" b="1" dirty="0">
+                <a:latin typeface="Arial" panose="020B0604020202020204" pitchFamily="34" charset="0"/>
+                <a:cs typeface="Arial" panose="020B0604020202020204" pitchFamily="34" charset="0"/>
+              </a:rPr>
+              <a:t>What AI did: </a:t>
+            </a:r>
+            <a:r>
+              <a:rPr lang="en-US" sz="3200" dirty="0">
+                <a:latin typeface="Arial" panose="020B0604020202020204" pitchFamily="34" charset="0"/>
+                <a:cs typeface="Arial" panose="020B0604020202020204" pitchFamily="34" charset="0"/>
+              </a:rPr>
+              <a:t>On the right track, but ~75% correct</a:t>
+            </a:r>
+          </a:p>
+        </p:txBody>
+      </p:sp>
+      <p:sp>
+        <p:nvSpPr>
+          <p:cNvPr id="12" name="Slide Number Placeholder 7">
+            <a:extLst>
+              <a:ext uri="{FF2B5EF4-FFF2-40B4-BE49-F238E27FC236}">
+                <a16:creationId xmlns:a16="http://schemas.microsoft.com/office/drawing/2014/main" id="{31101A4C-41AD-B585-940F-4A9E535E8FF0}"/>
+              </a:ext>
+            </a:extLst>
+          </p:cNvPr>
+          <p:cNvSpPr>
+            <a:spLocks noGrp="1"/>
+          </p:cNvSpPr>
+          <p:nvPr>
+            <p:ph type="sldNum" sz="quarter" idx="12"/>
+          </p:nvPr>
+        </p:nvSpPr>
+        <p:spPr>
+          <a:xfrm>
+            <a:off x="9263062" y="6337300"/>
+            <a:ext cx="2743200" cy="365125"/>
+          </a:xfrm>
+        </p:spPr>
+        <p:txBody>
+          <a:bodyPr/>
+          <a:lstStyle/>
+          <a:p>
+            <a:fld id="{A7C13B74-2CD1-074C-84D2-FF26F00FE39E}" type="slidenum">
+              <a:rPr lang="en-US" sz="1400" smtClean="0">
+                <a:solidFill>
+                  <a:schemeClr val="tx1"/>
+                </a:solidFill>
+              </a:rPr>
+              <a:t>2</a:t>
+            </a:fld>
+            <a:endParaRPr lang="en-US" sz="1400" dirty="0">
+              <a:solidFill>
+                <a:schemeClr val="tx1"/>
+              </a:solidFill>
+            </a:endParaRPr>
+          </a:p>
+        </p:txBody>
+      </p:sp>
       <p:pic>
         <p:nvPicPr>
-          <p:cNvPr id="4" name="Picture 3" descr="A screenshot of a computer&#10;&#10;AI-generated content may be incorrect.">
-            <a:extLst>
-              <a:ext uri="{FF2B5EF4-FFF2-40B4-BE49-F238E27FC236}">
-                <a16:creationId xmlns:a16="http://schemas.microsoft.com/office/drawing/2014/main" id="{E8D20AE0-000A-BFAF-5C82-FD6FBCBB932D}"/>
+          <p:cNvPr id="3" name="Picture 2" descr="A diagram of a company&#10;&#10;AI-generated content may be incorrect.">
+            <a:extLst>
+              <a:ext uri="{FF2B5EF4-FFF2-40B4-BE49-F238E27FC236}">
+                <a16:creationId xmlns:a16="http://schemas.microsoft.com/office/drawing/2014/main" id="{0DEC8E1A-CF7A-1FA5-9C76-824709CFA87C}"/>
               </a:ext>
             </a:extLst>
           </p:cNvPr>
@@ -6141,27 +8159,157 @@
         </p:nvPicPr>
         <p:blipFill>
           <a:blip r:embed="rId3"/>
-          <a:srcRect l="965" t="23433" r="49381"/>
           <a:stretch>
             <a:fillRect/>
           </a:stretch>
         </p:blipFill>
         <p:spPr>
           <a:xfrm>
-            <a:off x="5118984" y="1014453"/>
-            <a:ext cx="5627517" cy="5583190"/>
+            <a:off x="2490402" y="800731"/>
+            <a:ext cx="7211196" cy="6057269"/>
           </a:xfrm>
           <a:prstGeom prst="rect">
             <a:avLst/>
           </a:prstGeom>
         </p:spPr>
       </p:pic>
+    </p:spTree>
+    <p:extLst>
+      <p:ext uri="{BB962C8B-B14F-4D97-AF65-F5344CB8AC3E}">
+        <p14:creationId xmlns:p14="http://schemas.microsoft.com/office/powerpoint/2010/main" val="4060666080"/>
+      </p:ext>
+    </p:extLst>
+  </p:cSld>
+  <p:clrMapOvr>
+    <a:masterClrMapping/>
+  </p:clrMapOvr>
+</p:sld>
+</file>
+
+<file path=ppt/slides/slide4.xml><?xml version="1.0" encoding="utf-8"?>
+<p:sld xmlns:a="http://schemas.openxmlformats.org/drawingml/2006/main" xmlns:r="http://schemas.openxmlformats.org/officeDocument/2006/relationships" xmlns:p="http://schemas.openxmlformats.org/presentationml/2006/main">
+  <p:cSld>
+    <p:spTree>
+      <p:nvGrpSpPr>
+        <p:cNvPr id="1" name="">
+          <a:extLst>
+            <a:ext uri="{FF2B5EF4-FFF2-40B4-BE49-F238E27FC236}">
+              <a16:creationId xmlns:a16="http://schemas.microsoft.com/office/drawing/2014/main" id="{ABF76868-4CF1-39F9-6159-7FEA5DF7713C}"/>
+            </a:ext>
+          </a:extLst>
+        </p:cNvPr>
+        <p:cNvGrpSpPr/>
+        <p:nvPr/>
+      </p:nvGrpSpPr>
+      <p:grpSpPr>
+        <a:xfrm>
+          <a:off x="0" y="0"/>
+          <a:ext cx="0" cy="0"/>
+          <a:chOff x="0" y="0"/>
+          <a:chExt cx="0" cy="0"/>
+        </a:xfrm>
+      </p:grpSpPr>
+      <p:sp>
+        <p:nvSpPr>
+          <p:cNvPr id="2" name="TextBox 1">
+            <a:extLst>
+              <a:ext uri="{FF2B5EF4-FFF2-40B4-BE49-F238E27FC236}">
+                <a16:creationId xmlns:a16="http://schemas.microsoft.com/office/drawing/2014/main" id="{A9C5F5CC-2ADB-4A3C-9486-283408C67550}"/>
+              </a:ext>
+            </a:extLst>
+          </p:cNvPr>
+          <p:cNvSpPr txBox="1"/>
+          <p:nvPr/>
+        </p:nvSpPr>
+        <p:spPr>
+          <a:xfrm>
+            <a:off x="171450" y="0"/>
+            <a:ext cx="10877550" cy="739754"/>
+          </a:xfrm>
+          <a:prstGeom prst="rect">
+            <a:avLst/>
+          </a:prstGeom>
+          <a:noFill/>
+        </p:spPr>
+        <p:txBody>
+          <a:bodyPr wrap="square" rtlCol="0">
+            <a:spAutoFit/>
+          </a:bodyPr>
+          <a:lstStyle/>
+          <a:p>
+            <a:pPr>
+              <a:lnSpc>
+                <a:spcPct val="150000"/>
+              </a:lnSpc>
+            </a:pPr>
+            <a:r>
+              <a:rPr lang="en-US" sz="3200" b="1" dirty="0">
+                <a:latin typeface="Arial" panose="020B0604020202020204" pitchFamily="34" charset="0"/>
+                <a:cs typeface="Arial" panose="020B0604020202020204" pitchFamily="34" charset="0"/>
+              </a:rPr>
+              <a:t>Utilizing AI as a tool </a:t>
+            </a:r>
+            <a:r>
+              <a:rPr lang="en-US" i="1" dirty="0">
+                <a:highlight>
+                  <a:srgbClr val="00FFFF"/>
+                </a:highlight>
+                <a:latin typeface="Arial" panose="020B0604020202020204" pitchFamily="34" charset="0"/>
+                <a:cs typeface="Arial" panose="020B0604020202020204" pitchFamily="34" charset="0"/>
+              </a:rPr>
+              <a:t>*you can be lazy, but you need to fact-check</a:t>
+            </a:r>
+          </a:p>
+        </p:txBody>
+      </p:sp>
+      <p:sp>
+        <p:nvSpPr>
+          <p:cNvPr id="12" name="Slide Number Placeholder 7">
+            <a:extLst>
+              <a:ext uri="{FF2B5EF4-FFF2-40B4-BE49-F238E27FC236}">
+                <a16:creationId xmlns:a16="http://schemas.microsoft.com/office/drawing/2014/main" id="{19272A45-8B55-E889-484F-C0520004CC8C}"/>
+              </a:ext>
+            </a:extLst>
+          </p:cNvPr>
+          <p:cNvSpPr>
+            <a:spLocks noGrp="1"/>
+          </p:cNvSpPr>
+          <p:nvPr>
+            <p:ph type="sldNum" sz="quarter" idx="12"/>
+          </p:nvPr>
+        </p:nvSpPr>
+        <p:spPr>
+          <a:xfrm>
+            <a:off x="9263062" y="6337300"/>
+            <a:ext cx="2743200" cy="365125"/>
+          </a:xfrm>
+        </p:spPr>
+        <p:txBody>
+          <a:bodyPr/>
+          <a:lstStyle/>
+          <a:p>
+            <a:fld id="{A7C13B74-2CD1-074C-84D2-FF26F00FE39E}" type="slidenum">
+              <a:rPr lang="en-US" sz="1400" smtClean="0">
+                <a:solidFill>
+                  <a:schemeClr val="tx1"/>
+                </a:solidFill>
+              </a:rPr>
+              <a:t>3</a:t>
+            </a:fld>
+            <a:endParaRPr lang="en-US" sz="1400" dirty="0">
+              <a:solidFill>
+                <a:schemeClr val="tx1"/>
+              </a:solidFill>
+            </a:endParaRPr>
+          </a:p>
+        </p:txBody>
+      </p:sp>
       <p:pic>
         <p:nvPicPr>
-          <p:cNvPr id="8" name="Picture 7" descr="A screenshot of a computer&#10;&#10;AI-generated content may be incorrect.">
-            <a:extLst>
-              <a:ext uri="{FF2B5EF4-FFF2-40B4-BE49-F238E27FC236}">
-                <a16:creationId xmlns:a16="http://schemas.microsoft.com/office/drawing/2014/main" id="{97416228-1FF1-CE8D-772A-E9943124C98A}"/>
+          <p:cNvPr id="13" name="Picture 12" descr="A diagram of a company&#10;&#10;AI-generated content may be incorrect.">
+            <a:extLst>
+              <a:ext uri="{FF2B5EF4-FFF2-40B4-BE49-F238E27FC236}">
+                <a16:creationId xmlns:a16="http://schemas.microsoft.com/office/drawing/2014/main" id="{926BFAD7-2374-06F5-5448-C0AE62889A8E}"/>
               </a:ext>
             </a:extLst>
           </p:cNvPr>
@@ -6172,44 +8320,135 @@
         </p:nvPicPr>
         <p:blipFill>
           <a:blip r:embed="rId3"/>
-          <a:srcRect l="18945" b="85748"/>
+          <a:srcRect l="48151" t="5689" r="45641" b="90517"/>
           <a:stretch>
             <a:fillRect/>
           </a:stretch>
         </p:blipFill>
         <p:spPr>
           <a:xfrm>
-            <a:off x="5118984" y="260357"/>
-            <a:ext cx="5627516" cy="636628"/>
+            <a:off x="753714" y="5126485"/>
+            <a:ext cx="1746218" cy="896086"/>
           </a:xfrm>
           <a:prstGeom prst="rect">
             <a:avLst/>
           </a:prstGeom>
         </p:spPr>
       </p:pic>
-      <p:sp>
-        <p:nvSpPr>
-          <p:cNvPr id="6" name="TextBox 5">
-            <a:extLst>
-              <a:ext uri="{FF2B5EF4-FFF2-40B4-BE49-F238E27FC236}">
-                <a16:creationId xmlns:a16="http://schemas.microsoft.com/office/drawing/2014/main" id="{3A103DB1-F5DF-912E-2F02-0256B4F3EE16}"/>
-              </a:ext>
-            </a:extLst>
-          </p:cNvPr>
-          <p:cNvSpPr txBox="1"/>
+      <p:pic>
+        <p:nvPicPr>
+          <p:cNvPr id="3" name="Picture 2" descr="A diagram of a company&#10;&#10;AI-generated content may be incorrect.">
+            <a:extLst>
+              <a:ext uri="{FF2B5EF4-FFF2-40B4-BE49-F238E27FC236}">
+                <a16:creationId xmlns:a16="http://schemas.microsoft.com/office/drawing/2014/main" id="{1812EE11-681E-43E3-3523-C151E299370A}"/>
+              </a:ext>
+            </a:extLst>
+          </p:cNvPr>
+          <p:cNvPicPr>
+            <a:picLocks noChangeAspect="1"/>
+          </p:cNvPicPr>
           <p:nvPr/>
-        </p:nvSpPr>
-        <p:spPr>
-          <a:xfrm>
-            <a:off x="6166600" y="6459535"/>
-            <a:ext cx="1416423" cy="307777"/>
+        </p:nvPicPr>
+        <p:blipFill>
+          <a:blip r:embed="rId3"/>
+          <a:srcRect l="48712" t="16849" r="46173" b="79357"/>
+          <a:stretch>
+            <a:fillRect/>
+          </a:stretch>
+        </p:blipFill>
+        <p:spPr>
+          <a:xfrm>
+            <a:off x="3455356" y="3407942"/>
+            <a:ext cx="1386975" cy="863906"/>
           </a:xfrm>
           <a:prstGeom prst="rect">
             <a:avLst/>
           </a:prstGeom>
-          <a:solidFill>
-            <a:schemeClr val="bg1"/>
-          </a:solidFill>
+        </p:spPr>
+      </p:pic>
+      <p:pic>
+        <p:nvPicPr>
+          <p:cNvPr id="4" name="Picture 3" descr="A diagram of a company&#10;&#10;AI-generated content may be incorrect.">
+            <a:extLst>
+              <a:ext uri="{FF2B5EF4-FFF2-40B4-BE49-F238E27FC236}">
+                <a16:creationId xmlns:a16="http://schemas.microsoft.com/office/drawing/2014/main" id="{13D63E18-5F72-106D-1014-9B6BEB29E8BB}"/>
+              </a:ext>
+            </a:extLst>
+          </p:cNvPr>
+          <p:cNvPicPr>
+            <a:picLocks noChangeAspect="1"/>
+          </p:cNvPicPr>
+          <p:nvPr/>
+        </p:nvPicPr>
+        <p:blipFill>
+          <a:blip r:embed="rId3"/>
+          <a:srcRect l="48099" t="11042" r="45693" b="85164"/>
+          <a:stretch>
+            <a:fillRect/>
+          </a:stretch>
+        </p:blipFill>
+        <p:spPr>
+          <a:xfrm>
+            <a:off x="3275733" y="4678442"/>
+            <a:ext cx="1746219" cy="896086"/>
+          </a:xfrm>
+          <a:prstGeom prst="rect">
+            <a:avLst/>
+          </a:prstGeom>
+        </p:spPr>
+      </p:pic>
+      <p:pic>
+        <p:nvPicPr>
+          <p:cNvPr id="5" name="Picture 4" descr="A diagram of a company&#10;&#10;AI-generated content may be incorrect.">
+            <a:extLst>
+              <a:ext uri="{FF2B5EF4-FFF2-40B4-BE49-F238E27FC236}">
+                <a16:creationId xmlns:a16="http://schemas.microsoft.com/office/drawing/2014/main" id="{7C611AF8-06F7-9608-46C2-8D4CF09D09B8}"/>
+              </a:ext>
+            </a:extLst>
+          </p:cNvPr>
+          <p:cNvPicPr>
+            <a:picLocks noChangeAspect="1"/>
+          </p:cNvPicPr>
+          <p:nvPr/>
+        </p:nvPicPr>
+        <p:blipFill>
+          <a:blip r:embed="rId3"/>
+          <a:srcRect l="81265" t="16948" r="12527" b="79258"/>
+          <a:stretch>
+            <a:fillRect/>
+          </a:stretch>
+        </p:blipFill>
+        <p:spPr>
+          <a:xfrm>
+            <a:off x="753714" y="3119081"/>
+            <a:ext cx="1683509" cy="863906"/>
+          </a:xfrm>
+          <a:prstGeom prst="rect">
+            <a:avLst/>
+          </a:prstGeom>
+        </p:spPr>
+      </p:pic>
+      <p:sp>
+        <p:nvSpPr>
+          <p:cNvPr id="6" name="TextBox 5">
+            <a:extLst>
+              <a:ext uri="{FF2B5EF4-FFF2-40B4-BE49-F238E27FC236}">
+                <a16:creationId xmlns:a16="http://schemas.microsoft.com/office/drawing/2014/main" id="{6F736C64-79B6-EA70-314A-4D3257B83B73}"/>
+              </a:ext>
+            </a:extLst>
+          </p:cNvPr>
+          <p:cNvSpPr txBox="1"/>
+          <p:nvPr/>
+        </p:nvSpPr>
+        <p:spPr>
+          <a:xfrm>
+            <a:off x="834681" y="4589094"/>
+            <a:ext cx="1584285" cy="537391"/>
+          </a:xfrm>
+          <a:prstGeom prst="rect">
+            <a:avLst/>
+          </a:prstGeom>
+          <a:noFill/>
         </p:spPr>
         <p:txBody>
           <a:bodyPr wrap="square" rtlCol="0">
@@ -6217,24 +8456,157 @@
           </a:bodyPr>
           <a:lstStyle/>
           <a:p>
-            <a:pPr algn="ctr"/>
-            <a:r>
-              <a:rPr lang="en-US" sz="1400" dirty="0" err="1">
+            <a:pPr algn="ctr">
+              <a:lnSpc>
+                <a:spcPct val="150000"/>
+              </a:lnSpc>
+            </a:pPr>
+            <a:r>
+              <a:rPr lang="en-US" sz="2200" dirty="0">
+                <a:latin typeface="Arial" panose="020B0604020202020204" pitchFamily="34" charset="0"/>
+                <a:cs typeface="Arial" panose="020B0604020202020204" pitchFamily="34" charset="0"/>
+              </a:rPr>
+              <a:t>Illumina</a:t>
+            </a:r>
+          </a:p>
+        </p:txBody>
+      </p:sp>
+      <p:sp>
+        <p:nvSpPr>
+          <p:cNvPr id="7" name="TextBox 6">
+            <a:extLst>
+              <a:ext uri="{FF2B5EF4-FFF2-40B4-BE49-F238E27FC236}">
+                <a16:creationId xmlns:a16="http://schemas.microsoft.com/office/drawing/2014/main" id="{A6B1C4D2-EF0C-8B96-CFEE-B53A28402FC8}"/>
+              </a:ext>
+            </a:extLst>
+          </p:cNvPr>
+          <p:cNvSpPr txBox="1"/>
+          <p:nvPr/>
+        </p:nvSpPr>
+        <p:spPr>
+          <a:xfrm>
+            <a:off x="578805" y="1291204"/>
+            <a:ext cx="2162236" cy="537391"/>
+          </a:xfrm>
+          <a:prstGeom prst="rect">
+            <a:avLst/>
+          </a:prstGeom>
+          <a:noFill/>
+        </p:spPr>
+        <p:txBody>
+          <a:bodyPr wrap="square" rtlCol="0">
+            <a:spAutoFit/>
+          </a:bodyPr>
+          <a:lstStyle/>
+          <a:p>
+            <a:pPr algn="ctr">
+              <a:lnSpc>
+                <a:spcPct val="150000"/>
+              </a:lnSpc>
+            </a:pPr>
+            <a:r>
+              <a:rPr lang="en-US" sz="2200" dirty="0">
+                <a:latin typeface="Arial" panose="020B0604020202020204" pitchFamily="34" charset="0"/>
+                <a:cs typeface="Arial" panose="020B0604020202020204" pitchFamily="34" charset="0"/>
+              </a:rPr>
+              <a:t>Experiment</a:t>
+            </a:r>
+          </a:p>
+        </p:txBody>
+      </p:sp>
+      <p:sp>
+        <p:nvSpPr>
+          <p:cNvPr id="8" name="TextBox 7">
+            <a:extLst>
+              <a:ext uri="{FF2B5EF4-FFF2-40B4-BE49-F238E27FC236}">
+                <a16:creationId xmlns:a16="http://schemas.microsoft.com/office/drawing/2014/main" id="{AA590572-9471-3D3D-B512-9B444F536503}"/>
+              </a:ext>
+            </a:extLst>
+          </p:cNvPr>
+          <p:cNvSpPr txBox="1"/>
+          <p:nvPr/>
+        </p:nvSpPr>
+        <p:spPr>
+          <a:xfrm>
+            <a:off x="803325" y="4055865"/>
+            <a:ext cx="1584285" cy="537391"/>
+          </a:xfrm>
+          <a:prstGeom prst="rect">
+            <a:avLst/>
+          </a:prstGeom>
+          <a:noFill/>
+        </p:spPr>
+        <p:txBody>
+          <a:bodyPr wrap="square" rtlCol="0">
+            <a:spAutoFit/>
+          </a:bodyPr>
+          <a:lstStyle/>
+          <a:p>
+            <a:pPr algn="ctr">
+              <a:lnSpc>
+                <a:spcPct val="150000"/>
+              </a:lnSpc>
+            </a:pPr>
+            <a:r>
+              <a:rPr lang="en-US" sz="2200" dirty="0">
                 <a:solidFill>
-                  <a:schemeClr val="accent5">
-                    <a:lumMod val="75000"/>
-                  </a:schemeClr>
+                  <a:schemeClr val="accent2"/>
                 </a:solidFill>
                 <a:latin typeface="Arial" panose="020B0604020202020204" pitchFamily="34" charset="0"/>
                 <a:cs typeface="Arial" panose="020B0604020202020204" pitchFamily="34" charset="0"/>
               </a:rPr>
-              <a:t>Sample_Type</a:t>
-            </a:r>
-            <a:endParaRPr lang="en-US" sz="1400" dirty="0">
+              <a:t>+</a:t>
+            </a:r>
+          </a:p>
+        </p:txBody>
+      </p:sp>
+      <p:sp>
+        <p:nvSpPr>
+          <p:cNvPr id="9" name="TextBox 8">
+            <a:extLst>
+              <a:ext uri="{FF2B5EF4-FFF2-40B4-BE49-F238E27FC236}">
+                <a16:creationId xmlns:a16="http://schemas.microsoft.com/office/drawing/2014/main" id="{F47847DB-E42C-0D49-33B8-F3D80017EC9B}"/>
+              </a:ext>
+            </a:extLst>
+          </p:cNvPr>
+          <p:cNvSpPr txBox="1"/>
+          <p:nvPr/>
+        </p:nvSpPr>
+        <p:spPr>
+          <a:xfrm>
+            <a:off x="2200427" y="4027075"/>
+            <a:ext cx="1584285" cy="638701"/>
+          </a:xfrm>
+          <a:prstGeom prst="rect">
+            <a:avLst/>
+          </a:prstGeom>
+          <a:noFill/>
+        </p:spPr>
+        <p:txBody>
+          <a:bodyPr wrap="square" rtlCol="0">
+            <a:spAutoFit/>
+          </a:bodyPr>
+          <a:lstStyle/>
+          <a:p>
+            <a:pPr algn="ctr">
+              <a:lnSpc>
+                <a:spcPct val="150000"/>
+              </a:lnSpc>
+            </a:pPr>
+            <a:r>
+              <a:rPr lang="en-US" sz="2700" b="1" dirty="0">
+                <a:solidFill>
+                  <a:schemeClr val="accent2"/>
+                </a:solidFill>
+                <a:latin typeface="Arial" panose="020B0604020202020204" pitchFamily="34" charset="0"/>
+                <a:cs typeface="Arial" panose="020B0604020202020204" pitchFamily="34" charset="0"/>
+                <a:sym typeface="Wingdings" pitchFamily="2" charset="2"/>
+              </a:rPr>
+              <a:t></a:t>
+            </a:r>
+            <a:endParaRPr lang="en-US" sz="2700" b="1" dirty="0">
               <a:solidFill>
-                <a:schemeClr val="accent5">
-                  <a:lumMod val="75000"/>
-                </a:schemeClr>
+                <a:schemeClr val="accent2"/>
               </a:solidFill>
               <a:latin typeface="Arial" panose="020B0604020202020204" pitchFamily="34" charset="0"/>
               <a:cs typeface="Arial" panose="020B0604020202020204" pitchFamily="34" charset="0"/>
@@ -6244,30 +8616,73 @@
       </p:sp>
       <p:sp>
         <p:nvSpPr>
-          <p:cNvPr id="9" name="Left Brace 8">
-            <a:extLst>
-              <a:ext uri="{FF2B5EF4-FFF2-40B4-BE49-F238E27FC236}">
-                <a16:creationId xmlns:a16="http://schemas.microsoft.com/office/drawing/2014/main" id="{C02F3D61-81AA-409F-9ED9-52A7901EBF7D}"/>
-              </a:ext>
-            </a:extLst>
-          </p:cNvPr>
-          <p:cNvSpPr/>
+          <p:cNvPr id="10" name="TextBox 9">
+            <a:extLst>
+              <a:ext uri="{FF2B5EF4-FFF2-40B4-BE49-F238E27FC236}">
+                <a16:creationId xmlns:a16="http://schemas.microsoft.com/office/drawing/2014/main" id="{F1D597B5-45FA-8961-7794-FED9E940F24B}"/>
+              </a:ext>
+            </a:extLst>
+          </p:cNvPr>
+          <p:cNvSpPr txBox="1"/>
           <p:nvPr/>
         </p:nvSpPr>
         <p:spPr>
-          <a:xfrm rot="16200000">
-            <a:off x="6752859" y="5042272"/>
-            <a:ext cx="243906" cy="2776817"/>
-          </a:xfrm>
-          <a:prstGeom prst="leftBrace">
+          <a:xfrm>
+            <a:off x="3025669" y="1285877"/>
+            <a:ext cx="2162236" cy="537391"/>
+          </a:xfrm>
+          <a:prstGeom prst="rect">
             <a:avLst/>
           </a:prstGeom>
-          <a:ln>
+          <a:noFill/>
+        </p:spPr>
+        <p:txBody>
+          <a:bodyPr wrap="square" rtlCol="0">
+            <a:spAutoFit/>
+          </a:bodyPr>
+          <a:lstStyle/>
+          <a:p>
+            <a:pPr algn="ctr">
+              <a:lnSpc>
+                <a:spcPct val="150000"/>
+              </a:lnSpc>
+            </a:pPr>
+            <a:r>
+              <a:rPr lang="en-US" sz="2200" dirty="0">
+                <a:latin typeface="Arial" panose="020B0604020202020204" pitchFamily="34" charset="0"/>
+                <a:cs typeface="Arial" panose="020B0604020202020204" pitchFamily="34" charset="0"/>
+              </a:rPr>
+              <a:t>Pre-processing</a:t>
+            </a:r>
+          </a:p>
+        </p:txBody>
+      </p:sp>
+      <p:cxnSp>
+        <p:nvCxnSpPr>
+          <p:cNvPr id="14" name="Straight Arrow Connector 13">
+            <a:extLst>
+              <a:ext uri="{FF2B5EF4-FFF2-40B4-BE49-F238E27FC236}">
+                <a16:creationId xmlns:a16="http://schemas.microsoft.com/office/drawing/2014/main" id="{92B13764-6514-A9E6-728F-D6BD35F9A447}"/>
+              </a:ext>
+            </a:extLst>
+          </p:cNvPr>
+          <p:cNvCxnSpPr/>
+          <p:nvPr/>
+        </p:nvCxnSpPr>
+        <p:spPr>
+          <a:xfrm>
+            <a:off x="4164884" y="4324560"/>
+            <a:ext cx="0" cy="319350"/>
+          </a:xfrm>
+          <a:prstGeom prst="straightConnector1">
+            <a:avLst/>
+          </a:prstGeom>
+          <a:ln w="38100">
             <a:solidFill>
-              <a:schemeClr val="accent5">
-                <a:lumMod val="75000"/>
-              </a:schemeClr>
+              <a:schemeClr val="accent2"/>
             </a:solidFill>
+            <a:headEnd type="triangle"/>
+            <a:tailEnd type="triangle"/>
           </a:ln>
         </p:spPr>
         <p:style>
@@ -6284,6 +8699,1389 @@
             <a:schemeClr val="tx1"/>
           </a:fontRef>
         </p:style>
+      </p:cxnSp>
+      <p:sp>
+        <p:nvSpPr>
+          <p:cNvPr id="15" name="TextBox 14">
+            <a:extLst>
+              <a:ext uri="{FF2B5EF4-FFF2-40B4-BE49-F238E27FC236}">
+                <a16:creationId xmlns:a16="http://schemas.microsoft.com/office/drawing/2014/main" id="{D07806AD-E616-3730-92E9-90724FE832D8}"/>
+              </a:ext>
+            </a:extLst>
+          </p:cNvPr>
+          <p:cNvSpPr txBox="1"/>
+          <p:nvPr/>
+        </p:nvSpPr>
+        <p:spPr>
+          <a:xfrm>
+            <a:off x="4641479" y="4055865"/>
+            <a:ext cx="1584285" cy="638701"/>
+          </a:xfrm>
+          <a:prstGeom prst="rect">
+            <a:avLst/>
+          </a:prstGeom>
+          <a:noFill/>
+        </p:spPr>
+        <p:txBody>
+          <a:bodyPr wrap="square" rtlCol="0">
+            <a:spAutoFit/>
+          </a:bodyPr>
+          <a:lstStyle/>
+          <a:p>
+            <a:pPr algn="ctr">
+              <a:lnSpc>
+                <a:spcPct val="150000"/>
+              </a:lnSpc>
+            </a:pPr>
+            <a:r>
+              <a:rPr lang="en-US" sz="2700" b="1" dirty="0">
+                <a:solidFill>
+                  <a:schemeClr val="accent2"/>
+                </a:solidFill>
+                <a:latin typeface="Arial" panose="020B0604020202020204" pitchFamily="34" charset="0"/>
+                <a:cs typeface="Arial" panose="020B0604020202020204" pitchFamily="34" charset="0"/>
+                <a:sym typeface="Wingdings" pitchFamily="2" charset="2"/>
+              </a:rPr>
+              <a:t></a:t>
+            </a:r>
+            <a:endParaRPr lang="en-US" sz="2700" b="1" dirty="0">
+              <a:solidFill>
+                <a:schemeClr val="accent2"/>
+              </a:solidFill>
+              <a:latin typeface="Arial" panose="020B0604020202020204" pitchFamily="34" charset="0"/>
+              <a:cs typeface="Arial" panose="020B0604020202020204" pitchFamily="34" charset="0"/>
+            </a:endParaRPr>
+          </a:p>
+        </p:txBody>
+      </p:sp>
+      <p:pic>
+        <p:nvPicPr>
+          <p:cNvPr id="17" name="Picture 16" descr="A diagram of a company&#10;&#10;AI-generated content may be incorrect.">
+            <a:extLst>
+              <a:ext uri="{FF2B5EF4-FFF2-40B4-BE49-F238E27FC236}">
+                <a16:creationId xmlns:a16="http://schemas.microsoft.com/office/drawing/2014/main" id="{A037EEB7-19B2-BF1A-376C-62AE23C72FDE}"/>
+              </a:ext>
+            </a:extLst>
+          </p:cNvPr>
+          <p:cNvPicPr>
+            <a:picLocks noChangeAspect="1"/>
+          </p:cNvPicPr>
+          <p:nvPr/>
+        </p:nvPicPr>
+        <p:blipFill>
+          <a:blip r:embed="rId3"/>
+          <a:srcRect l="48878" t="24915" r="44914" b="71291"/>
+          <a:stretch>
+            <a:fillRect/>
+          </a:stretch>
+        </p:blipFill>
+        <p:spPr>
+          <a:xfrm>
+            <a:off x="5764520" y="4013810"/>
+            <a:ext cx="1746219" cy="896086"/>
+          </a:xfrm>
+          <a:prstGeom prst="rect">
+            <a:avLst/>
+          </a:prstGeom>
+        </p:spPr>
+      </p:pic>
+      <p:pic>
+        <p:nvPicPr>
+          <p:cNvPr id="18" name="Picture 17" descr="A diagram of a company&#10;&#10;AI-generated content may be incorrect.">
+            <a:extLst>
+              <a:ext uri="{FF2B5EF4-FFF2-40B4-BE49-F238E27FC236}">
+                <a16:creationId xmlns:a16="http://schemas.microsoft.com/office/drawing/2014/main" id="{F42E326C-0EE3-347D-5E3B-79B8A672088A}"/>
+              </a:ext>
+            </a:extLst>
+          </p:cNvPr>
+          <p:cNvPicPr>
+            <a:picLocks noChangeAspect="1"/>
+          </p:cNvPicPr>
+          <p:nvPr/>
+        </p:nvPicPr>
+        <p:blipFill>
+          <a:blip r:embed="rId3"/>
+          <a:srcRect l="48486" t="30773" r="44357" b="64364"/>
+          <a:stretch>
+            <a:fillRect/>
+          </a:stretch>
+        </p:blipFill>
+        <p:spPr>
+          <a:xfrm>
+            <a:off x="7620670" y="3997001"/>
+            <a:ext cx="1655213" cy="944334"/>
+          </a:xfrm>
+          <a:prstGeom prst="rect">
+            <a:avLst/>
+          </a:prstGeom>
+        </p:spPr>
+      </p:pic>
+      <p:pic>
+        <p:nvPicPr>
+          <p:cNvPr id="20" name="Picture 19" descr="A diagram of a company&#10;&#10;AI-generated content may be incorrect.">
+            <a:extLst>
+              <a:ext uri="{FF2B5EF4-FFF2-40B4-BE49-F238E27FC236}">
+                <a16:creationId xmlns:a16="http://schemas.microsoft.com/office/drawing/2014/main" id="{AA6564B6-1F77-0D25-2B7B-793D03C118B2}"/>
+              </a:ext>
+            </a:extLst>
+          </p:cNvPr>
+          <p:cNvPicPr>
+            <a:picLocks noChangeAspect="1"/>
+          </p:cNvPicPr>
+          <p:nvPr/>
+        </p:nvPicPr>
+        <p:blipFill>
+          <a:blip r:embed="rId3"/>
+          <a:srcRect l="40801" t="42522" r="52428" b="53684"/>
+          <a:stretch>
+            <a:fillRect/>
+          </a:stretch>
+        </p:blipFill>
+        <p:spPr>
+          <a:xfrm>
+            <a:off x="9385814" y="3063096"/>
+            <a:ext cx="1904474" cy="896086"/>
+          </a:xfrm>
+          <a:prstGeom prst="rect">
+            <a:avLst/>
+          </a:prstGeom>
+        </p:spPr>
+      </p:pic>
+      <p:pic>
+        <p:nvPicPr>
+          <p:cNvPr id="21" name="Picture 20" descr="A diagram of a company&#10;&#10;AI-generated content may be incorrect.">
+            <a:extLst>
+              <a:ext uri="{FF2B5EF4-FFF2-40B4-BE49-F238E27FC236}">
+                <a16:creationId xmlns:a16="http://schemas.microsoft.com/office/drawing/2014/main" id="{1749B804-88F3-308A-5F3A-E909023E4D76}"/>
+              </a:ext>
+            </a:extLst>
+          </p:cNvPr>
+          <p:cNvPicPr>
+            <a:picLocks noChangeAspect="1"/>
+          </p:cNvPicPr>
+          <p:nvPr/>
+        </p:nvPicPr>
+        <p:blipFill>
+          <a:blip r:embed="rId3"/>
+          <a:srcRect l="49125" t="42548" r="45274" b="53658"/>
+          <a:stretch>
+            <a:fillRect/>
+          </a:stretch>
+        </p:blipFill>
+        <p:spPr>
+          <a:xfrm>
+            <a:off x="9550343" y="4048912"/>
+            <a:ext cx="1575417" cy="896086"/>
+          </a:xfrm>
+          <a:prstGeom prst="rect">
+            <a:avLst/>
+          </a:prstGeom>
+        </p:spPr>
+      </p:pic>
+      <p:pic>
+        <p:nvPicPr>
+          <p:cNvPr id="22" name="Picture 21" descr="A diagram of a company&#10;&#10;AI-generated content may be incorrect.">
+            <a:extLst>
+              <a:ext uri="{FF2B5EF4-FFF2-40B4-BE49-F238E27FC236}">
+                <a16:creationId xmlns:a16="http://schemas.microsoft.com/office/drawing/2014/main" id="{DCE34706-58A3-F0F0-E9F9-900B331C091A}"/>
+              </a:ext>
+            </a:extLst>
+          </p:cNvPr>
+          <p:cNvPicPr>
+            <a:picLocks noChangeAspect="1"/>
+          </p:cNvPicPr>
+          <p:nvPr/>
+        </p:nvPicPr>
+        <p:blipFill>
+          <a:blip r:embed="rId3"/>
+          <a:srcRect l="57681" t="42607" r="36718" b="53599"/>
+          <a:stretch>
+            <a:fillRect/>
+          </a:stretch>
+        </p:blipFill>
+        <p:spPr>
+          <a:xfrm>
+            <a:off x="9424081" y="5043785"/>
+            <a:ext cx="1866207" cy="1061485"/>
+          </a:xfrm>
+          <a:prstGeom prst="rect">
+            <a:avLst/>
+          </a:prstGeom>
+        </p:spPr>
+      </p:pic>
+      <p:sp>
+        <p:nvSpPr>
+          <p:cNvPr id="23" name="TextBox 22">
+            <a:extLst>
+              <a:ext uri="{FF2B5EF4-FFF2-40B4-BE49-F238E27FC236}">
+                <a16:creationId xmlns:a16="http://schemas.microsoft.com/office/drawing/2014/main" id="{E6B84901-6645-7EBF-5865-394B257AFCE9}"/>
+              </a:ext>
+            </a:extLst>
+          </p:cNvPr>
+          <p:cNvSpPr txBox="1"/>
+          <p:nvPr/>
+        </p:nvSpPr>
+        <p:spPr>
+          <a:xfrm>
+            <a:off x="514349" y="2559646"/>
+            <a:ext cx="2162236" cy="537391"/>
+          </a:xfrm>
+          <a:prstGeom prst="rect">
+            <a:avLst/>
+          </a:prstGeom>
+          <a:noFill/>
+        </p:spPr>
+        <p:txBody>
+          <a:bodyPr wrap="square" rtlCol="0">
+            <a:spAutoFit/>
+          </a:bodyPr>
+          <a:lstStyle/>
+          <a:p>
+            <a:pPr algn="ctr">
+              <a:lnSpc>
+                <a:spcPct val="150000"/>
+              </a:lnSpc>
+            </a:pPr>
+            <a:r>
+              <a:rPr lang="en-US" sz="2200" dirty="0">
+                <a:latin typeface="Arial" panose="020B0604020202020204" pitchFamily="34" charset="0"/>
+                <a:cs typeface="Arial" panose="020B0604020202020204" pitchFamily="34" charset="0"/>
+              </a:rPr>
+              <a:t>Field Work</a:t>
+            </a:r>
+          </a:p>
+        </p:txBody>
+      </p:sp>
+      <p:sp>
+        <p:nvSpPr>
+          <p:cNvPr id="24" name="TextBox 23">
+            <a:extLst>
+              <a:ext uri="{FF2B5EF4-FFF2-40B4-BE49-F238E27FC236}">
+                <a16:creationId xmlns:a16="http://schemas.microsoft.com/office/drawing/2014/main" id="{630F575D-6EAE-179C-D875-2B45B2117BB3}"/>
+              </a:ext>
+            </a:extLst>
+          </p:cNvPr>
+          <p:cNvSpPr txBox="1"/>
+          <p:nvPr/>
+        </p:nvSpPr>
+        <p:spPr>
+          <a:xfrm>
+            <a:off x="5433621" y="1285877"/>
+            <a:ext cx="2162236" cy="537391"/>
+          </a:xfrm>
+          <a:prstGeom prst="rect">
+            <a:avLst/>
+          </a:prstGeom>
+          <a:noFill/>
+        </p:spPr>
+        <p:txBody>
+          <a:bodyPr wrap="square" rtlCol="0">
+            <a:spAutoFit/>
+          </a:bodyPr>
+          <a:lstStyle/>
+          <a:p>
+            <a:pPr algn="ctr">
+              <a:lnSpc>
+                <a:spcPct val="150000"/>
+              </a:lnSpc>
+            </a:pPr>
+            <a:r>
+              <a:rPr lang="en-US" sz="2200" dirty="0">
+                <a:latin typeface="Arial" panose="020B0604020202020204" pitchFamily="34" charset="0"/>
+                <a:cs typeface="Arial" panose="020B0604020202020204" pitchFamily="34" charset="0"/>
+              </a:rPr>
+              <a:t>QIIME2</a:t>
+            </a:r>
+          </a:p>
+        </p:txBody>
+      </p:sp>
+      <p:sp>
+        <p:nvSpPr>
+          <p:cNvPr id="25" name="TextBox 24">
+            <a:extLst>
+              <a:ext uri="{FF2B5EF4-FFF2-40B4-BE49-F238E27FC236}">
+                <a16:creationId xmlns:a16="http://schemas.microsoft.com/office/drawing/2014/main" id="{7B8727B7-6F8C-0D57-8933-1EBE5CCC9635}"/>
+              </a:ext>
+            </a:extLst>
+          </p:cNvPr>
+          <p:cNvSpPr txBox="1"/>
+          <p:nvPr/>
+        </p:nvSpPr>
+        <p:spPr>
+          <a:xfrm>
+            <a:off x="7261845" y="1285876"/>
+            <a:ext cx="2162236" cy="537391"/>
+          </a:xfrm>
+          <a:prstGeom prst="rect">
+            <a:avLst/>
+          </a:prstGeom>
+          <a:noFill/>
+        </p:spPr>
+        <p:txBody>
+          <a:bodyPr wrap="square" rtlCol="0">
+            <a:spAutoFit/>
+          </a:bodyPr>
+          <a:lstStyle/>
+          <a:p>
+            <a:pPr algn="ctr">
+              <a:lnSpc>
+                <a:spcPct val="150000"/>
+              </a:lnSpc>
+            </a:pPr>
+            <a:r>
+              <a:rPr lang="en-US" sz="2200" dirty="0">
+                <a:latin typeface="Arial" panose="020B0604020202020204" pitchFamily="34" charset="0"/>
+                <a:cs typeface="Arial" panose="020B0604020202020204" pitchFamily="34" charset="0"/>
+              </a:rPr>
+              <a:t>More QC</a:t>
+            </a:r>
+          </a:p>
+        </p:txBody>
+      </p:sp>
+      <p:sp>
+        <p:nvSpPr>
+          <p:cNvPr id="26" name="TextBox 25">
+            <a:extLst>
+              <a:ext uri="{FF2B5EF4-FFF2-40B4-BE49-F238E27FC236}">
+                <a16:creationId xmlns:a16="http://schemas.microsoft.com/office/drawing/2014/main" id="{96F8749F-1F6A-FB9B-1F0C-C28CD8C5001F}"/>
+              </a:ext>
+            </a:extLst>
+          </p:cNvPr>
+          <p:cNvSpPr txBox="1"/>
+          <p:nvPr/>
+        </p:nvSpPr>
+        <p:spPr>
+          <a:xfrm>
+            <a:off x="9200679" y="1090496"/>
+            <a:ext cx="2162236" cy="1045223"/>
+          </a:xfrm>
+          <a:prstGeom prst="rect">
+            <a:avLst/>
+          </a:prstGeom>
+          <a:noFill/>
+        </p:spPr>
+        <p:txBody>
+          <a:bodyPr wrap="square" rtlCol="0">
+            <a:spAutoFit/>
+          </a:bodyPr>
+          <a:lstStyle/>
+          <a:p>
+            <a:pPr algn="ctr">
+              <a:lnSpc>
+                <a:spcPct val="150000"/>
+              </a:lnSpc>
+            </a:pPr>
+            <a:r>
+              <a:rPr lang="en-US" sz="2200" dirty="0">
+                <a:latin typeface="Arial" panose="020B0604020202020204" pitchFamily="34" charset="0"/>
+                <a:cs typeface="Arial" panose="020B0604020202020204" pitchFamily="34" charset="0"/>
+              </a:rPr>
+              <a:t>Biological</a:t>
+            </a:r>
+            <a:br>
+              <a:rPr lang="en-US" sz="2200" dirty="0">
+                <a:latin typeface="Arial" panose="020B0604020202020204" pitchFamily="34" charset="0"/>
+                <a:cs typeface="Arial" panose="020B0604020202020204" pitchFamily="34" charset="0"/>
+              </a:rPr>
+            </a:br>
+            <a:r>
+              <a:rPr lang="en-US" sz="2200" dirty="0">
+                <a:latin typeface="Arial" panose="020B0604020202020204" pitchFamily="34" charset="0"/>
+                <a:cs typeface="Arial" panose="020B0604020202020204" pitchFamily="34" charset="0"/>
+              </a:rPr>
+              <a:t>Meaning</a:t>
+            </a:r>
+          </a:p>
+        </p:txBody>
+      </p:sp>
+      <p:sp>
+        <p:nvSpPr>
+          <p:cNvPr id="27" name="TextBox 26">
+            <a:extLst>
+              <a:ext uri="{FF2B5EF4-FFF2-40B4-BE49-F238E27FC236}">
+                <a16:creationId xmlns:a16="http://schemas.microsoft.com/office/drawing/2014/main" id="{B92082D1-9A09-5BC5-7CDD-D931DE03BF79}"/>
+              </a:ext>
+            </a:extLst>
+          </p:cNvPr>
+          <p:cNvSpPr txBox="1"/>
+          <p:nvPr/>
+        </p:nvSpPr>
+        <p:spPr>
+          <a:xfrm>
+            <a:off x="200737" y="571745"/>
+            <a:ext cx="10877550" cy="638573"/>
+          </a:xfrm>
+          <a:prstGeom prst="rect">
+            <a:avLst/>
+          </a:prstGeom>
+          <a:noFill/>
+        </p:spPr>
+        <p:txBody>
+          <a:bodyPr wrap="square" rtlCol="0">
+            <a:spAutoFit/>
+          </a:bodyPr>
+          <a:lstStyle/>
+          <a:p>
+            <a:pPr>
+              <a:lnSpc>
+                <a:spcPct val="150000"/>
+              </a:lnSpc>
+            </a:pPr>
+            <a:r>
+              <a:rPr lang="en-US" sz="2700" dirty="0">
+                <a:highlight>
+                  <a:srgbClr val="FFFF00"/>
+                </a:highlight>
+                <a:latin typeface="Arial" panose="020B0604020202020204" pitchFamily="34" charset="0"/>
+                <a:cs typeface="Arial" panose="020B0604020202020204" pitchFamily="34" charset="0"/>
+              </a:rPr>
+              <a:t>Session 1</a:t>
+            </a:r>
+          </a:p>
+        </p:txBody>
+      </p:sp>
+    </p:spTree>
+    <p:extLst>
+      <p:ext uri="{BB962C8B-B14F-4D97-AF65-F5344CB8AC3E}">
+        <p14:creationId xmlns:p14="http://schemas.microsoft.com/office/powerpoint/2010/main" val="1644807721"/>
+      </p:ext>
+    </p:extLst>
+  </p:cSld>
+  <p:clrMapOvr>
+    <a:masterClrMapping/>
+  </p:clrMapOvr>
+</p:sld>
+</file>
+
+<file path=ppt/slides/slide5.xml><?xml version="1.0" encoding="utf-8"?>
+<p:sld xmlns:a="http://schemas.openxmlformats.org/drawingml/2006/main" xmlns:r="http://schemas.openxmlformats.org/officeDocument/2006/relationships" xmlns:p="http://schemas.openxmlformats.org/presentationml/2006/main">
+  <p:cSld>
+    <p:spTree>
+      <p:nvGrpSpPr>
+        <p:cNvPr id="1" name="">
+          <a:extLst>
+            <a:ext uri="{FF2B5EF4-FFF2-40B4-BE49-F238E27FC236}">
+              <a16:creationId xmlns:a16="http://schemas.microsoft.com/office/drawing/2014/main" id="{D91DD088-1696-11E9-E9D0-5BFD23499C35}"/>
+            </a:ext>
+          </a:extLst>
+        </p:cNvPr>
+        <p:cNvGrpSpPr/>
+        <p:nvPr/>
+      </p:nvGrpSpPr>
+      <p:grpSpPr>
+        <a:xfrm>
+          <a:off x="0" y="0"/>
+          <a:ext cx="0" cy="0"/>
+          <a:chOff x="0" y="0"/>
+          <a:chExt cx="0" cy="0"/>
+        </a:xfrm>
+      </p:grpSpPr>
+      <p:sp>
+        <p:nvSpPr>
+          <p:cNvPr id="2" name="TextBox 1">
+            <a:extLst>
+              <a:ext uri="{FF2B5EF4-FFF2-40B4-BE49-F238E27FC236}">
+                <a16:creationId xmlns:a16="http://schemas.microsoft.com/office/drawing/2014/main" id="{ED0BA7FB-5B46-6FB3-0928-1E06416CEE40}"/>
+              </a:ext>
+            </a:extLst>
+          </p:cNvPr>
+          <p:cNvSpPr txBox="1"/>
+          <p:nvPr/>
+        </p:nvSpPr>
+        <p:spPr>
+          <a:xfrm>
+            <a:off x="171450" y="0"/>
+            <a:ext cx="10877550" cy="739754"/>
+          </a:xfrm>
+          <a:prstGeom prst="rect">
+            <a:avLst/>
+          </a:prstGeom>
+          <a:noFill/>
+        </p:spPr>
+        <p:txBody>
+          <a:bodyPr wrap="square" rtlCol="0">
+            <a:spAutoFit/>
+          </a:bodyPr>
+          <a:lstStyle/>
+          <a:p>
+            <a:pPr>
+              <a:lnSpc>
+                <a:spcPct val="150000"/>
+              </a:lnSpc>
+            </a:pPr>
+            <a:r>
+              <a:rPr lang="en-US" sz="3200" b="1" dirty="0">
+                <a:latin typeface="Arial" panose="020B0604020202020204" pitchFamily="34" charset="0"/>
+                <a:cs typeface="Arial" panose="020B0604020202020204" pitchFamily="34" charset="0"/>
+              </a:rPr>
+              <a:t>Remainder Community Analyses Workflow</a:t>
+            </a:r>
+            <a:endParaRPr lang="en-US" i="1" dirty="0">
+              <a:highlight>
+                <a:srgbClr val="00FFFF"/>
+              </a:highlight>
+              <a:latin typeface="Arial" panose="020B0604020202020204" pitchFamily="34" charset="0"/>
+              <a:cs typeface="Arial" panose="020B0604020202020204" pitchFamily="34" charset="0"/>
+            </a:endParaRPr>
+          </a:p>
+        </p:txBody>
+      </p:sp>
+      <p:sp>
+        <p:nvSpPr>
+          <p:cNvPr id="12" name="Slide Number Placeholder 7">
+            <a:extLst>
+              <a:ext uri="{FF2B5EF4-FFF2-40B4-BE49-F238E27FC236}">
+                <a16:creationId xmlns:a16="http://schemas.microsoft.com/office/drawing/2014/main" id="{2A13F113-E709-7F4B-AC3A-AF11F2EA598B}"/>
+              </a:ext>
+            </a:extLst>
+          </p:cNvPr>
+          <p:cNvSpPr>
+            <a:spLocks noGrp="1"/>
+          </p:cNvSpPr>
+          <p:nvPr>
+            <p:ph type="sldNum" sz="quarter" idx="12"/>
+          </p:nvPr>
+        </p:nvSpPr>
+        <p:spPr>
+          <a:xfrm>
+            <a:off x="9263062" y="6337300"/>
+            <a:ext cx="2743200" cy="365125"/>
+          </a:xfrm>
+        </p:spPr>
+        <p:txBody>
+          <a:bodyPr/>
+          <a:lstStyle/>
+          <a:p>
+            <a:fld id="{A7C13B74-2CD1-074C-84D2-FF26F00FE39E}" type="slidenum">
+              <a:rPr lang="en-US" sz="1400" smtClean="0">
+                <a:solidFill>
+                  <a:schemeClr val="tx1"/>
+                </a:solidFill>
+              </a:rPr>
+              <a:t>4</a:t>
+            </a:fld>
+            <a:endParaRPr lang="en-US" sz="1400" dirty="0">
+              <a:solidFill>
+                <a:schemeClr val="tx1"/>
+              </a:solidFill>
+            </a:endParaRPr>
+          </a:p>
+        </p:txBody>
+      </p:sp>
+      <p:pic>
+        <p:nvPicPr>
+          <p:cNvPr id="11" name="Picture 10" descr="A diagram of a company&#10;&#10;AI-generated content may be incorrect.">
+            <a:extLst>
+              <a:ext uri="{FF2B5EF4-FFF2-40B4-BE49-F238E27FC236}">
+                <a16:creationId xmlns:a16="http://schemas.microsoft.com/office/drawing/2014/main" id="{B2637888-7812-9AEE-DCD6-57ED04B4C78C}"/>
+              </a:ext>
+            </a:extLst>
+          </p:cNvPr>
+          <p:cNvPicPr>
+            <a:picLocks noChangeAspect="1"/>
+          </p:cNvPicPr>
+          <p:nvPr/>
+        </p:nvPicPr>
+        <p:blipFill>
+          <a:blip r:embed="rId3"/>
+          <a:srcRect l="77646" t="51015" r="16146" b="45191"/>
+          <a:stretch>
+            <a:fillRect/>
+          </a:stretch>
+        </p:blipFill>
+        <p:spPr>
+          <a:xfrm>
+            <a:off x="7040214" y="3524250"/>
+            <a:ext cx="1683509" cy="863906"/>
+          </a:xfrm>
+          <a:prstGeom prst="rect">
+            <a:avLst/>
+          </a:prstGeom>
+        </p:spPr>
+      </p:pic>
+      <p:pic>
+        <p:nvPicPr>
+          <p:cNvPr id="16" name="Picture 15" descr="A diagram of a company&#10;&#10;AI-generated content may be incorrect.">
+            <a:extLst>
+              <a:ext uri="{FF2B5EF4-FFF2-40B4-BE49-F238E27FC236}">
+                <a16:creationId xmlns:a16="http://schemas.microsoft.com/office/drawing/2014/main" id="{7297797E-756E-9EC7-9888-4C8BCD186E9F}"/>
+              </a:ext>
+            </a:extLst>
+          </p:cNvPr>
+          <p:cNvPicPr>
+            <a:picLocks noChangeAspect="1"/>
+          </p:cNvPicPr>
+          <p:nvPr/>
+        </p:nvPicPr>
+        <p:blipFill>
+          <a:blip r:embed="rId3"/>
+          <a:srcRect l="85935" t="51015" r="7857" b="45191"/>
+          <a:stretch>
+            <a:fillRect/>
+          </a:stretch>
+        </p:blipFill>
+        <p:spPr>
+          <a:xfrm>
+            <a:off x="7085502" y="4549369"/>
+            <a:ext cx="1683509" cy="863906"/>
+          </a:xfrm>
+          <a:prstGeom prst="rect">
+            <a:avLst/>
+          </a:prstGeom>
+        </p:spPr>
+      </p:pic>
+      <p:pic>
+        <p:nvPicPr>
+          <p:cNvPr id="19" name="Picture 18" descr="A diagram of a company&#10;&#10;AI-generated content may be incorrect.">
+            <a:extLst>
+              <a:ext uri="{FF2B5EF4-FFF2-40B4-BE49-F238E27FC236}">
+                <a16:creationId xmlns:a16="http://schemas.microsoft.com/office/drawing/2014/main" id="{25FFBD91-3E8D-9371-C34F-1D5424A2CA11}"/>
+              </a:ext>
+            </a:extLst>
+          </p:cNvPr>
+          <p:cNvPicPr>
+            <a:picLocks noChangeAspect="1"/>
+          </p:cNvPicPr>
+          <p:nvPr/>
+        </p:nvPicPr>
+        <p:blipFill>
+          <a:blip r:embed="rId3"/>
+          <a:srcRect l="86087" t="57485" r="7705" b="38721"/>
+          <a:stretch>
+            <a:fillRect/>
+          </a:stretch>
+        </p:blipFill>
+        <p:spPr>
+          <a:xfrm>
+            <a:off x="1310217" y="4033481"/>
+            <a:ext cx="1683509" cy="863906"/>
+          </a:xfrm>
+          <a:prstGeom prst="rect">
+            <a:avLst/>
+          </a:prstGeom>
+        </p:spPr>
+      </p:pic>
+      <p:pic>
+        <p:nvPicPr>
+          <p:cNvPr id="29" name="Picture 28" descr="A diagram of a company&#10;&#10;AI-generated content may be incorrect.">
+            <a:extLst>
+              <a:ext uri="{FF2B5EF4-FFF2-40B4-BE49-F238E27FC236}">
+                <a16:creationId xmlns:a16="http://schemas.microsoft.com/office/drawing/2014/main" id="{F3AAAD52-2992-CD75-1248-6E961F3D6B04}"/>
+              </a:ext>
+            </a:extLst>
+          </p:cNvPr>
+          <p:cNvPicPr>
+            <a:picLocks noChangeAspect="1"/>
+          </p:cNvPicPr>
+          <p:nvPr/>
+        </p:nvPicPr>
+        <p:blipFill>
+          <a:blip r:embed="rId3"/>
+          <a:srcRect l="38686" t="51144" r="55106" b="45062"/>
+          <a:stretch>
+            <a:fillRect/>
+          </a:stretch>
+        </p:blipFill>
+        <p:spPr>
+          <a:xfrm>
+            <a:off x="4009986" y="4033481"/>
+            <a:ext cx="1683509" cy="863906"/>
+          </a:xfrm>
+          <a:prstGeom prst="rect">
+            <a:avLst/>
+          </a:prstGeom>
+        </p:spPr>
+      </p:pic>
+      <p:sp>
+        <p:nvSpPr>
+          <p:cNvPr id="30" name="TextBox 29">
+            <a:extLst>
+              <a:ext uri="{FF2B5EF4-FFF2-40B4-BE49-F238E27FC236}">
+                <a16:creationId xmlns:a16="http://schemas.microsoft.com/office/drawing/2014/main" id="{FA969704-D671-84E6-F36B-3DC428D62FED}"/>
+              </a:ext>
+            </a:extLst>
+          </p:cNvPr>
+          <p:cNvSpPr txBox="1"/>
+          <p:nvPr/>
+        </p:nvSpPr>
+        <p:spPr>
+          <a:xfrm>
+            <a:off x="1070853" y="2014570"/>
+            <a:ext cx="2162236" cy="1045223"/>
+          </a:xfrm>
+          <a:prstGeom prst="rect">
+            <a:avLst/>
+          </a:prstGeom>
+          <a:noFill/>
+        </p:spPr>
+        <p:txBody>
+          <a:bodyPr wrap="square" rtlCol="0">
+            <a:spAutoFit/>
+          </a:bodyPr>
+          <a:lstStyle/>
+          <a:p>
+            <a:pPr algn="ctr">
+              <a:lnSpc>
+                <a:spcPct val="150000"/>
+              </a:lnSpc>
+            </a:pPr>
+            <a:r>
+              <a:rPr lang="en-US" sz="2200" dirty="0">
+                <a:latin typeface="Arial" panose="020B0604020202020204" pitchFamily="34" charset="0"/>
+                <a:cs typeface="Arial" panose="020B0604020202020204" pitchFamily="34" charset="0"/>
+              </a:rPr>
+              <a:t>Getting a General Idea</a:t>
+            </a:r>
+          </a:p>
+        </p:txBody>
+      </p:sp>
+      <p:sp>
+        <p:nvSpPr>
+          <p:cNvPr id="31" name="TextBox 30">
+            <a:extLst>
+              <a:ext uri="{FF2B5EF4-FFF2-40B4-BE49-F238E27FC236}">
+                <a16:creationId xmlns:a16="http://schemas.microsoft.com/office/drawing/2014/main" id="{8CF01B46-0DC6-8D2E-EE65-BD4D228A5BB0}"/>
+              </a:ext>
+            </a:extLst>
+          </p:cNvPr>
+          <p:cNvSpPr txBox="1"/>
+          <p:nvPr/>
+        </p:nvSpPr>
+        <p:spPr>
+          <a:xfrm>
+            <a:off x="3770622" y="2268485"/>
+            <a:ext cx="2162236" cy="537391"/>
+          </a:xfrm>
+          <a:prstGeom prst="rect">
+            <a:avLst/>
+          </a:prstGeom>
+          <a:noFill/>
+        </p:spPr>
+        <p:txBody>
+          <a:bodyPr wrap="square" rtlCol="0">
+            <a:spAutoFit/>
+          </a:bodyPr>
+          <a:lstStyle/>
+          <a:p>
+            <a:pPr algn="ctr">
+              <a:lnSpc>
+                <a:spcPct val="150000"/>
+              </a:lnSpc>
+            </a:pPr>
+            <a:r>
+              <a:rPr lang="en-US" sz="2200" dirty="0">
+                <a:latin typeface="Arial" panose="020B0604020202020204" pitchFamily="34" charset="0"/>
+                <a:cs typeface="Arial" panose="020B0604020202020204" pitchFamily="34" charset="0"/>
+              </a:rPr>
+              <a:t>Import into R</a:t>
+            </a:r>
+          </a:p>
+        </p:txBody>
+      </p:sp>
+      <p:pic>
+        <p:nvPicPr>
+          <p:cNvPr id="32" name="Picture 31" descr="A diagram of a company&#10;&#10;AI-generated content may be incorrect.">
+            <a:extLst>
+              <a:ext uri="{FF2B5EF4-FFF2-40B4-BE49-F238E27FC236}">
+                <a16:creationId xmlns:a16="http://schemas.microsoft.com/office/drawing/2014/main" id="{12FE884B-C68D-B44D-08B1-9D0BEF951203}"/>
+              </a:ext>
+            </a:extLst>
+          </p:cNvPr>
+          <p:cNvPicPr>
+            <a:picLocks noChangeAspect="1"/>
+          </p:cNvPicPr>
+          <p:nvPr/>
+        </p:nvPicPr>
+        <p:blipFill>
+          <a:blip r:embed="rId3"/>
+          <a:srcRect l="15633" t="75431" r="78159" b="20775"/>
+          <a:stretch>
+            <a:fillRect/>
+          </a:stretch>
+        </p:blipFill>
+        <p:spPr>
+          <a:xfrm>
+            <a:off x="8943516" y="4549369"/>
+            <a:ext cx="1683509" cy="863906"/>
+          </a:xfrm>
+          <a:prstGeom prst="rect">
+            <a:avLst/>
+          </a:prstGeom>
+        </p:spPr>
+      </p:pic>
+      <p:pic>
+        <p:nvPicPr>
+          <p:cNvPr id="33" name="Picture 32" descr="A diagram of a company&#10;&#10;AI-generated content may be incorrect.">
+            <a:extLst>
+              <a:ext uri="{FF2B5EF4-FFF2-40B4-BE49-F238E27FC236}">
+                <a16:creationId xmlns:a16="http://schemas.microsoft.com/office/drawing/2014/main" id="{EBE5849B-102D-F8AA-E8D7-DFD16A5B83FA}"/>
+              </a:ext>
+            </a:extLst>
+          </p:cNvPr>
+          <p:cNvPicPr>
+            <a:picLocks noChangeAspect="1"/>
+          </p:cNvPicPr>
+          <p:nvPr/>
+        </p:nvPicPr>
+        <p:blipFill>
+          <a:blip r:embed="rId3"/>
+          <a:srcRect l="71801" t="75348" r="21390" b="20858"/>
+          <a:stretch>
+            <a:fillRect/>
+          </a:stretch>
+        </p:blipFill>
+        <p:spPr>
+          <a:xfrm>
+            <a:off x="8943516" y="3524250"/>
+            <a:ext cx="1683509" cy="863906"/>
+          </a:xfrm>
+          <a:prstGeom prst="rect">
+            <a:avLst/>
+          </a:prstGeom>
+        </p:spPr>
+      </p:pic>
+      <p:sp>
+        <p:nvSpPr>
+          <p:cNvPr id="34" name="TextBox 33">
+            <a:extLst>
+              <a:ext uri="{FF2B5EF4-FFF2-40B4-BE49-F238E27FC236}">
+                <a16:creationId xmlns:a16="http://schemas.microsoft.com/office/drawing/2014/main" id="{72CC907B-9200-0AB4-518D-C5C8F7825EA3}"/>
+              </a:ext>
+            </a:extLst>
+          </p:cNvPr>
+          <p:cNvSpPr txBox="1"/>
+          <p:nvPr/>
+        </p:nvSpPr>
+        <p:spPr>
+          <a:xfrm>
+            <a:off x="6820959" y="1663779"/>
+            <a:ext cx="3896104" cy="1553054"/>
+          </a:xfrm>
+          <a:prstGeom prst="rect">
+            <a:avLst/>
+          </a:prstGeom>
+          <a:noFill/>
+        </p:spPr>
+        <p:txBody>
+          <a:bodyPr wrap="square" rtlCol="0">
+            <a:spAutoFit/>
+          </a:bodyPr>
+          <a:lstStyle/>
+          <a:p>
+            <a:pPr algn="ctr">
+              <a:lnSpc>
+                <a:spcPct val="150000"/>
+              </a:lnSpc>
+            </a:pPr>
+            <a:r>
+              <a:rPr lang="en-US" sz="2200" dirty="0">
+                <a:latin typeface="Arial" panose="020B0604020202020204" pitchFamily="34" charset="0"/>
+                <a:cs typeface="Arial" panose="020B0604020202020204" pitchFamily="34" charset="0"/>
+              </a:rPr>
+              <a:t>Pairing visualizations with your statistics for insight into the core community</a:t>
+            </a:r>
+          </a:p>
+        </p:txBody>
+      </p:sp>
+      <p:sp>
+        <p:nvSpPr>
+          <p:cNvPr id="35" name="TextBox 34">
+            <a:extLst>
+              <a:ext uri="{FF2B5EF4-FFF2-40B4-BE49-F238E27FC236}">
+                <a16:creationId xmlns:a16="http://schemas.microsoft.com/office/drawing/2014/main" id="{DC6AEB63-18A7-5B0F-DB3A-CEDDC24912D3}"/>
+              </a:ext>
+            </a:extLst>
+          </p:cNvPr>
+          <p:cNvSpPr txBox="1"/>
+          <p:nvPr/>
+        </p:nvSpPr>
+        <p:spPr>
+          <a:xfrm>
+            <a:off x="2709714" y="4047412"/>
+            <a:ext cx="1584285" cy="638701"/>
+          </a:xfrm>
+          <a:prstGeom prst="rect">
+            <a:avLst/>
+          </a:prstGeom>
+          <a:noFill/>
+        </p:spPr>
+        <p:txBody>
+          <a:bodyPr wrap="square" rtlCol="0">
+            <a:spAutoFit/>
+          </a:bodyPr>
+          <a:lstStyle/>
+          <a:p>
+            <a:pPr algn="ctr">
+              <a:lnSpc>
+                <a:spcPct val="150000"/>
+              </a:lnSpc>
+            </a:pPr>
+            <a:r>
+              <a:rPr lang="en-US" sz="2700" b="1" dirty="0">
+                <a:solidFill>
+                  <a:schemeClr val="accent2"/>
+                </a:solidFill>
+                <a:latin typeface="Arial" panose="020B0604020202020204" pitchFamily="34" charset="0"/>
+                <a:cs typeface="Arial" panose="020B0604020202020204" pitchFamily="34" charset="0"/>
+                <a:sym typeface="Wingdings" pitchFamily="2" charset="2"/>
+              </a:rPr>
+              <a:t></a:t>
+            </a:r>
+            <a:endParaRPr lang="en-US" sz="2700" b="1" dirty="0">
+              <a:solidFill>
+                <a:schemeClr val="accent2"/>
+              </a:solidFill>
+              <a:latin typeface="Arial" panose="020B0604020202020204" pitchFamily="34" charset="0"/>
+              <a:cs typeface="Arial" panose="020B0604020202020204" pitchFamily="34" charset="0"/>
+            </a:endParaRPr>
+          </a:p>
+        </p:txBody>
+      </p:sp>
+      <p:sp>
+        <p:nvSpPr>
+          <p:cNvPr id="36" name="TextBox 35">
+            <a:extLst>
+              <a:ext uri="{FF2B5EF4-FFF2-40B4-BE49-F238E27FC236}">
+                <a16:creationId xmlns:a16="http://schemas.microsoft.com/office/drawing/2014/main" id="{E4D4D4C1-5266-0AD7-B254-2A3E2E168478}"/>
+              </a:ext>
+            </a:extLst>
+          </p:cNvPr>
+          <p:cNvSpPr txBox="1"/>
+          <p:nvPr/>
+        </p:nvSpPr>
+        <p:spPr>
+          <a:xfrm>
+            <a:off x="5552068" y="4068805"/>
+            <a:ext cx="1584285" cy="638701"/>
+          </a:xfrm>
+          <a:prstGeom prst="rect">
+            <a:avLst/>
+          </a:prstGeom>
+          <a:noFill/>
+        </p:spPr>
+        <p:txBody>
+          <a:bodyPr wrap="square" rtlCol="0">
+            <a:spAutoFit/>
+          </a:bodyPr>
+          <a:lstStyle/>
+          <a:p>
+            <a:pPr algn="ctr">
+              <a:lnSpc>
+                <a:spcPct val="150000"/>
+              </a:lnSpc>
+            </a:pPr>
+            <a:r>
+              <a:rPr lang="en-US" sz="2700" b="1" dirty="0">
+                <a:solidFill>
+                  <a:schemeClr val="accent2"/>
+                </a:solidFill>
+                <a:latin typeface="Arial" panose="020B0604020202020204" pitchFamily="34" charset="0"/>
+                <a:cs typeface="Arial" panose="020B0604020202020204" pitchFamily="34" charset="0"/>
+                <a:sym typeface="Wingdings" pitchFamily="2" charset="2"/>
+              </a:rPr>
+              <a:t></a:t>
+            </a:r>
+            <a:endParaRPr lang="en-US" sz="2700" b="1" dirty="0">
+              <a:solidFill>
+                <a:schemeClr val="accent2"/>
+              </a:solidFill>
+              <a:latin typeface="Arial" panose="020B0604020202020204" pitchFamily="34" charset="0"/>
+              <a:cs typeface="Arial" panose="020B0604020202020204" pitchFamily="34" charset="0"/>
+            </a:endParaRPr>
+          </a:p>
+        </p:txBody>
+      </p:sp>
+    </p:spTree>
+    <p:extLst>
+      <p:ext uri="{BB962C8B-B14F-4D97-AF65-F5344CB8AC3E}">
+        <p14:creationId xmlns:p14="http://schemas.microsoft.com/office/powerpoint/2010/main" val="3154971919"/>
+      </p:ext>
+    </p:extLst>
+  </p:cSld>
+  <p:clrMapOvr>
+    <a:masterClrMapping/>
+  </p:clrMapOvr>
+</p:sld>
+</file>
+
+<file path=ppt/slides/slide6.xml><?xml version="1.0" encoding="utf-8"?>
+<p:sld xmlns:a="http://schemas.openxmlformats.org/drawingml/2006/main" xmlns:r="http://schemas.openxmlformats.org/officeDocument/2006/relationships" xmlns:p="http://schemas.openxmlformats.org/presentationml/2006/main">
+  <p:cSld>
+    <p:spTree>
+      <p:nvGrpSpPr>
+        <p:cNvPr id="1" name="">
+          <a:extLst>
+            <a:ext uri="{FF2B5EF4-FFF2-40B4-BE49-F238E27FC236}">
+              <a16:creationId xmlns:a16="http://schemas.microsoft.com/office/drawing/2014/main" id="{7C03DDDC-74A6-A651-9F6F-8DD7C91D212E}"/>
+            </a:ext>
+          </a:extLst>
+        </p:cNvPr>
+        <p:cNvGrpSpPr/>
+        <p:nvPr/>
+      </p:nvGrpSpPr>
+      <p:grpSpPr>
+        <a:xfrm>
+          <a:off x="0" y="0"/>
+          <a:ext cx="0" cy="0"/>
+          <a:chOff x="0" y="0"/>
+          <a:chExt cx="0" cy="0"/>
+        </a:xfrm>
+      </p:grpSpPr>
+      <p:sp>
+        <p:nvSpPr>
+          <p:cNvPr id="2" name="TextBox 1">
+            <a:extLst>
+              <a:ext uri="{FF2B5EF4-FFF2-40B4-BE49-F238E27FC236}">
+                <a16:creationId xmlns:a16="http://schemas.microsoft.com/office/drawing/2014/main" id="{5CD01262-EA5F-7642-A634-FB5B0F970F3F}"/>
+              </a:ext>
+            </a:extLst>
+          </p:cNvPr>
+          <p:cNvSpPr txBox="1"/>
+          <p:nvPr/>
+        </p:nvSpPr>
+        <p:spPr>
+          <a:xfrm>
+            <a:off x="657225" y="2533650"/>
+            <a:ext cx="10877550" cy="739754"/>
+          </a:xfrm>
+          <a:prstGeom prst="rect">
+            <a:avLst/>
+          </a:prstGeom>
+          <a:noFill/>
+        </p:spPr>
+        <p:txBody>
+          <a:bodyPr wrap="square" rtlCol="0">
+            <a:spAutoFit/>
+          </a:bodyPr>
+          <a:lstStyle/>
+          <a:p>
+            <a:pPr algn="ctr">
+              <a:lnSpc>
+                <a:spcPct val="150000"/>
+              </a:lnSpc>
+            </a:pPr>
+            <a:r>
+              <a:rPr lang="en-US" sz="3200" b="1" dirty="0">
+                <a:latin typeface="Arial" panose="020B0604020202020204" pitchFamily="34" charset="0"/>
+                <a:cs typeface="Arial" panose="020B0604020202020204" pitchFamily="34" charset="0"/>
+              </a:rPr>
+              <a:t>Another amazing poll!</a:t>
+            </a:r>
+          </a:p>
+        </p:txBody>
+      </p:sp>
+      <p:sp>
+        <p:nvSpPr>
+          <p:cNvPr id="8" name="Slide Number Placeholder 7">
+            <a:extLst>
+              <a:ext uri="{FF2B5EF4-FFF2-40B4-BE49-F238E27FC236}">
+                <a16:creationId xmlns:a16="http://schemas.microsoft.com/office/drawing/2014/main" id="{136F1D06-D99C-C088-6C32-260DD06B9F8B}"/>
+              </a:ext>
+            </a:extLst>
+          </p:cNvPr>
+          <p:cNvSpPr>
+            <a:spLocks noGrp="1"/>
+          </p:cNvSpPr>
+          <p:nvPr>
+            <p:ph type="sldNum" sz="quarter" idx="12"/>
+          </p:nvPr>
+        </p:nvSpPr>
+        <p:spPr>
+          <a:xfrm>
+            <a:off x="9263062" y="6337300"/>
+            <a:ext cx="2743200" cy="365125"/>
+          </a:xfrm>
+        </p:spPr>
+        <p:txBody>
+          <a:bodyPr/>
+          <a:lstStyle/>
+          <a:p>
+            <a:fld id="{A7C13B74-2CD1-074C-84D2-FF26F00FE39E}" type="slidenum">
+              <a:rPr lang="en-US" sz="1400" smtClean="0">
+                <a:solidFill>
+                  <a:schemeClr val="tx1"/>
+                </a:solidFill>
+              </a:rPr>
+              <a:t>5</a:t>
+            </a:fld>
+            <a:endParaRPr lang="en-US" sz="1400" dirty="0">
+              <a:solidFill>
+                <a:schemeClr val="tx1"/>
+              </a:solidFill>
+            </a:endParaRPr>
+          </a:p>
+        </p:txBody>
+      </p:sp>
+      <p:sp>
+        <p:nvSpPr>
+          <p:cNvPr id="4" name="TextBox 3">
+            <a:extLst>
+              <a:ext uri="{FF2B5EF4-FFF2-40B4-BE49-F238E27FC236}">
+                <a16:creationId xmlns:a16="http://schemas.microsoft.com/office/drawing/2014/main" id="{58803C29-ECC7-8CEC-5B5C-E56F2BF098F3}"/>
+              </a:ext>
+            </a:extLst>
+          </p:cNvPr>
+          <p:cNvSpPr txBox="1"/>
+          <p:nvPr/>
+        </p:nvSpPr>
+        <p:spPr>
+          <a:xfrm>
+            <a:off x="657225" y="3285541"/>
+            <a:ext cx="10877550" cy="598112"/>
+          </a:xfrm>
+          <a:prstGeom prst="rect">
+            <a:avLst/>
+          </a:prstGeom>
+          <a:noFill/>
+        </p:spPr>
+        <p:txBody>
+          <a:bodyPr wrap="square" rtlCol="0">
+            <a:spAutoFit/>
+          </a:bodyPr>
+          <a:lstStyle/>
+          <a:p>
+            <a:pPr algn="ctr">
+              <a:lnSpc>
+                <a:spcPct val="150000"/>
+              </a:lnSpc>
+            </a:pPr>
+            <a:r>
+              <a:rPr lang="en-US" sz="2500" dirty="0">
+                <a:solidFill>
+                  <a:schemeClr val="tx2">
+                    <a:lumMod val="50000"/>
+                    <a:lumOff val="50000"/>
+                  </a:schemeClr>
+                </a:solidFill>
+                <a:highlight>
+                  <a:srgbClr val="FFFF00"/>
+                </a:highlight>
+                <a:latin typeface="Arial" panose="020B0604020202020204" pitchFamily="34" charset="0"/>
+                <a:cs typeface="Arial" panose="020B0604020202020204" pitchFamily="34" charset="0"/>
+                <a:hlinkClick r:id="rId2">
+                  <a:extLst>
+                    <a:ext uri="{A12FA001-AC4F-418D-AE19-62706E023703}">
+                      <ahyp:hlinkClr xmlns:ahyp="http://schemas.microsoft.com/office/drawing/2018/hyperlinkcolor" val="tx"/>
+                    </a:ext>
+                  </a:extLst>
+                </a:hlinkClick>
+              </a:rPr>
+              <a:t>https://forms.gle/iQLJTJPLx7PksAVR6</a:t>
+            </a:r>
+            <a:r>
+              <a:rPr lang="en-US" sz="2500" dirty="0">
+                <a:solidFill>
+                  <a:schemeClr val="tx2">
+                    <a:lumMod val="50000"/>
+                    <a:lumOff val="50000"/>
+                  </a:schemeClr>
+                </a:solidFill>
+                <a:highlight>
+                  <a:srgbClr val="FFFF00"/>
+                </a:highlight>
+                <a:latin typeface="Arial" panose="020B0604020202020204" pitchFamily="34" charset="0"/>
+                <a:cs typeface="Arial" panose="020B0604020202020204" pitchFamily="34" charset="0"/>
+              </a:rPr>
+              <a:t> </a:t>
+            </a:r>
+          </a:p>
+        </p:txBody>
+      </p:sp>
+    </p:spTree>
+    <p:extLst>
+      <p:ext uri="{BB962C8B-B14F-4D97-AF65-F5344CB8AC3E}">
+        <p14:creationId xmlns:p14="http://schemas.microsoft.com/office/powerpoint/2010/main" val="1543468140"/>
+      </p:ext>
+    </p:extLst>
+  </p:cSld>
+  <p:clrMapOvr>
+    <a:masterClrMapping/>
+  </p:clrMapOvr>
+</p:sld>
+</file>
+
+<file path=ppt/slides/slide7.xml><?xml version="1.0" encoding="utf-8"?>
+<p:sld xmlns:a="http://schemas.openxmlformats.org/drawingml/2006/main" xmlns:r="http://schemas.openxmlformats.org/officeDocument/2006/relationships" xmlns:p="http://schemas.openxmlformats.org/presentationml/2006/main">
+  <p:cSld>
+    <p:spTree>
+      <p:nvGrpSpPr>
+        <p:cNvPr id="1" name="">
+          <a:extLst>
+            <a:ext uri="{FF2B5EF4-FFF2-40B4-BE49-F238E27FC236}">
+              <a16:creationId xmlns:a16="http://schemas.microsoft.com/office/drawing/2014/main" id="{6F6189F8-3958-78A9-5AED-ED1D48FDFEDD}"/>
+            </a:ext>
+          </a:extLst>
+        </p:cNvPr>
+        <p:cNvGrpSpPr/>
+        <p:nvPr/>
+      </p:nvGrpSpPr>
+      <p:grpSpPr>
+        <a:xfrm>
+          <a:off x="0" y="0"/>
+          <a:ext cx="0" cy="0"/>
+          <a:chOff x="0" y="0"/>
+          <a:chExt cx="0" cy="0"/>
+        </a:xfrm>
+      </p:grpSpPr>
+      <p:pic>
+        <p:nvPicPr>
+          <p:cNvPr id="4" name="Picture 3" descr="A screenshot of a computer&#10;&#10;AI-generated content may be incorrect.">
+            <a:extLst>
+              <a:ext uri="{FF2B5EF4-FFF2-40B4-BE49-F238E27FC236}">
+                <a16:creationId xmlns:a16="http://schemas.microsoft.com/office/drawing/2014/main" id="{26BC822D-0A3D-8D2D-F86A-B59D8837E545}"/>
+              </a:ext>
+            </a:extLst>
+          </p:cNvPr>
+          <p:cNvPicPr>
+            <a:picLocks noChangeAspect="1"/>
+          </p:cNvPicPr>
+          <p:nvPr/>
+        </p:nvPicPr>
+        <p:blipFill>
+          <a:blip r:embed="rId3"/>
+          <a:srcRect l="965" t="23433" r="49381"/>
+          <a:stretch>
+            <a:fillRect/>
+          </a:stretch>
+        </p:blipFill>
+        <p:spPr>
+          <a:xfrm>
+            <a:off x="5118984" y="1014453"/>
+            <a:ext cx="5627517" cy="5583190"/>
+          </a:xfrm>
+          <a:prstGeom prst="rect">
+            <a:avLst/>
+          </a:prstGeom>
+        </p:spPr>
+      </p:pic>
+      <p:pic>
+        <p:nvPicPr>
+          <p:cNvPr id="8" name="Picture 7" descr="A screenshot of a computer&#10;&#10;AI-generated content may be incorrect.">
+            <a:extLst>
+              <a:ext uri="{FF2B5EF4-FFF2-40B4-BE49-F238E27FC236}">
+                <a16:creationId xmlns:a16="http://schemas.microsoft.com/office/drawing/2014/main" id="{7A764257-E9B3-28C9-E4D5-D2127B788922}"/>
+              </a:ext>
+            </a:extLst>
+          </p:cNvPr>
+          <p:cNvPicPr>
+            <a:picLocks noChangeAspect="1"/>
+          </p:cNvPicPr>
+          <p:nvPr/>
+        </p:nvPicPr>
+        <p:blipFill>
+          <a:blip r:embed="rId3"/>
+          <a:srcRect l="18945" b="85748"/>
+          <a:stretch>
+            <a:fillRect/>
+          </a:stretch>
+        </p:blipFill>
+        <p:spPr>
+          <a:xfrm>
+            <a:off x="5118984" y="260357"/>
+            <a:ext cx="5627516" cy="636628"/>
+          </a:xfrm>
+          <a:prstGeom prst="rect">
+            <a:avLst/>
+          </a:prstGeom>
+        </p:spPr>
+      </p:pic>
+      <p:sp>
+        <p:nvSpPr>
+          <p:cNvPr id="6" name="TextBox 5">
+            <a:extLst>
+              <a:ext uri="{FF2B5EF4-FFF2-40B4-BE49-F238E27FC236}">
+                <a16:creationId xmlns:a16="http://schemas.microsoft.com/office/drawing/2014/main" id="{744A2C09-E8D9-EF5F-79F3-B135E25C1EC1}"/>
+              </a:ext>
+            </a:extLst>
+          </p:cNvPr>
+          <p:cNvSpPr txBox="1"/>
+          <p:nvPr/>
+        </p:nvSpPr>
+        <p:spPr>
+          <a:xfrm>
+            <a:off x="6166600" y="6459535"/>
+            <a:ext cx="1416423" cy="307777"/>
+          </a:xfrm>
+          <a:prstGeom prst="rect">
+            <a:avLst/>
+          </a:prstGeom>
+          <a:solidFill>
+            <a:schemeClr val="bg1"/>
+          </a:solidFill>
+        </p:spPr>
+        <p:txBody>
+          <a:bodyPr wrap="square" rtlCol="0">
+            <a:spAutoFit/>
+          </a:bodyPr>
+          <a:lstStyle/>
+          <a:p>
+            <a:pPr algn="ctr"/>
+            <a:r>
+              <a:rPr lang="en-US" sz="1400" dirty="0" err="1">
+                <a:solidFill>
+                  <a:schemeClr val="accent5">
+                    <a:lumMod val="75000"/>
+                  </a:schemeClr>
+                </a:solidFill>
+                <a:latin typeface="Arial" panose="020B0604020202020204" pitchFamily="34" charset="0"/>
+                <a:cs typeface="Arial" panose="020B0604020202020204" pitchFamily="34" charset="0"/>
+              </a:rPr>
+              <a:t>Sample_Type</a:t>
+            </a:r>
+            <a:endParaRPr lang="en-US" sz="1400" dirty="0">
+              <a:solidFill>
+                <a:schemeClr val="accent5">
+                  <a:lumMod val="75000"/>
+                </a:schemeClr>
+              </a:solidFill>
+              <a:latin typeface="Arial" panose="020B0604020202020204" pitchFamily="34" charset="0"/>
+              <a:cs typeface="Arial" panose="020B0604020202020204" pitchFamily="34" charset="0"/>
+            </a:endParaRPr>
+          </a:p>
+        </p:txBody>
+      </p:sp>
+      <p:sp>
+        <p:nvSpPr>
+          <p:cNvPr id="9" name="Left Brace 8">
+            <a:extLst>
+              <a:ext uri="{FF2B5EF4-FFF2-40B4-BE49-F238E27FC236}">
+                <a16:creationId xmlns:a16="http://schemas.microsoft.com/office/drawing/2014/main" id="{28BEAD8F-0017-A55F-2466-B06D364B4F1C}"/>
+              </a:ext>
+            </a:extLst>
+          </p:cNvPr>
+          <p:cNvSpPr/>
+          <p:nvPr/>
+        </p:nvSpPr>
+        <p:spPr>
+          <a:xfrm rot="16200000">
+            <a:off x="6752859" y="5042272"/>
+            <a:ext cx="243906" cy="2776817"/>
+          </a:xfrm>
+          <a:prstGeom prst="leftBrace">
+            <a:avLst/>
+          </a:prstGeom>
+          <a:ln>
+            <a:solidFill>
+              <a:schemeClr val="accent5">
+                <a:lumMod val="75000"/>
+              </a:schemeClr>
+            </a:solidFill>
+          </a:ln>
+        </p:spPr>
+        <p:style>
+          <a:lnRef idx="2">
+            <a:schemeClr val="accent1"/>
+          </a:lnRef>
+          <a:fillRef idx="0">
+            <a:schemeClr val="accent1"/>
+          </a:fillRef>
+          <a:effectRef idx="1">
+            <a:schemeClr val="accent1"/>
+          </a:effectRef>
+          <a:fontRef idx="minor">
+            <a:schemeClr val="tx1"/>
+          </a:fontRef>
+        </p:style>
         <p:txBody>
           <a:bodyPr rtlCol="0" anchor="ctr"/>
           <a:lstStyle/>
@@ -6298,7 +10096,7 @@
           <p:cNvPr id="11" name="Straight Connector 10">
             <a:extLst>
               <a:ext uri="{FF2B5EF4-FFF2-40B4-BE49-F238E27FC236}">
-                <a16:creationId xmlns:a16="http://schemas.microsoft.com/office/drawing/2014/main" id="{3A5AC5FE-5A33-8ABB-CF17-CC6C3AC9076D}"/>
+                <a16:creationId xmlns:a16="http://schemas.microsoft.com/office/drawing/2014/main" id="{E3C2C102-E2ED-B14C-8339-43C9D382BFB3}"/>
               </a:ext>
             </a:extLst>
           </p:cNvPr>
@@ -6337,7 +10135,7 @@
           <p:cNvPr id="16" name="Straight Connector 15">
             <a:extLst>
               <a:ext uri="{FF2B5EF4-FFF2-40B4-BE49-F238E27FC236}">
-                <a16:creationId xmlns:a16="http://schemas.microsoft.com/office/drawing/2014/main" id="{52F7048B-1200-BE41-2C71-CE28500E9D5D}"/>
+                <a16:creationId xmlns:a16="http://schemas.microsoft.com/office/drawing/2014/main" id="{5A419A5B-6C0F-A2B3-8B5B-E312CEC31B3D}"/>
               </a:ext>
             </a:extLst>
           </p:cNvPr>
@@ -6376,7 +10174,7 @@
           <p:cNvPr id="17" name="Straight Connector 16">
             <a:extLst>
               <a:ext uri="{FF2B5EF4-FFF2-40B4-BE49-F238E27FC236}">
-                <a16:creationId xmlns:a16="http://schemas.microsoft.com/office/drawing/2014/main" id="{E069E062-C499-E53F-E1A0-6C24857A1930}"/>
+                <a16:creationId xmlns:a16="http://schemas.microsoft.com/office/drawing/2014/main" id="{6696E920-8C4D-056C-1B24-D8ECBA1BA355}"/>
               </a:ext>
             </a:extLst>
           </p:cNvPr>
@@ -6415,7 +10213,7 @@
           <p:cNvPr id="18" name="Straight Connector 17">
             <a:extLst>
               <a:ext uri="{FF2B5EF4-FFF2-40B4-BE49-F238E27FC236}">
-                <a16:creationId xmlns:a16="http://schemas.microsoft.com/office/drawing/2014/main" id="{78B7E543-7602-DC91-C362-7238EDCFAB1A}"/>
+                <a16:creationId xmlns:a16="http://schemas.microsoft.com/office/drawing/2014/main" id="{12F283E4-3773-ECB7-6640-84477772A258}"/>
               </a:ext>
             </a:extLst>
           </p:cNvPr>
@@ -6454,7 +10252,7 @@
           <p:cNvPr id="2" name="TextBox 1">
             <a:extLst>
               <a:ext uri="{FF2B5EF4-FFF2-40B4-BE49-F238E27FC236}">
-                <a16:creationId xmlns:a16="http://schemas.microsoft.com/office/drawing/2014/main" id="{314B383F-972D-EA01-05F5-3737B2A692D8}"/>
+                <a16:creationId xmlns:a16="http://schemas.microsoft.com/office/drawing/2014/main" id="{53648950-4EBA-6A05-5A69-440F59791B3C}"/>
               </a:ext>
             </a:extLst>
           </p:cNvPr>
@@ -6487,63 +10285,7 @@
                 <a:latin typeface="Arial" panose="020B0604020202020204" pitchFamily="34" charset="0"/>
                 <a:cs typeface="Arial" panose="020B0604020202020204" pitchFamily="34" charset="0"/>
               </a:rPr>
-              <a:t>Recap: Session 1</a:t>
-            </a:r>
-          </a:p>
-        </p:txBody>
-      </p:sp>
-      <p:sp>
-        <p:nvSpPr>
-          <p:cNvPr id="10" name="TextBox 9">
-            <a:extLst>
-              <a:ext uri="{FF2B5EF4-FFF2-40B4-BE49-F238E27FC236}">
-                <a16:creationId xmlns:a16="http://schemas.microsoft.com/office/drawing/2014/main" id="{8A9F45FA-CF01-9B03-F096-1D1516816427}"/>
-              </a:ext>
-            </a:extLst>
-          </p:cNvPr>
-          <p:cNvSpPr txBox="1"/>
-          <p:nvPr/>
-        </p:nvSpPr>
-        <p:spPr>
-          <a:xfrm>
-            <a:off x="657225" y="1099644"/>
-            <a:ext cx="3679399" cy="1175194"/>
-          </a:xfrm>
-          <a:prstGeom prst="rect">
-            <a:avLst/>
-          </a:prstGeom>
-          <a:noFill/>
-        </p:spPr>
-        <p:txBody>
-          <a:bodyPr wrap="square" rtlCol="0">
-            <a:spAutoFit/>
-          </a:bodyPr>
-          <a:lstStyle/>
-          <a:p>
-            <a:pPr>
-              <a:lnSpc>
-                <a:spcPct val="150000"/>
-              </a:lnSpc>
-            </a:pPr>
-            <a:r>
-              <a:rPr lang="en-US" sz="2500" dirty="0">
-                <a:latin typeface="Arial" panose="020B0604020202020204" pitchFamily="34" charset="0"/>
-                <a:cs typeface="Arial" panose="020B0604020202020204" pitchFamily="34" charset="0"/>
-              </a:rPr>
-              <a:t>Why is this important, </a:t>
-            </a:r>
-            <a:br>
-              <a:rPr lang="en-US" sz="2500" dirty="0">
-                <a:latin typeface="Arial" panose="020B0604020202020204" pitchFamily="34" charset="0"/>
-                <a:cs typeface="Arial" panose="020B0604020202020204" pitchFamily="34" charset="0"/>
-              </a:rPr>
-            </a:br>
-            <a:r>
-              <a:rPr lang="en-US" sz="2500" dirty="0">
-                <a:latin typeface="Arial" panose="020B0604020202020204" pitchFamily="34" charset="0"/>
-                <a:cs typeface="Arial" panose="020B0604020202020204" pitchFamily="34" charset="0"/>
-              </a:rPr>
-              <a:t>what does it tell us?</a:t>
+              <a:t>What does this tell us?</a:t>
             </a:r>
           </a:p>
         </p:txBody>
@@ -6553,7 +10295,7 @@
           <p:cNvPr id="12" name="Slide Number Placeholder 7">
             <a:extLst>
               <a:ext uri="{FF2B5EF4-FFF2-40B4-BE49-F238E27FC236}">
-                <a16:creationId xmlns:a16="http://schemas.microsoft.com/office/drawing/2014/main" id="{70FB20F2-C56D-3F98-0B6E-4FB6DEDD49B6}"/>
+                <a16:creationId xmlns:a16="http://schemas.microsoft.com/office/drawing/2014/main" id="{973B4F4E-0D10-1986-F17E-DAC81758AB56}"/>
               </a:ext>
             </a:extLst>
           </p:cNvPr>
@@ -6580,7 +10322,7 @@
                   <a:schemeClr val="tx1"/>
                 </a:solidFill>
               </a:rPr>
-              <a:t>1</a:t>
+              <a:t>6</a:t>
             </a:fld>
             <a:endParaRPr lang="en-US" sz="1400" dirty="0">
               <a:solidFill>
@@ -6593,7 +10335,7 @@
     </p:spTree>
     <p:extLst>
       <p:ext uri="{BB962C8B-B14F-4D97-AF65-F5344CB8AC3E}">
-        <p14:creationId xmlns:p14="http://schemas.microsoft.com/office/powerpoint/2010/main" val="1950204725"/>
+        <p14:creationId xmlns:p14="http://schemas.microsoft.com/office/powerpoint/2010/main" val="355921266"/>
       </p:ext>
     </p:extLst>
   </p:cSld>
@@ -6603,7 +10345,7 @@
 </p:sld>
 </file>
 
-<file path=ppt/slides/slide3.xml><?xml version="1.0" encoding="utf-8"?>
+<file path=ppt/slides/slide8.xml><?xml version="1.0" encoding="utf-8"?>
 <p:sld xmlns:a="http://schemas.openxmlformats.org/drawingml/2006/main" xmlns:r="http://schemas.openxmlformats.org/officeDocument/2006/relationships" xmlns:p="http://schemas.openxmlformats.org/presentationml/2006/main">
   <p:cSld>
     <p:spTree>
@@ -6701,7 +10443,7 @@
                   <a:schemeClr val="tx1"/>
                 </a:solidFill>
               </a:rPr>
-              <a:t>2</a:t>
+              <a:t>7</a:t>
             </a:fld>
             <a:endParaRPr lang="en-US" sz="1400" dirty="0">
               <a:solidFill>
@@ -6724,7 +10466,7 @@
 </p:sld>
 </file>
 
-<file path=ppt/slides/slide4.xml><?xml version="1.0" encoding="utf-8"?>
+<file path=ppt/slides/slide9.xml><?xml version="1.0" encoding="utf-8"?>
 <p:sld xmlns:a="http://schemas.openxmlformats.org/drawingml/2006/main" xmlns:r="http://schemas.openxmlformats.org/officeDocument/2006/relationships" xmlns:p="http://schemas.openxmlformats.org/presentationml/2006/main">
   <p:cSld>
     <p:spTree>
@@ -6822,7 +10564,7 @@
                   <a:schemeClr val="tx1"/>
                 </a:solidFill>
               </a:rPr>
-              <a:t>3</a:t>
+              <a:t>8</a:t>
             </a:fld>
             <a:endParaRPr lang="en-US" sz="1400" dirty="0">
               <a:solidFill>
@@ -6891,1491 +10633,6 @@
     <p:extLst>
       <p:ext uri="{BB962C8B-B14F-4D97-AF65-F5344CB8AC3E}">
         <p14:creationId xmlns:p14="http://schemas.microsoft.com/office/powerpoint/2010/main" val="1744705141"/>
-      </p:ext>
-    </p:extLst>
-  </p:cSld>
-  <p:clrMapOvr>
-    <a:masterClrMapping/>
-  </p:clrMapOvr>
-</p:sld>
-</file>
-
-<file path=ppt/slides/slide5.xml><?xml version="1.0" encoding="utf-8"?>
-<p:sld xmlns:a="http://schemas.openxmlformats.org/drawingml/2006/main" xmlns:r="http://schemas.openxmlformats.org/officeDocument/2006/relationships" xmlns:p="http://schemas.openxmlformats.org/presentationml/2006/main">
-  <p:cSld>
-    <p:spTree>
-      <p:nvGrpSpPr>
-        <p:cNvPr id="1" name="">
-          <a:extLst>
-            <a:ext uri="{FF2B5EF4-FFF2-40B4-BE49-F238E27FC236}">
-              <a16:creationId xmlns:a16="http://schemas.microsoft.com/office/drawing/2014/main" id="{4D2ED574-4245-E47B-6A64-824C7E7ADDC6}"/>
-            </a:ext>
-          </a:extLst>
-        </p:cNvPr>
-        <p:cNvGrpSpPr/>
-        <p:nvPr/>
-      </p:nvGrpSpPr>
-      <p:grpSpPr>
-        <a:xfrm>
-          <a:off x="0" y="0"/>
-          <a:ext cx="0" cy="0"/>
-          <a:chOff x="0" y="0"/>
-          <a:chExt cx="0" cy="0"/>
-        </a:xfrm>
-      </p:grpSpPr>
-      <p:sp>
-        <p:nvSpPr>
-          <p:cNvPr id="2" name="TextBox 1">
-            <a:extLst>
-              <a:ext uri="{FF2B5EF4-FFF2-40B4-BE49-F238E27FC236}">
-                <a16:creationId xmlns:a16="http://schemas.microsoft.com/office/drawing/2014/main" id="{A2EA2798-BF0C-5C1D-B978-EC167EBE917B}"/>
-              </a:ext>
-            </a:extLst>
-          </p:cNvPr>
-          <p:cNvSpPr txBox="1"/>
-          <p:nvPr/>
-        </p:nvSpPr>
-        <p:spPr>
-          <a:xfrm>
-            <a:off x="171450" y="0"/>
-            <a:ext cx="10877550" cy="739754"/>
-          </a:xfrm>
-          <a:prstGeom prst="rect">
-            <a:avLst/>
-          </a:prstGeom>
-          <a:noFill/>
-        </p:spPr>
-        <p:txBody>
-          <a:bodyPr wrap="square" rtlCol="0">
-            <a:spAutoFit/>
-          </a:bodyPr>
-          <a:lstStyle/>
-          <a:p>
-            <a:pPr>
-              <a:lnSpc>
-                <a:spcPct val="150000"/>
-              </a:lnSpc>
-            </a:pPr>
-            <a:r>
-              <a:rPr lang="en-US" sz="3200" b="1" dirty="0">
-                <a:latin typeface="Arial" panose="020B0604020202020204" pitchFamily="34" charset="0"/>
-                <a:cs typeface="Arial" panose="020B0604020202020204" pitchFamily="34" charset="0"/>
-              </a:rPr>
-              <a:t>Experimental Design, Statistics, and Visualizations</a:t>
-            </a:r>
-          </a:p>
-        </p:txBody>
-      </p:sp>
-      <p:sp>
-        <p:nvSpPr>
-          <p:cNvPr id="8" name="Slide Number Placeholder 7">
-            <a:extLst>
-              <a:ext uri="{FF2B5EF4-FFF2-40B4-BE49-F238E27FC236}">
-                <a16:creationId xmlns:a16="http://schemas.microsoft.com/office/drawing/2014/main" id="{D2D3AB51-407F-78C8-638A-D203D2C87988}"/>
-              </a:ext>
-            </a:extLst>
-          </p:cNvPr>
-          <p:cNvSpPr>
-            <a:spLocks noGrp="1"/>
-          </p:cNvSpPr>
-          <p:nvPr>
-            <p:ph type="sldNum" sz="quarter" idx="12"/>
-          </p:nvPr>
-        </p:nvSpPr>
-        <p:spPr>
-          <a:xfrm>
-            <a:off x="9263062" y="6337300"/>
-            <a:ext cx="2743200" cy="365125"/>
-          </a:xfrm>
-        </p:spPr>
-        <p:txBody>
-          <a:bodyPr/>
-          <a:lstStyle/>
-          <a:p>
-            <a:fld id="{A7C13B74-2CD1-074C-84D2-FF26F00FE39E}" type="slidenum">
-              <a:rPr lang="en-US" sz="1400" smtClean="0">
-                <a:solidFill>
-                  <a:schemeClr val="tx1"/>
-                </a:solidFill>
-              </a:rPr>
-              <a:t>4</a:t>
-            </a:fld>
-            <a:endParaRPr lang="en-US" sz="1400" dirty="0">
-              <a:solidFill>
-                <a:schemeClr val="tx1"/>
-              </a:solidFill>
-            </a:endParaRPr>
-          </a:p>
-        </p:txBody>
-      </p:sp>
-      <p:sp>
-        <p:nvSpPr>
-          <p:cNvPr id="3" name="TextBox 2">
-            <a:extLst>
-              <a:ext uri="{FF2B5EF4-FFF2-40B4-BE49-F238E27FC236}">
-                <a16:creationId xmlns:a16="http://schemas.microsoft.com/office/drawing/2014/main" id="{6CB29C4F-00DE-C32D-EAEE-E98C76DEAF77}"/>
-              </a:ext>
-            </a:extLst>
-          </p:cNvPr>
-          <p:cNvSpPr txBox="1"/>
-          <p:nvPr/>
-        </p:nvSpPr>
-        <p:spPr>
-          <a:xfrm>
-            <a:off x="657224" y="1099644"/>
-            <a:ext cx="11534775" cy="2568717"/>
-          </a:xfrm>
-          <a:prstGeom prst="rect">
-            <a:avLst/>
-          </a:prstGeom>
-          <a:noFill/>
-        </p:spPr>
-        <p:txBody>
-          <a:bodyPr wrap="square" rtlCol="0">
-            <a:spAutoFit/>
-          </a:bodyPr>
-          <a:lstStyle/>
-          <a:p>
-            <a:pPr marL="457200" indent="-457200">
-              <a:lnSpc>
-                <a:spcPct val="150000"/>
-              </a:lnSpc>
-              <a:buFont typeface="+mj-lt"/>
-              <a:buAutoNum type="arabicPeriod"/>
-            </a:pPr>
-            <a:r>
-              <a:rPr lang="en-US" sz="2200" dirty="0">
-                <a:latin typeface="Arial" panose="020B0604020202020204" pitchFamily="34" charset="0"/>
-                <a:cs typeface="Arial" panose="020B0604020202020204" pitchFamily="34" charset="0"/>
-              </a:rPr>
-              <a:t>You can have a good question, and you also </a:t>
-            </a:r>
-            <a:r>
-              <a:rPr lang="en-US" sz="2200" u="sng" dirty="0">
-                <a:latin typeface="Arial" panose="020B0604020202020204" pitchFamily="34" charset="0"/>
-                <a:cs typeface="Arial" panose="020B0604020202020204" pitchFamily="34" charset="0"/>
-              </a:rPr>
-              <a:t>need</a:t>
-            </a:r>
-            <a:r>
-              <a:rPr lang="en-US" sz="2200" dirty="0">
-                <a:latin typeface="Arial" panose="020B0604020202020204" pitchFamily="34" charset="0"/>
-                <a:cs typeface="Arial" panose="020B0604020202020204" pitchFamily="34" charset="0"/>
-              </a:rPr>
-              <a:t> a good experimental design</a:t>
-            </a:r>
-            <a:br>
-              <a:rPr lang="en-US" sz="2200" dirty="0">
-                <a:latin typeface="Arial" panose="020B0604020202020204" pitchFamily="34" charset="0"/>
-                <a:cs typeface="Arial" panose="020B0604020202020204" pitchFamily="34" charset="0"/>
-              </a:rPr>
-            </a:br>
-            <a:r>
-              <a:rPr lang="en-US" sz="2200" dirty="0">
-                <a:highlight>
-                  <a:srgbClr val="00FFFF"/>
-                </a:highlight>
-                <a:latin typeface="Arial" panose="020B0604020202020204" pitchFamily="34" charset="0"/>
-                <a:cs typeface="Arial" panose="020B0604020202020204" pitchFamily="34" charset="0"/>
-              </a:rPr>
-              <a:t>Does the venom microbial community differ across the gland of </a:t>
-            </a:r>
-            <a:r>
-              <a:rPr lang="en-US" sz="2200" i="1" dirty="0">
-                <a:highlight>
-                  <a:srgbClr val="00FFFF"/>
-                </a:highlight>
-                <a:latin typeface="Arial" panose="020B0604020202020204" pitchFamily="34" charset="0"/>
-                <a:cs typeface="Arial" panose="020B0604020202020204" pitchFamily="34" charset="0"/>
-              </a:rPr>
-              <a:t>C. </a:t>
-            </a:r>
-            <a:r>
-              <a:rPr lang="en-US" sz="2200" i="1" dirty="0" err="1">
-                <a:highlight>
-                  <a:srgbClr val="00FFFF"/>
-                </a:highlight>
-                <a:latin typeface="Arial" panose="020B0604020202020204" pitchFamily="34" charset="0"/>
-                <a:cs typeface="Arial" panose="020B0604020202020204" pitchFamily="34" charset="0"/>
-              </a:rPr>
-              <a:t>californiconus</a:t>
-            </a:r>
-            <a:r>
-              <a:rPr lang="en-US" sz="2200" dirty="0">
-                <a:highlight>
-                  <a:srgbClr val="00FFFF"/>
-                </a:highlight>
-                <a:latin typeface="Arial" panose="020B0604020202020204" pitchFamily="34" charset="0"/>
-                <a:cs typeface="Arial" panose="020B0604020202020204" pitchFamily="34" charset="0"/>
-              </a:rPr>
-              <a:t>?</a:t>
-            </a:r>
-            <a:br>
-              <a:rPr lang="en-US" sz="2200" dirty="0">
-                <a:highlight>
-                  <a:srgbClr val="00FFFF"/>
-                </a:highlight>
-                <a:latin typeface="Arial" panose="020B0604020202020204" pitchFamily="34" charset="0"/>
-                <a:cs typeface="Arial" panose="020B0604020202020204" pitchFamily="34" charset="0"/>
-              </a:rPr>
-            </a:br>
-            <a:r>
-              <a:rPr lang="en-US" sz="2200" dirty="0">
-                <a:latin typeface="Arial" panose="020B0604020202020204" pitchFamily="34" charset="0"/>
-                <a:cs typeface="Arial" panose="020B0604020202020204" pitchFamily="34" charset="0"/>
-              </a:rPr>
-              <a:t>	Is the experimental design sufficient for answering this question? </a:t>
-            </a:r>
-            <a:br>
-              <a:rPr lang="en-US" sz="2200" dirty="0">
-                <a:latin typeface="Arial" panose="020B0604020202020204" pitchFamily="34" charset="0"/>
-                <a:cs typeface="Arial" panose="020B0604020202020204" pitchFamily="34" charset="0"/>
-              </a:rPr>
-            </a:br>
-            <a:r>
-              <a:rPr lang="en-US" sz="2200" dirty="0">
-                <a:latin typeface="Arial" panose="020B0604020202020204" pitchFamily="34" charset="0"/>
-                <a:cs typeface="Arial" panose="020B0604020202020204" pitchFamily="34" charset="0"/>
-              </a:rPr>
-              <a:t> 		If not, what needs to be included? Controls, n, assumptions, </a:t>
-            </a:r>
-            <a:r>
-              <a:rPr lang="en-US" sz="2200" dirty="0" err="1">
-                <a:latin typeface="Arial" panose="020B0604020202020204" pitchFamily="34" charset="0"/>
-                <a:cs typeface="Arial" panose="020B0604020202020204" pitchFamily="34" charset="0"/>
-              </a:rPr>
-              <a:t>etc</a:t>
-            </a:r>
-            <a:endParaRPr lang="en-US" sz="2200" dirty="0">
-              <a:latin typeface="Arial" panose="020B0604020202020204" pitchFamily="34" charset="0"/>
-              <a:cs typeface="Arial" panose="020B0604020202020204" pitchFamily="34" charset="0"/>
-            </a:endParaRPr>
-          </a:p>
-          <a:p>
-            <a:pPr>
-              <a:lnSpc>
-                <a:spcPct val="150000"/>
-              </a:lnSpc>
-            </a:pPr>
-            <a:endParaRPr lang="en-US" sz="2200" dirty="0">
-              <a:latin typeface="Arial" panose="020B0604020202020204" pitchFamily="34" charset="0"/>
-              <a:cs typeface="Arial" panose="020B0604020202020204" pitchFamily="34" charset="0"/>
-            </a:endParaRPr>
-          </a:p>
-        </p:txBody>
-      </p:sp>
-    </p:spTree>
-    <p:extLst>
-      <p:ext uri="{BB962C8B-B14F-4D97-AF65-F5344CB8AC3E}">
-        <p14:creationId xmlns:p14="http://schemas.microsoft.com/office/powerpoint/2010/main" val="2364240087"/>
-      </p:ext>
-    </p:extLst>
-  </p:cSld>
-  <p:clrMapOvr>
-    <a:masterClrMapping/>
-  </p:clrMapOvr>
-</p:sld>
-</file>
-
-<file path=ppt/slides/slide6.xml><?xml version="1.0" encoding="utf-8"?>
-<p:sld xmlns:a="http://schemas.openxmlformats.org/drawingml/2006/main" xmlns:r="http://schemas.openxmlformats.org/officeDocument/2006/relationships" xmlns:p="http://schemas.openxmlformats.org/presentationml/2006/main">
-  <p:cSld>
-    <p:spTree>
-      <p:nvGrpSpPr>
-        <p:cNvPr id="1" name="">
-          <a:extLst>
-            <a:ext uri="{FF2B5EF4-FFF2-40B4-BE49-F238E27FC236}">
-              <a16:creationId xmlns:a16="http://schemas.microsoft.com/office/drawing/2014/main" id="{5B112624-82DC-B459-1BF0-E52ED156E98C}"/>
-            </a:ext>
-          </a:extLst>
-        </p:cNvPr>
-        <p:cNvGrpSpPr/>
-        <p:nvPr/>
-      </p:nvGrpSpPr>
-      <p:grpSpPr>
-        <a:xfrm>
-          <a:off x="0" y="0"/>
-          <a:ext cx="0" cy="0"/>
-          <a:chOff x="0" y="0"/>
-          <a:chExt cx="0" cy="0"/>
-        </a:xfrm>
-      </p:grpSpPr>
-      <p:sp>
-        <p:nvSpPr>
-          <p:cNvPr id="2" name="TextBox 1">
-            <a:extLst>
-              <a:ext uri="{FF2B5EF4-FFF2-40B4-BE49-F238E27FC236}">
-                <a16:creationId xmlns:a16="http://schemas.microsoft.com/office/drawing/2014/main" id="{88D62610-CA43-801C-1429-0BD02975689E}"/>
-              </a:ext>
-            </a:extLst>
-          </p:cNvPr>
-          <p:cNvSpPr txBox="1"/>
-          <p:nvPr/>
-        </p:nvSpPr>
-        <p:spPr>
-          <a:xfrm>
-            <a:off x="171450" y="0"/>
-            <a:ext cx="10877550" cy="739754"/>
-          </a:xfrm>
-          <a:prstGeom prst="rect">
-            <a:avLst/>
-          </a:prstGeom>
-          <a:noFill/>
-        </p:spPr>
-        <p:txBody>
-          <a:bodyPr wrap="square" rtlCol="0">
-            <a:spAutoFit/>
-          </a:bodyPr>
-          <a:lstStyle/>
-          <a:p>
-            <a:pPr>
-              <a:lnSpc>
-                <a:spcPct val="150000"/>
-              </a:lnSpc>
-            </a:pPr>
-            <a:r>
-              <a:rPr lang="en-US" sz="3200" b="1" dirty="0">
-                <a:latin typeface="Arial" panose="020B0604020202020204" pitchFamily="34" charset="0"/>
-                <a:cs typeface="Arial" panose="020B0604020202020204" pitchFamily="34" charset="0"/>
-              </a:rPr>
-              <a:t>Experimental Design, Statistics, and Visualizations</a:t>
-            </a:r>
-          </a:p>
-        </p:txBody>
-      </p:sp>
-      <p:sp>
-        <p:nvSpPr>
-          <p:cNvPr id="8" name="Slide Number Placeholder 7">
-            <a:extLst>
-              <a:ext uri="{FF2B5EF4-FFF2-40B4-BE49-F238E27FC236}">
-                <a16:creationId xmlns:a16="http://schemas.microsoft.com/office/drawing/2014/main" id="{CDF4345B-8988-C416-E5D2-D4FAE062DAAD}"/>
-              </a:ext>
-            </a:extLst>
-          </p:cNvPr>
-          <p:cNvSpPr>
-            <a:spLocks noGrp="1"/>
-          </p:cNvSpPr>
-          <p:nvPr>
-            <p:ph type="sldNum" sz="quarter" idx="12"/>
-          </p:nvPr>
-        </p:nvSpPr>
-        <p:spPr>
-          <a:xfrm>
-            <a:off x="9263062" y="6337300"/>
-            <a:ext cx="2743200" cy="365125"/>
-          </a:xfrm>
-        </p:spPr>
-        <p:txBody>
-          <a:bodyPr/>
-          <a:lstStyle/>
-          <a:p>
-            <a:fld id="{A7C13B74-2CD1-074C-84D2-FF26F00FE39E}" type="slidenum">
-              <a:rPr lang="en-US" sz="1400" smtClean="0">
-                <a:solidFill>
-                  <a:schemeClr val="tx1"/>
-                </a:solidFill>
-              </a:rPr>
-              <a:t>5</a:t>
-            </a:fld>
-            <a:endParaRPr lang="en-US" sz="1400" dirty="0">
-              <a:solidFill>
-                <a:schemeClr val="tx1"/>
-              </a:solidFill>
-            </a:endParaRPr>
-          </a:p>
-        </p:txBody>
-      </p:sp>
-      <p:sp>
-        <p:nvSpPr>
-          <p:cNvPr id="3" name="TextBox 2">
-            <a:extLst>
-              <a:ext uri="{FF2B5EF4-FFF2-40B4-BE49-F238E27FC236}">
-                <a16:creationId xmlns:a16="http://schemas.microsoft.com/office/drawing/2014/main" id="{509F5D5D-B043-9888-D1BF-AB9F7C664CE3}"/>
-              </a:ext>
-            </a:extLst>
-          </p:cNvPr>
-          <p:cNvSpPr txBox="1"/>
-          <p:nvPr/>
-        </p:nvSpPr>
-        <p:spPr>
-          <a:xfrm>
-            <a:off x="657224" y="1099644"/>
-            <a:ext cx="11534775" cy="3584379"/>
-          </a:xfrm>
-          <a:prstGeom prst="rect">
-            <a:avLst/>
-          </a:prstGeom>
-          <a:noFill/>
-        </p:spPr>
-        <p:txBody>
-          <a:bodyPr wrap="square" rtlCol="0">
-            <a:spAutoFit/>
-          </a:bodyPr>
-          <a:lstStyle/>
-          <a:p>
-            <a:pPr marL="457200" indent="-457200">
-              <a:lnSpc>
-                <a:spcPct val="150000"/>
-              </a:lnSpc>
-              <a:buFont typeface="+mj-lt"/>
-              <a:buAutoNum type="arabicPeriod"/>
-            </a:pPr>
-            <a:r>
-              <a:rPr lang="en-US" sz="2200" dirty="0">
-                <a:latin typeface="Arial" panose="020B0604020202020204" pitchFamily="34" charset="0"/>
-                <a:cs typeface="Arial" panose="020B0604020202020204" pitchFamily="34" charset="0"/>
-              </a:rPr>
-              <a:t>You can have a good question, and you also </a:t>
-            </a:r>
-            <a:r>
-              <a:rPr lang="en-US" sz="2200" u="sng" dirty="0">
-                <a:latin typeface="Arial" panose="020B0604020202020204" pitchFamily="34" charset="0"/>
-                <a:cs typeface="Arial" panose="020B0604020202020204" pitchFamily="34" charset="0"/>
-              </a:rPr>
-              <a:t>need</a:t>
-            </a:r>
-            <a:r>
-              <a:rPr lang="en-US" sz="2200" dirty="0">
-                <a:latin typeface="Arial" panose="020B0604020202020204" pitchFamily="34" charset="0"/>
-                <a:cs typeface="Arial" panose="020B0604020202020204" pitchFamily="34" charset="0"/>
-              </a:rPr>
-              <a:t> a good experimental design</a:t>
-            </a:r>
-            <a:br>
-              <a:rPr lang="en-US" sz="2200" dirty="0">
-                <a:latin typeface="Arial" panose="020B0604020202020204" pitchFamily="34" charset="0"/>
-                <a:cs typeface="Arial" panose="020B0604020202020204" pitchFamily="34" charset="0"/>
-              </a:rPr>
-            </a:br>
-            <a:r>
-              <a:rPr lang="en-US" sz="2200" dirty="0">
-                <a:highlight>
-                  <a:srgbClr val="00FFFF"/>
-                </a:highlight>
-                <a:latin typeface="Arial" panose="020B0604020202020204" pitchFamily="34" charset="0"/>
-                <a:cs typeface="Arial" panose="020B0604020202020204" pitchFamily="34" charset="0"/>
-              </a:rPr>
-              <a:t>Does the venom microbial community differ across the gland of </a:t>
-            </a:r>
-            <a:r>
-              <a:rPr lang="en-US" sz="2200" i="1" dirty="0">
-                <a:highlight>
-                  <a:srgbClr val="00FFFF"/>
-                </a:highlight>
-                <a:latin typeface="Arial" panose="020B0604020202020204" pitchFamily="34" charset="0"/>
-                <a:cs typeface="Arial" panose="020B0604020202020204" pitchFamily="34" charset="0"/>
-              </a:rPr>
-              <a:t>C. </a:t>
-            </a:r>
-            <a:r>
-              <a:rPr lang="en-US" sz="2200" i="1" dirty="0" err="1">
-                <a:highlight>
-                  <a:srgbClr val="00FFFF"/>
-                </a:highlight>
-                <a:latin typeface="Arial" panose="020B0604020202020204" pitchFamily="34" charset="0"/>
-                <a:cs typeface="Arial" panose="020B0604020202020204" pitchFamily="34" charset="0"/>
-              </a:rPr>
-              <a:t>californiconus</a:t>
-            </a:r>
-            <a:r>
-              <a:rPr lang="en-US" sz="2200" dirty="0">
-                <a:highlight>
-                  <a:srgbClr val="00FFFF"/>
-                </a:highlight>
-                <a:latin typeface="Arial" panose="020B0604020202020204" pitchFamily="34" charset="0"/>
-                <a:cs typeface="Arial" panose="020B0604020202020204" pitchFamily="34" charset="0"/>
-              </a:rPr>
-              <a:t>?</a:t>
-            </a:r>
-            <a:br>
-              <a:rPr lang="en-US" sz="2200" dirty="0">
-                <a:highlight>
-                  <a:srgbClr val="00FFFF"/>
-                </a:highlight>
-                <a:latin typeface="Arial" panose="020B0604020202020204" pitchFamily="34" charset="0"/>
-                <a:cs typeface="Arial" panose="020B0604020202020204" pitchFamily="34" charset="0"/>
-              </a:rPr>
-            </a:br>
-            <a:r>
-              <a:rPr lang="en-US" sz="2200" dirty="0">
-                <a:latin typeface="Arial" panose="020B0604020202020204" pitchFamily="34" charset="0"/>
-                <a:cs typeface="Arial" panose="020B0604020202020204" pitchFamily="34" charset="0"/>
-              </a:rPr>
-              <a:t>	Is the experimental design sufficient for answering this question? </a:t>
-            </a:r>
-            <a:br>
-              <a:rPr lang="en-US" sz="2200" dirty="0">
-                <a:latin typeface="Arial" panose="020B0604020202020204" pitchFamily="34" charset="0"/>
-                <a:cs typeface="Arial" panose="020B0604020202020204" pitchFamily="34" charset="0"/>
-              </a:rPr>
-            </a:br>
-            <a:r>
-              <a:rPr lang="en-US" sz="2200" dirty="0">
-                <a:latin typeface="Arial" panose="020B0604020202020204" pitchFamily="34" charset="0"/>
-                <a:cs typeface="Arial" panose="020B0604020202020204" pitchFamily="34" charset="0"/>
-              </a:rPr>
-              <a:t> 		If not, what needs to be included? Controls, n, assumptions, </a:t>
-            </a:r>
-            <a:r>
-              <a:rPr lang="en-US" sz="2200" dirty="0" err="1">
-                <a:latin typeface="Arial" panose="020B0604020202020204" pitchFamily="34" charset="0"/>
-                <a:cs typeface="Arial" panose="020B0604020202020204" pitchFamily="34" charset="0"/>
-              </a:rPr>
-              <a:t>etc</a:t>
-            </a:r>
-            <a:endParaRPr lang="en-US" sz="2200" dirty="0">
-              <a:latin typeface="Arial" panose="020B0604020202020204" pitchFamily="34" charset="0"/>
-              <a:cs typeface="Arial" panose="020B0604020202020204" pitchFamily="34" charset="0"/>
-            </a:endParaRPr>
-          </a:p>
-          <a:p>
-            <a:pPr marL="457200" indent="-457200">
-              <a:lnSpc>
-                <a:spcPct val="150000"/>
-              </a:lnSpc>
-              <a:buFont typeface="+mj-lt"/>
-              <a:buAutoNum type="arabicPeriod"/>
-            </a:pPr>
-            <a:endParaRPr lang="en-US" sz="2200" dirty="0">
-              <a:latin typeface="Arial" panose="020B0604020202020204" pitchFamily="34" charset="0"/>
-              <a:cs typeface="Arial" panose="020B0604020202020204" pitchFamily="34" charset="0"/>
-            </a:endParaRPr>
-          </a:p>
-          <a:p>
-            <a:pPr marL="457200" indent="-457200">
-              <a:lnSpc>
-                <a:spcPct val="150000"/>
-              </a:lnSpc>
-              <a:buFont typeface="+mj-lt"/>
-              <a:buAutoNum type="arabicPeriod"/>
-            </a:pPr>
-            <a:r>
-              <a:rPr lang="en-US" sz="2200" dirty="0">
-                <a:latin typeface="Arial" panose="020B0604020202020204" pitchFamily="34" charset="0"/>
-                <a:cs typeface="Arial" panose="020B0604020202020204" pitchFamily="34" charset="0"/>
-              </a:rPr>
-              <a:t>Just because you have a p-value, doesn’t mean it’s real (or that it means something)</a:t>
-            </a:r>
-            <a:br>
-              <a:rPr lang="en-US" sz="2200" dirty="0">
-                <a:latin typeface="Arial" panose="020B0604020202020204" pitchFamily="34" charset="0"/>
-                <a:cs typeface="Arial" panose="020B0604020202020204" pitchFamily="34" charset="0"/>
-              </a:rPr>
-            </a:br>
-            <a:endParaRPr lang="en-US" sz="2200" dirty="0">
-              <a:latin typeface="Arial" panose="020B0604020202020204" pitchFamily="34" charset="0"/>
-              <a:cs typeface="Arial" panose="020B0604020202020204" pitchFamily="34" charset="0"/>
-            </a:endParaRPr>
-          </a:p>
-        </p:txBody>
-      </p:sp>
-    </p:spTree>
-    <p:extLst>
-      <p:ext uri="{BB962C8B-B14F-4D97-AF65-F5344CB8AC3E}">
-        <p14:creationId xmlns:p14="http://schemas.microsoft.com/office/powerpoint/2010/main" val="3629887579"/>
-      </p:ext>
-    </p:extLst>
-  </p:cSld>
-  <p:clrMapOvr>
-    <a:masterClrMapping/>
-  </p:clrMapOvr>
-</p:sld>
-</file>
-
-<file path=ppt/slides/slide7.xml><?xml version="1.0" encoding="utf-8"?>
-<p:sld xmlns:a="http://schemas.openxmlformats.org/drawingml/2006/main" xmlns:r="http://schemas.openxmlformats.org/officeDocument/2006/relationships" xmlns:p="http://schemas.openxmlformats.org/presentationml/2006/main">
-  <p:cSld>
-    <p:spTree>
-      <p:nvGrpSpPr>
-        <p:cNvPr id="1" name="">
-          <a:extLst>
-            <a:ext uri="{FF2B5EF4-FFF2-40B4-BE49-F238E27FC236}">
-              <a16:creationId xmlns:a16="http://schemas.microsoft.com/office/drawing/2014/main" id="{E77A9C7F-381E-5DE4-1813-CF7A96E81B65}"/>
-            </a:ext>
-          </a:extLst>
-        </p:cNvPr>
-        <p:cNvGrpSpPr/>
-        <p:nvPr/>
-      </p:nvGrpSpPr>
-      <p:grpSpPr>
-        <a:xfrm>
-          <a:off x="0" y="0"/>
-          <a:ext cx="0" cy="0"/>
-          <a:chOff x="0" y="0"/>
-          <a:chExt cx="0" cy="0"/>
-        </a:xfrm>
-      </p:grpSpPr>
-      <p:sp>
-        <p:nvSpPr>
-          <p:cNvPr id="2" name="TextBox 1">
-            <a:extLst>
-              <a:ext uri="{FF2B5EF4-FFF2-40B4-BE49-F238E27FC236}">
-                <a16:creationId xmlns:a16="http://schemas.microsoft.com/office/drawing/2014/main" id="{42D71262-E9D0-EC5E-0CC4-CC5C26CC5DC3}"/>
-              </a:ext>
-            </a:extLst>
-          </p:cNvPr>
-          <p:cNvSpPr txBox="1"/>
-          <p:nvPr/>
-        </p:nvSpPr>
-        <p:spPr>
-          <a:xfrm>
-            <a:off x="171450" y="0"/>
-            <a:ext cx="10877550" cy="739754"/>
-          </a:xfrm>
-          <a:prstGeom prst="rect">
-            <a:avLst/>
-          </a:prstGeom>
-          <a:noFill/>
-        </p:spPr>
-        <p:txBody>
-          <a:bodyPr wrap="square" rtlCol="0">
-            <a:spAutoFit/>
-          </a:bodyPr>
-          <a:lstStyle/>
-          <a:p>
-            <a:pPr>
-              <a:lnSpc>
-                <a:spcPct val="150000"/>
-              </a:lnSpc>
-            </a:pPr>
-            <a:r>
-              <a:rPr lang="en-US" sz="3200" b="1" dirty="0">
-                <a:latin typeface="Arial" panose="020B0604020202020204" pitchFamily="34" charset="0"/>
-                <a:cs typeface="Arial" panose="020B0604020202020204" pitchFamily="34" charset="0"/>
-              </a:rPr>
-              <a:t>Experimental Design, Statistics, and Visualizations</a:t>
-            </a:r>
-          </a:p>
-        </p:txBody>
-      </p:sp>
-      <p:sp>
-        <p:nvSpPr>
-          <p:cNvPr id="8" name="Slide Number Placeholder 7">
-            <a:extLst>
-              <a:ext uri="{FF2B5EF4-FFF2-40B4-BE49-F238E27FC236}">
-                <a16:creationId xmlns:a16="http://schemas.microsoft.com/office/drawing/2014/main" id="{1D393352-7395-32FC-B554-08C3BB0DE569}"/>
-              </a:ext>
-            </a:extLst>
-          </p:cNvPr>
-          <p:cNvSpPr>
-            <a:spLocks noGrp="1"/>
-          </p:cNvSpPr>
-          <p:nvPr>
-            <p:ph type="sldNum" sz="quarter" idx="12"/>
-          </p:nvPr>
-        </p:nvSpPr>
-        <p:spPr>
-          <a:xfrm>
-            <a:off x="9263062" y="6337300"/>
-            <a:ext cx="2743200" cy="365125"/>
-          </a:xfrm>
-        </p:spPr>
-        <p:txBody>
-          <a:bodyPr/>
-          <a:lstStyle/>
-          <a:p>
-            <a:fld id="{A7C13B74-2CD1-074C-84D2-FF26F00FE39E}" type="slidenum">
-              <a:rPr lang="en-US" sz="1400" smtClean="0">
-                <a:solidFill>
-                  <a:schemeClr val="tx1"/>
-                </a:solidFill>
-              </a:rPr>
-              <a:t>6</a:t>
-            </a:fld>
-            <a:endParaRPr lang="en-US" sz="1400" dirty="0">
-              <a:solidFill>
-                <a:schemeClr val="tx1"/>
-              </a:solidFill>
-            </a:endParaRPr>
-          </a:p>
-        </p:txBody>
-      </p:sp>
-      <p:sp>
-        <p:nvSpPr>
-          <p:cNvPr id="3" name="TextBox 2">
-            <a:extLst>
-              <a:ext uri="{FF2B5EF4-FFF2-40B4-BE49-F238E27FC236}">
-                <a16:creationId xmlns:a16="http://schemas.microsoft.com/office/drawing/2014/main" id="{356431D3-1988-D34F-F26B-43065962BAAE}"/>
-              </a:ext>
-            </a:extLst>
-          </p:cNvPr>
-          <p:cNvSpPr txBox="1"/>
-          <p:nvPr/>
-        </p:nvSpPr>
-        <p:spPr>
-          <a:xfrm>
-            <a:off x="657224" y="1099644"/>
-            <a:ext cx="11534775" cy="4092211"/>
-          </a:xfrm>
-          <a:prstGeom prst="rect">
-            <a:avLst/>
-          </a:prstGeom>
-          <a:noFill/>
-        </p:spPr>
-        <p:txBody>
-          <a:bodyPr wrap="square" rtlCol="0">
-            <a:spAutoFit/>
-          </a:bodyPr>
-          <a:lstStyle/>
-          <a:p>
-            <a:pPr marL="457200" indent="-457200">
-              <a:lnSpc>
-                <a:spcPct val="150000"/>
-              </a:lnSpc>
-              <a:buFont typeface="+mj-lt"/>
-              <a:buAutoNum type="arabicPeriod"/>
-            </a:pPr>
-            <a:r>
-              <a:rPr lang="en-US" sz="2200" dirty="0">
-                <a:latin typeface="Arial" panose="020B0604020202020204" pitchFamily="34" charset="0"/>
-                <a:cs typeface="Arial" panose="020B0604020202020204" pitchFamily="34" charset="0"/>
-              </a:rPr>
-              <a:t>You can have a good question, and you also </a:t>
-            </a:r>
-            <a:r>
-              <a:rPr lang="en-US" sz="2200" u="sng" dirty="0">
-                <a:latin typeface="Arial" panose="020B0604020202020204" pitchFamily="34" charset="0"/>
-                <a:cs typeface="Arial" panose="020B0604020202020204" pitchFamily="34" charset="0"/>
-              </a:rPr>
-              <a:t>need</a:t>
-            </a:r>
-            <a:r>
-              <a:rPr lang="en-US" sz="2200" dirty="0">
-                <a:latin typeface="Arial" panose="020B0604020202020204" pitchFamily="34" charset="0"/>
-                <a:cs typeface="Arial" panose="020B0604020202020204" pitchFamily="34" charset="0"/>
-              </a:rPr>
-              <a:t> a good experimental design</a:t>
-            </a:r>
-            <a:br>
-              <a:rPr lang="en-US" sz="2200" dirty="0">
-                <a:latin typeface="Arial" panose="020B0604020202020204" pitchFamily="34" charset="0"/>
-                <a:cs typeface="Arial" panose="020B0604020202020204" pitchFamily="34" charset="0"/>
-              </a:rPr>
-            </a:br>
-            <a:r>
-              <a:rPr lang="en-US" sz="2200" dirty="0">
-                <a:highlight>
-                  <a:srgbClr val="00FFFF"/>
-                </a:highlight>
-                <a:latin typeface="Arial" panose="020B0604020202020204" pitchFamily="34" charset="0"/>
-                <a:cs typeface="Arial" panose="020B0604020202020204" pitchFamily="34" charset="0"/>
-              </a:rPr>
-              <a:t>Does the venom microbial community differ across the gland of </a:t>
-            </a:r>
-            <a:r>
-              <a:rPr lang="en-US" sz="2200" i="1" dirty="0">
-                <a:highlight>
-                  <a:srgbClr val="00FFFF"/>
-                </a:highlight>
-                <a:latin typeface="Arial" panose="020B0604020202020204" pitchFamily="34" charset="0"/>
-                <a:cs typeface="Arial" panose="020B0604020202020204" pitchFamily="34" charset="0"/>
-              </a:rPr>
-              <a:t>C. </a:t>
-            </a:r>
-            <a:r>
-              <a:rPr lang="en-US" sz="2200" i="1" dirty="0" err="1">
-                <a:highlight>
-                  <a:srgbClr val="00FFFF"/>
-                </a:highlight>
-                <a:latin typeface="Arial" panose="020B0604020202020204" pitchFamily="34" charset="0"/>
-                <a:cs typeface="Arial" panose="020B0604020202020204" pitchFamily="34" charset="0"/>
-              </a:rPr>
-              <a:t>californiconus</a:t>
-            </a:r>
-            <a:r>
-              <a:rPr lang="en-US" sz="2200" dirty="0">
-                <a:highlight>
-                  <a:srgbClr val="00FFFF"/>
-                </a:highlight>
-                <a:latin typeface="Arial" panose="020B0604020202020204" pitchFamily="34" charset="0"/>
-                <a:cs typeface="Arial" panose="020B0604020202020204" pitchFamily="34" charset="0"/>
-              </a:rPr>
-              <a:t>?</a:t>
-            </a:r>
-            <a:br>
-              <a:rPr lang="en-US" sz="2200" dirty="0">
-                <a:highlight>
-                  <a:srgbClr val="00FFFF"/>
-                </a:highlight>
-                <a:latin typeface="Arial" panose="020B0604020202020204" pitchFamily="34" charset="0"/>
-                <a:cs typeface="Arial" panose="020B0604020202020204" pitchFamily="34" charset="0"/>
-              </a:rPr>
-            </a:br>
-            <a:r>
-              <a:rPr lang="en-US" sz="2200" dirty="0">
-                <a:latin typeface="Arial" panose="020B0604020202020204" pitchFamily="34" charset="0"/>
-                <a:cs typeface="Arial" panose="020B0604020202020204" pitchFamily="34" charset="0"/>
-              </a:rPr>
-              <a:t>	Is the experimental design sufficient for answering this question? </a:t>
-            </a:r>
-            <a:br>
-              <a:rPr lang="en-US" sz="2200" dirty="0">
-                <a:latin typeface="Arial" panose="020B0604020202020204" pitchFamily="34" charset="0"/>
-                <a:cs typeface="Arial" panose="020B0604020202020204" pitchFamily="34" charset="0"/>
-              </a:rPr>
-            </a:br>
-            <a:r>
-              <a:rPr lang="en-US" sz="2200" dirty="0">
-                <a:latin typeface="Arial" panose="020B0604020202020204" pitchFamily="34" charset="0"/>
-                <a:cs typeface="Arial" panose="020B0604020202020204" pitchFamily="34" charset="0"/>
-              </a:rPr>
-              <a:t> 		If not, what needs to be included? Controls, n, assumptions, </a:t>
-            </a:r>
-            <a:r>
-              <a:rPr lang="en-US" sz="2200" dirty="0" err="1">
-                <a:latin typeface="Arial" panose="020B0604020202020204" pitchFamily="34" charset="0"/>
-                <a:cs typeface="Arial" panose="020B0604020202020204" pitchFamily="34" charset="0"/>
-              </a:rPr>
-              <a:t>etc</a:t>
-            </a:r>
-            <a:endParaRPr lang="en-US" sz="2200" dirty="0">
-              <a:latin typeface="Arial" panose="020B0604020202020204" pitchFamily="34" charset="0"/>
-              <a:cs typeface="Arial" panose="020B0604020202020204" pitchFamily="34" charset="0"/>
-            </a:endParaRPr>
-          </a:p>
-          <a:p>
-            <a:pPr marL="457200" indent="-457200">
-              <a:lnSpc>
-                <a:spcPct val="150000"/>
-              </a:lnSpc>
-              <a:buFont typeface="+mj-lt"/>
-              <a:buAutoNum type="arabicPeriod"/>
-            </a:pPr>
-            <a:endParaRPr lang="en-US" sz="2200" dirty="0">
-              <a:latin typeface="Arial" panose="020B0604020202020204" pitchFamily="34" charset="0"/>
-              <a:cs typeface="Arial" panose="020B0604020202020204" pitchFamily="34" charset="0"/>
-            </a:endParaRPr>
-          </a:p>
-          <a:p>
-            <a:pPr marL="457200" indent="-457200">
-              <a:lnSpc>
-                <a:spcPct val="150000"/>
-              </a:lnSpc>
-              <a:buFont typeface="+mj-lt"/>
-              <a:buAutoNum type="arabicPeriod"/>
-            </a:pPr>
-            <a:r>
-              <a:rPr lang="en-US" sz="2200" dirty="0">
-                <a:latin typeface="Arial" panose="020B0604020202020204" pitchFamily="34" charset="0"/>
-                <a:cs typeface="Arial" panose="020B0604020202020204" pitchFamily="34" charset="0"/>
-              </a:rPr>
-              <a:t>Just because you have a p-value, doesn’t mean it’s real (or that it means something)</a:t>
-            </a:r>
-            <a:br>
-              <a:rPr lang="en-US" sz="2200" dirty="0">
-                <a:latin typeface="Arial" panose="020B0604020202020204" pitchFamily="34" charset="0"/>
-                <a:cs typeface="Arial" panose="020B0604020202020204" pitchFamily="34" charset="0"/>
-              </a:rPr>
-            </a:br>
-            <a:r>
-              <a:rPr lang="en-US" sz="2200" dirty="0">
-                <a:highlight>
-                  <a:srgbClr val="00FFFF"/>
-                </a:highlight>
-                <a:latin typeface="Arial" panose="020B0604020202020204" pitchFamily="34" charset="0"/>
-                <a:cs typeface="Arial" panose="020B0604020202020204" pitchFamily="34" charset="0"/>
-              </a:rPr>
-              <a:t>How do trust the results we see? </a:t>
-            </a:r>
-            <a:br>
-              <a:rPr lang="en-US" sz="2200" dirty="0">
-                <a:latin typeface="Arial" panose="020B0604020202020204" pitchFamily="34" charset="0"/>
-                <a:cs typeface="Arial" panose="020B0604020202020204" pitchFamily="34" charset="0"/>
-              </a:rPr>
-            </a:br>
-            <a:r>
-              <a:rPr lang="en-US" sz="2200" dirty="0">
-                <a:latin typeface="Arial" panose="020B0604020202020204" pitchFamily="34" charset="0"/>
-                <a:cs typeface="Arial" panose="020B0604020202020204" pitchFamily="34" charset="0"/>
-              </a:rPr>
-              <a:t> 	Why statistics are important. And the difference of visuals vs results</a:t>
-            </a:r>
-          </a:p>
-        </p:txBody>
-      </p:sp>
-    </p:spTree>
-    <p:extLst>
-      <p:ext uri="{BB962C8B-B14F-4D97-AF65-F5344CB8AC3E}">
-        <p14:creationId xmlns:p14="http://schemas.microsoft.com/office/powerpoint/2010/main" val="1241989413"/>
-      </p:ext>
-    </p:extLst>
-  </p:cSld>
-  <p:clrMapOvr>
-    <a:masterClrMapping/>
-  </p:clrMapOvr>
-</p:sld>
-</file>
-
-<file path=ppt/slides/slide8.xml><?xml version="1.0" encoding="utf-8"?>
-<p:sld xmlns:a="http://schemas.openxmlformats.org/drawingml/2006/main" xmlns:r="http://schemas.openxmlformats.org/officeDocument/2006/relationships" xmlns:p="http://schemas.openxmlformats.org/presentationml/2006/main">
-  <p:cSld>
-    <p:spTree>
-      <p:nvGrpSpPr>
-        <p:cNvPr id="1" name="">
-          <a:extLst>
-            <a:ext uri="{FF2B5EF4-FFF2-40B4-BE49-F238E27FC236}">
-              <a16:creationId xmlns:a16="http://schemas.microsoft.com/office/drawing/2014/main" id="{6C089280-FC7A-B37C-9B5A-CCBE098A4D11}"/>
-            </a:ext>
-          </a:extLst>
-        </p:cNvPr>
-        <p:cNvGrpSpPr/>
-        <p:nvPr/>
-      </p:nvGrpSpPr>
-      <p:grpSpPr>
-        <a:xfrm>
-          <a:off x="0" y="0"/>
-          <a:ext cx="0" cy="0"/>
-          <a:chOff x="0" y="0"/>
-          <a:chExt cx="0" cy="0"/>
-        </a:xfrm>
-      </p:grpSpPr>
-      <p:pic>
-        <p:nvPicPr>
-          <p:cNvPr id="4" name="Picture 3" descr="A screenshot of a computer&#10;&#10;AI-generated content may be incorrect.">
-            <a:extLst>
-              <a:ext uri="{FF2B5EF4-FFF2-40B4-BE49-F238E27FC236}">
-                <a16:creationId xmlns:a16="http://schemas.microsoft.com/office/drawing/2014/main" id="{64A9BB0A-5C9C-FE60-95E5-30602024B05A}"/>
-              </a:ext>
-            </a:extLst>
-          </p:cNvPr>
-          <p:cNvPicPr>
-            <a:picLocks noChangeAspect="1"/>
-          </p:cNvPicPr>
-          <p:nvPr/>
-        </p:nvPicPr>
-        <p:blipFill>
-          <a:blip r:embed="rId3"/>
-          <a:srcRect l="965" t="23433" r="49381"/>
-          <a:stretch>
-            <a:fillRect/>
-          </a:stretch>
-        </p:blipFill>
-        <p:spPr>
-          <a:xfrm>
-            <a:off x="185738" y="844784"/>
-            <a:ext cx="5627517" cy="5583190"/>
-          </a:xfrm>
-          <a:prstGeom prst="rect">
-            <a:avLst/>
-          </a:prstGeom>
-        </p:spPr>
-      </p:pic>
-      <p:sp>
-        <p:nvSpPr>
-          <p:cNvPr id="6" name="TextBox 5">
-            <a:extLst>
-              <a:ext uri="{FF2B5EF4-FFF2-40B4-BE49-F238E27FC236}">
-                <a16:creationId xmlns:a16="http://schemas.microsoft.com/office/drawing/2014/main" id="{0126572D-17B9-062E-E813-16BE286C5850}"/>
-              </a:ext>
-            </a:extLst>
-          </p:cNvPr>
-          <p:cNvSpPr txBox="1"/>
-          <p:nvPr/>
-        </p:nvSpPr>
-        <p:spPr>
-          <a:xfrm>
-            <a:off x="1233354" y="6289866"/>
-            <a:ext cx="1416423" cy="307777"/>
-          </a:xfrm>
-          <a:prstGeom prst="rect">
-            <a:avLst/>
-          </a:prstGeom>
-          <a:solidFill>
-            <a:schemeClr val="bg1"/>
-          </a:solidFill>
-        </p:spPr>
-        <p:txBody>
-          <a:bodyPr wrap="square" rtlCol="0">
-            <a:spAutoFit/>
-          </a:bodyPr>
-          <a:lstStyle/>
-          <a:p>
-            <a:pPr algn="ctr"/>
-            <a:r>
-              <a:rPr lang="en-US" sz="1400" dirty="0" err="1">
-                <a:solidFill>
-                  <a:schemeClr val="accent5">
-                    <a:lumMod val="75000"/>
-                  </a:schemeClr>
-                </a:solidFill>
-                <a:latin typeface="Arial" panose="020B0604020202020204" pitchFamily="34" charset="0"/>
-                <a:cs typeface="Arial" panose="020B0604020202020204" pitchFamily="34" charset="0"/>
-              </a:rPr>
-              <a:t>Sample_Type</a:t>
-            </a:r>
-            <a:endParaRPr lang="en-US" sz="1400" dirty="0">
-              <a:solidFill>
-                <a:schemeClr val="accent5">
-                  <a:lumMod val="75000"/>
-                </a:schemeClr>
-              </a:solidFill>
-              <a:latin typeface="Arial" panose="020B0604020202020204" pitchFamily="34" charset="0"/>
-              <a:cs typeface="Arial" panose="020B0604020202020204" pitchFamily="34" charset="0"/>
-            </a:endParaRPr>
-          </a:p>
-        </p:txBody>
-      </p:sp>
-      <p:sp>
-        <p:nvSpPr>
-          <p:cNvPr id="9" name="Left Brace 8">
-            <a:extLst>
-              <a:ext uri="{FF2B5EF4-FFF2-40B4-BE49-F238E27FC236}">
-                <a16:creationId xmlns:a16="http://schemas.microsoft.com/office/drawing/2014/main" id="{E2C38033-E636-BCA6-8043-07ACC45D0495}"/>
-              </a:ext>
-            </a:extLst>
-          </p:cNvPr>
-          <p:cNvSpPr/>
-          <p:nvPr/>
-        </p:nvSpPr>
-        <p:spPr>
-          <a:xfrm rot="16200000">
-            <a:off x="1819613" y="4872603"/>
-            <a:ext cx="243906" cy="2776817"/>
-          </a:xfrm>
-          <a:prstGeom prst="leftBrace">
-            <a:avLst/>
-          </a:prstGeom>
-          <a:ln>
-            <a:solidFill>
-              <a:schemeClr val="accent5">
-                <a:lumMod val="75000"/>
-              </a:schemeClr>
-            </a:solidFill>
-          </a:ln>
-        </p:spPr>
-        <p:style>
-          <a:lnRef idx="2">
-            <a:schemeClr val="accent1"/>
-          </a:lnRef>
-          <a:fillRef idx="0">
-            <a:schemeClr val="accent1"/>
-          </a:fillRef>
-          <a:effectRef idx="1">
-            <a:schemeClr val="accent1"/>
-          </a:effectRef>
-          <a:fontRef idx="minor">
-            <a:schemeClr val="tx1"/>
-          </a:fontRef>
-        </p:style>
-        <p:txBody>
-          <a:bodyPr rtlCol="0" anchor="ctr"/>
-          <a:lstStyle/>
-          <a:p>
-            <a:pPr algn="ctr"/>
-            <a:endParaRPr lang="en-US"/>
-          </a:p>
-        </p:txBody>
-      </p:sp>
-      <p:cxnSp>
-        <p:nvCxnSpPr>
-          <p:cNvPr id="11" name="Straight Connector 10">
-            <a:extLst>
-              <a:ext uri="{FF2B5EF4-FFF2-40B4-BE49-F238E27FC236}">
-                <a16:creationId xmlns:a16="http://schemas.microsoft.com/office/drawing/2014/main" id="{95CE6784-57F3-C2F6-A6EE-16BAC14BCFC0}"/>
-              </a:ext>
-            </a:extLst>
-          </p:cNvPr>
-          <p:cNvCxnSpPr>
-            <a:cxnSpLocks/>
-          </p:cNvCxnSpPr>
-          <p:nvPr/>
-        </p:nvCxnSpPr>
-        <p:spPr>
-          <a:xfrm>
-            <a:off x="1233354" y="993502"/>
-            <a:ext cx="0" cy="4410635"/>
-          </a:xfrm>
-          <a:prstGeom prst="line">
-            <a:avLst/>
-          </a:prstGeom>
-          <a:ln w="28575"/>
-        </p:spPr>
-        <p:style>
-          <a:lnRef idx="2">
-            <a:schemeClr val="dk1"/>
-          </a:lnRef>
-          <a:fillRef idx="0">
-            <a:schemeClr val="dk1"/>
-          </a:fillRef>
-          <a:effectRef idx="1">
-            <a:schemeClr val="dk1"/>
-          </a:effectRef>
-          <a:fontRef idx="minor">
-            <a:schemeClr val="tx1"/>
-          </a:fontRef>
-        </p:style>
-      </p:cxnSp>
-      <p:cxnSp>
-        <p:nvCxnSpPr>
-          <p:cNvPr id="16" name="Straight Connector 15">
-            <a:extLst>
-              <a:ext uri="{FF2B5EF4-FFF2-40B4-BE49-F238E27FC236}">
-                <a16:creationId xmlns:a16="http://schemas.microsoft.com/office/drawing/2014/main" id="{2723D22F-768D-0268-524F-99D3FFA0B635}"/>
-              </a:ext>
-            </a:extLst>
-          </p:cNvPr>
-          <p:cNvCxnSpPr>
-            <a:cxnSpLocks/>
-          </p:cNvCxnSpPr>
-          <p:nvPr/>
-        </p:nvCxnSpPr>
-        <p:spPr>
-          <a:xfrm>
-            <a:off x="1372307" y="993502"/>
-            <a:ext cx="0" cy="4410635"/>
-          </a:xfrm>
-          <a:prstGeom prst="line">
-            <a:avLst/>
-          </a:prstGeom>
-          <a:ln w="28575"/>
-        </p:spPr>
-        <p:style>
-          <a:lnRef idx="2">
-            <a:schemeClr val="dk1"/>
-          </a:lnRef>
-          <a:fillRef idx="0">
-            <a:schemeClr val="dk1"/>
-          </a:fillRef>
-          <a:effectRef idx="1">
-            <a:schemeClr val="dk1"/>
-          </a:effectRef>
-          <a:fontRef idx="minor">
-            <a:schemeClr val="tx1"/>
-          </a:fontRef>
-        </p:style>
-      </p:cxnSp>
-      <p:cxnSp>
-        <p:nvCxnSpPr>
-          <p:cNvPr id="17" name="Straight Connector 16">
-            <a:extLst>
-              <a:ext uri="{FF2B5EF4-FFF2-40B4-BE49-F238E27FC236}">
-                <a16:creationId xmlns:a16="http://schemas.microsoft.com/office/drawing/2014/main" id="{CE040614-5AA7-346B-E275-E53D624E66B8}"/>
-              </a:ext>
-            </a:extLst>
-          </p:cNvPr>
-          <p:cNvCxnSpPr>
-            <a:cxnSpLocks/>
-          </p:cNvCxnSpPr>
-          <p:nvPr/>
-        </p:nvCxnSpPr>
-        <p:spPr>
-          <a:xfrm>
-            <a:off x="1943807" y="993502"/>
-            <a:ext cx="0" cy="4410635"/>
-          </a:xfrm>
-          <a:prstGeom prst="line">
-            <a:avLst/>
-          </a:prstGeom>
-          <a:ln w="28575"/>
-        </p:spPr>
-        <p:style>
-          <a:lnRef idx="2">
-            <a:schemeClr val="dk1"/>
-          </a:lnRef>
-          <a:fillRef idx="0">
-            <a:schemeClr val="dk1"/>
-          </a:fillRef>
-          <a:effectRef idx="1">
-            <a:schemeClr val="dk1"/>
-          </a:effectRef>
-          <a:fontRef idx="minor">
-            <a:schemeClr val="tx1"/>
-          </a:fontRef>
-        </p:style>
-      </p:cxnSp>
-      <p:cxnSp>
-        <p:nvCxnSpPr>
-          <p:cNvPr id="18" name="Straight Connector 17">
-            <a:extLst>
-              <a:ext uri="{FF2B5EF4-FFF2-40B4-BE49-F238E27FC236}">
-                <a16:creationId xmlns:a16="http://schemas.microsoft.com/office/drawing/2014/main" id="{CE0AF89F-EF8F-DA59-9E75-5A5E425654B2}"/>
-              </a:ext>
-            </a:extLst>
-          </p:cNvPr>
-          <p:cNvCxnSpPr>
-            <a:cxnSpLocks/>
-          </p:cNvCxnSpPr>
-          <p:nvPr/>
-        </p:nvCxnSpPr>
-        <p:spPr>
-          <a:xfrm>
-            <a:off x="2608316" y="993502"/>
-            <a:ext cx="0" cy="4410635"/>
-          </a:xfrm>
-          <a:prstGeom prst="line">
-            <a:avLst/>
-          </a:prstGeom>
-          <a:ln w="28575"/>
-        </p:spPr>
-        <p:style>
-          <a:lnRef idx="2">
-            <a:schemeClr val="dk1"/>
-          </a:lnRef>
-          <a:fillRef idx="0">
-            <a:schemeClr val="dk1"/>
-          </a:fillRef>
-          <a:effectRef idx="1">
-            <a:schemeClr val="dk1"/>
-          </a:effectRef>
-          <a:fontRef idx="minor">
-            <a:schemeClr val="tx1"/>
-          </a:fontRef>
-        </p:style>
-      </p:cxnSp>
-      <p:sp>
-        <p:nvSpPr>
-          <p:cNvPr id="2" name="TextBox 1">
-            <a:extLst>
-              <a:ext uri="{FF2B5EF4-FFF2-40B4-BE49-F238E27FC236}">
-                <a16:creationId xmlns:a16="http://schemas.microsoft.com/office/drawing/2014/main" id="{0B94CA20-82A9-BFEF-4ECB-B6B0F26ED4BD}"/>
-              </a:ext>
-            </a:extLst>
-          </p:cNvPr>
-          <p:cNvSpPr txBox="1"/>
-          <p:nvPr/>
-        </p:nvSpPr>
-        <p:spPr>
-          <a:xfrm>
-            <a:off x="171449" y="0"/>
-            <a:ext cx="11512545" cy="739754"/>
-          </a:xfrm>
-          <a:prstGeom prst="rect">
-            <a:avLst/>
-          </a:prstGeom>
-          <a:noFill/>
-        </p:spPr>
-        <p:txBody>
-          <a:bodyPr wrap="square" rtlCol="0">
-            <a:spAutoFit/>
-          </a:bodyPr>
-          <a:lstStyle/>
-          <a:p>
-            <a:pPr>
-              <a:lnSpc>
-                <a:spcPct val="150000"/>
-              </a:lnSpc>
-            </a:pPr>
-            <a:r>
-              <a:rPr lang="en-US" sz="3200" b="1" dirty="0">
-                <a:latin typeface="Arial" panose="020B0604020202020204" pitchFamily="34" charset="0"/>
-                <a:cs typeface="Arial" panose="020B0604020202020204" pitchFamily="34" charset="0"/>
-              </a:rPr>
-              <a:t>What could be some reasons behind these differences?</a:t>
-            </a:r>
-          </a:p>
-        </p:txBody>
-      </p:sp>
-      <p:sp>
-        <p:nvSpPr>
-          <p:cNvPr id="12" name="Slide Number Placeholder 7">
-            <a:extLst>
-              <a:ext uri="{FF2B5EF4-FFF2-40B4-BE49-F238E27FC236}">
-                <a16:creationId xmlns:a16="http://schemas.microsoft.com/office/drawing/2014/main" id="{603CA6CA-66FA-EB03-2FBC-EE1E33439BCC}"/>
-              </a:ext>
-            </a:extLst>
-          </p:cNvPr>
-          <p:cNvSpPr>
-            <a:spLocks noGrp="1"/>
-          </p:cNvSpPr>
-          <p:nvPr>
-            <p:ph type="sldNum" sz="quarter" idx="12"/>
-          </p:nvPr>
-        </p:nvSpPr>
-        <p:spPr>
-          <a:xfrm>
-            <a:off x="9263062" y="6337300"/>
-            <a:ext cx="2743200" cy="365125"/>
-          </a:xfrm>
-        </p:spPr>
-        <p:txBody>
-          <a:bodyPr/>
-          <a:lstStyle/>
-          <a:p>
-            <a:fld id="{A7C13B74-2CD1-074C-84D2-FF26F00FE39E}" type="slidenum">
-              <a:rPr lang="en-US" sz="1400" smtClean="0">
-                <a:solidFill>
-                  <a:schemeClr val="tx1"/>
-                </a:solidFill>
-              </a:rPr>
-              <a:t>7</a:t>
-            </a:fld>
-            <a:endParaRPr lang="en-US" sz="1400" dirty="0">
-              <a:solidFill>
-                <a:schemeClr val="tx1"/>
-              </a:solidFill>
-            </a:endParaRPr>
-          </a:p>
-        </p:txBody>
-      </p:sp>
-      <p:pic>
-        <p:nvPicPr>
-          <p:cNvPr id="5" name="Picture 4" descr="A chart with different colored bars&#10;&#10;AI-generated content may be incorrect.">
-            <a:extLst>
-              <a:ext uri="{FF2B5EF4-FFF2-40B4-BE49-F238E27FC236}">
-                <a16:creationId xmlns:a16="http://schemas.microsoft.com/office/drawing/2014/main" id="{97FA4388-84D4-D798-7EEF-343303A92E45}"/>
-              </a:ext>
-            </a:extLst>
-          </p:cNvPr>
-          <p:cNvPicPr>
-            <a:picLocks noChangeAspect="1"/>
-          </p:cNvPicPr>
-          <p:nvPr/>
-        </p:nvPicPr>
-        <p:blipFill>
-          <a:blip r:embed="rId4"/>
-          <a:stretch>
-            <a:fillRect/>
-          </a:stretch>
-        </p:blipFill>
-        <p:spPr>
-          <a:xfrm>
-            <a:off x="5651494" y="1676400"/>
-            <a:ext cx="6032500" cy="3505200"/>
-          </a:xfrm>
-          <a:prstGeom prst="rect">
-            <a:avLst/>
-          </a:prstGeom>
-        </p:spPr>
-      </p:pic>
-    </p:spTree>
-    <p:extLst>
-      <p:ext uri="{BB962C8B-B14F-4D97-AF65-F5344CB8AC3E}">
-        <p14:creationId xmlns:p14="http://schemas.microsoft.com/office/powerpoint/2010/main" val="3228791797"/>
-      </p:ext>
-    </p:extLst>
-  </p:cSld>
-  <p:clrMapOvr>
-    <a:masterClrMapping/>
-  </p:clrMapOvr>
-</p:sld>
-</file>
-
-<file path=ppt/slides/slide9.xml><?xml version="1.0" encoding="utf-8"?>
-<p:sld xmlns:a="http://schemas.openxmlformats.org/drawingml/2006/main" xmlns:r="http://schemas.openxmlformats.org/officeDocument/2006/relationships" xmlns:p="http://schemas.openxmlformats.org/presentationml/2006/main">
-  <p:cSld>
-    <p:spTree>
-      <p:nvGrpSpPr>
-        <p:cNvPr id="1" name="">
-          <a:extLst>
-            <a:ext uri="{FF2B5EF4-FFF2-40B4-BE49-F238E27FC236}">
-              <a16:creationId xmlns:a16="http://schemas.microsoft.com/office/drawing/2014/main" id="{BF19687D-33EB-EB16-ABDC-40CEF8A795AF}"/>
-            </a:ext>
-          </a:extLst>
-        </p:cNvPr>
-        <p:cNvGrpSpPr/>
-        <p:nvPr/>
-      </p:nvGrpSpPr>
-      <p:grpSpPr>
-        <a:xfrm>
-          <a:off x="0" y="0"/>
-          <a:ext cx="0" cy="0"/>
-          <a:chOff x="0" y="0"/>
-          <a:chExt cx="0" cy="0"/>
-        </a:xfrm>
-      </p:grpSpPr>
-      <p:sp>
-        <p:nvSpPr>
-          <p:cNvPr id="2" name="TextBox 1">
-            <a:extLst>
-              <a:ext uri="{FF2B5EF4-FFF2-40B4-BE49-F238E27FC236}">
-                <a16:creationId xmlns:a16="http://schemas.microsoft.com/office/drawing/2014/main" id="{A6699D8B-F4EE-9433-E74A-629F3D6534C1}"/>
-              </a:ext>
-            </a:extLst>
-          </p:cNvPr>
-          <p:cNvSpPr txBox="1"/>
-          <p:nvPr/>
-        </p:nvSpPr>
-        <p:spPr>
-          <a:xfrm>
-            <a:off x="339727" y="2896563"/>
-            <a:ext cx="11512545" cy="1478418"/>
-          </a:xfrm>
-          <a:prstGeom prst="rect">
-            <a:avLst/>
-          </a:prstGeom>
-          <a:noFill/>
-        </p:spPr>
-        <p:txBody>
-          <a:bodyPr wrap="square" rtlCol="0">
-            <a:spAutoFit/>
-          </a:bodyPr>
-          <a:lstStyle/>
-          <a:p>
-            <a:pPr algn="ctr">
-              <a:lnSpc>
-                <a:spcPct val="150000"/>
-              </a:lnSpc>
-            </a:pPr>
-            <a:r>
-              <a:rPr lang="en-US" sz="3200" b="1" dirty="0">
-                <a:latin typeface="Arial" panose="020B0604020202020204" pitchFamily="34" charset="0"/>
-                <a:cs typeface="Arial" panose="020B0604020202020204" pitchFamily="34" charset="0"/>
-              </a:rPr>
-              <a:t>The data doesn’t lie, but your approach may trick you</a:t>
-            </a:r>
-          </a:p>
-          <a:p>
-            <a:pPr algn="ctr">
-              <a:lnSpc>
-                <a:spcPct val="150000"/>
-              </a:lnSpc>
-            </a:pPr>
-            <a:r>
-              <a:rPr lang="en-US" sz="3200" dirty="0">
-                <a:latin typeface="Arial" panose="020B0604020202020204" pitchFamily="34" charset="0"/>
-                <a:cs typeface="Arial" panose="020B0604020202020204" pitchFamily="34" charset="0"/>
-              </a:rPr>
-              <a:t>Ensure you’re interpreting your data correctly</a:t>
-            </a:r>
-          </a:p>
-        </p:txBody>
-      </p:sp>
-      <p:sp>
-        <p:nvSpPr>
-          <p:cNvPr id="12" name="Slide Number Placeholder 7">
-            <a:extLst>
-              <a:ext uri="{FF2B5EF4-FFF2-40B4-BE49-F238E27FC236}">
-                <a16:creationId xmlns:a16="http://schemas.microsoft.com/office/drawing/2014/main" id="{4F8BCA73-C142-BD79-3B47-67651FC89255}"/>
-              </a:ext>
-            </a:extLst>
-          </p:cNvPr>
-          <p:cNvSpPr>
-            <a:spLocks noGrp="1"/>
-          </p:cNvSpPr>
-          <p:nvPr>
-            <p:ph type="sldNum" sz="quarter" idx="12"/>
-          </p:nvPr>
-        </p:nvSpPr>
-        <p:spPr>
-          <a:xfrm>
-            <a:off x="9263062" y="6337300"/>
-            <a:ext cx="2743200" cy="365125"/>
-          </a:xfrm>
-        </p:spPr>
-        <p:txBody>
-          <a:bodyPr/>
-          <a:lstStyle/>
-          <a:p>
-            <a:fld id="{A7C13B74-2CD1-074C-84D2-FF26F00FE39E}" type="slidenum">
-              <a:rPr lang="en-US" sz="1400" smtClean="0">
-                <a:solidFill>
-                  <a:schemeClr val="tx1"/>
-                </a:solidFill>
-              </a:rPr>
-              <a:t>8</a:t>
-            </a:fld>
-            <a:endParaRPr lang="en-US" sz="1400" dirty="0">
-              <a:solidFill>
-                <a:schemeClr val="tx1"/>
-              </a:solidFill>
-            </a:endParaRPr>
-          </a:p>
-        </p:txBody>
-      </p:sp>
-    </p:spTree>
-    <p:extLst>
-      <p:ext uri="{BB962C8B-B14F-4D97-AF65-F5344CB8AC3E}">
-        <p14:creationId xmlns:p14="http://schemas.microsoft.com/office/powerpoint/2010/main" val="2405003966"/>
       </p:ext>
     </p:extLst>
   </p:cSld>

--- a/lectures/Lecture3_UlHasan.pptx
+++ b/lectures/Lecture3_UlHasan.pptx
@@ -7198,10 +7198,10 @@
       </p:sp>
       <p:sp>
         <p:nvSpPr>
-          <p:cNvPr id="3" name="TextBox 2">
-            <a:extLst>
-              <a:ext uri="{FF2B5EF4-FFF2-40B4-BE49-F238E27FC236}">
-                <a16:creationId xmlns:a16="http://schemas.microsoft.com/office/drawing/2014/main" id="{02353F3A-4AD6-6121-C1B5-BDDD3571BC39}"/>
+          <p:cNvPr id="2" name="TextBox 1">
+            <a:extLst>
+              <a:ext uri="{FF2B5EF4-FFF2-40B4-BE49-F238E27FC236}">
+                <a16:creationId xmlns:a16="http://schemas.microsoft.com/office/drawing/2014/main" id="{015EF301-E945-6926-F9E2-93B31C0FB8A4}"/>
               </a:ext>
             </a:extLst>
           </p:cNvPr>
@@ -7210,8 +7210,8 @@
         </p:nvSpPr>
         <p:spPr>
           <a:xfrm>
-            <a:off x="171450" y="5932984"/>
-            <a:ext cx="6096000" cy="769441"/>
+            <a:off x="171450" y="5209709"/>
+            <a:ext cx="6096000" cy="1446550"/>
           </a:xfrm>
           <a:prstGeom prst="rect">
             <a:avLst/>
@@ -7223,6 +7223,43 @@
             <a:spAutoFit/>
           </a:bodyPr>
           <a:lstStyle/>
+          <a:p>
+            <a:r>
+              <a:rPr lang="en-US" sz="2200" dirty="0">
+                <a:solidFill>
+                  <a:schemeClr val="tx2">
+                    <a:lumMod val="50000"/>
+                    <a:lumOff val="50000"/>
+                  </a:schemeClr>
+                </a:solidFill>
+                <a:hlinkClick r:id="rId2">
+                  <a:extLst>
+                    <a:ext uri="{A12FA001-AC4F-418D-AE19-62706E023703}">
+                      <ahyp:hlinkClr xmlns:ahyp="http://schemas.microsoft.com/office/drawing/2018/hyperlinkcolor" val="tx"/>
+                    </a:ext>
+                  </a:extLst>
+                </a:hlinkClick>
+              </a:rPr>
+              <a:t>https://github.com/qiime2 </a:t>
+            </a:r>
+          </a:p>
+          <a:p>
+            <a:endParaRPr lang="en-US" sz="2200" dirty="0">
+              <a:solidFill>
+                <a:schemeClr val="tx2">
+                  <a:lumMod val="50000"/>
+                  <a:lumOff val="50000"/>
+                </a:schemeClr>
+              </a:solidFill>
+              <a:hlinkClick r:id="rId2">
+                <a:extLst>
+                  <a:ext uri="{A12FA001-AC4F-418D-AE19-62706E023703}">
+                    <ahyp:hlinkClr xmlns:ahyp="http://schemas.microsoft.com/office/drawing/2018/hyperlinkcolor" val="tx"/>
+                  </a:ext>
+                </a:extLst>
+              </a:hlinkClick>
+            </a:endParaRPr>
+          </a:p>
           <a:p>
             <a:r>
               <a:rPr lang="en-US" sz="2200" dirty="0">
@@ -7429,8 +7466,8 @@
         </p:nvSpPr>
         <p:spPr>
           <a:xfrm>
-            <a:off x="171450" y="5932984"/>
-            <a:ext cx="6096000" cy="769441"/>
+            <a:off x="171450" y="5209709"/>
+            <a:ext cx="6096000" cy="1446550"/>
           </a:xfrm>
           <a:prstGeom prst="rect">
             <a:avLst/>
@@ -7459,6 +7496,43 @@
                   </a:extLst>
                 </a:hlinkClick>
               </a:rPr>
+              <a:t>https://github.com/qiime2 </a:t>
+            </a:r>
+          </a:p>
+          <a:p>
+            <a:endParaRPr lang="en-US" sz="2200" dirty="0">
+              <a:solidFill>
+                <a:schemeClr val="tx2">
+                  <a:lumMod val="50000"/>
+                  <a:lumOff val="50000"/>
+                </a:schemeClr>
+              </a:solidFill>
+              <a:hlinkClick r:id="rId2">
+                <a:extLst>
+                  <a:ext uri="{A12FA001-AC4F-418D-AE19-62706E023703}">
+                    <ahyp:hlinkClr xmlns:ahyp="http://schemas.microsoft.com/office/drawing/2018/hyperlinkcolor" val="tx"/>
+                  </a:ext>
+                </a:extLst>
+              </a:hlinkClick>
+            </a:endParaRPr>
+          </a:p>
+          <a:p>
+            <a:r>
+              <a:rPr lang="en-US" sz="2200" dirty="0">
+                <a:solidFill>
+                  <a:schemeClr val="tx2">
+                    <a:lumMod val="50000"/>
+                    <a:lumOff val="50000"/>
+                  </a:schemeClr>
+                </a:solidFill>
+                <a:hlinkClick r:id="rId2">
+                  <a:extLst>
+                    <a:ext uri="{A12FA001-AC4F-418D-AE19-62706E023703}">
+                      <ahyp:hlinkClr xmlns:ahyp="http://schemas.microsoft.com/office/drawing/2018/hyperlinkcolor" val="tx"/>
+                    </a:ext>
+                  </a:extLst>
+                </a:hlinkClick>
+              </a:rPr>
               <a:t>https://r-graph-gallery.com/</a:t>
             </a:r>
             <a:r>
@@ -7520,8 +7594,8 @@
         </p:nvSpPr>
         <p:spPr>
           <a:xfrm>
-            <a:off x="657225" y="1736964"/>
-            <a:ext cx="10877550" cy="4196020"/>
+            <a:off x="657225" y="1440517"/>
+            <a:ext cx="10877550" cy="3365024"/>
           </a:xfrm>
           <a:prstGeom prst="rect">
             <a:avLst/>
@@ -7603,19 +7677,8 @@
             </a:br>
             <a:r>
               <a:rPr lang="en-US" sz="1800" dirty="0"/>
-              <a:t>Is the composition of the community different between groups (</a:t>
-            </a:r>
-            <a:br>
-              <a:rPr lang="en-US" sz="1800" dirty="0"/>
-            </a:br>
-            <a:endParaRPr lang="en-US" sz="1800" dirty="0"/>
-          </a:p>
-          <a:p>
-            <a:pPr>
-              <a:lnSpc>
-                <a:spcPct val="150000"/>
-              </a:lnSpc>
-            </a:pPr>
+              <a:t>Is the composition of the community different between groups </a:t>
+            </a:r>
             <a:br>
               <a:rPr lang="en-US" sz="1800" b="1" dirty="0">
                 <a:latin typeface="Arial" panose="020B0604020202020204" pitchFamily="34" charset="0"/>
@@ -8011,6 +8074,134 @@
                 <a:cs typeface="Arial" panose="020B0604020202020204" pitchFamily="34" charset="0"/>
               </a:rPr>
               <a:t>Questions?</a:t>
+            </a:r>
+          </a:p>
+        </p:txBody>
+      </p:sp>
+      <p:sp>
+        <p:nvSpPr>
+          <p:cNvPr id="5" name="TextBox 4">
+            <a:extLst>
+              <a:ext uri="{FF2B5EF4-FFF2-40B4-BE49-F238E27FC236}">
+                <a16:creationId xmlns:a16="http://schemas.microsoft.com/office/drawing/2014/main" id="{2940BBB2-2AEF-7802-87C3-84B74B11838F}"/>
+              </a:ext>
+            </a:extLst>
+          </p:cNvPr>
+          <p:cNvSpPr txBox="1"/>
+          <p:nvPr/>
+        </p:nvSpPr>
+        <p:spPr>
+          <a:xfrm>
+            <a:off x="171450" y="5209709"/>
+            <a:ext cx="6096000" cy="1446550"/>
+          </a:xfrm>
+          <a:prstGeom prst="rect">
+            <a:avLst/>
+          </a:prstGeom>
+          <a:noFill/>
+        </p:spPr>
+        <p:txBody>
+          <a:bodyPr wrap="square">
+            <a:spAutoFit/>
+          </a:bodyPr>
+          <a:lstStyle/>
+          <a:p>
+            <a:r>
+              <a:rPr lang="en-US" sz="2200" dirty="0">
+                <a:solidFill>
+                  <a:schemeClr val="tx2">
+                    <a:lumMod val="50000"/>
+                    <a:lumOff val="50000"/>
+                  </a:schemeClr>
+                </a:solidFill>
+                <a:hlinkClick r:id="rId2">
+                  <a:extLst>
+                    <a:ext uri="{A12FA001-AC4F-418D-AE19-62706E023703}">
+                      <ahyp:hlinkClr xmlns:ahyp="http://schemas.microsoft.com/office/drawing/2018/hyperlinkcolor" val="tx"/>
+                    </a:ext>
+                  </a:extLst>
+                </a:hlinkClick>
+              </a:rPr>
+              <a:t>https://github.com/qiime2 </a:t>
+            </a:r>
+          </a:p>
+          <a:p>
+            <a:endParaRPr lang="en-US" sz="2200" dirty="0">
+              <a:solidFill>
+                <a:schemeClr val="tx2">
+                  <a:lumMod val="50000"/>
+                  <a:lumOff val="50000"/>
+                </a:schemeClr>
+              </a:solidFill>
+              <a:hlinkClick r:id="rId2">
+                <a:extLst>
+                  <a:ext uri="{A12FA001-AC4F-418D-AE19-62706E023703}">
+                    <ahyp:hlinkClr xmlns:ahyp="http://schemas.microsoft.com/office/drawing/2018/hyperlinkcolor" val="tx"/>
+                  </a:ext>
+                </a:extLst>
+              </a:hlinkClick>
+            </a:endParaRPr>
+          </a:p>
+          <a:p>
+            <a:r>
+              <a:rPr lang="en-US" sz="2200" dirty="0">
+                <a:solidFill>
+                  <a:schemeClr val="tx2">
+                    <a:lumMod val="50000"/>
+                    <a:lumOff val="50000"/>
+                  </a:schemeClr>
+                </a:solidFill>
+                <a:hlinkClick r:id="rId2">
+                  <a:extLst>
+                    <a:ext uri="{A12FA001-AC4F-418D-AE19-62706E023703}">
+                      <ahyp:hlinkClr xmlns:ahyp="http://schemas.microsoft.com/office/drawing/2018/hyperlinkcolor" val="tx"/>
+                    </a:ext>
+                  </a:extLst>
+                </a:hlinkClick>
+              </a:rPr>
+              <a:t>https://r-graph-gallery.com/</a:t>
+            </a:r>
+            <a:r>
+              <a:rPr lang="en-US" sz="2200" dirty="0">
+                <a:solidFill>
+                  <a:schemeClr val="tx2">
+                    <a:lumMod val="50000"/>
+                    <a:lumOff val="50000"/>
+                  </a:schemeClr>
+                </a:solidFill>
+              </a:rPr>
+              <a:t> </a:t>
+            </a:r>
+          </a:p>
+          <a:p>
+            <a:r>
+              <a:rPr lang="en-US" sz="2200" dirty="0">
+                <a:solidFill>
+                  <a:schemeClr val="tx2">
+                    <a:lumMod val="50000"/>
+                    <a:lumOff val="50000"/>
+                  </a:schemeClr>
+                </a:solidFill>
+                <a:hlinkClick r:id="rId3">
+                  <a:extLst>
+                    <a:ext uri="{A12FA001-AC4F-418D-AE19-62706E023703}">
+                      <ahyp:hlinkClr xmlns:ahyp="http://schemas.microsoft.com/office/drawing/2018/hyperlinkcolor" val="tx"/>
+                    </a:ext>
+                  </a:extLst>
+                </a:hlinkClick>
+              </a:rPr>
+              <a:t>https://microbiome.github.io/tutorials/</a:t>
+            </a:r>
+            <a:r>
+              <a:rPr lang="en-US" sz="2200" dirty="0">
+                <a:solidFill>
+                  <a:schemeClr val="tx2">
+                    <a:lumMod val="50000"/>
+                    <a:lumOff val="50000"/>
+                  </a:schemeClr>
+                </a:solidFill>
+              </a:rPr>
+              <a:t> </a:t>
             </a:r>
           </a:p>
         </p:txBody>
